--- a/presentation/MemoryOptimizedTables_SQLDatenbanken.pptx
+++ b/presentation/MemoryOptimizedTables_SQLDatenbanken.pptx
@@ -23090,6 +23090,18 @@
           </a:p>
           <a:p>
             <a:r>
+              <a:rPr lang="de-DE" dirty="0"/>
+              <a:t>Speicherung page-basiert </a:t>
+            </a:r>
+          </a:p>
+          <a:p>
+            <a:r>
+              <a:rPr lang="de-DE" dirty="0"/>
+              <a:t>Indexseiten werden im Transaktionslog protokolliert</a:t>
+            </a:r>
+          </a:p>
+          <a:p>
+            <a:r>
               <a:rPr lang="de-DE" dirty="0" err="1"/>
               <a:t>Locking</a:t>
             </a:r>
@@ -23229,6 +23241,83 @@
           <a:p>
             <a:r>
               <a:rPr lang="en-GB" dirty="0" err="1"/>
+              <a:t>Persistierung</a:t>
+            </a:r>
+            <a:r>
+              <a:rPr lang="en-GB" dirty="0"/>
+              <a:t> von </a:t>
+            </a:r>
+            <a:r>
+              <a:rPr lang="en-GB" dirty="0" err="1"/>
+              <a:t>Indexdefinitionen</a:t>
+            </a:r>
+            <a:r>
+              <a:rPr lang="en-GB" dirty="0"/>
+              <a:t>. Aufbau </a:t>
+            </a:r>
+            <a:r>
+              <a:rPr lang="en-GB" dirty="0" err="1"/>
+              <a:t>Indexe</a:t>
+            </a:r>
+            <a:r>
+              <a:rPr lang="en-GB" dirty="0"/>
+              <a:t> </a:t>
+            </a:r>
+            <a:r>
+              <a:rPr lang="en-GB" dirty="0" err="1"/>
+              <a:t>bei</a:t>
+            </a:r>
+            <a:r>
+              <a:rPr lang="en-GB" dirty="0"/>
+              <a:t> </a:t>
+            </a:r>
+            <a:r>
+              <a:rPr lang="en-GB" dirty="0" err="1"/>
+              <a:t>Datenbankstart</a:t>
+            </a:r>
+            <a:r>
+              <a:rPr lang="en-GB" dirty="0"/>
+              <a:t>.</a:t>
+            </a:r>
+          </a:p>
+          <a:p>
+            <a:pPr lvl="1"/>
+            <a:r>
+              <a:rPr lang="en-GB" dirty="0" err="1"/>
+              <a:t>V.a.</a:t>
+            </a:r>
+            <a:r>
+              <a:rPr lang="en-GB" dirty="0"/>
+              <a:t> Hash </a:t>
+            </a:r>
+            <a:r>
+              <a:rPr lang="en-GB" dirty="0" err="1"/>
+              <a:t>Indizes</a:t>
+            </a:r>
+            <a:r>
+              <a:rPr lang="en-GB" dirty="0"/>
+              <a:t> / </a:t>
+            </a:r>
+            <a:r>
+              <a:rPr lang="en-GB" dirty="0" err="1"/>
+              <a:t>Bw_Tree-Basierte</a:t>
+            </a:r>
+            <a:r>
+              <a:rPr lang="en-GB" dirty="0"/>
+              <a:t> Range </a:t>
+            </a:r>
+            <a:r>
+              <a:rPr lang="en-GB" dirty="0" err="1"/>
+              <a:t>Indizes</a:t>
+            </a:r>
+            <a:r>
+              <a:rPr lang="en-GB" dirty="0"/>
+              <a:t> </a:t>
+            </a:r>
+          </a:p>
+          <a:p>
+            <a:r>
+              <a:rPr lang="en-GB" dirty="0" err="1"/>
               <a:t>Spezielle</a:t>
             </a:r>
             <a:r>
@@ -23250,42 +23339,6 @@
             <a:endParaRPr lang="en-GB" dirty="0"/>
           </a:p>
           <a:p>
-            <a:endParaRPr lang="en-CH" dirty="0"/>
-          </a:p>
-        </p:txBody>
-      </p:sp>
-      <p:sp>
-        <p:nvSpPr>
-          <p:cNvPr id="6" name="TextBox 5">
-            <a:extLst>
-              <a:ext uri="{FF2B5EF4-FFF2-40B4-BE49-F238E27FC236}">
-                <a16:creationId xmlns:a16="http://schemas.microsoft.com/office/drawing/2014/main" id="{A59E5C55-55EE-1140-50F3-A1EF57CAF644}"/>
-              </a:ext>
-            </a:extLst>
-          </p:cNvPr>
-          <p:cNvSpPr txBox="1"/>
-          <p:nvPr/>
-        </p:nvSpPr>
-        <p:spPr>
-          <a:xfrm>
-            <a:off x="3478138" y="5563312"/>
-            <a:ext cx="4828374" cy="923330"/>
-          </a:xfrm>
-          <a:prstGeom prst="rect">
-            <a:avLst/>
-          </a:prstGeom>
-          <a:noFill/>
-        </p:spPr>
-        <p:txBody>
-          <a:bodyPr wrap="square" rtlCol="0">
-            <a:spAutoFit/>
-          </a:bodyPr>
-          <a:lstStyle/>
-          <a:p>
-            <a:r>
-              <a:rPr lang="de-DE" dirty="0"/>
-              <a:t>Technisch ist es eine andere Storage Engine mit eigener Dateistruktur und eigenen Einschränkungen</a:t>
-            </a:r>
             <a:endParaRPr lang="en-CH" dirty="0"/>
           </a:p>
         </p:txBody>
@@ -24463,13 +24516,13 @@
             </a:r>
           </a:p>
           <a:p>
-            <a:pPr marL="0" indent="0">
-              <a:buFont typeface="Arial" panose="020B0604020202020204" pitchFamily="34" charset="0"/>
-              <a:buNone/>
+            <a:pPr>
+              <a:buFontTx/>
+              <a:buChar char="-"/>
             </a:pPr>
             <a:r>
               <a:rPr lang="de-CH" dirty="0"/>
-              <a:t>- Recovery </a:t>
+              <a:t>Recovery </a:t>
             </a:r>
             <a:r>
               <a:rPr lang="de-CH" dirty="0" err="1"/>
@@ -24492,8 +24545,261 @@
               <a:t>critical</a:t>
             </a:r>
             <a:r>
-              <a:rPr lang="de-CH"/>
+              <a:rPr lang="de-CH" dirty="0"/>
+              <a:t> (</a:t>
+            </a:r>
+            <a:r>
+              <a:rPr lang="de-CH" dirty="0" err="1"/>
+              <a:t>cold</a:t>
+            </a:r>
+            <a:r>
+              <a:rPr lang="de-CH" dirty="0"/>
               <a:t> </a:t>
+            </a:r>
+            <a:r>
+              <a:rPr lang="de-CH" dirty="0" err="1"/>
+              <a:t>starts</a:t>
+            </a:r>
+            <a:r>
+              <a:rPr lang="de-CH" dirty="0"/>
+              <a:t> </a:t>
+            </a:r>
+            <a:r>
+              <a:rPr lang="de-CH" dirty="0" err="1"/>
+              <a:t>with</a:t>
+            </a:r>
+            <a:r>
+              <a:rPr lang="de-CH" dirty="0"/>
+              <a:t> </a:t>
+            </a:r>
+            <a:r>
+              <a:rPr lang="de-CH" dirty="0" err="1"/>
+              <a:t>empty</a:t>
+            </a:r>
+            <a:r>
+              <a:rPr lang="de-CH" dirty="0"/>
+              <a:t> </a:t>
+            </a:r>
+            <a:r>
+              <a:rPr lang="de-CH" dirty="0" err="1"/>
+              <a:t>caches</a:t>
+            </a:r>
+            <a:r>
+              <a:rPr lang="de-CH" dirty="0"/>
+              <a:t>) </a:t>
+            </a:r>
+            <a:r>
+              <a:rPr lang="de-CH" dirty="0" err="1"/>
+              <a:t>load</a:t>
+            </a:r>
+            <a:r>
+              <a:rPr lang="de-CH" dirty="0"/>
+              <a:t> </a:t>
+            </a:r>
+            <a:r>
+              <a:rPr lang="de-CH" dirty="0" err="1"/>
+              <a:t>data</a:t>
+            </a:r>
+            <a:r>
+              <a:rPr lang="de-CH" dirty="0"/>
+              <a:t> in </a:t>
+            </a:r>
+            <a:r>
+              <a:rPr lang="de-CH" dirty="0" err="1"/>
+              <a:t>batches</a:t>
+            </a:r>
+            <a:endParaRPr lang="de-CH" dirty="0"/>
+          </a:p>
+          <a:p>
+            <a:pPr>
+              <a:buFontTx/>
+              <a:buChar char="-"/>
+            </a:pPr>
+            <a:endParaRPr lang="de-CH" dirty="0"/>
+          </a:p>
+          <a:p>
+            <a:pPr>
+              <a:buFontTx/>
+              <a:buChar char="-"/>
+            </a:pPr>
+            <a:r>
+              <a:rPr lang="de-CH" dirty="0"/>
+              <a:t>Memory </a:t>
+            </a:r>
+            <a:r>
+              <a:rPr lang="de-CH" dirty="0" err="1"/>
+              <a:t>fragmentation</a:t>
+            </a:r>
+            <a:r>
+              <a:rPr lang="de-CH" dirty="0"/>
+              <a:t> (</a:t>
+            </a:r>
+            <a:r>
+              <a:rPr lang="de-CH" dirty="0" err="1"/>
+              <a:t>memory</a:t>
+            </a:r>
+            <a:r>
+              <a:rPr lang="de-CH" dirty="0"/>
+              <a:t> </a:t>
+            </a:r>
+            <a:r>
+              <a:rPr lang="de-CH" dirty="0" err="1"/>
+              <a:t>fragmentation</a:t>
+            </a:r>
+            <a:r>
+              <a:rPr lang="de-CH" dirty="0"/>
+              <a:t> </a:t>
+            </a:r>
+            <a:r>
+              <a:rPr lang="de-CH" dirty="0" err="1"/>
+              <a:t>can</a:t>
+            </a:r>
+            <a:r>
+              <a:rPr lang="de-CH" dirty="0"/>
+              <a:t> </a:t>
+            </a:r>
+            <a:r>
+              <a:rPr lang="de-CH" dirty="0" err="1"/>
+              <a:t>degrade</a:t>
+            </a:r>
+            <a:r>
+              <a:rPr lang="de-CH" dirty="0"/>
+              <a:t> </a:t>
+            </a:r>
+            <a:r>
+              <a:rPr lang="de-CH" dirty="0" err="1"/>
+              <a:t>performance</a:t>
+            </a:r>
+            <a:r>
+              <a:rPr lang="de-CH" dirty="0"/>
+              <a:t> </a:t>
+            </a:r>
+            <a:r>
+              <a:rPr lang="de-CH" dirty="0" err="1"/>
+              <a:t>over</a:t>
+            </a:r>
+            <a:r>
+              <a:rPr lang="de-CH" dirty="0"/>
+              <a:t> time) -&gt; plan </a:t>
+            </a:r>
+            <a:r>
+              <a:rPr lang="de-CH" dirty="0" err="1"/>
+              <a:t>regular</a:t>
+            </a:r>
+            <a:r>
+              <a:rPr lang="de-CH" dirty="0"/>
+              <a:t> </a:t>
+            </a:r>
+            <a:r>
+              <a:rPr lang="de-CH" dirty="0" err="1"/>
+              <a:t>restarts</a:t>
+            </a:r>
+            <a:endParaRPr lang="de-CH" dirty="0"/>
+          </a:p>
+          <a:p>
+            <a:pPr>
+              <a:buFontTx/>
+              <a:buChar char="-"/>
+            </a:pPr>
+            <a:r>
+              <a:rPr lang="de-CH" dirty="0"/>
+              <a:t>Data </a:t>
+            </a:r>
+            <a:r>
+              <a:rPr lang="de-CH" dirty="0" err="1"/>
+              <a:t>structure</a:t>
+            </a:r>
+            <a:r>
+              <a:rPr lang="de-CH" dirty="0"/>
+              <a:t> </a:t>
+            </a:r>
+            <a:r>
+              <a:rPr lang="de-CH" dirty="0" err="1"/>
+              <a:t>selection</a:t>
+            </a:r>
+            <a:r>
+              <a:rPr lang="de-CH" dirty="0"/>
+              <a:t> </a:t>
+            </a:r>
+            <a:r>
+              <a:rPr lang="de-CH" dirty="0" err="1"/>
+              <a:t>matters</a:t>
+            </a:r>
+            <a:r>
+              <a:rPr lang="de-CH" dirty="0"/>
+              <a:t> </a:t>
+            </a:r>
+            <a:r>
+              <a:rPr lang="de-CH" dirty="0" err="1"/>
+              <a:t>enormously</a:t>
+            </a:r>
+            <a:r>
+              <a:rPr lang="de-CH" dirty="0"/>
+              <a:t>. Switch </a:t>
+            </a:r>
+            <a:r>
+              <a:rPr lang="de-CH" dirty="0" err="1"/>
+              <a:t>from</a:t>
+            </a:r>
+            <a:r>
+              <a:rPr lang="de-CH" dirty="0"/>
+              <a:t> </a:t>
+            </a:r>
+            <a:r>
+              <a:rPr lang="de-CH" dirty="0" err="1"/>
+              <a:t>hash</a:t>
+            </a:r>
+            <a:r>
+              <a:rPr lang="de-CH" dirty="0"/>
+              <a:t> </a:t>
+            </a:r>
+            <a:r>
+              <a:rPr lang="de-CH" dirty="0" err="1"/>
+              <a:t>tables</a:t>
+            </a:r>
+            <a:r>
+              <a:rPr lang="de-CH" dirty="0"/>
+              <a:t> </a:t>
+            </a:r>
+            <a:r>
+              <a:rPr lang="de-CH" dirty="0" err="1"/>
+              <a:t>to</a:t>
+            </a:r>
+            <a:r>
+              <a:rPr lang="de-CH" dirty="0"/>
+              <a:t> </a:t>
+            </a:r>
+            <a:r>
+              <a:rPr lang="de-CH" dirty="0" err="1"/>
+              <a:t>specialized</a:t>
+            </a:r>
+            <a:r>
+              <a:rPr lang="de-CH" dirty="0"/>
+              <a:t> </a:t>
+            </a:r>
+            <a:r>
+              <a:rPr lang="de-CH" dirty="0" err="1"/>
+              <a:t>radic</a:t>
+            </a:r>
+            <a:r>
+              <a:rPr lang="de-CH" dirty="0"/>
+              <a:t> </a:t>
+            </a:r>
+            <a:r>
+              <a:rPr lang="de-CH" dirty="0" err="1"/>
+              <a:t>trees</a:t>
+            </a:r>
+            <a:r>
+              <a:rPr lang="de-CH" dirty="0"/>
+              <a:t> </a:t>
+            </a:r>
+            <a:r>
+              <a:rPr lang="de-CH" dirty="0" err="1"/>
+              <a:t>improvement</a:t>
+            </a:r>
+            <a:r>
+              <a:rPr lang="de-CH" dirty="0"/>
+              <a:t>? </a:t>
             </a:r>
             <a:endParaRPr lang="en-CH" dirty="0"/>
           </a:p>

--- a/presentation/MemoryOptimizedTables_SQLDatenbanken.pptx
+++ b/presentation/MemoryOptimizedTables_SQLDatenbanken.pptx
@@ -13,6 +13,7 @@
     <p:sldId id="262" r:id="rId7"/>
     <p:sldId id="261" r:id="rId8"/>
     <p:sldId id="263" r:id="rId9"/>
+    <p:sldId id="265" r:id="rId10"/>
   </p:sldIdLst>
   <p:sldSz cx="12192000" cy="6858000"/>
   <p:notesSz cx="6858000" cy="9144000"/>
@@ -22273,7 +22274,7 @@
             <p:ph sz="quarter" idx="13"/>
             <p:extLst>
               <p:ext uri="{D42A27DB-BD31-4B8C-83A1-F6EECF244321}">
-                <p14:modId xmlns:p14="http://schemas.microsoft.com/office/powerpoint/2010/main" val="3452986559"/>
+                <p14:modId xmlns:p14="http://schemas.microsoft.com/office/powerpoint/2010/main" val="396645844"/>
               </p:ext>
               <p:ext uri="{E7BDC344-281C-4309-B0C6-D0EE65EED2A8}">
                 <p202:designPr xmlns:p202="http://schemas.microsoft.com/office/powerpoint/2020/02/main">
@@ -22367,7 +22368,7 @@
                             <a:schemeClr val="tx1"/>
                           </a:solidFill>
                         </a:rPr>
-                        <a:t>Disk vs in Memory Table</a:t>
+                        <a:t>Disk vs in MOT Table</a:t>
                       </a:r>
                     </a:p>
                   </a:txBody>
@@ -22574,7 +22575,7 @@
                             <a:schemeClr val="tx1"/>
                           </a:solidFill>
                         </a:rPr>
-                        <a:t> in Memory Table</a:t>
+                        <a:t> Memory Optimized Table</a:t>
                       </a:r>
                     </a:p>
                   </a:txBody>
@@ -22697,7 +22698,7 @@
                             <a:schemeClr val="tx1"/>
                           </a:solidFill>
                         </a:rPr>
-                        <a:t> in Memory Table</a:t>
+                        <a:t> Memory Optimized Table</a:t>
                       </a:r>
                     </a:p>
                   </a:txBody>
@@ -23127,6 +23128,28 @@
             </a:r>
           </a:p>
           <a:p>
+            <a:r>
+              <a:rPr lang="de-DE" dirty="0"/>
+              <a:t>Page Fragmentierung (bedarf </a:t>
+            </a:r>
+            <a:r>
+              <a:rPr lang="de-DE" dirty="0" err="1"/>
+              <a:t>Rebuild</a:t>
+            </a:r>
+            <a:r>
+              <a:rPr lang="de-DE" dirty="0"/>
+              <a:t>/</a:t>
+            </a:r>
+            <a:r>
+              <a:rPr lang="de-DE" dirty="0" err="1"/>
+              <a:t>Reorganize</a:t>
+            </a:r>
+            <a:r>
+              <a:rPr lang="de-DE" dirty="0"/>
+              <a:t> von Indizes)</a:t>
+            </a:r>
+          </a:p>
+          <a:p>
             <a:endParaRPr lang="en-CH" dirty="0"/>
           </a:p>
         </p:txBody>
@@ -23149,7 +23172,9 @@
         </p:nvSpPr>
         <p:spPr/>
         <p:txBody>
-          <a:bodyPr/>
+          <a:bodyPr>
+            <a:normAutofit fontScale="92500" lnSpcReduction="10000"/>
+          </a:bodyPr>
           <a:lstStyle/>
           <a:p>
             <a:pPr marL="0" indent="0">
@@ -23205,6 +23230,106 @@
           </a:p>
           <a:p>
             <a:r>
+              <a:rPr lang="en-GB" dirty="0" err="1"/>
+              <a:t>Spezielle</a:t>
+            </a:r>
+            <a:r>
+              <a:rPr lang="en-GB" dirty="0"/>
+              <a:t> Filegroup </a:t>
+            </a:r>
+            <a:r>
+              <a:rPr lang="en-GB" dirty="0" err="1"/>
+              <a:t>MEMORY_OPTIMIZED_DATA</a:t>
+            </a:r>
+            <a:r>
+              <a:rPr lang="en-GB" dirty="0"/>
+              <a:t>, Durability-</a:t>
+            </a:r>
+            <a:r>
+              <a:rPr lang="en-GB" dirty="0" err="1"/>
+              <a:t>Optionen</a:t>
+            </a:r>
+            <a:endParaRPr lang="en-GB" dirty="0"/>
+          </a:p>
+          <a:p>
+            <a:r>
+              <a:rPr lang="en-GB" dirty="0" err="1"/>
+              <a:t>Persistierung</a:t>
+            </a:r>
+            <a:r>
+              <a:rPr lang="en-GB" dirty="0"/>
+              <a:t> von </a:t>
+            </a:r>
+            <a:r>
+              <a:rPr lang="en-GB" dirty="0" err="1"/>
+              <a:t>Indexdefinitionen</a:t>
+            </a:r>
+            <a:r>
+              <a:rPr lang="en-GB" dirty="0"/>
+              <a:t>. Aufbau </a:t>
+            </a:r>
+            <a:r>
+              <a:rPr lang="en-GB" dirty="0" err="1"/>
+              <a:t>Indexe</a:t>
+            </a:r>
+            <a:r>
+              <a:rPr lang="en-GB" dirty="0"/>
+              <a:t> </a:t>
+            </a:r>
+            <a:r>
+              <a:rPr lang="en-GB" dirty="0" err="1"/>
+              <a:t>bei</a:t>
+            </a:r>
+            <a:r>
+              <a:rPr lang="en-GB" dirty="0"/>
+              <a:t> </a:t>
+            </a:r>
+            <a:r>
+              <a:rPr lang="en-GB" dirty="0" err="1"/>
+              <a:t>Datenbankstart</a:t>
+            </a:r>
+            <a:r>
+              <a:rPr lang="en-GB" dirty="0"/>
+              <a:t>.</a:t>
+            </a:r>
+          </a:p>
+          <a:p>
+            <a:pPr lvl="1"/>
+            <a:r>
+              <a:rPr lang="en-GB" dirty="0" err="1"/>
+              <a:t>V.a.</a:t>
+            </a:r>
+            <a:r>
+              <a:rPr lang="en-GB" dirty="0"/>
+              <a:t> Hash </a:t>
+            </a:r>
+            <a:r>
+              <a:rPr lang="en-GB" dirty="0" err="1"/>
+              <a:t>Indizes</a:t>
+            </a:r>
+            <a:r>
+              <a:rPr lang="en-GB" dirty="0"/>
+              <a:t> / </a:t>
+            </a:r>
+            <a:r>
+              <a:rPr lang="en-GB" dirty="0" err="1"/>
+              <a:t>Bw_Tree-Basierte</a:t>
+            </a:r>
+            <a:r>
+              <a:rPr lang="en-GB" dirty="0"/>
+              <a:t> Range </a:t>
+            </a:r>
+            <a:r>
+              <a:rPr lang="en-GB" dirty="0" err="1"/>
+              <a:t>Indizes</a:t>
+            </a:r>
+            <a:r>
+              <a:rPr lang="en-GB" dirty="0"/>
+              <a:t> </a:t>
+            </a:r>
+          </a:p>
+          <a:p>
+            <a:r>
               <a:rPr lang="en-GB" dirty="0"/>
               <a:t>Lock-</a:t>
             </a:r>
@@ -23222,42 +23347,22 @@
             </a:r>
             <a:r>
               <a:rPr lang="en-GB" dirty="0"/>
-              <a:t> MVCC-</a:t>
+              <a:t> multi-version Concurrency-Modell MVCC-</a:t>
             </a:r>
             <a:r>
               <a:rPr lang="en-GB" dirty="0" err="1"/>
               <a:t>Struktur</a:t>
             </a:r>
+            <a:endParaRPr lang="en-GB" dirty="0"/>
+          </a:p>
+          <a:p>
             <a:r>
               <a:rPr lang="en-GB" dirty="0"/>
-              <a:t>, Hash-/Range-</a:t>
+              <a:t>Alte </a:t>
             </a:r>
             <a:r>
               <a:rPr lang="en-GB" dirty="0" err="1"/>
-              <a:t>Indizes</a:t>
-            </a:r>
-            <a:endParaRPr lang="en-GB" dirty="0"/>
-          </a:p>
-          <a:p>
-            <a:r>
-              <a:rPr lang="en-GB" dirty="0" err="1"/>
-              <a:t>Persistierung</a:t>
-            </a:r>
-            <a:r>
-              <a:rPr lang="en-GB" dirty="0"/>
-              <a:t> von </a:t>
-            </a:r>
-            <a:r>
-              <a:rPr lang="en-GB" dirty="0" err="1"/>
-              <a:t>Indexdefinitionen</a:t>
-            </a:r>
-            <a:r>
-              <a:rPr lang="en-GB" dirty="0"/>
-              <a:t>. Aufbau </a:t>
-            </a:r>
-            <a:r>
-              <a:rPr lang="en-GB" dirty="0" err="1"/>
-              <a:t>Indexe</a:t>
+              <a:t>Zeilenversionen</a:t>
             </a:r>
             <a:r>
               <a:rPr lang="en-GB" dirty="0"/>
@@ -23265,7 +23370,7 @@
             </a:r>
             <a:r>
               <a:rPr lang="en-GB" dirty="0" err="1"/>
-              <a:t>bei</a:t>
+              <a:t>müssen</a:t>
             </a:r>
             <a:r>
               <a:rPr lang="en-GB" dirty="0"/>
@@ -23273,69 +23378,27 @@
             </a:r>
             <a:r>
               <a:rPr lang="en-GB" dirty="0" err="1"/>
-              <a:t>Datenbankstart</a:t>
+              <a:t>mit</a:t>
             </a:r>
             <a:r>
               <a:rPr lang="en-GB" dirty="0"/>
-              <a:t>.</a:t>
-            </a:r>
-          </a:p>
-          <a:p>
-            <a:pPr lvl="1"/>
+              <a:t> Merge thread </a:t>
+            </a:r>
             <a:r>
               <a:rPr lang="en-GB" dirty="0" err="1"/>
-              <a:t>V.a.</a:t>
-            </a:r>
-            <a:r>
-              <a:rPr lang="en-GB" dirty="0"/>
-              <a:t> Hash </a:t>
-            </a:r>
-            <a:r>
-              <a:rPr lang="en-GB" dirty="0" err="1"/>
-              <a:t>Indizes</a:t>
-            </a:r>
-            <a:r>
-              <a:rPr lang="en-GB" dirty="0"/>
-              <a:t> / </a:t>
-            </a:r>
-            <a:r>
-              <a:rPr lang="en-GB" dirty="0" err="1"/>
-              <a:t>Bw_Tree-Basierte</a:t>
-            </a:r>
-            <a:r>
-              <a:rPr lang="en-GB" dirty="0"/>
-              <a:t> Range </a:t>
-            </a:r>
-            <a:r>
-              <a:rPr lang="en-GB" dirty="0" err="1"/>
-              <a:t>Indizes</a:t>
+              <a:t>zusammengeführt</a:t>
             </a:r>
             <a:r>
               <a:rPr lang="en-GB" dirty="0"/>
               <a:t> </a:t>
             </a:r>
-          </a:p>
-          <a:p>
             <a:r>
               <a:rPr lang="en-GB" dirty="0" err="1"/>
-              <a:t>Spezielle</a:t>
-            </a:r>
-            <a:r>
-              <a:rPr lang="en-GB" dirty="0"/>
-              <a:t> Filegroup </a:t>
-            </a:r>
-            <a:r>
-              <a:rPr lang="en-GB" dirty="0" err="1"/>
-              <a:t>MEMORY_OPTIMIZED_DATA</a:t>
-            </a:r>
-            <a:r>
-              <a:rPr lang="en-GB" dirty="0"/>
-              <a:t>, Durability-</a:t>
-            </a:r>
-            <a:r>
-              <a:rPr lang="en-GB" dirty="0" err="1"/>
-              <a:t>Optionen</a:t>
-            </a:r>
+              <a:t>werden</a:t>
+            </a:r>
+            <a:endParaRPr lang="en-GB" dirty="0"/>
+          </a:p>
+          <a:p>
             <a:endParaRPr lang="en-GB" dirty="0"/>
           </a:p>
           <a:p>
@@ -24308,7 +24371,15 @@
           <a:p>
             <a:r>
               <a:rPr lang="de-CH" dirty="0"/>
-              <a:t>Vor- und Nachteile «in Memory» Table</a:t>
+              <a:t>Vor- und Nachteile  Memory </a:t>
+            </a:r>
+            <a:r>
+              <a:rPr lang="de-CH" dirty="0" err="1"/>
+              <a:t>Optimized</a:t>
+            </a:r>
+            <a:r>
+              <a:rPr lang="de-CH" dirty="0"/>
+              <a:t> Table</a:t>
             </a:r>
             <a:endParaRPr lang="en-CH" dirty="0"/>
           </a:p>
@@ -24615,13 +24686,6 @@
               <a:buFontTx/>
               <a:buChar char="-"/>
             </a:pPr>
-            <a:endParaRPr lang="de-CH" dirty="0"/>
-          </a:p>
-          <a:p>
-            <a:pPr>
-              <a:buFontTx/>
-              <a:buChar char="-"/>
-            </a:pPr>
             <a:r>
               <a:rPr lang="de-CH" dirty="0"/>
               <a:t>Memory </a:t>
@@ -24869,6 +24933,37 @@
               <a:rPr lang="de-CH" dirty="0"/>
               <a:t>Vorteile «in Memory» Table</a:t>
             </a:r>
+          </a:p>
+          <a:p>
+            <a:pPr marL="0" indent="0">
+              <a:buNone/>
+            </a:pPr>
+            <a:endParaRPr lang="de-CH" dirty="0"/>
+          </a:p>
+          <a:p>
+            <a:pPr marL="0" indent="0">
+              <a:buNone/>
+            </a:pPr>
+            <a:r>
+              <a:rPr lang="de-CH" dirty="0"/>
+              <a:t>Sehr gute </a:t>
+            </a:r>
+            <a:r>
+              <a:rPr lang="de-CH" dirty="0" err="1"/>
+              <a:t>performance</a:t>
+            </a:r>
+            <a:r>
+              <a:rPr lang="de-CH" dirty="0"/>
+              <a:t> bei passendem OLTP Workloads (z.B. vielen kurzen Transaktionen, Hot </a:t>
+            </a:r>
+            <a:r>
+              <a:rPr lang="de-CH" dirty="0" err="1"/>
+              <a:t>Tables</a:t>
+            </a:r>
+            <a:r>
+              <a:rPr lang="de-CH" dirty="0"/>
+              <a:t>, Sessions- oder Queue Tabellen)</a:t>
+            </a:r>
             <a:endParaRPr lang="en-CH" dirty="0"/>
           </a:p>
         </p:txBody>
@@ -24931,7 +25026,23 @@
           <a:p>
             <a:r>
               <a:rPr lang="de-CH" dirty="0"/>
-              <a:t>Beispiel Nachteil «in Memory» Table gegenüber «in </a:t>
+              <a:t>Beispiel Nachteil Memory </a:t>
+            </a:r>
+            <a:r>
+              <a:rPr lang="de-CH" dirty="0" err="1"/>
+              <a:t>Optimized</a:t>
+            </a:r>
+            <a:r>
+              <a:rPr lang="de-CH" dirty="0"/>
+              <a:t> </a:t>
+            </a:r>
+            <a:r>
+              <a:rPr lang="de-CH" dirty="0" err="1"/>
+              <a:t>vs</a:t>
+            </a:r>
+            <a:r>
+              <a:rPr lang="de-CH" dirty="0"/>
+              <a:t>  «in </a:t>
             </a:r>
             <a:r>
               <a:rPr lang="de-CH" dirty="0" err="1"/>
@@ -25145,7 +25256,33 @@
               <a:rPr lang="de-CH" dirty="0"/>
               <a:t>Nachteile «in Memory» Table</a:t>
             </a:r>
-            <a:endParaRPr lang="en-CH" dirty="0"/>
+          </a:p>
+          <a:p>
+            <a:pPr marL="0" indent="0">
+              <a:buFont typeface="Arial" panose="020B0604020202020204" pitchFamily="34" charset="0"/>
+              <a:buNone/>
+            </a:pPr>
+            <a:endParaRPr lang="de-CH" dirty="0"/>
+          </a:p>
+          <a:p>
+            <a:pPr marL="0" indent="0">
+              <a:buFont typeface="Arial" panose="020B0604020202020204" pitchFamily="34" charset="0"/>
+              <a:buNone/>
+            </a:pPr>
+            <a:r>
+              <a:rPr lang="de-CH" dirty="0"/>
+              <a:t>Über RAM begrenzt</a:t>
+            </a:r>
+          </a:p>
+          <a:p>
+            <a:pPr marL="0" indent="0">
+              <a:buFont typeface="Arial" panose="020B0604020202020204" pitchFamily="34" charset="0"/>
+              <a:buNone/>
+            </a:pPr>
+            <a:r>
+              <a:rPr lang="de-CH" dirty="0"/>
+              <a:t>Datentypen Constraints</a:t>
+            </a:r>
           </a:p>
         </p:txBody>
       </p:sp>
@@ -25153,6 +25290,1953 @@
     <p:extLst>
       <p:ext uri="{BB962C8B-B14F-4D97-AF65-F5344CB8AC3E}">
         <p14:creationId xmlns:p14="http://schemas.microsoft.com/office/powerpoint/2010/main" val="335068550"/>
+      </p:ext>
+    </p:extLst>
+  </p:cSld>
+  <p:clrMapOvr>
+    <a:masterClrMapping/>
+  </p:clrMapOvr>
+</p:sld>
+</file>
+
+<file path=ppt/slides/slide9.xml><?xml version="1.0" encoding="utf-8"?>
+<p:sld xmlns:a="http://schemas.openxmlformats.org/drawingml/2006/main" xmlns:r="http://schemas.openxmlformats.org/officeDocument/2006/relationships" xmlns:p="http://schemas.openxmlformats.org/presentationml/2006/main">
+  <p:cSld>
+    <p:spTree>
+      <p:nvGrpSpPr>
+        <p:cNvPr id="1" name=""/>
+        <p:cNvGrpSpPr/>
+        <p:nvPr/>
+      </p:nvGrpSpPr>
+      <p:grpSpPr>
+        <a:xfrm>
+          <a:off x="0" y="0"/>
+          <a:ext cx="0" cy="0"/>
+          <a:chOff x="0" y="0"/>
+          <a:chExt cx="0" cy="0"/>
+        </a:xfrm>
+      </p:grpSpPr>
+      <p:sp>
+        <p:nvSpPr>
+          <p:cNvPr id="2" name="Title 1">
+            <a:extLst>
+              <a:ext uri="{FF2B5EF4-FFF2-40B4-BE49-F238E27FC236}">
+                <a16:creationId xmlns:a16="http://schemas.microsoft.com/office/drawing/2014/main" id="{3E460989-2BA5-C934-C371-59ABD89AF6F2}"/>
+              </a:ext>
+            </a:extLst>
+          </p:cNvPr>
+          <p:cNvSpPr>
+            <a:spLocks noGrp="1"/>
+          </p:cNvSpPr>
+          <p:nvPr>
+            <p:ph type="title"/>
+          </p:nvPr>
+        </p:nvSpPr>
+        <p:spPr/>
+        <p:txBody>
+          <a:bodyPr/>
+          <a:lstStyle/>
+          <a:p>
+            <a:r>
+              <a:rPr lang="de-CH" dirty="0"/>
+              <a:t>Anhang</a:t>
+            </a:r>
+            <a:endParaRPr lang="en-CH" dirty="0"/>
+          </a:p>
+        </p:txBody>
+      </p:sp>
+      <p:sp>
+        <p:nvSpPr>
+          <p:cNvPr id="3" name="Content Placeholder 2">
+            <a:extLst>
+              <a:ext uri="{FF2B5EF4-FFF2-40B4-BE49-F238E27FC236}">
+                <a16:creationId xmlns:a16="http://schemas.microsoft.com/office/drawing/2014/main" id="{21373E59-A7C9-BFB4-08BB-DC39FC4EDCD5}"/>
+              </a:ext>
+            </a:extLst>
+          </p:cNvPr>
+          <p:cNvSpPr>
+            <a:spLocks noGrp="1"/>
+          </p:cNvSpPr>
+          <p:nvPr>
+            <p:ph sz="quarter" idx="13"/>
+          </p:nvPr>
+        </p:nvSpPr>
+        <p:spPr>
+          <a:xfrm>
+            <a:off x="7332292" y="1103861"/>
+            <a:ext cx="4060072" cy="1797350"/>
+          </a:xfrm>
+        </p:spPr>
+        <p:txBody>
+          <a:bodyPr/>
+          <a:lstStyle/>
+          <a:p>
+            <a:r>
+              <a:rPr lang="de-DE" dirty="0"/>
+              <a:t>In einer Transaktion können beide Typen kombiniert werden, meist mit READ </a:t>
+            </a:r>
+            <a:r>
+              <a:rPr lang="de-DE" dirty="0" err="1"/>
+              <a:t>COMMITTED</a:t>
+            </a:r>
+            <a:r>
+              <a:rPr lang="de-DE" dirty="0"/>
+              <a:t> für Disk‑Tabellen und </a:t>
+            </a:r>
+            <a:r>
+              <a:rPr lang="de-DE" dirty="0" err="1"/>
+              <a:t>SERIALIZABLE</a:t>
+            </a:r>
+            <a:r>
+              <a:rPr lang="de-DE" dirty="0"/>
+              <a:t>‑ähnlicher Isolation für in </a:t>
+            </a:r>
+            <a:r>
+              <a:rPr lang="de-DE" dirty="0" err="1"/>
+              <a:t>memory</a:t>
+            </a:r>
+            <a:r>
+              <a:rPr lang="de-DE" dirty="0"/>
+              <a:t> Tabellen</a:t>
+            </a:r>
+            <a:endParaRPr lang="en-CH" dirty="0"/>
+          </a:p>
+        </p:txBody>
+      </p:sp>
+      <p:graphicFrame>
+        <p:nvGraphicFramePr>
+          <p:cNvPr id="4" name="Table 3">
+            <a:extLst>
+              <a:ext uri="{FF2B5EF4-FFF2-40B4-BE49-F238E27FC236}">
+                <a16:creationId xmlns:a16="http://schemas.microsoft.com/office/drawing/2014/main" id="{E732A028-81D2-DDC3-10A8-350E9A730978}"/>
+              </a:ext>
+            </a:extLst>
+          </p:cNvPr>
+          <p:cNvGraphicFramePr>
+            <a:graphicFrameLocks noGrp="1"/>
+          </p:cNvGraphicFramePr>
+          <p:nvPr>
+            <p:extLst>
+              <p:ext uri="{D42A27DB-BD31-4B8C-83A1-F6EECF244321}">
+                <p14:modId xmlns:p14="http://schemas.microsoft.com/office/powerpoint/2010/main" val="4085196458"/>
+              </p:ext>
+            </p:extLst>
+          </p:nvPr>
+        </p:nvGraphicFramePr>
+        <p:xfrm>
+          <a:off x="612648" y="1554520"/>
+          <a:ext cx="5770512" cy="4581104"/>
+        </p:xfrm>
+        <a:graphic>
+          <a:graphicData uri="http://schemas.openxmlformats.org/drawingml/2006/table">
+            <a:tbl>
+              <a:tblPr/>
+              <a:tblGrid>
+                <a:gridCol w="1923504">
+                  <a:extLst>
+                    <a:ext uri="{9D8B030D-6E8A-4147-A177-3AD203B41FA5}">
+                      <a16:colId xmlns:a16="http://schemas.microsoft.com/office/drawing/2014/main" val="2619766692"/>
+                    </a:ext>
+                  </a:extLst>
+                </a:gridCol>
+                <a:gridCol w="1923504">
+                  <a:extLst>
+                    <a:ext uri="{9D8B030D-6E8A-4147-A177-3AD203B41FA5}">
+                      <a16:colId xmlns:a16="http://schemas.microsoft.com/office/drawing/2014/main" val="18921312"/>
+                    </a:ext>
+                  </a:extLst>
+                </a:gridCol>
+                <a:gridCol w="1923504">
+                  <a:extLst>
+                    <a:ext uri="{9D8B030D-6E8A-4147-A177-3AD203B41FA5}">
+                      <a16:colId xmlns:a16="http://schemas.microsoft.com/office/drawing/2014/main" val="1624438146"/>
+                    </a:ext>
+                  </a:extLst>
+                </a:gridCol>
+              </a:tblGrid>
+              <a:tr h="325981">
+                <a:tc>
+                  <a:txBody>
+                    <a:bodyPr/>
+                    <a:lstStyle/>
+                    <a:p>
+                      <a:pPr algn="l">
+                        <a:buNone/>
+                      </a:pPr>
+                      <a:endParaRPr lang="en-GB" sz="900" dirty="0">
+                        <a:effectLst/>
+                      </a:endParaRPr>
+                    </a:p>
+                  </a:txBody>
+                  <a:tcPr marL="40143" marR="40143" marT="40143" marB="40143" anchor="ctr">
+                    <a:lnL w="9525" cap="flat" cmpd="sng" algn="ctr">
+                      <a:solidFill>
+                        <a:srgbClr val="DDDDDD"/>
+                      </a:solidFill>
+                      <a:prstDash val="solid"/>
+                      <a:round/>
+                      <a:headEnd type="none" w="med" len="med"/>
+                      <a:tailEnd type="none" w="med" len="med"/>
+                    </a:lnL>
+                    <a:lnR w="9525" cap="flat" cmpd="sng" algn="ctr">
+                      <a:solidFill>
+                        <a:srgbClr val="DDDDDD"/>
+                      </a:solidFill>
+                      <a:prstDash val="solid"/>
+                      <a:round/>
+                      <a:headEnd type="none" w="med" len="med"/>
+                      <a:tailEnd type="none" w="med" len="med"/>
+                    </a:lnR>
+                    <a:lnT w="9525" cap="flat" cmpd="sng" algn="ctr">
+                      <a:solidFill>
+                        <a:srgbClr val="DDDDDD"/>
+                      </a:solidFill>
+                      <a:prstDash val="solid"/>
+                      <a:round/>
+                      <a:headEnd type="none" w="med" len="med"/>
+                      <a:tailEnd type="none" w="med" len="med"/>
+                    </a:lnT>
+                    <a:lnB w="9525" cap="flat" cmpd="sng" algn="ctr">
+                      <a:solidFill>
+                        <a:srgbClr val="DDDDDD"/>
+                      </a:solidFill>
+                      <a:prstDash val="solid"/>
+                      <a:round/>
+                      <a:headEnd type="none" w="med" len="med"/>
+                      <a:tailEnd type="none" w="med" len="med"/>
+                    </a:lnB>
+                    <a:solidFill>
+                      <a:srgbClr val="F2F2F2"/>
+                    </a:solidFill>
+                  </a:tcPr>
+                </a:tc>
+                <a:tc>
+                  <a:txBody>
+                    <a:bodyPr/>
+                    <a:lstStyle/>
+                    <a:p>
+                      <a:pPr algn="l">
+                        <a:buNone/>
+                      </a:pPr>
+                      <a:r>
+                        <a:rPr lang="en-GB" sz="900" dirty="0">
+                          <a:effectLst/>
+                        </a:rPr>
+                        <a:t>In Disk Table</a:t>
+                      </a:r>
+                    </a:p>
+                  </a:txBody>
+                  <a:tcPr marL="40143" marR="40143" marT="40143" marB="40143" anchor="ctr">
+                    <a:lnL w="9525" cap="flat" cmpd="sng" algn="ctr">
+                      <a:solidFill>
+                        <a:srgbClr val="DDDDDD"/>
+                      </a:solidFill>
+                      <a:prstDash val="solid"/>
+                      <a:round/>
+                      <a:headEnd type="none" w="med" len="med"/>
+                      <a:tailEnd type="none" w="med" len="med"/>
+                    </a:lnL>
+                    <a:lnR w="9525" cap="flat" cmpd="sng" algn="ctr">
+                      <a:solidFill>
+                        <a:srgbClr val="DDDDDD"/>
+                      </a:solidFill>
+                      <a:prstDash val="solid"/>
+                      <a:round/>
+                      <a:headEnd type="none" w="med" len="med"/>
+                      <a:tailEnd type="none" w="med" len="med"/>
+                    </a:lnR>
+                    <a:lnT w="9525" cap="flat" cmpd="sng" algn="ctr">
+                      <a:solidFill>
+                        <a:srgbClr val="DDDDDD"/>
+                      </a:solidFill>
+                      <a:prstDash val="solid"/>
+                      <a:round/>
+                      <a:headEnd type="none" w="med" len="med"/>
+                      <a:tailEnd type="none" w="med" len="med"/>
+                    </a:lnT>
+                    <a:lnB w="9525" cap="flat" cmpd="sng" algn="ctr">
+                      <a:solidFill>
+                        <a:srgbClr val="DDDDDD"/>
+                      </a:solidFill>
+                      <a:prstDash val="solid"/>
+                      <a:round/>
+                      <a:headEnd type="none" w="med" len="med"/>
+                      <a:tailEnd type="none" w="med" len="med"/>
+                    </a:lnB>
+                    <a:solidFill>
+                      <a:srgbClr val="F2F2F2"/>
+                    </a:solidFill>
+                  </a:tcPr>
+                </a:tc>
+                <a:tc>
+                  <a:txBody>
+                    <a:bodyPr/>
+                    <a:lstStyle/>
+                    <a:p>
+                      <a:pPr algn="l">
+                        <a:buNone/>
+                      </a:pPr>
+                      <a:r>
+                        <a:rPr lang="en-GB" sz="900" dirty="0">
+                          <a:effectLst/>
+                        </a:rPr>
+                        <a:t>In Memory Table</a:t>
+                      </a:r>
+                    </a:p>
+                  </a:txBody>
+                  <a:tcPr marL="40143" marR="40143" marT="40143" marB="40143" anchor="ctr">
+                    <a:lnL w="9525" cap="flat" cmpd="sng" algn="ctr">
+                      <a:solidFill>
+                        <a:srgbClr val="DDDDDD"/>
+                      </a:solidFill>
+                      <a:prstDash val="solid"/>
+                      <a:round/>
+                      <a:headEnd type="none" w="med" len="med"/>
+                      <a:tailEnd type="none" w="med" len="med"/>
+                    </a:lnL>
+                    <a:lnR w="9525" cap="flat" cmpd="sng" algn="ctr">
+                      <a:solidFill>
+                        <a:srgbClr val="DDDDDD"/>
+                      </a:solidFill>
+                      <a:prstDash val="solid"/>
+                      <a:round/>
+                      <a:headEnd type="none" w="med" len="med"/>
+                      <a:tailEnd type="none" w="med" len="med"/>
+                    </a:lnR>
+                    <a:lnT w="9525" cap="flat" cmpd="sng" algn="ctr">
+                      <a:solidFill>
+                        <a:srgbClr val="DDDDDD"/>
+                      </a:solidFill>
+                      <a:prstDash val="solid"/>
+                      <a:round/>
+                      <a:headEnd type="none" w="med" len="med"/>
+                      <a:tailEnd type="none" w="med" len="med"/>
+                    </a:lnT>
+                    <a:lnB w="9525" cap="flat" cmpd="sng" algn="ctr">
+                      <a:solidFill>
+                        <a:srgbClr val="DDDDDD"/>
+                      </a:solidFill>
+                      <a:prstDash val="solid"/>
+                      <a:round/>
+                      <a:headEnd type="none" w="med" len="med"/>
+                      <a:tailEnd type="none" w="med" len="med"/>
+                    </a:lnB>
+                    <a:solidFill>
+                      <a:srgbClr val="F2F2F2"/>
+                    </a:solidFill>
+                  </a:tcPr>
+                </a:tc>
+                <a:extLst>
+                  <a:ext uri="{0D108BD9-81ED-4DB2-BD59-A6C34878D82A}">
+                    <a16:rowId xmlns:a16="http://schemas.microsoft.com/office/drawing/2014/main" val="3852954944"/>
+                  </a:ext>
+                </a:extLst>
+              </a:tr>
+              <a:tr h="513826">
+                <a:tc>
+                  <a:txBody>
+                    <a:bodyPr/>
+                    <a:lstStyle/>
+                    <a:p>
+                      <a:pPr algn="l">
+                        <a:buNone/>
+                      </a:pPr>
+                      <a:r>
+                        <a:rPr lang="en-GB" sz="900">
+                          <a:effectLst/>
+                        </a:rPr>
+                        <a:t>Speicherort</a:t>
+                      </a:r>
+                    </a:p>
+                  </a:txBody>
+                  <a:tcPr marL="40143" marR="40143" marT="40143" marB="40143" anchor="ctr">
+                    <a:lnL w="9525" cap="flat" cmpd="sng" algn="ctr">
+                      <a:solidFill>
+                        <a:srgbClr val="DDDDDD"/>
+                      </a:solidFill>
+                      <a:prstDash val="solid"/>
+                      <a:round/>
+                      <a:headEnd type="none" w="med" len="med"/>
+                      <a:tailEnd type="none" w="med" len="med"/>
+                    </a:lnL>
+                    <a:lnR w="9525" cap="flat" cmpd="sng" algn="ctr">
+                      <a:solidFill>
+                        <a:srgbClr val="DDDDDD"/>
+                      </a:solidFill>
+                      <a:prstDash val="solid"/>
+                      <a:round/>
+                      <a:headEnd type="none" w="med" len="med"/>
+                      <a:tailEnd type="none" w="med" len="med"/>
+                    </a:lnR>
+                    <a:lnT w="9525" cap="flat" cmpd="sng" algn="ctr">
+                      <a:solidFill>
+                        <a:srgbClr val="DDDDDD"/>
+                      </a:solidFill>
+                      <a:prstDash val="solid"/>
+                      <a:round/>
+                      <a:headEnd type="none" w="med" len="med"/>
+                      <a:tailEnd type="none" w="med" len="med"/>
+                    </a:lnT>
+                    <a:lnB w="9525" cap="flat" cmpd="sng" algn="ctr">
+                      <a:solidFill>
+                        <a:srgbClr val="DDDDDD"/>
+                      </a:solidFill>
+                      <a:prstDash val="solid"/>
+                      <a:round/>
+                      <a:headEnd type="none" w="med" len="med"/>
+                      <a:tailEnd type="none" w="med" len="med"/>
+                    </a:lnB>
+                    <a:noFill/>
+                  </a:tcPr>
+                </a:tc>
+                <a:tc>
+                  <a:txBody>
+                    <a:bodyPr/>
+                    <a:lstStyle/>
+                    <a:p>
+                      <a:pPr algn="l">
+                        <a:buNone/>
+                      </a:pPr>
+                      <a:r>
+                        <a:rPr lang="de-DE" sz="900" dirty="0">
+                          <a:effectLst/>
+                        </a:rPr>
+                        <a:t>Seiten auf Datenträger, Buffer Cache im RAM</a:t>
+                      </a:r>
+                    </a:p>
+                  </a:txBody>
+                  <a:tcPr marL="40143" marR="40143" marT="40143" marB="40143" anchor="ctr">
+                    <a:lnL w="9525" cap="flat" cmpd="sng" algn="ctr">
+                      <a:solidFill>
+                        <a:srgbClr val="DDDDDD"/>
+                      </a:solidFill>
+                      <a:prstDash val="solid"/>
+                      <a:round/>
+                      <a:headEnd type="none" w="med" len="med"/>
+                      <a:tailEnd type="none" w="med" len="med"/>
+                    </a:lnL>
+                    <a:lnR w="9525" cap="flat" cmpd="sng" algn="ctr">
+                      <a:solidFill>
+                        <a:srgbClr val="DDDDDD"/>
+                      </a:solidFill>
+                      <a:prstDash val="solid"/>
+                      <a:round/>
+                      <a:headEnd type="none" w="med" len="med"/>
+                      <a:tailEnd type="none" w="med" len="med"/>
+                    </a:lnR>
+                    <a:lnT w="9525" cap="flat" cmpd="sng" algn="ctr">
+                      <a:solidFill>
+                        <a:srgbClr val="DDDDDD"/>
+                      </a:solidFill>
+                      <a:prstDash val="solid"/>
+                      <a:round/>
+                      <a:headEnd type="none" w="med" len="med"/>
+                      <a:tailEnd type="none" w="med" len="med"/>
+                    </a:lnT>
+                    <a:lnB w="9525" cap="flat" cmpd="sng" algn="ctr">
+                      <a:solidFill>
+                        <a:srgbClr val="DDDDDD"/>
+                      </a:solidFill>
+                      <a:prstDash val="solid"/>
+                      <a:round/>
+                      <a:headEnd type="none" w="med" len="med"/>
+                      <a:tailEnd type="none" w="med" len="med"/>
+                    </a:lnB>
+                    <a:noFill/>
+                  </a:tcPr>
+                </a:tc>
+                <a:tc>
+                  <a:txBody>
+                    <a:bodyPr/>
+                    <a:lstStyle/>
+                    <a:p>
+                      <a:pPr algn="l">
+                        <a:buNone/>
+                      </a:pPr>
+                      <a:r>
+                        <a:rPr lang="de-DE" sz="900" dirty="0">
+                          <a:effectLst/>
+                        </a:rPr>
+                        <a:t>Daten dauerhaft im RAM, Log/Daten/Delta auf Disk</a:t>
+                      </a:r>
+                    </a:p>
+                  </a:txBody>
+                  <a:tcPr marL="40143" marR="40143" marT="40143" marB="40143" anchor="ctr">
+                    <a:lnL w="9525" cap="flat" cmpd="sng" algn="ctr">
+                      <a:solidFill>
+                        <a:srgbClr val="DDDDDD"/>
+                      </a:solidFill>
+                      <a:prstDash val="solid"/>
+                      <a:round/>
+                      <a:headEnd type="none" w="med" len="med"/>
+                      <a:tailEnd type="none" w="med" len="med"/>
+                    </a:lnL>
+                    <a:lnR w="9525" cap="flat" cmpd="sng" algn="ctr">
+                      <a:solidFill>
+                        <a:srgbClr val="DDDDDD"/>
+                      </a:solidFill>
+                      <a:prstDash val="solid"/>
+                      <a:round/>
+                      <a:headEnd type="none" w="med" len="med"/>
+                      <a:tailEnd type="none" w="med" len="med"/>
+                    </a:lnR>
+                    <a:lnT w="9525" cap="flat" cmpd="sng" algn="ctr">
+                      <a:solidFill>
+                        <a:srgbClr val="DDDDDD"/>
+                      </a:solidFill>
+                      <a:prstDash val="solid"/>
+                      <a:round/>
+                      <a:headEnd type="none" w="med" len="med"/>
+                      <a:tailEnd type="none" w="med" len="med"/>
+                    </a:lnT>
+                    <a:lnB w="9525" cap="flat" cmpd="sng" algn="ctr">
+                      <a:solidFill>
+                        <a:srgbClr val="DDDDDD"/>
+                      </a:solidFill>
+                      <a:prstDash val="solid"/>
+                      <a:round/>
+                      <a:headEnd type="none" w="med" len="med"/>
+                      <a:tailEnd type="none" w="med" len="med"/>
+                    </a:lnB>
+                    <a:noFill/>
+                  </a:tcPr>
+                </a:tc>
+                <a:extLst>
+                  <a:ext uri="{0D108BD9-81ED-4DB2-BD59-A6C34878D82A}">
+                    <a16:rowId xmlns:a16="http://schemas.microsoft.com/office/drawing/2014/main" val="3048235710"/>
+                  </a:ext>
+                </a:extLst>
+              </a:tr>
+              <a:tr h="513826">
+                <a:tc>
+                  <a:txBody>
+                    <a:bodyPr/>
+                    <a:lstStyle/>
+                    <a:p>
+                      <a:pPr algn="l">
+                        <a:buNone/>
+                      </a:pPr>
+                      <a:r>
+                        <a:rPr lang="en-GB" sz="900">
+                          <a:effectLst/>
+                        </a:rPr>
+                        <a:t>Struktur</a:t>
+                      </a:r>
+                    </a:p>
+                  </a:txBody>
+                  <a:tcPr marL="40143" marR="40143" marT="40143" marB="40143" anchor="ctr">
+                    <a:lnL w="9525" cap="flat" cmpd="sng" algn="ctr">
+                      <a:solidFill>
+                        <a:srgbClr val="DDDDDD"/>
+                      </a:solidFill>
+                      <a:prstDash val="solid"/>
+                      <a:round/>
+                      <a:headEnd type="none" w="med" len="med"/>
+                      <a:tailEnd type="none" w="med" len="med"/>
+                    </a:lnL>
+                    <a:lnR w="9525" cap="flat" cmpd="sng" algn="ctr">
+                      <a:solidFill>
+                        <a:srgbClr val="DDDDDD"/>
+                      </a:solidFill>
+                      <a:prstDash val="solid"/>
+                      <a:round/>
+                      <a:headEnd type="none" w="med" len="med"/>
+                      <a:tailEnd type="none" w="med" len="med"/>
+                    </a:lnR>
+                    <a:lnT w="9525" cap="flat" cmpd="sng" algn="ctr">
+                      <a:solidFill>
+                        <a:srgbClr val="DDDDDD"/>
+                      </a:solidFill>
+                      <a:prstDash val="solid"/>
+                      <a:round/>
+                      <a:headEnd type="none" w="med" len="med"/>
+                      <a:tailEnd type="none" w="med" len="med"/>
+                    </a:lnT>
+                    <a:lnB w="9525" cap="flat" cmpd="sng" algn="ctr">
+                      <a:solidFill>
+                        <a:srgbClr val="DDDDDD"/>
+                      </a:solidFill>
+                      <a:prstDash val="solid"/>
+                      <a:round/>
+                      <a:headEnd type="none" w="med" len="med"/>
+                      <a:tailEnd type="none" w="med" len="med"/>
+                    </a:lnB>
+                    <a:noFill/>
+                  </a:tcPr>
+                </a:tc>
+                <a:tc>
+                  <a:txBody>
+                    <a:bodyPr/>
+                    <a:lstStyle/>
+                    <a:p>
+                      <a:pPr algn="l">
+                        <a:buNone/>
+                      </a:pPr>
+                      <a:r>
+                        <a:rPr lang="de-DE" sz="900" dirty="0">
+                          <a:effectLst/>
+                        </a:rPr>
+                        <a:t>8‑KB‑Seiten, eine Seite pro Tabelle</a:t>
+                      </a:r>
+                    </a:p>
+                  </a:txBody>
+                  <a:tcPr marL="40143" marR="40143" marT="40143" marB="40143" anchor="ctr">
+                    <a:lnL w="9525" cap="flat" cmpd="sng" algn="ctr">
+                      <a:solidFill>
+                        <a:srgbClr val="DDDDDD"/>
+                      </a:solidFill>
+                      <a:prstDash val="solid"/>
+                      <a:round/>
+                      <a:headEnd type="none" w="med" len="med"/>
+                      <a:tailEnd type="none" w="med" len="med"/>
+                    </a:lnL>
+                    <a:lnR w="9525" cap="flat" cmpd="sng" algn="ctr">
+                      <a:solidFill>
+                        <a:srgbClr val="DDDDDD"/>
+                      </a:solidFill>
+                      <a:prstDash val="solid"/>
+                      <a:round/>
+                      <a:headEnd type="none" w="med" len="med"/>
+                      <a:tailEnd type="none" w="med" len="med"/>
+                    </a:lnR>
+                    <a:lnT w="9525" cap="flat" cmpd="sng" algn="ctr">
+                      <a:solidFill>
+                        <a:srgbClr val="DDDDDD"/>
+                      </a:solidFill>
+                      <a:prstDash val="solid"/>
+                      <a:round/>
+                      <a:headEnd type="none" w="med" len="med"/>
+                      <a:tailEnd type="none" w="med" len="med"/>
+                    </a:lnT>
+                    <a:lnB w="9525" cap="flat" cmpd="sng" algn="ctr">
+                      <a:solidFill>
+                        <a:srgbClr val="DDDDDD"/>
+                      </a:solidFill>
+                      <a:prstDash val="solid"/>
+                      <a:round/>
+                      <a:headEnd type="none" w="med" len="med"/>
+                      <a:tailEnd type="none" w="med" len="med"/>
+                    </a:lnB>
+                    <a:noFill/>
+                  </a:tcPr>
+                </a:tc>
+                <a:tc>
+                  <a:txBody>
+                    <a:bodyPr/>
+                    <a:lstStyle/>
+                    <a:p>
+                      <a:pPr algn="l">
+                        <a:buNone/>
+                      </a:pPr>
+                      <a:r>
+                        <a:rPr lang="de-DE" sz="900" dirty="0">
+                          <a:effectLst/>
+                        </a:rPr>
+                        <a:t>Zeilenbasiert, keine Seiten, Files können Zeilen mehrerer Tabellen enthalten. </a:t>
+                      </a:r>
+                    </a:p>
+                  </a:txBody>
+                  <a:tcPr marL="40143" marR="40143" marT="40143" marB="40143" anchor="ctr">
+                    <a:lnL w="9525" cap="flat" cmpd="sng" algn="ctr">
+                      <a:solidFill>
+                        <a:srgbClr val="DDDDDD"/>
+                      </a:solidFill>
+                      <a:prstDash val="solid"/>
+                      <a:round/>
+                      <a:headEnd type="none" w="med" len="med"/>
+                      <a:tailEnd type="none" w="med" len="med"/>
+                    </a:lnL>
+                    <a:lnR w="9525" cap="flat" cmpd="sng" algn="ctr">
+                      <a:solidFill>
+                        <a:srgbClr val="DDDDDD"/>
+                      </a:solidFill>
+                      <a:prstDash val="solid"/>
+                      <a:round/>
+                      <a:headEnd type="none" w="med" len="med"/>
+                      <a:tailEnd type="none" w="med" len="med"/>
+                    </a:lnR>
+                    <a:lnT w="9525" cap="flat" cmpd="sng" algn="ctr">
+                      <a:solidFill>
+                        <a:srgbClr val="DDDDDD"/>
+                      </a:solidFill>
+                      <a:prstDash val="solid"/>
+                      <a:round/>
+                      <a:headEnd type="none" w="med" len="med"/>
+                      <a:tailEnd type="none" w="med" len="med"/>
+                    </a:lnT>
+                    <a:lnB w="9525" cap="flat" cmpd="sng" algn="ctr">
+                      <a:solidFill>
+                        <a:srgbClr val="DDDDDD"/>
+                      </a:solidFill>
+                      <a:prstDash val="solid"/>
+                      <a:round/>
+                      <a:headEnd type="none" w="med" len="med"/>
+                      <a:tailEnd type="none" w="med" len="med"/>
+                    </a:lnB>
+                    <a:noFill/>
+                  </a:tcPr>
+                </a:tc>
+                <a:extLst>
+                  <a:ext uri="{0D108BD9-81ED-4DB2-BD59-A6C34878D82A}">
+                    <a16:rowId xmlns:a16="http://schemas.microsoft.com/office/drawing/2014/main" val="4219890668"/>
+                  </a:ext>
+                </a:extLst>
+              </a:tr>
+              <a:tr h="658340">
+                <a:tc>
+                  <a:txBody>
+                    <a:bodyPr/>
+                    <a:lstStyle/>
+                    <a:p>
+                      <a:pPr algn="l">
+                        <a:buNone/>
+                      </a:pPr>
+                      <a:r>
+                        <a:rPr lang="en-GB" sz="900">
+                          <a:effectLst/>
+                        </a:rPr>
+                        <a:t>Indizes</a:t>
+                      </a:r>
+                    </a:p>
+                  </a:txBody>
+                  <a:tcPr marL="40143" marR="40143" marT="40143" marB="40143" anchor="ctr">
+                    <a:lnL w="9525" cap="flat" cmpd="sng" algn="ctr">
+                      <a:solidFill>
+                        <a:srgbClr val="DDDDDD"/>
+                      </a:solidFill>
+                      <a:prstDash val="solid"/>
+                      <a:round/>
+                      <a:headEnd type="none" w="med" len="med"/>
+                      <a:tailEnd type="none" w="med" len="med"/>
+                    </a:lnL>
+                    <a:lnR w="9525" cap="flat" cmpd="sng" algn="ctr">
+                      <a:solidFill>
+                        <a:srgbClr val="DDDDDD"/>
+                      </a:solidFill>
+                      <a:prstDash val="solid"/>
+                      <a:round/>
+                      <a:headEnd type="none" w="med" len="med"/>
+                      <a:tailEnd type="none" w="med" len="med"/>
+                    </a:lnR>
+                    <a:lnT w="9525" cap="flat" cmpd="sng" algn="ctr">
+                      <a:solidFill>
+                        <a:srgbClr val="DDDDDD"/>
+                      </a:solidFill>
+                      <a:prstDash val="solid"/>
+                      <a:round/>
+                      <a:headEnd type="none" w="med" len="med"/>
+                      <a:tailEnd type="none" w="med" len="med"/>
+                    </a:lnT>
+                    <a:lnB w="9525" cap="flat" cmpd="sng" algn="ctr">
+                      <a:solidFill>
+                        <a:srgbClr val="DDDDDD"/>
+                      </a:solidFill>
+                      <a:prstDash val="solid"/>
+                      <a:round/>
+                      <a:headEnd type="none" w="med" len="med"/>
+                      <a:tailEnd type="none" w="med" len="med"/>
+                    </a:lnB>
+                    <a:noFill/>
+                  </a:tcPr>
+                </a:tc>
+                <a:tc>
+                  <a:txBody>
+                    <a:bodyPr/>
+                    <a:lstStyle/>
+                    <a:p>
+                      <a:pPr algn="l">
+                        <a:buNone/>
+                      </a:pPr>
+                      <a:r>
+                        <a:rPr lang="en-GB" sz="900" dirty="0" err="1">
+                          <a:effectLst/>
+                        </a:rPr>
+                        <a:t>Persistierte</a:t>
+                      </a:r>
+                      <a:r>
+                        <a:rPr lang="en-GB" sz="900" dirty="0">
+                          <a:effectLst/>
+                        </a:rPr>
+                        <a:t> </a:t>
+                      </a:r>
+                      <a:r>
+                        <a:rPr lang="en-GB" sz="900" dirty="0" err="1">
+                          <a:effectLst/>
+                        </a:rPr>
+                        <a:t>Indexseiten</a:t>
+                      </a:r>
+                      <a:r>
+                        <a:rPr lang="en-GB" sz="900" dirty="0">
+                          <a:effectLst/>
+                        </a:rPr>
+                        <a:t>, </a:t>
+                      </a:r>
+                      <a:r>
+                        <a:rPr lang="en-GB" sz="900" dirty="0" err="1">
+                          <a:effectLst/>
+                        </a:rPr>
+                        <a:t>voll</a:t>
+                      </a:r>
+                      <a:r>
+                        <a:rPr lang="en-GB" sz="900" dirty="0">
+                          <a:effectLst/>
+                        </a:rPr>
+                        <a:t> </a:t>
+                      </a:r>
+                      <a:r>
+                        <a:rPr lang="en-GB" sz="900" dirty="0" err="1">
+                          <a:effectLst/>
+                        </a:rPr>
+                        <a:t>geloggt</a:t>
+                      </a:r>
+                      <a:r>
+                        <a:rPr lang="en-GB" sz="900" dirty="0">
+                          <a:effectLst/>
+                        </a:rPr>
+                        <a:t>.</a:t>
+                      </a:r>
+                    </a:p>
+                  </a:txBody>
+                  <a:tcPr marL="40143" marR="40143" marT="40143" marB="40143" anchor="ctr">
+                    <a:lnL w="9525" cap="flat" cmpd="sng" algn="ctr">
+                      <a:solidFill>
+                        <a:srgbClr val="DDDDDD"/>
+                      </a:solidFill>
+                      <a:prstDash val="solid"/>
+                      <a:round/>
+                      <a:headEnd type="none" w="med" len="med"/>
+                      <a:tailEnd type="none" w="med" len="med"/>
+                    </a:lnL>
+                    <a:lnR w="9525" cap="flat" cmpd="sng" algn="ctr">
+                      <a:solidFill>
+                        <a:srgbClr val="DDDDDD"/>
+                      </a:solidFill>
+                      <a:prstDash val="solid"/>
+                      <a:round/>
+                      <a:headEnd type="none" w="med" len="med"/>
+                      <a:tailEnd type="none" w="med" len="med"/>
+                    </a:lnR>
+                    <a:lnT w="9525" cap="flat" cmpd="sng" algn="ctr">
+                      <a:solidFill>
+                        <a:srgbClr val="DDDDDD"/>
+                      </a:solidFill>
+                      <a:prstDash val="solid"/>
+                      <a:round/>
+                      <a:headEnd type="none" w="med" len="med"/>
+                      <a:tailEnd type="none" w="med" len="med"/>
+                    </a:lnT>
+                    <a:lnB w="9525" cap="flat" cmpd="sng" algn="ctr">
+                      <a:solidFill>
+                        <a:srgbClr val="DDDDDD"/>
+                      </a:solidFill>
+                      <a:prstDash val="solid"/>
+                      <a:round/>
+                      <a:headEnd type="none" w="med" len="med"/>
+                      <a:tailEnd type="none" w="med" len="med"/>
+                    </a:lnB>
+                    <a:noFill/>
+                  </a:tcPr>
+                </a:tc>
+                <a:tc>
+                  <a:txBody>
+                    <a:bodyPr/>
+                    <a:lstStyle/>
+                    <a:p>
+                      <a:pPr algn="l">
+                        <a:buNone/>
+                      </a:pPr>
+                      <a:r>
+                        <a:rPr lang="en-GB" sz="900" dirty="0">
+                          <a:effectLst/>
+                        </a:rPr>
+                        <a:t>Nur Definition persistent, Index </a:t>
+                      </a:r>
+                      <a:r>
+                        <a:rPr lang="en-GB" sz="900" dirty="0" err="1">
+                          <a:effectLst/>
+                        </a:rPr>
+                        <a:t>im</a:t>
+                      </a:r>
+                      <a:r>
+                        <a:rPr lang="en-GB" sz="900" dirty="0">
+                          <a:effectLst/>
+                        </a:rPr>
+                        <a:t> RAM, </a:t>
+                      </a:r>
+                      <a:r>
+                        <a:rPr lang="en-GB" sz="900" dirty="0" err="1">
+                          <a:effectLst/>
+                        </a:rPr>
+                        <a:t>kein</a:t>
+                      </a:r>
+                      <a:r>
+                        <a:rPr lang="en-GB" sz="900" dirty="0">
+                          <a:effectLst/>
+                        </a:rPr>
+                        <a:t> Logging der Index‑</a:t>
+                      </a:r>
+                      <a:r>
+                        <a:rPr lang="en-GB" sz="900" dirty="0" err="1">
+                          <a:effectLst/>
+                        </a:rPr>
+                        <a:t>Zeilen</a:t>
+                      </a:r>
+                      <a:endParaRPr lang="en-GB" sz="900" dirty="0">
+                        <a:effectLst/>
+                      </a:endParaRPr>
+                    </a:p>
+                  </a:txBody>
+                  <a:tcPr marL="40143" marR="40143" marT="40143" marB="40143" anchor="ctr">
+                    <a:lnL w="9525" cap="flat" cmpd="sng" algn="ctr">
+                      <a:solidFill>
+                        <a:srgbClr val="DDDDDD"/>
+                      </a:solidFill>
+                      <a:prstDash val="solid"/>
+                      <a:round/>
+                      <a:headEnd type="none" w="med" len="med"/>
+                      <a:tailEnd type="none" w="med" len="med"/>
+                    </a:lnL>
+                    <a:lnR w="9525" cap="flat" cmpd="sng" algn="ctr">
+                      <a:solidFill>
+                        <a:srgbClr val="DDDDDD"/>
+                      </a:solidFill>
+                      <a:prstDash val="solid"/>
+                      <a:round/>
+                      <a:headEnd type="none" w="med" len="med"/>
+                      <a:tailEnd type="none" w="med" len="med"/>
+                    </a:lnR>
+                    <a:lnT w="9525" cap="flat" cmpd="sng" algn="ctr">
+                      <a:solidFill>
+                        <a:srgbClr val="DDDDDD"/>
+                      </a:solidFill>
+                      <a:prstDash val="solid"/>
+                      <a:round/>
+                      <a:headEnd type="none" w="med" len="med"/>
+                      <a:tailEnd type="none" w="med" len="med"/>
+                    </a:lnT>
+                    <a:lnB w="9525" cap="flat" cmpd="sng" algn="ctr">
+                      <a:solidFill>
+                        <a:srgbClr val="DDDDDD"/>
+                      </a:solidFill>
+                      <a:prstDash val="solid"/>
+                      <a:round/>
+                      <a:headEnd type="none" w="med" len="med"/>
+                      <a:tailEnd type="none" w="med" len="med"/>
+                    </a:lnB>
+                    <a:noFill/>
+                  </a:tcPr>
+                </a:tc>
+                <a:extLst>
+                  <a:ext uri="{0D108BD9-81ED-4DB2-BD59-A6C34878D82A}">
+                    <a16:rowId xmlns:a16="http://schemas.microsoft.com/office/drawing/2014/main" val="3453355456"/>
+                  </a:ext>
+                </a:extLst>
+              </a:tr>
+              <a:tr h="658340">
+                <a:tc>
+                  <a:txBody>
+                    <a:bodyPr/>
+                    <a:lstStyle/>
+                    <a:p>
+                      <a:pPr algn="l">
+                        <a:buNone/>
+                      </a:pPr>
+                      <a:r>
+                        <a:rPr lang="en-GB" sz="900" dirty="0" err="1">
+                          <a:effectLst/>
+                        </a:rPr>
+                        <a:t>DML</a:t>
+                      </a:r>
+                      <a:r>
+                        <a:rPr lang="en-GB" sz="900" dirty="0">
+                          <a:effectLst/>
+                        </a:rPr>
+                        <a:t> (Data Manipulation Language)</a:t>
+                      </a:r>
+                    </a:p>
+                  </a:txBody>
+                  <a:tcPr marL="40143" marR="40143" marT="40143" marB="40143" anchor="ctr">
+                    <a:lnL w="9525" cap="flat" cmpd="sng" algn="ctr">
+                      <a:solidFill>
+                        <a:srgbClr val="DDDDDD"/>
+                      </a:solidFill>
+                      <a:prstDash val="solid"/>
+                      <a:round/>
+                      <a:headEnd type="none" w="med" len="med"/>
+                      <a:tailEnd type="none" w="med" len="med"/>
+                    </a:lnL>
+                    <a:lnR w="9525" cap="flat" cmpd="sng" algn="ctr">
+                      <a:solidFill>
+                        <a:srgbClr val="DDDDDD"/>
+                      </a:solidFill>
+                      <a:prstDash val="solid"/>
+                      <a:round/>
+                      <a:headEnd type="none" w="med" len="med"/>
+                      <a:tailEnd type="none" w="med" len="med"/>
+                    </a:lnR>
+                    <a:lnT w="9525" cap="flat" cmpd="sng" algn="ctr">
+                      <a:solidFill>
+                        <a:srgbClr val="DDDDDD"/>
+                      </a:solidFill>
+                      <a:prstDash val="solid"/>
+                      <a:round/>
+                      <a:headEnd type="none" w="med" len="med"/>
+                      <a:tailEnd type="none" w="med" len="med"/>
+                    </a:lnT>
+                    <a:lnB w="9525" cap="flat" cmpd="sng" algn="ctr">
+                      <a:solidFill>
+                        <a:srgbClr val="DDDDDD"/>
+                      </a:solidFill>
+                      <a:prstDash val="solid"/>
+                      <a:round/>
+                      <a:headEnd type="none" w="med" len="med"/>
+                      <a:tailEnd type="none" w="med" len="med"/>
+                    </a:lnB>
+                    <a:noFill/>
+                  </a:tcPr>
+                </a:tc>
+                <a:tc>
+                  <a:txBody>
+                    <a:bodyPr/>
+                    <a:lstStyle/>
+                    <a:p>
+                      <a:pPr algn="l">
+                        <a:buNone/>
+                      </a:pPr>
+                      <a:r>
+                        <a:rPr lang="de-DE" sz="900" dirty="0">
+                          <a:effectLst/>
+                        </a:rPr>
+                        <a:t>Seiten laden, auf Seite ändern, Seiten zurückschreiben. </a:t>
+                      </a:r>
+                    </a:p>
+                  </a:txBody>
+                  <a:tcPr marL="40143" marR="40143" marT="40143" marB="40143" anchor="ctr">
+                    <a:lnL w="9525" cap="flat" cmpd="sng" algn="ctr">
+                      <a:solidFill>
+                        <a:srgbClr val="DDDDDD"/>
+                      </a:solidFill>
+                      <a:prstDash val="solid"/>
+                      <a:round/>
+                      <a:headEnd type="none" w="med" len="med"/>
+                      <a:tailEnd type="none" w="med" len="med"/>
+                    </a:lnL>
+                    <a:lnR w="9525" cap="flat" cmpd="sng" algn="ctr">
+                      <a:solidFill>
+                        <a:srgbClr val="DDDDDD"/>
+                      </a:solidFill>
+                      <a:prstDash val="solid"/>
+                      <a:round/>
+                      <a:headEnd type="none" w="med" len="med"/>
+                      <a:tailEnd type="none" w="med" len="med"/>
+                    </a:lnR>
+                    <a:lnT w="9525" cap="flat" cmpd="sng" algn="ctr">
+                      <a:solidFill>
+                        <a:srgbClr val="DDDDDD"/>
+                      </a:solidFill>
+                      <a:prstDash val="solid"/>
+                      <a:round/>
+                      <a:headEnd type="none" w="med" len="med"/>
+                      <a:tailEnd type="none" w="med" len="med"/>
+                    </a:lnT>
+                    <a:lnB w="9525" cap="flat" cmpd="sng" algn="ctr">
+                      <a:solidFill>
+                        <a:srgbClr val="DDDDDD"/>
+                      </a:solidFill>
+                      <a:prstDash val="solid"/>
+                      <a:round/>
+                      <a:headEnd type="none" w="med" len="med"/>
+                      <a:tailEnd type="none" w="med" len="med"/>
+                    </a:lnB>
+                    <a:noFill/>
+                  </a:tcPr>
+                </a:tc>
+                <a:tc>
+                  <a:txBody>
+                    <a:bodyPr/>
+                    <a:lstStyle/>
+                    <a:p>
+                      <a:pPr algn="l">
+                        <a:buNone/>
+                      </a:pPr>
+                      <a:r>
+                        <a:rPr lang="de-DE" sz="900" dirty="0">
+                          <a:effectLst/>
+                        </a:rPr>
+                        <a:t>Direkt im RAM, Log‑Thread schreibt Daten/Delta‑Dateien.</a:t>
+                      </a:r>
+                    </a:p>
+                  </a:txBody>
+                  <a:tcPr marL="40143" marR="40143" marT="40143" marB="40143" anchor="ctr">
+                    <a:lnL w="9525" cap="flat" cmpd="sng" algn="ctr">
+                      <a:solidFill>
+                        <a:srgbClr val="DDDDDD"/>
+                      </a:solidFill>
+                      <a:prstDash val="solid"/>
+                      <a:round/>
+                      <a:headEnd type="none" w="med" len="med"/>
+                      <a:tailEnd type="none" w="med" len="med"/>
+                    </a:lnL>
+                    <a:lnR w="9525" cap="flat" cmpd="sng" algn="ctr">
+                      <a:solidFill>
+                        <a:srgbClr val="DDDDDD"/>
+                      </a:solidFill>
+                      <a:prstDash val="solid"/>
+                      <a:round/>
+                      <a:headEnd type="none" w="med" len="med"/>
+                      <a:tailEnd type="none" w="med" len="med"/>
+                    </a:lnR>
+                    <a:lnT w="9525" cap="flat" cmpd="sng" algn="ctr">
+                      <a:solidFill>
+                        <a:srgbClr val="DDDDDD"/>
+                      </a:solidFill>
+                      <a:prstDash val="solid"/>
+                      <a:round/>
+                      <a:headEnd type="none" w="med" len="med"/>
+                      <a:tailEnd type="none" w="med" len="med"/>
+                    </a:lnT>
+                    <a:lnB w="9525" cap="flat" cmpd="sng" algn="ctr">
+                      <a:solidFill>
+                        <a:srgbClr val="DDDDDD"/>
+                      </a:solidFill>
+                      <a:prstDash val="solid"/>
+                      <a:round/>
+                      <a:headEnd type="none" w="med" len="med"/>
+                      <a:tailEnd type="none" w="med" len="med"/>
+                    </a:lnB>
+                    <a:noFill/>
+                  </a:tcPr>
+                </a:tc>
+                <a:extLst>
+                  <a:ext uri="{0D108BD9-81ED-4DB2-BD59-A6C34878D82A}">
+                    <a16:rowId xmlns:a16="http://schemas.microsoft.com/office/drawing/2014/main" val="1493453244"/>
+                  </a:ext>
+                </a:extLst>
+              </a:tr>
+              <a:tr h="369313">
+                <a:tc>
+                  <a:txBody>
+                    <a:bodyPr/>
+                    <a:lstStyle/>
+                    <a:p>
+                      <a:pPr algn="l">
+                        <a:buNone/>
+                      </a:pPr>
+                      <a:r>
+                        <a:rPr lang="en-GB" sz="900">
+                          <a:effectLst/>
+                        </a:rPr>
+                        <a:t>Concurrency</a:t>
+                      </a:r>
+                    </a:p>
+                  </a:txBody>
+                  <a:tcPr marL="40143" marR="40143" marT="40143" marB="40143" anchor="ctr">
+                    <a:lnL w="9525" cap="flat" cmpd="sng" algn="ctr">
+                      <a:solidFill>
+                        <a:srgbClr val="DDDDDD"/>
+                      </a:solidFill>
+                      <a:prstDash val="solid"/>
+                      <a:round/>
+                      <a:headEnd type="none" w="med" len="med"/>
+                      <a:tailEnd type="none" w="med" len="med"/>
+                    </a:lnL>
+                    <a:lnR w="9525" cap="flat" cmpd="sng" algn="ctr">
+                      <a:solidFill>
+                        <a:srgbClr val="DDDDDD"/>
+                      </a:solidFill>
+                      <a:prstDash val="solid"/>
+                      <a:round/>
+                      <a:headEnd type="none" w="med" len="med"/>
+                      <a:tailEnd type="none" w="med" len="med"/>
+                    </a:lnR>
+                    <a:lnT w="9525" cap="flat" cmpd="sng" algn="ctr">
+                      <a:solidFill>
+                        <a:srgbClr val="DDDDDD"/>
+                      </a:solidFill>
+                      <a:prstDash val="solid"/>
+                      <a:round/>
+                      <a:headEnd type="none" w="med" len="med"/>
+                      <a:tailEnd type="none" w="med" len="med"/>
+                    </a:lnT>
+                    <a:lnB w="9525" cap="flat" cmpd="sng" algn="ctr">
+                      <a:solidFill>
+                        <a:srgbClr val="DDDDDD"/>
+                      </a:solidFill>
+                      <a:prstDash val="solid"/>
+                      <a:round/>
+                      <a:headEnd type="none" w="med" len="med"/>
+                      <a:tailEnd type="none" w="med" len="med"/>
+                    </a:lnB>
+                    <a:noFill/>
+                  </a:tcPr>
+                </a:tc>
+                <a:tc>
+                  <a:txBody>
+                    <a:bodyPr/>
+                    <a:lstStyle/>
+                    <a:p>
+                      <a:pPr algn="l">
+                        <a:buNone/>
+                      </a:pPr>
+                      <a:r>
+                        <a:rPr lang="de-DE" sz="900" dirty="0">
+                          <a:effectLst/>
+                        </a:rPr>
+                        <a:t>Locks und Latches, potenziell Blockierungen.</a:t>
+                      </a:r>
+                    </a:p>
+                  </a:txBody>
+                  <a:tcPr marL="40143" marR="40143" marT="40143" marB="40143" anchor="ctr">
+                    <a:lnL w="9525" cap="flat" cmpd="sng" algn="ctr">
+                      <a:solidFill>
+                        <a:srgbClr val="DDDDDD"/>
+                      </a:solidFill>
+                      <a:prstDash val="solid"/>
+                      <a:round/>
+                      <a:headEnd type="none" w="med" len="med"/>
+                      <a:tailEnd type="none" w="med" len="med"/>
+                    </a:lnL>
+                    <a:lnR w="9525" cap="flat" cmpd="sng" algn="ctr">
+                      <a:solidFill>
+                        <a:srgbClr val="DDDDDD"/>
+                      </a:solidFill>
+                      <a:prstDash val="solid"/>
+                      <a:round/>
+                      <a:headEnd type="none" w="med" len="med"/>
+                      <a:tailEnd type="none" w="med" len="med"/>
+                    </a:lnR>
+                    <a:lnT w="9525" cap="flat" cmpd="sng" algn="ctr">
+                      <a:solidFill>
+                        <a:srgbClr val="DDDDDD"/>
+                      </a:solidFill>
+                      <a:prstDash val="solid"/>
+                      <a:round/>
+                      <a:headEnd type="none" w="med" len="med"/>
+                      <a:tailEnd type="none" w="med" len="med"/>
+                    </a:lnT>
+                    <a:lnB w="9525" cap="flat" cmpd="sng" algn="ctr">
+                      <a:solidFill>
+                        <a:srgbClr val="DDDDDD"/>
+                      </a:solidFill>
+                      <a:prstDash val="solid"/>
+                      <a:round/>
+                      <a:headEnd type="none" w="med" len="med"/>
+                      <a:tailEnd type="none" w="med" len="med"/>
+                    </a:lnB>
+                    <a:noFill/>
+                  </a:tcPr>
+                </a:tc>
+                <a:tc>
+                  <a:txBody>
+                    <a:bodyPr/>
+                    <a:lstStyle/>
+                    <a:p>
+                      <a:pPr algn="l">
+                        <a:buNone/>
+                      </a:pPr>
+                      <a:r>
+                        <a:rPr lang="de-DE" sz="900" dirty="0">
+                          <a:effectLst/>
+                        </a:rPr>
+                        <a:t>Lock‑freie Strukturen, optimistisches </a:t>
+                      </a:r>
+                      <a:r>
+                        <a:rPr lang="de-DE" sz="900" dirty="0" err="1">
+                          <a:effectLst/>
+                        </a:rPr>
+                        <a:t>MVCC</a:t>
+                      </a:r>
+                      <a:endParaRPr lang="de-DE" sz="900" dirty="0">
+                        <a:effectLst/>
+                      </a:endParaRPr>
+                    </a:p>
+                  </a:txBody>
+                  <a:tcPr marL="40143" marR="40143" marT="40143" marB="40143" anchor="ctr">
+                    <a:lnL w="9525" cap="flat" cmpd="sng" algn="ctr">
+                      <a:solidFill>
+                        <a:srgbClr val="DDDDDD"/>
+                      </a:solidFill>
+                      <a:prstDash val="solid"/>
+                      <a:round/>
+                      <a:headEnd type="none" w="med" len="med"/>
+                      <a:tailEnd type="none" w="med" len="med"/>
+                    </a:lnL>
+                    <a:lnR w="9525" cap="flat" cmpd="sng" algn="ctr">
+                      <a:solidFill>
+                        <a:srgbClr val="DDDDDD"/>
+                      </a:solidFill>
+                      <a:prstDash val="solid"/>
+                      <a:round/>
+                      <a:headEnd type="none" w="med" len="med"/>
+                      <a:tailEnd type="none" w="med" len="med"/>
+                    </a:lnR>
+                    <a:lnT w="9525" cap="flat" cmpd="sng" algn="ctr">
+                      <a:solidFill>
+                        <a:srgbClr val="DDDDDD"/>
+                      </a:solidFill>
+                      <a:prstDash val="solid"/>
+                      <a:round/>
+                      <a:headEnd type="none" w="med" len="med"/>
+                      <a:tailEnd type="none" w="med" len="med"/>
+                    </a:lnT>
+                    <a:lnB w="9525" cap="flat" cmpd="sng" algn="ctr">
+                      <a:solidFill>
+                        <a:srgbClr val="DDDDDD"/>
+                      </a:solidFill>
+                      <a:prstDash val="solid"/>
+                      <a:round/>
+                      <a:headEnd type="none" w="med" len="med"/>
+                      <a:tailEnd type="none" w="med" len="med"/>
+                    </a:lnB>
+                    <a:noFill/>
+                  </a:tcPr>
+                </a:tc>
+                <a:extLst>
+                  <a:ext uri="{0D108BD9-81ED-4DB2-BD59-A6C34878D82A}">
+                    <a16:rowId xmlns:a16="http://schemas.microsoft.com/office/drawing/2014/main" val="365479551"/>
+                  </a:ext>
+                </a:extLst>
+              </a:tr>
+              <a:tr h="513826">
+                <a:tc>
+                  <a:txBody>
+                    <a:bodyPr/>
+                    <a:lstStyle/>
+                    <a:p>
+                      <a:pPr algn="l">
+                        <a:buNone/>
+                      </a:pPr>
+                      <a:r>
+                        <a:rPr lang="en-GB" sz="900">
+                          <a:effectLst/>
+                        </a:rPr>
+                        <a:t>Fragmentierung</a:t>
+                      </a:r>
+                    </a:p>
+                  </a:txBody>
+                  <a:tcPr marL="40143" marR="40143" marT="40143" marB="40143" anchor="ctr">
+                    <a:lnL w="9525" cap="flat" cmpd="sng" algn="ctr">
+                      <a:solidFill>
+                        <a:srgbClr val="DDDDDD"/>
+                      </a:solidFill>
+                      <a:prstDash val="solid"/>
+                      <a:round/>
+                      <a:headEnd type="none" w="med" len="med"/>
+                      <a:tailEnd type="none" w="med" len="med"/>
+                    </a:lnL>
+                    <a:lnR w="9525" cap="flat" cmpd="sng" algn="ctr">
+                      <a:solidFill>
+                        <a:srgbClr val="DDDDDD"/>
+                      </a:solidFill>
+                      <a:prstDash val="solid"/>
+                      <a:round/>
+                      <a:headEnd type="none" w="med" len="med"/>
+                      <a:tailEnd type="none" w="med" len="med"/>
+                    </a:lnR>
+                    <a:lnT w="9525" cap="flat" cmpd="sng" algn="ctr">
+                      <a:solidFill>
+                        <a:srgbClr val="DDDDDD"/>
+                      </a:solidFill>
+                      <a:prstDash val="solid"/>
+                      <a:round/>
+                      <a:headEnd type="none" w="med" len="med"/>
+                      <a:tailEnd type="none" w="med" len="med"/>
+                    </a:lnT>
+                    <a:lnB w="9525" cap="flat" cmpd="sng" algn="ctr">
+                      <a:solidFill>
+                        <a:srgbClr val="DDDDDD"/>
+                      </a:solidFill>
+                      <a:prstDash val="solid"/>
+                      <a:round/>
+                      <a:headEnd type="none" w="med" len="med"/>
+                      <a:tailEnd type="none" w="med" len="med"/>
+                    </a:lnB>
+                    <a:noFill/>
+                  </a:tcPr>
+                </a:tc>
+                <a:tc>
+                  <a:txBody>
+                    <a:bodyPr/>
+                    <a:lstStyle/>
+                    <a:p>
+                      <a:pPr algn="l">
+                        <a:buNone/>
+                      </a:pPr>
+                      <a:r>
+                        <a:rPr lang="de-DE" sz="900" dirty="0">
+                          <a:effectLst/>
+                        </a:rPr>
+                        <a:t>Page‑Fragmentierung, Index‑Wartung nötig.</a:t>
+                      </a:r>
+                    </a:p>
+                    <a:p>
+                      <a:pPr algn="l">
+                        <a:buNone/>
+                      </a:pPr>
+                      <a:endParaRPr lang="de-DE" sz="900" dirty="0">
+                        <a:effectLst/>
+                      </a:endParaRPr>
+                    </a:p>
+                  </a:txBody>
+                  <a:tcPr marL="40143" marR="40143" marT="40143" marB="40143" anchor="ctr">
+                    <a:lnL w="9525" cap="flat" cmpd="sng" algn="ctr">
+                      <a:solidFill>
+                        <a:srgbClr val="DDDDDD"/>
+                      </a:solidFill>
+                      <a:prstDash val="solid"/>
+                      <a:round/>
+                      <a:headEnd type="none" w="med" len="med"/>
+                      <a:tailEnd type="none" w="med" len="med"/>
+                    </a:lnL>
+                    <a:lnR w="9525" cap="flat" cmpd="sng" algn="ctr">
+                      <a:solidFill>
+                        <a:srgbClr val="DDDDDD"/>
+                      </a:solidFill>
+                      <a:prstDash val="solid"/>
+                      <a:round/>
+                      <a:headEnd type="none" w="med" len="med"/>
+                      <a:tailEnd type="none" w="med" len="med"/>
+                    </a:lnR>
+                    <a:lnT w="9525" cap="flat" cmpd="sng" algn="ctr">
+                      <a:solidFill>
+                        <a:srgbClr val="DDDDDD"/>
+                      </a:solidFill>
+                      <a:prstDash val="solid"/>
+                      <a:round/>
+                      <a:headEnd type="none" w="med" len="med"/>
+                      <a:tailEnd type="none" w="med" len="med"/>
+                    </a:lnT>
+                    <a:lnB w="9525" cap="flat" cmpd="sng" algn="ctr">
+                      <a:solidFill>
+                        <a:srgbClr val="DDDDDD"/>
+                      </a:solidFill>
+                      <a:prstDash val="solid"/>
+                      <a:round/>
+                      <a:headEnd type="none" w="med" len="med"/>
+                      <a:tailEnd type="none" w="med" len="med"/>
+                    </a:lnB>
+                    <a:noFill/>
+                  </a:tcPr>
+                </a:tc>
+                <a:tc>
+                  <a:txBody>
+                    <a:bodyPr/>
+                    <a:lstStyle/>
+                    <a:p>
+                      <a:pPr algn="l">
+                        <a:buNone/>
+                      </a:pPr>
+                      <a:r>
+                        <a:rPr lang="de-DE" sz="900" dirty="0">
+                          <a:effectLst/>
+                        </a:rPr>
+                        <a:t>Keine Page‑Fragmentierung, Hintergrund‑</a:t>
+                      </a:r>
+                      <a:r>
+                        <a:rPr lang="de-DE" sz="900" dirty="0" err="1">
+                          <a:effectLst/>
+                        </a:rPr>
+                        <a:t>MERGE</a:t>
+                      </a:r>
+                      <a:r>
+                        <a:rPr lang="de-DE" sz="900" dirty="0">
+                          <a:effectLst/>
+                        </a:rPr>
+                        <a:t> kompaktiert Files.</a:t>
+                      </a:r>
+                    </a:p>
+                  </a:txBody>
+                  <a:tcPr marL="40143" marR="40143" marT="40143" marB="40143" anchor="ctr">
+                    <a:lnL w="9525" cap="flat" cmpd="sng" algn="ctr">
+                      <a:solidFill>
+                        <a:srgbClr val="DDDDDD"/>
+                      </a:solidFill>
+                      <a:prstDash val="solid"/>
+                      <a:round/>
+                      <a:headEnd type="none" w="med" len="med"/>
+                      <a:tailEnd type="none" w="med" len="med"/>
+                    </a:lnL>
+                    <a:lnR w="9525" cap="flat" cmpd="sng" algn="ctr">
+                      <a:solidFill>
+                        <a:srgbClr val="DDDDDD"/>
+                      </a:solidFill>
+                      <a:prstDash val="solid"/>
+                      <a:round/>
+                      <a:headEnd type="none" w="med" len="med"/>
+                      <a:tailEnd type="none" w="med" len="med"/>
+                    </a:lnR>
+                    <a:lnT w="9525" cap="flat" cmpd="sng" algn="ctr">
+                      <a:solidFill>
+                        <a:srgbClr val="DDDDDD"/>
+                      </a:solidFill>
+                      <a:prstDash val="solid"/>
+                      <a:round/>
+                      <a:headEnd type="none" w="med" len="med"/>
+                      <a:tailEnd type="none" w="med" len="med"/>
+                    </a:lnT>
+                    <a:lnB w="9525" cap="flat" cmpd="sng" algn="ctr">
+                      <a:solidFill>
+                        <a:srgbClr val="DDDDDD"/>
+                      </a:solidFill>
+                      <a:prstDash val="solid"/>
+                      <a:round/>
+                      <a:headEnd type="none" w="med" len="med"/>
+                      <a:tailEnd type="none" w="med" len="med"/>
+                    </a:lnB>
+                    <a:noFill/>
+                  </a:tcPr>
+                </a:tc>
+                <a:extLst>
+                  <a:ext uri="{0D108BD9-81ED-4DB2-BD59-A6C34878D82A}">
+                    <a16:rowId xmlns:a16="http://schemas.microsoft.com/office/drawing/2014/main" val="1841073391"/>
+                  </a:ext>
+                </a:extLst>
+              </a:tr>
+              <a:tr h="513826">
+                <a:tc>
+                  <a:txBody>
+                    <a:bodyPr/>
+                    <a:lstStyle/>
+                    <a:p>
+                      <a:pPr algn="l">
+                        <a:buNone/>
+                      </a:pPr>
+                      <a:r>
+                        <a:rPr lang="en-GB" sz="900" dirty="0" err="1">
+                          <a:effectLst/>
+                        </a:rPr>
+                        <a:t>DDL</a:t>
+                      </a:r>
+                      <a:r>
+                        <a:rPr lang="en-GB" sz="900" dirty="0">
+                          <a:effectLst/>
+                        </a:rPr>
+                        <a:t> (Data Definition Language)</a:t>
+                      </a:r>
+                    </a:p>
+                  </a:txBody>
+                  <a:tcPr marL="40143" marR="40143" marT="40143" marB="40143" anchor="ctr">
+                    <a:lnL w="9525" cap="flat" cmpd="sng" algn="ctr">
+                      <a:solidFill>
+                        <a:srgbClr val="DDDDDD"/>
+                      </a:solidFill>
+                      <a:prstDash val="solid"/>
+                      <a:round/>
+                      <a:headEnd type="none" w="med" len="med"/>
+                      <a:tailEnd type="none" w="med" len="med"/>
+                    </a:lnL>
+                    <a:lnR w="9525" cap="flat" cmpd="sng" algn="ctr">
+                      <a:solidFill>
+                        <a:srgbClr val="DDDDDD"/>
+                      </a:solidFill>
+                      <a:prstDash val="solid"/>
+                      <a:round/>
+                      <a:headEnd type="none" w="med" len="med"/>
+                      <a:tailEnd type="none" w="med" len="med"/>
+                    </a:lnR>
+                    <a:lnT w="9525" cap="flat" cmpd="sng" algn="ctr">
+                      <a:solidFill>
+                        <a:srgbClr val="DDDDDD"/>
+                      </a:solidFill>
+                      <a:prstDash val="solid"/>
+                      <a:round/>
+                      <a:headEnd type="none" w="med" len="med"/>
+                      <a:tailEnd type="none" w="med" len="med"/>
+                    </a:lnT>
+                    <a:lnB w="9525" cap="flat" cmpd="sng" algn="ctr">
+                      <a:solidFill>
+                        <a:srgbClr val="DDDDDD"/>
+                      </a:solidFill>
+                      <a:prstDash val="solid"/>
+                      <a:round/>
+                      <a:headEnd type="none" w="med" len="med"/>
+                      <a:tailEnd type="none" w="med" len="med"/>
+                    </a:lnB>
+                    <a:noFill/>
+                  </a:tcPr>
+                </a:tc>
+                <a:tc>
+                  <a:txBody>
+                    <a:bodyPr/>
+                    <a:lstStyle/>
+                    <a:p>
+                      <a:pPr algn="l">
+                        <a:buNone/>
+                      </a:pPr>
+                      <a:r>
+                        <a:rPr lang="en-US" sz="900" dirty="0">
+                          <a:effectLst/>
+                        </a:rPr>
+                        <a:t>Standard CREATE TABLE.</a:t>
+                      </a:r>
+                    </a:p>
+                  </a:txBody>
+                  <a:tcPr marL="40143" marR="40143" marT="40143" marB="40143" anchor="ctr">
+                    <a:lnL w="9525" cap="flat" cmpd="sng" algn="ctr">
+                      <a:solidFill>
+                        <a:srgbClr val="DDDDDD"/>
+                      </a:solidFill>
+                      <a:prstDash val="solid"/>
+                      <a:round/>
+                      <a:headEnd type="none" w="med" len="med"/>
+                      <a:tailEnd type="none" w="med" len="med"/>
+                    </a:lnL>
+                    <a:lnR w="9525" cap="flat" cmpd="sng" algn="ctr">
+                      <a:solidFill>
+                        <a:srgbClr val="DDDDDD"/>
+                      </a:solidFill>
+                      <a:prstDash val="solid"/>
+                      <a:round/>
+                      <a:headEnd type="none" w="med" len="med"/>
+                      <a:tailEnd type="none" w="med" len="med"/>
+                    </a:lnR>
+                    <a:lnT w="9525" cap="flat" cmpd="sng" algn="ctr">
+                      <a:solidFill>
+                        <a:srgbClr val="DDDDDD"/>
+                      </a:solidFill>
+                      <a:prstDash val="solid"/>
+                      <a:round/>
+                      <a:headEnd type="none" w="med" len="med"/>
+                      <a:tailEnd type="none" w="med" len="med"/>
+                    </a:lnT>
+                    <a:lnB w="9525" cap="flat" cmpd="sng" algn="ctr">
+                      <a:solidFill>
+                        <a:srgbClr val="DDDDDD"/>
+                      </a:solidFill>
+                      <a:prstDash val="solid"/>
+                      <a:round/>
+                      <a:headEnd type="none" w="med" len="med"/>
+                      <a:tailEnd type="none" w="med" len="med"/>
+                    </a:lnB>
+                    <a:noFill/>
+                  </a:tcPr>
+                </a:tc>
+                <a:tc>
+                  <a:txBody>
+                    <a:bodyPr/>
+                    <a:lstStyle/>
+                    <a:p>
+                      <a:pPr algn="l">
+                        <a:buNone/>
+                      </a:pPr>
+                      <a:r>
+                        <a:rPr lang="en-US" sz="900" dirty="0" err="1">
+                          <a:effectLst/>
+                        </a:rPr>
+                        <a:t>MEMORY_OPTIMIZED</a:t>
+                      </a:r>
+                      <a:r>
+                        <a:rPr lang="en-US" sz="900" dirty="0">
+                          <a:effectLst/>
+                        </a:rPr>
+                        <a:t> = ON, DURABILITY‑Option, </a:t>
+                      </a:r>
+                      <a:r>
+                        <a:rPr lang="en-US" sz="900" dirty="0" err="1">
+                          <a:effectLst/>
+                        </a:rPr>
+                        <a:t>spezielle</a:t>
+                      </a:r>
+                      <a:r>
+                        <a:rPr lang="en-US" sz="900" dirty="0">
+                          <a:effectLst/>
+                        </a:rPr>
+                        <a:t> Filegroup </a:t>
+                      </a:r>
+                      <a:r>
+                        <a:rPr lang="en-US" sz="900" dirty="0" err="1">
+                          <a:effectLst/>
+                        </a:rPr>
+                        <a:t>nötig</a:t>
+                      </a:r>
+                      <a:r>
+                        <a:rPr lang="en-US" sz="900" dirty="0">
+                          <a:effectLst/>
+                        </a:rPr>
+                        <a:t>.</a:t>
+                      </a:r>
+                    </a:p>
+                  </a:txBody>
+                  <a:tcPr marL="40143" marR="40143" marT="40143" marB="40143" anchor="ctr">
+                    <a:lnL w="9525" cap="flat" cmpd="sng" algn="ctr">
+                      <a:solidFill>
+                        <a:srgbClr val="DDDDDD"/>
+                      </a:solidFill>
+                      <a:prstDash val="solid"/>
+                      <a:round/>
+                      <a:headEnd type="none" w="med" len="med"/>
+                      <a:tailEnd type="none" w="med" len="med"/>
+                    </a:lnL>
+                    <a:lnR w="9525" cap="flat" cmpd="sng" algn="ctr">
+                      <a:solidFill>
+                        <a:srgbClr val="DDDDDD"/>
+                      </a:solidFill>
+                      <a:prstDash val="solid"/>
+                      <a:round/>
+                      <a:headEnd type="none" w="med" len="med"/>
+                      <a:tailEnd type="none" w="med" len="med"/>
+                    </a:lnR>
+                    <a:lnT w="9525" cap="flat" cmpd="sng" algn="ctr">
+                      <a:solidFill>
+                        <a:srgbClr val="DDDDDD"/>
+                      </a:solidFill>
+                      <a:prstDash val="solid"/>
+                      <a:round/>
+                      <a:headEnd type="none" w="med" len="med"/>
+                      <a:tailEnd type="none" w="med" len="med"/>
+                    </a:lnT>
+                    <a:lnB w="9525" cap="flat" cmpd="sng" algn="ctr">
+                      <a:solidFill>
+                        <a:srgbClr val="DDDDDD"/>
+                      </a:solidFill>
+                      <a:prstDash val="solid"/>
+                      <a:round/>
+                      <a:headEnd type="none" w="med" len="med"/>
+                      <a:tailEnd type="none" w="med" len="med"/>
+                    </a:lnB>
+                    <a:noFill/>
+                  </a:tcPr>
+                </a:tc>
+                <a:extLst>
+                  <a:ext uri="{0D108BD9-81ED-4DB2-BD59-A6C34878D82A}">
+                    <a16:rowId xmlns:a16="http://schemas.microsoft.com/office/drawing/2014/main" val="2178630465"/>
+                  </a:ext>
+                </a:extLst>
+              </a:tr>
+              <a:tr h="513826">
+                <a:tc>
+                  <a:txBody>
+                    <a:bodyPr/>
+                    <a:lstStyle/>
+                    <a:p>
+                      <a:pPr algn="l">
+                        <a:buNone/>
+                      </a:pPr>
+                      <a:r>
+                        <a:rPr lang="en-GB" sz="900" dirty="0" err="1">
+                          <a:effectLst/>
+                        </a:rPr>
+                        <a:t>Vorteil</a:t>
+                      </a:r>
+                      <a:r>
+                        <a:rPr lang="en-GB" sz="900" dirty="0">
+                          <a:effectLst/>
+                        </a:rPr>
+                        <a:t> </a:t>
+                      </a:r>
+                      <a:r>
+                        <a:rPr lang="en-GB" sz="900" dirty="0" err="1">
+                          <a:effectLst/>
+                        </a:rPr>
+                        <a:t>bei</a:t>
+                      </a:r>
+                      <a:endParaRPr lang="en-GB" sz="900" dirty="0">
+                        <a:effectLst/>
+                      </a:endParaRPr>
+                    </a:p>
+                  </a:txBody>
+                  <a:tcPr marL="40143" marR="40143" marT="40143" marB="40143" anchor="ctr">
+                    <a:lnL w="9525" cap="flat" cmpd="sng" algn="ctr">
+                      <a:solidFill>
+                        <a:srgbClr val="DDDDDD"/>
+                      </a:solidFill>
+                      <a:prstDash val="solid"/>
+                      <a:round/>
+                      <a:headEnd type="none" w="med" len="med"/>
+                      <a:tailEnd type="none" w="med" len="med"/>
+                    </a:lnL>
+                    <a:lnR w="9525" cap="flat" cmpd="sng" algn="ctr">
+                      <a:solidFill>
+                        <a:srgbClr val="DDDDDD"/>
+                      </a:solidFill>
+                      <a:prstDash val="solid"/>
+                      <a:round/>
+                      <a:headEnd type="none" w="med" len="med"/>
+                      <a:tailEnd type="none" w="med" len="med"/>
+                    </a:lnR>
+                    <a:lnT w="9525" cap="flat" cmpd="sng" algn="ctr">
+                      <a:solidFill>
+                        <a:srgbClr val="DDDDDD"/>
+                      </a:solidFill>
+                      <a:prstDash val="solid"/>
+                      <a:round/>
+                      <a:headEnd type="none" w="med" len="med"/>
+                      <a:tailEnd type="none" w="med" len="med"/>
+                    </a:lnT>
+                    <a:lnB w="9525" cap="flat" cmpd="sng" algn="ctr">
+                      <a:solidFill>
+                        <a:srgbClr val="DDDDDD"/>
+                      </a:solidFill>
+                      <a:prstDash val="solid"/>
+                      <a:round/>
+                      <a:headEnd type="none" w="med" len="med"/>
+                      <a:tailEnd type="none" w="med" len="med"/>
+                    </a:lnB>
+                    <a:noFill/>
+                  </a:tcPr>
+                </a:tc>
+                <a:tc>
+                  <a:txBody>
+                    <a:bodyPr/>
+                    <a:lstStyle/>
+                    <a:p>
+                      <a:pPr algn="l">
+                        <a:buNone/>
+                      </a:pPr>
+                      <a:r>
+                        <a:rPr lang="en-GB" sz="900" dirty="0">
+                          <a:effectLst/>
+                        </a:rPr>
+                        <a:t>Allgemeine </a:t>
+                      </a:r>
+                      <a:r>
+                        <a:rPr lang="en-GB" sz="900" dirty="0" err="1">
+                          <a:effectLst/>
+                        </a:rPr>
+                        <a:t>OLTP</a:t>
+                      </a:r>
+                      <a:r>
+                        <a:rPr lang="en-GB" sz="900" dirty="0">
+                          <a:effectLst/>
+                        </a:rPr>
+                        <a:t>/Reporting‑</a:t>
+                      </a:r>
+                      <a:r>
+                        <a:rPr lang="en-GB" sz="900" dirty="0" err="1">
+                          <a:effectLst/>
+                        </a:rPr>
+                        <a:t>Tabellen</a:t>
+                      </a:r>
+                      <a:r>
+                        <a:rPr lang="en-GB" sz="900" dirty="0">
+                          <a:effectLst/>
+                        </a:rPr>
+                        <a:t>.</a:t>
+                      </a:r>
+                    </a:p>
+                  </a:txBody>
+                  <a:tcPr marL="40143" marR="40143" marT="40143" marB="40143" anchor="ctr">
+                    <a:lnL w="9525" cap="flat" cmpd="sng" algn="ctr">
+                      <a:solidFill>
+                        <a:srgbClr val="DDDDDD"/>
+                      </a:solidFill>
+                      <a:prstDash val="solid"/>
+                      <a:round/>
+                      <a:headEnd type="none" w="med" len="med"/>
+                      <a:tailEnd type="none" w="med" len="med"/>
+                    </a:lnL>
+                    <a:lnR w="9525" cap="flat" cmpd="sng" algn="ctr">
+                      <a:solidFill>
+                        <a:srgbClr val="DDDDDD"/>
+                      </a:solidFill>
+                      <a:prstDash val="solid"/>
+                      <a:round/>
+                      <a:headEnd type="none" w="med" len="med"/>
+                      <a:tailEnd type="none" w="med" len="med"/>
+                    </a:lnR>
+                    <a:lnT w="9525" cap="flat" cmpd="sng" algn="ctr">
+                      <a:solidFill>
+                        <a:srgbClr val="DDDDDD"/>
+                      </a:solidFill>
+                      <a:prstDash val="solid"/>
+                      <a:round/>
+                      <a:headEnd type="none" w="med" len="med"/>
+                      <a:tailEnd type="none" w="med" len="med"/>
+                    </a:lnT>
+                    <a:lnB w="9525" cap="flat" cmpd="sng" algn="ctr">
+                      <a:solidFill>
+                        <a:srgbClr val="DDDDDD"/>
+                      </a:solidFill>
+                      <a:prstDash val="solid"/>
+                      <a:round/>
+                      <a:headEnd type="none" w="med" len="med"/>
+                      <a:tailEnd type="none" w="med" len="med"/>
+                    </a:lnB>
+                    <a:noFill/>
+                  </a:tcPr>
+                </a:tc>
+                <a:tc>
+                  <a:txBody>
+                    <a:bodyPr/>
+                    <a:lstStyle/>
+                    <a:p>
+                      <a:pPr algn="l">
+                        <a:buNone/>
+                      </a:pPr>
+                      <a:r>
+                        <a:rPr lang="en-US" sz="900" dirty="0">
+                          <a:effectLst/>
+                        </a:rPr>
+                        <a:t>High‑Throughput‑</a:t>
+                      </a:r>
+                      <a:r>
+                        <a:rPr lang="en-US" sz="900" dirty="0" err="1">
+                          <a:effectLst/>
+                        </a:rPr>
+                        <a:t>OLTP</a:t>
+                      </a:r>
+                      <a:r>
+                        <a:rPr lang="en-US" sz="900" dirty="0">
+                          <a:effectLst/>
+                        </a:rPr>
+                        <a:t>, Session‑State, Queues, Hot‑Lookups.</a:t>
+                      </a:r>
+                    </a:p>
+                  </a:txBody>
+                  <a:tcPr marL="40143" marR="40143" marT="40143" marB="40143" anchor="ctr">
+                    <a:lnL w="9525" cap="flat" cmpd="sng" algn="ctr">
+                      <a:solidFill>
+                        <a:srgbClr val="DDDDDD"/>
+                      </a:solidFill>
+                      <a:prstDash val="solid"/>
+                      <a:round/>
+                      <a:headEnd type="none" w="med" len="med"/>
+                      <a:tailEnd type="none" w="med" len="med"/>
+                    </a:lnL>
+                    <a:lnR w="9525" cap="flat" cmpd="sng" algn="ctr">
+                      <a:solidFill>
+                        <a:srgbClr val="DDDDDD"/>
+                      </a:solidFill>
+                      <a:prstDash val="solid"/>
+                      <a:round/>
+                      <a:headEnd type="none" w="med" len="med"/>
+                      <a:tailEnd type="none" w="med" len="med"/>
+                    </a:lnR>
+                    <a:lnT w="9525" cap="flat" cmpd="sng" algn="ctr">
+                      <a:solidFill>
+                        <a:srgbClr val="DDDDDD"/>
+                      </a:solidFill>
+                      <a:prstDash val="solid"/>
+                      <a:round/>
+                      <a:headEnd type="none" w="med" len="med"/>
+                      <a:tailEnd type="none" w="med" len="med"/>
+                    </a:lnT>
+                    <a:lnB w="9525" cap="flat" cmpd="sng" algn="ctr">
+                      <a:solidFill>
+                        <a:srgbClr val="DDDDDD"/>
+                      </a:solidFill>
+                      <a:prstDash val="solid"/>
+                      <a:round/>
+                      <a:headEnd type="none" w="med" len="med"/>
+                      <a:tailEnd type="none" w="med" len="med"/>
+                    </a:lnB>
+                    <a:noFill/>
+                  </a:tcPr>
+                </a:tc>
+                <a:extLst>
+                  <a:ext uri="{0D108BD9-81ED-4DB2-BD59-A6C34878D82A}">
+                    <a16:rowId xmlns:a16="http://schemas.microsoft.com/office/drawing/2014/main" val="4232391107"/>
+                  </a:ext>
+                </a:extLst>
+              </a:tr>
+            </a:tbl>
+          </a:graphicData>
+        </a:graphic>
+      </p:graphicFrame>
+    </p:spTree>
+    <p:extLst>
+      <p:ext uri="{BB962C8B-B14F-4D97-AF65-F5344CB8AC3E}">
+        <p14:creationId xmlns:p14="http://schemas.microsoft.com/office/powerpoint/2010/main" val="3884400882"/>
       </p:ext>
     </p:extLst>
   </p:cSld>

--- a/presentation/MemoryOptimizedTables_SQLDatenbanken.pptx
+++ b/presentation/MemoryOptimizedTables_SQLDatenbanken.pptx
@@ -4,16 +4,20 @@
   <p:sldMasterIdLst>
     <p:sldMasterId id="2147483858" r:id="rId1"/>
   </p:sldMasterIdLst>
+  <p:notesMasterIdLst>
+    <p:notesMasterId r:id="rId12"/>
+  </p:notesMasterIdLst>
   <p:sldIdLst>
     <p:sldId id="256" r:id="rId2"/>
     <p:sldId id="260" r:id="rId3"/>
     <p:sldId id="257" r:id="rId4"/>
     <p:sldId id="264" r:id="rId5"/>
-    <p:sldId id="259" r:id="rId6"/>
-    <p:sldId id="262" r:id="rId7"/>
-    <p:sldId id="261" r:id="rId8"/>
-    <p:sldId id="263" r:id="rId9"/>
-    <p:sldId id="265" r:id="rId10"/>
+    <p:sldId id="267" r:id="rId6"/>
+    <p:sldId id="259" r:id="rId7"/>
+    <p:sldId id="262" r:id="rId8"/>
+    <p:sldId id="261" r:id="rId9"/>
+    <p:sldId id="266" r:id="rId10"/>
+    <p:sldId id="265" r:id="rId11"/>
   </p:sldIdLst>
   <p:sldSz cx="12192000" cy="6858000"/>
   <p:notesSz cx="6858000" cy="9144000"/>
@@ -129,6 +133,669 @@
     </p:ext>
   </p:extLst>
 </p:presentation>
+</file>
+
+<file path=ppt/notesMasters/notesMaster1.xml><?xml version="1.0" encoding="utf-8"?>
+<p:notesMaster xmlns:a="http://schemas.openxmlformats.org/drawingml/2006/main" xmlns:r="http://schemas.openxmlformats.org/officeDocument/2006/relationships" xmlns:p="http://schemas.openxmlformats.org/presentationml/2006/main">
+  <p:cSld>
+    <p:bg>
+      <p:bgRef idx="1001">
+        <a:schemeClr val="bg1"/>
+      </p:bgRef>
+    </p:bg>
+    <p:spTree>
+      <p:nvGrpSpPr>
+        <p:cNvPr id="1" name=""/>
+        <p:cNvGrpSpPr/>
+        <p:nvPr/>
+      </p:nvGrpSpPr>
+      <p:grpSpPr>
+        <a:xfrm>
+          <a:off x="0" y="0"/>
+          <a:ext cx="0" cy="0"/>
+          <a:chOff x="0" y="0"/>
+          <a:chExt cx="0" cy="0"/>
+        </a:xfrm>
+      </p:grpSpPr>
+      <p:sp>
+        <p:nvSpPr>
+          <p:cNvPr id="2" name="Header Placeholder 1"/>
+          <p:cNvSpPr>
+            <a:spLocks noGrp="1"/>
+          </p:cNvSpPr>
+          <p:nvPr>
+            <p:ph type="hdr" sz="quarter"/>
+          </p:nvPr>
+        </p:nvSpPr>
+        <p:spPr>
+          <a:xfrm>
+            <a:off x="0" y="0"/>
+            <a:ext cx="2971800" cy="458788"/>
+          </a:xfrm>
+          <a:prstGeom prst="rect">
+            <a:avLst/>
+          </a:prstGeom>
+        </p:spPr>
+        <p:txBody>
+          <a:bodyPr vert="horz" lIns="91440" tIns="45720" rIns="91440" bIns="45720" rtlCol="0"/>
+          <a:lstStyle>
+            <a:lvl1pPr algn="l">
+              <a:defRPr sz="1200"/>
+            </a:lvl1pPr>
+          </a:lstStyle>
+          <a:p>
+            <a:endParaRPr lang="en-CH"/>
+          </a:p>
+        </p:txBody>
+      </p:sp>
+      <p:sp>
+        <p:nvSpPr>
+          <p:cNvPr id="3" name="Date Placeholder 2"/>
+          <p:cNvSpPr>
+            <a:spLocks noGrp="1"/>
+          </p:cNvSpPr>
+          <p:nvPr>
+            <p:ph type="dt" idx="1"/>
+          </p:nvPr>
+        </p:nvSpPr>
+        <p:spPr>
+          <a:xfrm>
+            <a:off x="3884613" y="0"/>
+            <a:ext cx="2971800" cy="458788"/>
+          </a:xfrm>
+          <a:prstGeom prst="rect">
+            <a:avLst/>
+          </a:prstGeom>
+        </p:spPr>
+        <p:txBody>
+          <a:bodyPr vert="horz" lIns="91440" tIns="45720" rIns="91440" bIns="45720" rtlCol="0"/>
+          <a:lstStyle>
+            <a:lvl1pPr algn="r">
+              <a:defRPr sz="1200"/>
+            </a:lvl1pPr>
+          </a:lstStyle>
+          <a:p>
+            <a:fld id="{F0B750DF-DCB7-4C86-AE8F-4F3AE2390C9E}" type="datetimeFigureOut">
+              <a:rPr lang="en-CH" smtClean="0"/>
+              <a:t>24.02.2026</a:t>
+            </a:fld>
+            <a:endParaRPr lang="en-CH"/>
+          </a:p>
+        </p:txBody>
+      </p:sp>
+      <p:sp>
+        <p:nvSpPr>
+          <p:cNvPr id="4" name="Slide Image Placeholder 3"/>
+          <p:cNvSpPr>
+            <a:spLocks noGrp="1" noRot="1" noChangeAspect="1"/>
+          </p:cNvSpPr>
+          <p:nvPr>
+            <p:ph type="sldImg" idx="2"/>
+          </p:nvPr>
+        </p:nvSpPr>
+        <p:spPr>
+          <a:xfrm>
+            <a:off x="685800" y="1143000"/>
+            <a:ext cx="5486400" cy="3086100"/>
+          </a:xfrm>
+          <a:prstGeom prst="rect">
+            <a:avLst/>
+          </a:prstGeom>
+          <a:noFill/>
+          <a:ln w="12700">
+            <a:solidFill>
+              <a:prstClr val="black"/>
+            </a:solidFill>
+          </a:ln>
+        </p:spPr>
+        <p:txBody>
+          <a:bodyPr vert="horz" lIns="91440" tIns="45720" rIns="91440" bIns="45720" rtlCol="0" anchor="ctr"/>
+          <a:lstStyle/>
+          <a:p>
+            <a:endParaRPr lang="en-CH"/>
+          </a:p>
+        </p:txBody>
+      </p:sp>
+      <p:sp>
+        <p:nvSpPr>
+          <p:cNvPr id="5" name="Notes Placeholder 4"/>
+          <p:cNvSpPr>
+            <a:spLocks noGrp="1"/>
+          </p:cNvSpPr>
+          <p:nvPr>
+            <p:ph type="body" sz="quarter" idx="3"/>
+          </p:nvPr>
+        </p:nvSpPr>
+        <p:spPr>
+          <a:xfrm>
+            <a:off x="685800" y="4400550"/>
+            <a:ext cx="5486400" cy="3600450"/>
+          </a:xfrm>
+          <a:prstGeom prst="rect">
+            <a:avLst/>
+          </a:prstGeom>
+        </p:spPr>
+        <p:txBody>
+          <a:bodyPr vert="horz" lIns="91440" tIns="45720" rIns="91440" bIns="45720" rtlCol="0"/>
+          <a:lstStyle/>
+          <a:p>
+            <a:pPr lvl="0"/>
+            <a:r>
+              <a:rPr lang="en-US"/>
+              <a:t>Click to edit Master text styles</a:t>
+            </a:r>
+          </a:p>
+          <a:p>
+            <a:pPr lvl="1"/>
+            <a:r>
+              <a:rPr lang="en-US"/>
+              <a:t>Second level</a:t>
+            </a:r>
+          </a:p>
+          <a:p>
+            <a:pPr lvl="2"/>
+            <a:r>
+              <a:rPr lang="en-US"/>
+              <a:t>Third level</a:t>
+            </a:r>
+          </a:p>
+          <a:p>
+            <a:pPr lvl="3"/>
+            <a:r>
+              <a:rPr lang="en-US"/>
+              <a:t>Fourth level</a:t>
+            </a:r>
+          </a:p>
+          <a:p>
+            <a:pPr lvl="4"/>
+            <a:r>
+              <a:rPr lang="en-US"/>
+              <a:t>Fifth level</a:t>
+            </a:r>
+            <a:endParaRPr lang="en-CH"/>
+          </a:p>
+        </p:txBody>
+      </p:sp>
+      <p:sp>
+        <p:nvSpPr>
+          <p:cNvPr id="6" name="Footer Placeholder 5"/>
+          <p:cNvSpPr>
+            <a:spLocks noGrp="1"/>
+          </p:cNvSpPr>
+          <p:nvPr>
+            <p:ph type="ftr" sz="quarter" idx="4"/>
+          </p:nvPr>
+        </p:nvSpPr>
+        <p:spPr>
+          <a:xfrm>
+            <a:off x="0" y="8685213"/>
+            <a:ext cx="2971800" cy="458787"/>
+          </a:xfrm>
+          <a:prstGeom prst="rect">
+            <a:avLst/>
+          </a:prstGeom>
+        </p:spPr>
+        <p:txBody>
+          <a:bodyPr vert="horz" lIns="91440" tIns="45720" rIns="91440" bIns="45720" rtlCol="0" anchor="b"/>
+          <a:lstStyle>
+            <a:lvl1pPr algn="l">
+              <a:defRPr sz="1200"/>
+            </a:lvl1pPr>
+          </a:lstStyle>
+          <a:p>
+            <a:endParaRPr lang="en-CH"/>
+          </a:p>
+        </p:txBody>
+      </p:sp>
+      <p:sp>
+        <p:nvSpPr>
+          <p:cNvPr id="7" name="Slide Number Placeholder 6"/>
+          <p:cNvSpPr>
+            <a:spLocks noGrp="1"/>
+          </p:cNvSpPr>
+          <p:nvPr>
+            <p:ph type="sldNum" sz="quarter" idx="5"/>
+          </p:nvPr>
+        </p:nvSpPr>
+        <p:spPr>
+          <a:xfrm>
+            <a:off x="3884613" y="8685213"/>
+            <a:ext cx="2971800" cy="458787"/>
+          </a:xfrm>
+          <a:prstGeom prst="rect">
+            <a:avLst/>
+          </a:prstGeom>
+        </p:spPr>
+        <p:txBody>
+          <a:bodyPr vert="horz" lIns="91440" tIns="45720" rIns="91440" bIns="45720" rtlCol="0" anchor="b"/>
+          <a:lstStyle>
+            <a:lvl1pPr algn="r">
+              <a:defRPr sz="1200"/>
+            </a:lvl1pPr>
+          </a:lstStyle>
+          <a:p>
+            <a:fld id="{246B84B8-74CB-4495-A8F2-04F65146C792}" type="slidenum">
+              <a:rPr lang="en-CH" smtClean="0"/>
+              <a:t>‹#›</a:t>
+            </a:fld>
+            <a:endParaRPr lang="en-CH"/>
+          </a:p>
+        </p:txBody>
+      </p:sp>
+    </p:spTree>
+    <p:extLst>
+      <p:ext uri="{BB962C8B-B14F-4D97-AF65-F5344CB8AC3E}">
+        <p14:creationId xmlns:p14="http://schemas.microsoft.com/office/powerpoint/2010/main" val="456070641"/>
+      </p:ext>
+    </p:extLst>
+  </p:cSld>
+  <p:clrMap bg1="lt1" tx1="dk1" bg2="lt2" tx2="dk2" accent1="accent1" accent2="accent2" accent3="accent3" accent4="accent4" accent5="accent5" accent6="accent6" hlink="hlink" folHlink="folHlink"/>
+  <p:notesStyle>
+    <a:lvl1pPr marL="0" algn="l" defTabSz="914400" rtl="0" eaLnBrk="1" latinLnBrk="0" hangingPunct="1">
+      <a:defRPr sz="1200" kern="1200">
+        <a:solidFill>
+          <a:schemeClr val="tx1"/>
+        </a:solidFill>
+        <a:latin typeface="+mn-lt"/>
+        <a:ea typeface="+mn-ea"/>
+        <a:cs typeface="+mn-cs"/>
+      </a:defRPr>
+    </a:lvl1pPr>
+    <a:lvl2pPr marL="457200" algn="l" defTabSz="914400" rtl="0" eaLnBrk="1" latinLnBrk="0" hangingPunct="1">
+      <a:defRPr sz="1200" kern="1200">
+        <a:solidFill>
+          <a:schemeClr val="tx1"/>
+        </a:solidFill>
+        <a:latin typeface="+mn-lt"/>
+        <a:ea typeface="+mn-ea"/>
+        <a:cs typeface="+mn-cs"/>
+      </a:defRPr>
+    </a:lvl2pPr>
+    <a:lvl3pPr marL="914400" algn="l" defTabSz="914400" rtl="0" eaLnBrk="1" latinLnBrk="0" hangingPunct="1">
+      <a:defRPr sz="1200" kern="1200">
+        <a:solidFill>
+          <a:schemeClr val="tx1"/>
+        </a:solidFill>
+        <a:latin typeface="+mn-lt"/>
+        <a:ea typeface="+mn-ea"/>
+        <a:cs typeface="+mn-cs"/>
+      </a:defRPr>
+    </a:lvl3pPr>
+    <a:lvl4pPr marL="1371600" algn="l" defTabSz="914400" rtl="0" eaLnBrk="1" latinLnBrk="0" hangingPunct="1">
+      <a:defRPr sz="1200" kern="1200">
+        <a:solidFill>
+          <a:schemeClr val="tx1"/>
+        </a:solidFill>
+        <a:latin typeface="+mn-lt"/>
+        <a:ea typeface="+mn-ea"/>
+        <a:cs typeface="+mn-cs"/>
+      </a:defRPr>
+    </a:lvl4pPr>
+    <a:lvl5pPr marL="1828800" algn="l" defTabSz="914400" rtl="0" eaLnBrk="1" latinLnBrk="0" hangingPunct="1">
+      <a:defRPr sz="1200" kern="1200">
+        <a:solidFill>
+          <a:schemeClr val="tx1"/>
+        </a:solidFill>
+        <a:latin typeface="+mn-lt"/>
+        <a:ea typeface="+mn-ea"/>
+        <a:cs typeface="+mn-cs"/>
+      </a:defRPr>
+    </a:lvl5pPr>
+    <a:lvl6pPr marL="2286000" algn="l" defTabSz="914400" rtl="0" eaLnBrk="1" latinLnBrk="0" hangingPunct="1">
+      <a:defRPr sz="1200" kern="1200">
+        <a:solidFill>
+          <a:schemeClr val="tx1"/>
+        </a:solidFill>
+        <a:latin typeface="+mn-lt"/>
+        <a:ea typeface="+mn-ea"/>
+        <a:cs typeface="+mn-cs"/>
+      </a:defRPr>
+    </a:lvl6pPr>
+    <a:lvl7pPr marL="2743200" algn="l" defTabSz="914400" rtl="0" eaLnBrk="1" latinLnBrk="0" hangingPunct="1">
+      <a:defRPr sz="1200" kern="1200">
+        <a:solidFill>
+          <a:schemeClr val="tx1"/>
+        </a:solidFill>
+        <a:latin typeface="+mn-lt"/>
+        <a:ea typeface="+mn-ea"/>
+        <a:cs typeface="+mn-cs"/>
+      </a:defRPr>
+    </a:lvl7pPr>
+    <a:lvl8pPr marL="3200400" algn="l" defTabSz="914400" rtl="0" eaLnBrk="1" latinLnBrk="0" hangingPunct="1">
+      <a:defRPr sz="1200" kern="1200">
+        <a:solidFill>
+          <a:schemeClr val="tx1"/>
+        </a:solidFill>
+        <a:latin typeface="+mn-lt"/>
+        <a:ea typeface="+mn-ea"/>
+        <a:cs typeface="+mn-cs"/>
+      </a:defRPr>
+    </a:lvl8pPr>
+    <a:lvl9pPr marL="3657600" algn="l" defTabSz="914400" rtl="0" eaLnBrk="1" latinLnBrk="0" hangingPunct="1">
+      <a:defRPr sz="1200" kern="1200">
+        <a:solidFill>
+          <a:schemeClr val="tx1"/>
+        </a:solidFill>
+        <a:latin typeface="+mn-lt"/>
+        <a:ea typeface="+mn-ea"/>
+        <a:cs typeface="+mn-cs"/>
+      </a:defRPr>
+    </a:lvl9pPr>
+  </p:notesStyle>
+</p:notesMaster>
+</file>
+
+<file path=ppt/notesSlides/notesSlide1.xml><?xml version="1.0" encoding="utf-8"?>
+<p:notes xmlns:a="http://schemas.openxmlformats.org/drawingml/2006/main" xmlns:r="http://schemas.openxmlformats.org/officeDocument/2006/relationships" xmlns:p="http://schemas.openxmlformats.org/presentationml/2006/main">
+  <p:cSld>
+    <p:spTree>
+      <p:nvGrpSpPr>
+        <p:cNvPr id="1" name=""/>
+        <p:cNvGrpSpPr/>
+        <p:nvPr/>
+      </p:nvGrpSpPr>
+      <p:grpSpPr>
+        <a:xfrm>
+          <a:off x="0" y="0"/>
+          <a:ext cx="0" cy="0"/>
+          <a:chOff x="0" y="0"/>
+          <a:chExt cx="0" cy="0"/>
+        </a:xfrm>
+      </p:grpSpPr>
+      <p:sp>
+        <p:nvSpPr>
+          <p:cNvPr id="2" name="Slide Image Placeholder 1"/>
+          <p:cNvSpPr>
+            <a:spLocks noGrp="1" noRot="1" noChangeAspect="1"/>
+          </p:cNvSpPr>
+          <p:nvPr>
+            <p:ph type="sldImg"/>
+          </p:nvPr>
+        </p:nvSpPr>
+        <p:spPr/>
+      </p:sp>
+      <p:sp>
+        <p:nvSpPr>
+          <p:cNvPr id="3" name="Notes Placeholder 2"/>
+          <p:cNvSpPr>
+            <a:spLocks noGrp="1"/>
+          </p:cNvSpPr>
+          <p:nvPr>
+            <p:ph type="body" idx="1"/>
+          </p:nvPr>
+        </p:nvSpPr>
+        <p:spPr/>
+        <p:txBody>
+          <a:bodyPr/>
+          <a:lstStyle/>
+          <a:p>
+            <a:pPr marL="0" marR="0" lvl="0" indent="0" algn="l" defTabSz="914400" rtl="0" eaLnBrk="1" fontAlgn="auto" latinLnBrk="0" hangingPunct="1">
+              <a:lnSpc>
+                <a:spcPct val="100000"/>
+              </a:lnSpc>
+              <a:spcBef>
+                <a:spcPts val="0"/>
+              </a:spcBef>
+              <a:spcAft>
+                <a:spcPts val="0"/>
+              </a:spcAft>
+              <a:buClrTx/>
+              <a:buSzTx/>
+              <a:buFontTx/>
+              <a:buNone/>
+              <a:tabLst/>
+              <a:defRPr/>
+            </a:pPr>
+            <a:r>
+              <a:rPr lang="de-CH" sz="1200" dirty="0"/>
+              <a:t>Disk basiert </a:t>
+            </a:r>
+            <a:r>
+              <a:rPr lang="en-GB" sz="1200" dirty="0" err="1"/>
+              <a:t>Volles</a:t>
+            </a:r>
+            <a:r>
+              <a:rPr lang="en-GB" sz="1200" dirty="0"/>
+              <a:t> SQL Feature Set* </a:t>
+            </a:r>
+          </a:p>
+          <a:p>
+            <a:pPr marL="0" marR="0" lvl="0" indent="0" algn="l" defTabSz="914400" rtl="0" eaLnBrk="1" fontAlgn="auto" latinLnBrk="0" hangingPunct="1">
+              <a:lnSpc>
+                <a:spcPct val="100000"/>
+              </a:lnSpc>
+              <a:spcBef>
+                <a:spcPts val="0"/>
+              </a:spcBef>
+              <a:spcAft>
+                <a:spcPts val="0"/>
+              </a:spcAft>
+              <a:buClrTx/>
+              <a:buSzTx/>
+              <a:buFontTx/>
+              <a:buNone/>
+              <a:tabLst/>
+              <a:defRPr/>
+            </a:pPr>
+            <a:r>
+              <a:rPr lang="de-CH" dirty="0"/>
+              <a:t> Klassische Indexvarianten (</a:t>
+            </a:r>
+            <a:r>
+              <a:rPr lang="de-CH" dirty="0" err="1"/>
+              <a:t>Clustered</a:t>
+            </a:r>
+            <a:r>
+              <a:rPr lang="de-CH" dirty="0"/>
+              <a:t>, </a:t>
+            </a:r>
+            <a:r>
+              <a:rPr lang="de-CH" dirty="0" err="1"/>
+              <a:t>Nonclustered</a:t>
+            </a:r>
+            <a:r>
+              <a:rPr lang="de-CH" dirty="0"/>
+              <a:t> etc. </a:t>
+            </a:r>
+            <a:r>
+              <a:rPr lang="de-CH" dirty="0" err="1"/>
+              <a:t>Colmnstore</a:t>
+            </a:r>
+            <a:r>
+              <a:rPr lang="de-CH" dirty="0"/>
+              <a:t>, T-SQL Konstrukte wie </a:t>
+            </a:r>
+            <a:r>
+              <a:rPr lang="de-CH" dirty="0" err="1"/>
+              <a:t>stored</a:t>
+            </a:r>
+            <a:r>
+              <a:rPr lang="de-CH" dirty="0"/>
+              <a:t> </a:t>
+            </a:r>
+            <a:r>
+              <a:rPr lang="de-CH" dirty="0" err="1"/>
+              <a:t>Procedures</a:t>
+            </a:r>
+            <a:r>
+              <a:rPr lang="de-CH" dirty="0"/>
+              <a:t>, Funktionen, Triggern, alle </a:t>
+            </a:r>
+            <a:r>
+              <a:rPr lang="de-CH" dirty="0" err="1"/>
+              <a:t>üblgichen</a:t>
+            </a:r>
+            <a:r>
+              <a:rPr lang="de-CH" dirty="0"/>
+              <a:t> </a:t>
+            </a:r>
+            <a:r>
+              <a:rPr lang="de-CH" dirty="0" err="1"/>
+              <a:t>constraits</a:t>
+            </a:r>
+            <a:r>
+              <a:rPr lang="de-CH" dirty="0"/>
+              <a:t> /DDL Operationen //   </a:t>
+            </a:r>
+            <a:r>
+              <a:rPr lang="de-DE" dirty="0"/>
+              <a:t>In einer Transaktion können beide Typen kombiniert werden, meist mit READ </a:t>
+            </a:r>
+            <a:r>
+              <a:rPr lang="de-DE" dirty="0" err="1"/>
+              <a:t>COMMITTED</a:t>
+            </a:r>
+            <a:r>
+              <a:rPr lang="de-DE" dirty="0"/>
+              <a:t> für Disk‑Tabellen und </a:t>
+            </a:r>
+            <a:r>
+              <a:rPr lang="de-DE" dirty="0" err="1"/>
+              <a:t>SERIALIZABLE</a:t>
+            </a:r>
+            <a:r>
+              <a:rPr lang="de-DE" dirty="0"/>
+              <a:t>‑ähnlicher Isolation für in </a:t>
+            </a:r>
+            <a:r>
+              <a:rPr lang="de-DE" dirty="0" err="1"/>
+              <a:t>memory</a:t>
+            </a:r>
+            <a:r>
+              <a:rPr lang="de-DE" dirty="0"/>
+              <a:t> Tabellen</a:t>
+            </a:r>
+            <a:endParaRPr lang="en-CH" dirty="0"/>
+          </a:p>
+          <a:p>
+            <a:endParaRPr lang="de-CH" dirty="0"/>
+          </a:p>
+          <a:p>
+            <a:endParaRPr lang="de-CH" dirty="0"/>
+          </a:p>
+          <a:p>
+            <a:endParaRPr lang="en-CH" dirty="0"/>
+          </a:p>
+        </p:txBody>
+      </p:sp>
+      <p:sp>
+        <p:nvSpPr>
+          <p:cNvPr id="4" name="Slide Number Placeholder 3"/>
+          <p:cNvSpPr>
+            <a:spLocks noGrp="1"/>
+          </p:cNvSpPr>
+          <p:nvPr>
+            <p:ph type="sldNum" sz="quarter" idx="5"/>
+          </p:nvPr>
+        </p:nvSpPr>
+        <p:spPr/>
+        <p:txBody>
+          <a:bodyPr/>
+          <a:lstStyle/>
+          <a:p>
+            <a:fld id="{246B84B8-74CB-4495-A8F2-04F65146C792}" type="slidenum">
+              <a:rPr lang="en-CH" smtClean="0"/>
+              <a:t>4</a:t>
+            </a:fld>
+            <a:endParaRPr lang="en-CH"/>
+          </a:p>
+        </p:txBody>
+      </p:sp>
+    </p:spTree>
+    <p:extLst>
+      <p:ext uri="{BB962C8B-B14F-4D97-AF65-F5344CB8AC3E}">
+        <p14:creationId xmlns:p14="http://schemas.microsoft.com/office/powerpoint/2010/main" val="308914791"/>
+      </p:ext>
+    </p:extLst>
+  </p:cSld>
+  <p:clrMapOvr>
+    <a:masterClrMapping/>
+  </p:clrMapOvr>
+</p:notes>
+</file>
+
+<file path=ppt/notesSlides/notesSlide2.xml><?xml version="1.0" encoding="utf-8"?>
+<p:notes xmlns:a="http://schemas.openxmlformats.org/drawingml/2006/main" xmlns:r="http://schemas.openxmlformats.org/officeDocument/2006/relationships" xmlns:p="http://schemas.openxmlformats.org/presentationml/2006/main">
+  <p:cSld>
+    <p:spTree>
+      <p:nvGrpSpPr>
+        <p:cNvPr id="1" name=""/>
+        <p:cNvGrpSpPr/>
+        <p:nvPr/>
+      </p:nvGrpSpPr>
+      <p:grpSpPr>
+        <a:xfrm>
+          <a:off x="0" y="0"/>
+          <a:ext cx="0" cy="0"/>
+          <a:chOff x="0" y="0"/>
+          <a:chExt cx="0" cy="0"/>
+        </a:xfrm>
+      </p:grpSpPr>
+      <p:sp>
+        <p:nvSpPr>
+          <p:cNvPr id="2" name="Slide Image Placeholder 1"/>
+          <p:cNvSpPr>
+            <a:spLocks noGrp="1" noRot="1" noChangeAspect="1"/>
+          </p:cNvSpPr>
+          <p:nvPr>
+            <p:ph type="sldImg"/>
+          </p:nvPr>
+        </p:nvSpPr>
+        <p:spPr/>
+      </p:sp>
+      <p:sp>
+        <p:nvSpPr>
+          <p:cNvPr id="3" name="Notes Placeholder 2"/>
+          <p:cNvSpPr>
+            <a:spLocks noGrp="1"/>
+          </p:cNvSpPr>
+          <p:nvPr>
+            <p:ph type="body" idx="1"/>
+          </p:nvPr>
+        </p:nvSpPr>
+        <p:spPr/>
+        <p:txBody>
+          <a:bodyPr/>
+          <a:lstStyle/>
+          <a:p>
+            <a:endParaRPr lang="en-CH" dirty="0"/>
+          </a:p>
+        </p:txBody>
+      </p:sp>
+      <p:sp>
+        <p:nvSpPr>
+          <p:cNvPr id="4" name="Slide Number Placeholder 3"/>
+          <p:cNvSpPr>
+            <a:spLocks noGrp="1"/>
+          </p:cNvSpPr>
+          <p:nvPr>
+            <p:ph type="sldNum" sz="quarter" idx="5"/>
+          </p:nvPr>
+        </p:nvSpPr>
+        <p:spPr/>
+        <p:txBody>
+          <a:bodyPr/>
+          <a:lstStyle/>
+          <a:p>
+            <a:fld id="{246B84B8-74CB-4495-A8F2-04F65146C792}" type="slidenum">
+              <a:rPr lang="en-CH" smtClean="0"/>
+              <a:t>8</a:t>
+            </a:fld>
+            <a:endParaRPr lang="en-CH"/>
+          </a:p>
+        </p:txBody>
+      </p:sp>
+    </p:spTree>
+    <p:extLst>
+      <p:ext uri="{BB962C8B-B14F-4D97-AF65-F5344CB8AC3E}">
+        <p14:creationId xmlns:p14="http://schemas.microsoft.com/office/powerpoint/2010/main" val="834705386"/>
+      </p:ext>
+    </p:extLst>
+  </p:cSld>
+  <p:clrMapOvr>
+    <a:masterClrMapping/>
+  </p:clrMapOvr>
+</p:notes>
 </file>
 
 <file path=ppt/slideLayouts/slideLayout1.xml><?xml version="1.0" encoding="utf-8"?>
@@ -22205,6 +22872,90 @@
 </p:sld>
 </file>
 
+<file path=ppt/slides/slide10.xml><?xml version="1.0" encoding="utf-8"?>
+<p:sld xmlns:a="http://schemas.openxmlformats.org/drawingml/2006/main" xmlns:r="http://schemas.openxmlformats.org/officeDocument/2006/relationships" xmlns:p="http://schemas.openxmlformats.org/presentationml/2006/main">
+  <p:cSld>
+    <p:spTree>
+      <p:nvGrpSpPr>
+        <p:cNvPr id="1" name=""/>
+        <p:cNvGrpSpPr/>
+        <p:nvPr/>
+      </p:nvGrpSpPr>
+      <p:grpSpPr>
+        <a:xfrm>
+          <a:off x="0" y="0"/>
+          <a:ext cx="0" cy="0"/>
+          <a:chOff x="0" y="0"/>
+          <a:chExt cx="0" cy="0"/>
+        </a:xfrm>
+      </p:grpSpPr>
+      <p:sp>
+        <p:nvSpPr>
+          <p:cNvPr id="2" name="Title 1">
+            <a:extLst>
+              <a:ext uri="{FF2B5EF4-FFF2-40B4-BE49-F238E27FC236}">
+                <a16:creationId xmlns:a16="http://schemas.microsoft.com/office/drawing/2014/main" id="{3E460989-2BA5-C934-C371-59ABD89AF6F2}"/>
+              </a:ext>
+            </a:extLst>
+          </p:cNvPr>
+          <p:cNvSpPr>
+            <a:spLocks noGrp="1"/>
+          </p:cNvSpPr>
+          <p:nvPr>
+            <p:ph type="title"/>
+          </p:nvPr>
+        </p:nvSpPr>
+        <p:spPr/>
+        <p:txBody>
+          <a:bodyPr/>
+          <a:lstStyle/>
+          <a:p>
+            <a:r>
+              <a:rPr lang="de-CH" dirty="0"/>
+              <a:t>Anhang</a:t>
+            </a:r>
+            <a:endParaRPr lang="en-CH" dirty="0"/>
+          </a:p>
+        </p:txBody>
+      </p:sp>
+      <p:sp>
+        <p:nvSpPr>
+          <p:cNvPr id="6" name="Content Placeholder 5">
+            <a:extLst>
+              <a:ext uri="{FF2B5EF4-FFF2-40B4-BE49-F238E27FC236}">
+                <a16:creationId xmlns:a16="http://schemas.microsoft.com/office/drawing/2014/main" id="{2A2A8983-D8EA-20E1-2432-E6FD03ED1257}"/>
+              </a:ext>
+            </a:extLst>
+          </p:cNvPr>
+          <p:cNvSpPr>
+            <a:spLocks noGrp="1"/>
+          </p:cNvSpPr>
+          <p:nvPr>
+            <p:ph sz="quarter" idx="13"/>
+          </p:nvPr>
+        </p:nvSpPr>
+        <p:spPr/>
+        <p:txBody>
+          <a:bodyPr/>
+          <a:lstStyle/>
+          <a:p>
+            <a:endParaRPr lang="en-CH"/>
+          </a:p>
+        </p:txBody>
+      </p:sp>
+    </p:spTree>
+    <p:extLst>
+      <p:ext uri="{BB962C8B-B14F-4D97-AF65-F5344CB8AC3E}">
+        <p14:creationId xmlns:p14="http://schemas.microsoft.com/office/powerpoint/2010/main" val="3884400882"/>
+      </p:ext>
+    </p:extLst>
+  </p:cSld>
+  <p:clrMapOvr>
+    <a:masterClrMapping/>
+  </p:clrMapOvr>
+</p:sld>
+</file>
+
 <file path=ppt/slides/slide2.xml><?xml version="1.0" encoding="utf-8"?>
 <p:sld xmlns:a="http://schemas.openxmlformats.org/drawingml/2006/main" xmlns:r="http://schemas.openxmlformats.org/officeDocument/2006/relationships" xmlns:p="http://schemas.openxmlformats.org/presentationml/2006/main">
   <p:cSld>
@@ -22274,7 +23025,7 @@
             <p:ph sz="quarter" idx="13"/>
             <p:extLst>
               <p:ext uri="{D42A27DB-BD31-4B8C-83A1-F6EECF244321}">
-                <p14:modId xmlns:p14="http://schemas.microsoft.com/office/powerpoint/2010/main" val="396645844"/>
+                <p14:modId xmlns:p14="http://schemas.microsoft.com/office/powerpoint/2010/main" val="1872737493"/>
               </p:ext>
               <p:ext uri="{E7BDC344-281C-4309-B0C6-D0EE65EED2A8}">
                 <p202:designPr xmlns:p202="http://schemas.microsoft.com/office/powerpoint/2020/02/main">
@@ -22368,7 +23119,7 @@
                             <a:schemeClr val="tx1"/>
                           </a:solidFill>
                         </a:rPr>
-                        <a:t>Disk vs in MOT Table</a:t>
+                        <a:t>Disk vs in Memory Optimized  Table</a:t>
                       </a:r>
                     </a:p>
                   </a:txBody>
@@ -23067,7 +23818,9 @@
         </p:nvSpPr>
         <p:spPr/>
         <p:txBody>
-          <a:bodyPr/>
+          <a:bodyPr>
+            <a:normAutofit fontScale="85000" lnSpcReduction="20000"/>
+          </a:bodyPr>
           <a:lstStyle/>
           <a:p>
             <a:pPr marL="0" indent="0">
@@ -23081,75 +23834,160 @@
               <a:rPr lang="de-DE" b="1" dirty="0" err="1"/>
               <a:t>Tables</a:t>
             </a:r>
+            <a:endParaRPr lang="de-DE" b="1" dirty="0"/>
+          </a:p>
+          <a:p>
+            <a:r>
+              <a:rPr lang="en-GB" sz="1600" dirty="0"/>
+              <a:t>Page-/</a:t>
+            </a:r>
+            <a:r>
+              <a:rPr lang="en-GB" sz="1600" dirty="0" err="1"/>
+              <a:t>Bufferpool-basiert</a:t>
+            </a:r>
+            <a:r>
+              <a:rPr lang="en-GB" sz="1600" dirty="0"/>
+              <a:t> (8-KB Pages auf Disk, Caching </a:t>
+            </a:r>
+            <a:r>
+              <a:rPr lang="en-GB" sz="1600" dirty="0" err="1"/>
+              <a:t>im</a:t>
+            </a:r>
+            <a:r>
+              <a:rPr lang="en-GB" sz="1600" dirty="0"/>
+              <a:t> Buffer Pool) </a:t>
+            </a:r>
+          </a:p>
+          <a:p>
+            <a:r>
+              <a:rPr lang="en-US" dirty="0"/>
+              <a:t>B-Tree </a:t>
+            </a:r>
+            <a:r>
+              <a:rPr lang="en-US" dirty="0" err="1"/>
+              <a:t>Rowstore</a:t>
+            </a:r>
+            <a:r>
+              <a:rPr lang="en-US" dirty="0"/>
+              <a:t> (Clustered/</a:t>
+            </a:r>
+            <a:r>
+              <a:rPr lang="en-US" dirty="0" err="1"/>
+              <a:t>Nonclustered</a:t>
+            </a:r>
+            <a:r>
+              <a:rPr lang="en-US" dirty="0"/>
+              <a:t>), optional </a:t>
+            </a:r>
+            <a:r>
+              <a:rPr lang="en-US" dirty="0" err="1"/>
+              <a:t>Columnstore</a:t>
+            </a:r>
+            <a:r>
+              <a:rPr lang="en-US" dirty="0"/>
+              <a:t> für Analytics</a:t>
+            </a:r>
+          </a:p>
+          <a:p>
+            <a:r>
+              <a:rPr lang="en-GB" dirty="0"/>
+              <a:t>Locking + Latching (Pessimistic Concurrency)</a:t>
+            </a:r>
+          </a:p>
+          <a:p>
+            <a:r>
+              <a:rPr lang="en-GB" dirty="0"/>
+              <a:t>Write-Ahead Logging: Pages/</a:t>
+            </a:r>
+            <a:r>
+              <a:rPr lang="en-GB" dirty="0" err="1"/>
+              <a:t>Änderungen</a:t>
+            </a:r>
+            <a:r>
+              <a:rPr lang="en-GB" dirty="0"/>
+              <a:t> </a:t>
+            </a:r>
+            <a:r>
+              <a:rPr lang="en-GB" dirty="0" err="1"/>
+              <a:t>werden</a:t>
+            </a:r>
+            <a:r>
+              <a:rPr lang="en-GB" dirty="0"/>
+              <a:t> </a:t>
+            </a:r>
+            <a:r>
+              <a:rPr lang="en-GB" dirty="0" err="1"/>
+              <a:t>geloggt</a:t>
+            </a:r>
+            <a:r>
+              <a:rPr lang="en-GB" dirty="0"/>
+              <a:t> → stabile Recovery</a:t>
+            </a:r>
+          </a:p>
+          <a:p>
+            <a:r>
+              <a:rPr lang="en-GB" dirty="0"/>
+              <a:t>Page </a:t>
+            </a:r>
+            <a:r>
+              <a:rPr lang="en-GB" dirty="0" err="1"/>
+              <a:t>Fragmentierung</a:t>
+            </a:r>
+            <a:r>
+              <a:rPr lang="en-GB" dirty="0"/>
+              <a:t> (Rebuild/Reorg von </a:t>
+            </a:r>
+            <a:r>
+              <a:rPr lang="en-GB" dirty="0" err="1"/>
+              <a:t>Indexen</a:t>
+            </a:r>
+            <a:r>
+              <a:rPr lang="en-GB" dirty="0"/>
+              <a:t>)</a:t>
+            </a:r>
+          </a:p>
+          <a:p>
+            <a:r>
+              <a:rPr lang="de-DE" dirty="0"/>
+              <a:t>Bevorzugt bei großen Scans/Aggregationen/Reporting &amp; sehr großen Datenmengen</a:t>
+            </a:r>
+          </a:p>
+          <a:p>
+            <a:r>
+              <a:rPr lang="de-DE" dirty="0"/>
+              <a:t>Vorteil für </a:t>
+            </a:r>
+            <a:r>
+              <a:rPr lang="de-DE" dirty="0" err="1"/>
+              <a:t>DWH</a:t>
+            </a:r>
+            <a:r>
+              <a:rPr lang="de-DE" dirty="0"/>
+              <a:t>/Reporting ist „Disk + </a:t>
+            </a:r>
+            <a:r>
+              <a:rPr lang="de-DE" dirty="0" err="1"/>
+              <a:t>Columnstore</a:t>
+            </a:r>
+            <a:r>
+              <a:rPr lang="de-DE" dirty="0"/>
+              <a:t>“  (</a:t>
+            </a:r>
+            <a:r>
+              <a:rPr lang="en-GB" dirty="0"/>
+              <a:t>Batch Mode, </a:t>
+            </a:r>
+            <a:r>
+              <a:rPr lang="en-GB" dirty="0" err="1"/>
+              <a:t>Kompression</a:t>
+            </a:r>
+            <a:r>
+              <a:rPr lang="en-GB" dirty="0"/>
+              <a:t>)</a:t>
+            </a:r>
             <a:endParaRPr lang="de-DE" dirty="0"/>
           </a:p>
           <a:p>
-            <a:r>
-              <a:rPr lang="de-DE" dirty="0"/>
-              <a:t>Datenseiten liegen auf Disk, werden in Buffer Cache geladen</a:t>
-            </a:r>
-          </a:p>
-          <a:p>
-            <a:r>
-              <a:rPr lang="de-DE" dirty="0"/>
-              <a:t>Speicherung page-basiert </a:t>
-            </a:r>
-          </a:p>
-          <a:p>
-            <a:r>
-              <a:rPr lang="de-DE" dirty="0"/>
-              <a:t>Indexseiten werden im Transaktionslog protokolliert</a:t>
-            </a:r>
-          </a:p>
-          <a:p>
-            <a:r>
-              <a:rPr lang="de-DE" dirty="0" err="1"/>
-              <a:t>Locking</a:t>
-            </a:r>
-            <a:r>
-              <a:rPr lang="de-DE" dirty="0"/>
-              <a:t>/</a:t>
-            </a:r>
-            <a:r>
-              <a:rPr lang="de-DE" dirty="0" err="1"/>
-              <a:t>Latching</a:t>
-            </a:r>
-            <a:r>
-              <a:rPr lang="de-DE" dirty="0"/>
-              <a:t>, klassische B-</a:t>
-            </a:r>
-            <a:r>
-              <a:rPr lang="de-DE" dirty="0" err="1"/>
-              <a:t>Tree</a:t>
-            </a:r>
-            <a:r>
-              <a:rPr lang="de-DE" dirty="0"/>
-              <a:t>-Indizes</a:t>
-            </a:r>
-          </a:p>
-          <a:p>
-            <a:r>
-              <a:rPr lang="de-DE" dirty="0"/>
-              <a:t>Page Fragmentierung (bedarf </a:t>
-            </a:r>
-            <a:r>
-              <a:rPr lang="de-DE" dirty="0" err="1"/>
-              <a:t>Rebuild</a:t>
-            </a:r>
-            <a:r>
-              <a:rPr lang="de-DE" dirty="0"/>
-              <a:t>/</a:t>
-            </a:r>
-            <a:r>
-              <a:rPr lang="de-DE" dirty="0" err="1"/>
-              <a:t>Reorganize</a:t>
-            </a:r>
-            <a:r>
-              <a:rPr lang="de-DE" dirty="0"/>
-              <a:t> von Indizes)</a:t>
-            </a:r>
-          </a:p>
-          <a:p>
             <a:endParaRPr lang="en-CH" dirty="0"/>
           </a:p>
         </p:txBody>
@@ -23173,7 +24011,7 @@
         <p:spPr/>
         <p:txBody>
           <a:bodyPr>
-            <a:normAutofit fontScale="92500" lnSpcReduction="10000"/>
+            <a:normAutofit fontScale="85000" lnSpcReduction="10000"/>
           </a:bodyPr>
           <a:lstStyle/>
           <a:p>
@@ -23188,16 +24026,133 @@
           </a:p>
           <a:p>
             <a:r>
+              <a:rPr lang="de-DE" dirty="0"/>
+              <a:t>Daten </a:t>
+            </a:r>
+            <a:r>
+              <a:rPr lang="de-DE" b="1" dirty="0"/>
+              <a:t>liegen im RAM</a:t>
+            </a:r>
+          </a:p>
+          <a:p>
+            <a:r>
+              <a:rPr lang="de-DE" dirty="0" err="1"/>
+              <a:t>Durability</a:t>
+            </a:r>
+            <a:r>
+              <a:rPr lang="de-DE" dirty="0"/>
+              <a:t>: </a:t>
+            </a:r>
+            <a:r>
+              <a:rPr lang="de-DE" dirty="0" err="1"/>
+              <a:t>SCHEMA_ONLY</a:t>
+            </a:r>
+            <a:r>
+              <a:rPr lang="de-DE" dirty="0"/>
+              <a:t> (nur Schema) oder </a:t>
+            </a:r>
+            <a:r>
+              <a:rPr lang="de-DE" dirty="0" err="1"/>
+              <a:t>SCHEMA_AND_DATA</a:t>
+            </a:r>
+            <a:r>
+              <a:rPr lang="de-DE" dirty="0"/>
+              <a:t> (persistiert über Checkpoint-Dateien)</a:t>
+            </a:r>
+          </a:p>
+          <a:p>
+            <a:r>
+              <a:rPr lang="en-GB" dirty="0"/>
+              <a:t>Lock-/Latch-</a:t>
+            </a:r>
+            <a:r>
               <a:rPr lang="en-GB" dirty="0" err="1"/>
-              <a:t>Daten</a:t>
+              <a:t>frei</a:t>
+            </a:r>
+            <a:r>
+              <a:rPr lang="en-GB" dirty="0"/>
+              <a:t>, </a:t>
+            </a:r>
+            <a:r>
+              <a:rPr lang="en-GB" dirty="0" err="1"/>
+              <a:t>optimistische</a:t>
+            </a:r>
+            <a:r>
+              <a:rPr lang="en-GB" dirty="0"/>
+              <a:t> multi-version Concurrency-Modell MVCC-</a:t>
+            </a:r>
+            <a:r>
+              <a:rPr lang="en-GB" dirty="0" err="1"/>
+              <a:t>Struktur</a:t>
+            </a:r>
+            <a:endParaRPr lang="en-GB" dirty="0"/>
+          </a:p>
+          <a:p>
+            <a:r>
+              <a:rPr lang="en-US" dirty="0" err="1"/>
+              <a:t>Indexe</a:t>
+            </a:r>
+            <a:r>
+              <a:rPr lang="en-US" dirty="0"/>
+              <a:t>: Hash (Point Lookups) </a:t>
+            </a:r>
+            <a:r>
+              <a:rPr lang="en-US" dirty="0" err="1"/>
+              <a:t>oder</a:t>
+            </a:r>
+            <a:r>
+              <a:rPr lang="en-US" dirty="0"/>
+              <a:t> Range (</a:t>
+            </a:r>
+            <a:r>
+              <a:rPr lang="en-US" dirty="0" err="1"/>
+              <a:t>Bw</a:t>
+            </a:r>
+            <a:r>
+              <a:rPr lang="en-US" dirty="0"/>
+              <a:t>-Tree); </a:t>
+            </a:r>
+            <a:r>
+              <a:rPr lang="en-US" dirty="0" err="1"/>
+              <a:t>keine</a:t>
+            </a:r>
+            <a:r>
+              <a:rPr lang="en-US" dirty="0"/>
+              <a:t> Page-</a:t>
+            </a:r>
+            <a:r>
+              <a:rPr lang="en-US" dirty="0" err="1"/>
+              <a:t>Fragmentierung</a:t>
             </a:r>
             <a:r>
               <a:rPr lang="en-GB" dirty="0"/>
               <a:t> </a:t>
             </a:r>
+          </a:p>
+          <a:p>
+            <a:r>
+              <a:rPr lang="en-GB" dirty="0"/>
+              <a:t>Alte </a:t>
+            </a:r>
             <a:r>
               <a:rPr lang="en-GB" dirty="0" err="1"/>
-              <a:t>dauerhaft</a:t>
+              <a:t>Zeilenversionen</a:t>
+            </a:r>
+            <a:r>
+              <a:rPr lang="en-GB" dirty="0"/>
+              <a:t> (</a:t>
+            </a:r>
+            <a:r>
+              <a:rPr lang="en-GB" dirty="0" err="1"/>
+              <a:t>durch</a:t>
+            </a:r>
+            <a:r>
+              <a:rPr lang="en-GB" dirty="0"/>
+              <a:t> MVCC) </a:t>
+            </a:r>
+            <a:r>
+              <a:rPr lang="en-GB" dirty="0" err="1"/>
+              <a:t>müssen</a:t>
             </a:r>
             <a:r>
               <a:rPr lang="en-GB" dirty="0"/>
@@ -23205,200 +24160,39 @@
             </a:r>
             <a:r>
               <a:rPr lang="en-GB" dirty="0" err="1"/>
-              <a:t>im</a:t>
+              <a:t>mit</a:t>
+            </a:r>
+            <a:r>
+              <a:rPr lang="en-GB" dirty="0"/>
+              <a:t> Merge thread </a:t>
+            </a:r>
+            <a:r>
+              <a:rPr lang="en-GB" dirty="0" err="1"/>
+              <a:t>zusammengeführt</a:t>
             </a:r>
             <a:r>
               <a:rPr lang="en-GB" dirty="0"/>
               <a:t> </a:t>
             </a:r>
             <a:r>
-              <a:rPr lang="en-GB" b="1" dirty="0"/>
-              <a:t>Memory-Optimized Filegroup</a:t>
-            </a:r>
-            <a:r>
-              <a:rPr lang="en-GB" dirty="0"/>
-              <a:t> </a:t>
-            </a:r>
-            <a:r>
-              <a:rPr lang="en-GB" dirty="0" err="1"/>
-              <a:t>im</a:t>
-            </a:r>
-            <a:r>
-              <a:rPr lang="en-GB" dirty="0"/>
-              <a:t> RAM</a:t>
-            </a:r>
-          </a:p>
-          <a:p>
-            <a:r>
-              <a:rPr lang="en-GB" dirty="0" err="1"/>
-              <a:t>Spezielle</a:t>
-            </a:r>
-            <a:r>
-              <a:rPr lang="en-GB" dirty="0"/>
-              <a:t> Filegroup </a:t>
-            </a:r>
-            <a:r>
-              <a:rPr lang="en-GB" dirty="0" err="1"/>
-              <a:t>MEMORY_OPTIMIZED_DATA</a:t>
-            </a:r>
-            <a:r>
-              <a:rPr lang="en-GB" dirty="0"/>
-              <a:t>, Durability-</a:t>
-            </a:r>
-            <a:r>
-              <a:rPr lang="en-GB" dirty="0" err="1"/>
-              <a:t>Optionen</a:t>
-            </a:r>
-            <a:endParaRPr lang="en-GB" dirty="0"/>
-          </a:p>
-          <a:p>
-            <a:r>
-              <a:rPr lang="en-GB" dirty="0" err="1"/>
-              <a:t>Persistierung</a:t>
-            </a:r>
-            <a:r>
-              <a:rPr lang="en-GB" dirty="0"/>
-              <a:t> von </a:t>
-            </a:r>
-            <a:r>
-              <a:rPr lang="en-GB" dirty="0" err="1"/>
-              <a:t>Indexdefinitionen</a:t>
-            </a:r>
-            <a:r>
-              <a:rPr lang="en-GB" dirty="0"/>
-              <a:t>. Aufbau </a:t>
-            </a:r>
-            <a:r>
-              <a:rPr lang="en-GB" dirty="0" err="1"/>
-              <a:t>Indexe</a:t>
-            </a:r>
-            <a:r>
-              <a:rPr lang="en-GB" dirty="0"/>
-              <a:t> </a:t>
-            </a:r>
-            <a:r>
-              <a:rPr lang="en-GB" dirty="0" err="1"/>
-              <a:t>bei</a:t>
-            </a:r>
-            <a:r>
-              <a:rPr lang="en-GB" dirty="0"/>
-              <a:t> </a:t>
-            </a:r>
-            <a:r>
-              <a:rPr lang="en-GB" dirty="0" err="1"/>
-              <a:t>Datenbankstart</a:t>
-            </a:r>
-            <a:r>
-              <a:rPr lang="en-GB" dirty="0"/>
-              <a:t>.</a:t>
-            </a:r>
-          </a:p>
-          <a:p>
-            <a:pPr lvl="1"/>
-            <a:r>
-              <a:rPr lang="en-GB" dirty="0" err="1"/>
-              <a:t>V.a.</a:t>
-            </a:r>
-            <a:r>
-              <a:rPr lang="en-GB" dirty="0"/>
-              <a:t> Hash </a:t>
-            </a:r>
-            <a:r>
-              <a:rPr lang="en-GB" dirty="0" err="1"/>
-              <a:t>Indizes</a:t>
-            </a:r>
-            <a:r>
-              <a:rPr lang="en-GB" dirty="0"/>
-              <a:t> / </a:t>
-            </a:r>
-            <a:r>
-              <a:rPr lang="en-GB" dirty="0" err="1"/>
-              <a:t>Bw_Tree-Basierte</a:t>
-            </a:r>
-            <a:r>
-              <a:rPr lang="en-GB" dirty="0"/>
-              <a:t> Range </a:t>
-            </a:r>
-            <a:r>
-              <a:rPr lang="en-GB" dirty="0" err="1"/>
-              <a:t>Indizes</a:t>
-            </a:r>
-            <a:r>
-              <a:rPr lang="en-GB" dirty="0"/>
-              <a:t> </a:t>
-            </a:r>
-          </a:p>
-          <a:p>
-            <a:r>
-              <a:rPr lang="en-GB" dirty="0"/>
-              <a:t>Lock-</a:t>
-            </a:r>
-            <a:r>
-              <a:rPr lang="en-GB" dirty="0" err="1"/>
-              <a:t>freie</a:t>
-            </a:r>
-            <a:r>
-              <a:rPr lang="en-GB" dirty="0"/>
-              <a:t>, </a:t>
-            </a:r>
-            <a:r>
-              <a:rPr lang="en-GB" dirty="0" err="1"/>
-              <a:t>optimistische</a:t>
-            </a:r>
-            <a:r>
-              <a:rPr lang="en-GB" dirty="0"/>
-              <a:t> multi-version Concurrency-Modell MVCC-</a:t>
-            </a:r>
-            <a:r>
-              <a:rPr lang="en-GB" dirty="0" err="1"/>
-              <a:t>Struktur</a:t>
-            </a:r>
-            <a:endParaRPr lang="en-GB" dirty="0"/>
-          </a:p>
-          <a:p>
-            <a:r>
-              <a:rPr lang="en-GB" dirty="0"/>
-              <a:t>Alte </a:t>
-            </a:r>
-            <a:r>
-              <a:rPr lang="en-GB" dirty="0" err="1"/>
-              <a:t>Zeilenversionen</a:t>
-            </a:r>
-            <a:r>
-              <a:rPr lang="en-GB" dirty="0"/>
-              <a:t> </a:t>
-            </a:r>
-            <a:r>
-              <a:rPr lang="en-GB" dirty="0" err="1"/>
-              <a:t>müssen</a:t>
-            </a:r>
-            <a:r>
-              <a:rPr lang="en-GB" dirty="0"/>
-              <a:t> </a:t>
-            </a:r>
-            <a:r>
-              <a:rPr lang="en-GB" dirty="0" err="1"/>
-              <a:t>mit</a:t>
-            </a:r>
-            <a:r>
-              <a:rPr lang="en-GB" dirty="0"/>
-              <a:t> Merge thread </a:t>
-            </a:r>
-            <a:r>
-              <a:rPr lang="en-GB" dirty="0" err="1"/>
-              <a:t>zusammengeführt</a:t>
-            </a:r>
-            <a:r>
-              <a:rPr lang="en-GB" dirty="0"/>
-              <a:t> </a:t>
-            </a:r>
-            <a:r>
               <a:rPr lang="en-GB" dirty="0" err="1"/>
               <a:t>werden</a:t>
             </a:r>
             <a:endParaRPr lang="en-GB" dirty="0"/>
           </a:p>
           <a:p>
+            <a:r>
+              <a:rPr lang="de-DE" dirty="0"/>
+              <a:t>Ideal für hohe OLTP-</a:t>
+            </a:r>
+            <a:r>
+              <a:rPr lang="de-DE" dirty="0" err="1"/>
+              <a:t>Concurrency</a:t>
+            </a:r>
+            <a:r>
+              <a:rPr lang="de-DE" dirty="0"/>
+              <a:t> &amp; kurze Transaktionen</a:t>
+            </a:r>
             <a:endParaRPr lang="en-GB" dirty="0"/>
           </a:p>
           <a:p>
@@ -23406,1003 +24200,24 @@
           </a:p>
         </p:txBody>
       </p:sp>
-    </p:spTree>
-    <p:extLst>
-      <p:ext uri="{BB962C8B-B14F-4D97-AF65-F5344CB8AC3E}">
-        <p14:creationId xmlns:p14="http://schemas.microsoft.com/office/powerpoint/2010/main" val="3158852068"/>
-      </p:ext>
-    </p:extLst>
-  </p:cSld>
-  <p:clrMapOvr>
-    <a:masterClrMapping/>
-  </p:clrMapOvr>
-</p:sld>
-</file>
-
-<file path=ppt/slides/slide5.xml><?xml version="1.0" encoding="utf-8"?>
-<p:sld xmlns:a="http://schemas.openxmlformats.org/drawingml/2006/main" xmlns:r="http://schemas.openxmlformats.org/officeDocument/2006/relationships" xmlns:p="http://schemas.openxmlformats.org/presentationml/2006/main">
-  <p:cSld>
-    <p:spTree>
-      <p:nvGrpSpPr>
-        <p:cNvPr id="1" name="">
-          <a:extLst>
-            <a:ext uri="{FF2B5EF4-FFF2-40B4-BE49-F238E27FC236}">
-              <a16:creationId xmlns:a16="http://schemas.microsoft.com/office/drawing/2014/main" id="{E1C3E433-A8DF-825B-9DB9-C664B8AA6D67}"/>
-            </a:ext>
-          </a:extLst>
-        </p:cNvPr>
-        <p:cNvGrpSpPr/>
-        <p:nvPr/>
-      </p:nvGrpSpPr>
-      <p:grpSpPr>
-        <a:xfrm>
-          <a:off x="0" y="0"/>
-          <a:ext cx="0" cy="0"/>
-          <a:chOff x="0" y="0"/>
-          <a:chExt cx="0" cy="0"/>
-        </a:xfrm>
-      </p:grpSpPr>
-      <p:sp>
-        <p:nvSpPr>
-          <p:cNvPr id="2" name="Title 1">
-            <a:extLst>
-              <a:ext uri="{FF2B5EF4-FFF2-40B4-BE49-F238E27FC236}">
-                <a16:creationId xmlns:a16="http://schemas.microsoft.com/office/drawing/2014/main" id="{5E4BFFC2-A881-D7FD-A72F-A2BEFA44C006}"/>
-              </a:ext>
-            </a:extLst>
-          </p:cNvPr>
-          <p:cNvSpPr>
-            <a:spLocks noGrp="1"/>
-          </p:cNvSpPr>
-          <p:nvPr>
-            <p:ph type="title"/>
-          </p:nvPr>
-        </p:nvSpPr>
-        <p:spPr/>
-        <p:txBody>
-          <a:bodyPr/>
-          <a:lstStyle/>
-          <a:p>
-            <a:r>
-              <a:rPr lang="de-CH" dirty="0" err="1"/>
-              <a:t>Kurzdemo</a:t>
-            </a:r>
-            <a:r>
-              <a:rPr lang="de-CH" dirty="0"/>
-              <a:t> Performance Vergleich </a:t>
-            </a:r>
-            <a:r>
-              <a:rPr lang="de-CH" dirty="0" err="1"/>
-              <a:t>SSMS</a:t>
-            </a:r>
-            <a:r>
-              <a:rPr lang="de-CH" dirty="0"/>
-              <a:t> 2022 </a:t>
-            </a:r>
-            <a:br>
-              <a:rPr lang="en-US" dirty="0">
-                <a:solidFill>
-                  <a:schemeClr val="tx1"/>
-                </a:solidFill>
-              </a:rPr>
-            </a:br>
-            <a:endParaRPr lang="en-CH" dirty="0"/>
-          </a:p>
-        </p:txBody>
-      </p:sp>
-      <p:sp>
-        <p:nvSpPr>
-          <p:cNvPr id="4" name="Text Placeholder 3">
-            <a:extLst>
-              <a:ext uri="{FF2B5EF4-FFF2-40B4-BE49-F238E27FC236}">
-                <a16:creationId xmlns:a16="http://schemas.microsoft.com/office/drawing/2014/main" id="{DF2EE5AC-CE26-E9B8-3647-F8A110D8DFD2}"/>
-              </a:ext>
-            </a:extLst>
-          </p:cNvPr>
-          <p:cNvSpPr>
-            <a:spLocks noGrp="1"/>
-          </p:cNvSpPr>
-          <p:nvPr>
-            <p:ph type="body" sz="quarter" idx="13"/>
-          </p:nvPr>
-        </p:nvSpPr>
-        <p:spPr/>
-        <p:txBody>
-          <a:bodyPr/>
-          <a:lstStyle/>
-          <a:p>
-            <a:pPr marL="0" indent="0">
-              <a:buNone/>
-            </a:pPr>
-            <a:r>
-              <a:rPr lang="de-CH" dirty="0"/>
-              <a:t>Set </a:t>
-            </a:r>
-            <a:r>
-              <a:rPr lang="de-CH" dirty="0" err="1"/>
-              <a:t>up</a:t>
-            </a:r>
-            <a:r>
-              <a:rPr lang="de-CH" dirty="0"/>
-              <a:t>:</a:t>
-            </a:r>
-          </a:p>
-          <a:p>
-            <a:pPr>
-              <a:buFontTx/>
-              <a:buChar char="-"/>
-            </a:pPr>
-            <a:r>
-              <a:rPr lang="de-CH" dirty="0"/>
-              <a:t>Windows SQL Server 2025 </a:t>
-            </a:r>
-            <a:r>
-              <a:rPr lang="de-CH" dirty="0">
-                <a:hlinkClick r:id="rId2"/>
-              </a:rPr>
-              <a:t>Developer</a:t>
-            </a:r>
-            <a:endParaRPr lang="de-CH" dirty="0"/>
-          </a:p>
-          <a:p>
-            <a:pPr>
-              <a:buFontTx/>
-              <a:buChar char="-"/>
-            </a:pPr>
-            <a:r>
-              <a:rPr lang="de-CH" dirty="0" err="1"/>
-              <a:t>SSMS</a:t>
-            </a:r>
-            <a:r>
-              <a:rPr lang="de-CH" dirty="0"/>
-              <a:t> 2022: </a:t>
-            </a:r>
-            <a:r>
-              <a:rPr lang="de-CH" dirty="0">
-                <a:hlinkClick r:id="rId3"/>
-              </a:rPr>
-              <a:t>Download</a:t>
-            </a:r>
-            <a:endParaRPr lang="de-CH" dirty="0"/>
-          </a:p>
-          <a:p>
-            <a:pPr>
-              <a:buFontTx/>
-              <a:buChar char="-"/>
-            </a:pPr>
-            <a:r>
-              <a:rPr lang="de-CH" dirty="0"/>
-              <a:t>Datenset: </a:t>
-            </a:r>
-            <a:r>
-              <a:rPr lang="de-CH" dirty="0">
-                <a:hlinkClick r:id="rId4"/>
-              </a:rPr>
-              <a:t>Wide World </a:t>
-            </a:r>
-            <a:r>
-              <a:rPr lang="de-CH" dirty="0" err="1">
-                <a:hlinkClick r:id="rId4"/>
-              </a:rPr>
-              <a:t>Importers</a:t>
-            </a:r>
-            <a:endParaRPr lang="en-CH" dirty="0"/>
-          </a:p>
-        </p:txBody>
-      </p:sp>
-      <p:pic>
-        <p:nvPicPr>
-          <p:cNvPr id="9" name="Picture 8">
-            <a:extLst>
-              <a:ext uri="{FF2B5EF4-FFF2-40B4-BE49-F238E27FC236}">
-                <a16:creationId xmlns:a16="http://schemas.microsoft.com/office/drawing/2014/main" id="{B78E56D0-45AD-947F-1350-177E4D9211D5}"/>
-              </a:ext>
-            </a:extLst>
-          </p:cNvPr>
-          <p:cNvPicPr>
-            <a:picLocks noChangeAspect="1"/>
-          </p:cNvPicPr>
+      <p:sp>
+        <p:nvSpPr>
+          <p:cNvPr id="8" name="Content Placeholder 2">
+            <a:extLst>
+              <a:ext uri="{FF2B5EF4-FFF2-40B4-BE49-F238E27FC236}">
+                <a16:creationId xmlns:a16="http://schemas.microsoft.com/office/drawing/2014/main" id="{21373E59-A7C9-BFB4-08BB-DC39FC4EDCD5}"/>
+              </a:ext>
+            </a:extLst>
+          </p:cNvPr>
+          <p:cNvSpPr txBox="1">
+            <a:spLocks/>
+          </p:cNvSpPr>
           <p:nvPr/>
-        </p:nvPicPr>
-        <p:blipFill>
-          <a:blip r:embed="rId5"/>
-          <a:stretch>
-            <a:fillRect/>
-          </a:stretch>
-        </p:blipFill>
+        </p:nvSpPr>
         <p:spPr>
           <a:xfrm>
-            <a:off x="6215948" y="1978913"/>
-            <a:ext cx="5351212" cy="4214944"/>
-          </a:xfrm>
-          <a:prstGeom prst="rect">
-            <a:avLst/>
-          </a:prstGeom>
-        </p:spPr>
-      </p:pic>
-      <p:sp>
-        <p:nvSpPr>
-          <p:cNvPr id="10" name="TextBox 9">
-            <a:extLst>
-              <a:ext uri="{FF2B5EF4-FFF2-40B4-BE49-F238E27FC236}">
-                <a16:creationId xmlns:a16="http://schemas.microsoft.com/office/drawing/2014/main" id="{BE6AE895-3373-E405-3901-951DE9F3D2A3}"/>
-              </a:ext>
-            </a:extLst>
-          </p:cNvPr>
-          <p:cNvSpPr txBox="1"/>
-          <p:nvPr/>
-        </p:nvSpPr>
-        <p:spPr>
-          <a:xfrm>
-            <a:off x="529389" y="6458552"/>
-            <a:ext cx="6196151" cy="276999"/>
-          </a:xfrm>
-          <a:prstGeom prst="rect">
-            <a:avLst/>
-          </a:prstGeom>
-          <a:noFill/>
-        </p:spPr>
-        <p:txBody>
-          <a:bodyPr wrap="square" rtlCol="0">
-            <a:spAutoFit/>
-          </a:bodyPr>
-          <a:lstStyle/>
-          <a:p>
-            <a:r>
-              <a:rPr lang="en-CH" sz="1200" dirty="0"/>
-              <a:t>https://github.com/vjaeggi/MemoryOptimizedTables_SQL</a:t>
-            </a:r>
-          </a:p>
-        </p:txBody>
-      </p:sp>
-    </p:spTree>
-    <p:extLst>
-      <p:ext uri="{BB962C8B-B14F-4D97-AF65-F5344CB8AC3E}">
-        <p14:creationId xmlns:p14="http://schemas.microsoft.com/office/powerpoint/2010/main" val="3981012660"/>
-      </p:ext>
-    </p:extLst>
-  </p:cSld>
-  <p:clrMapOvr>
-    <a:masterClrMapping/>
-  </p:clrMapOvr>
-</p:sld>
-</file>
-
-<file path=ppt/slides/slide6.xml><?xml version="1.0" encoding="utf-8"?>
-<p:sld xmlns:a="http://schemas.openxmlformats.org/drawingml/2006/main" xmlns:r="http://schemas.openxmlformats.org/officeDocument/2006/relationships" xmlns:p="http://schemas.openxmlformats.org/presentationml/2006/main">
-  <p:cSld>
-    <p:spTree>
-      <p:nvGrpSpPr>
-        <p:cNvPr id="1" name="">
-          <a:extLst>
-            <a:ext uri="{FF2B5EF4-FFF2-40B4-BE49-F238E27FC236}">
-              <a16:creationId xmlns:a16="http://schemas.microsoft.com/office/drawing/2014/main" id="{EDAAB87D-042C-9599-0E1E-901F1CB920CE}"/>
-            </a:ext>
-          </a:extLst>
-        </p:cNvPr>
-        <p:cNvGrpSpPr/>
-        <p:nvPr/>
-      </p:nvGrpSpPr>
-      <p:grpSpPr>
-        <a:xfrm>
-          <a:off x="0" y="0"/>
-          <a:ext cx="0" cy="0"/>
-          <a:chOff x="0" y="0"/>
-          <a:chExt cx="0" cy="0"/>
-        </a:xfrm>
-      </p:grpSpPr>
-      <p:sp>
-        <p:nvSpPr>
-          <p:cNvPr id="2" name="Title 1">
-            <a:extLst>
-              <a:ext uri="{FF2B5EF4-FFF2-40B4-BE49-F238E27FC236}">
-                <a16:creationId xmlns:a16="http://schemas.microsoft.com/office/drawing/2014/main" id="{968F3BE6-32B3-569B-9511-F95682EEE589}"/>
-              </a:ext>
-            </a:extLst>
-          </p:cNvPr>
-          <p:cNvSpPr>
-            <a:spLocks noGrp="1"/>
-          </p:cNvSpPr>
-          <p:nvPr>
-            <p:ph type="title"/>
-          </p:nvPr>
-        </p:nvSpPr>
-        <p:spPr/>
-        <p:txBody>
-          <a:bodyPr/>
-          <a:lstStyle/>
-          <a:p>
-            <a:r>
-              <a:rPr lang="de-CH" dirty="0"/>
-              <a:t>Fazit Performance Vergleich (Laufzeiten)</a:t>
-            </a:r>
-            <a:br>
-              <a:rPr lang="en-US" dirty="0">
-                <a:solidFill>
-                  <a:schemeClr val="tx1"/>
-                </a:solidFill>
-              </a:rPr>
-            </a:br>
-            <a:endParaRPr lang="en-CH" dirty="0"/>
-          </a:p>
-        </p:txBody>
-      </p:sp>
-      <p:sp>
-        <p:nvSpPr>
-          <p:cNvPr id="4" name="Text Placeholder 3">
-            <a:extLst>
-              <a:ext uri="{FF2B5EF4-FFF2-40B4-BE49-F238E27FC236}">
-                <a16:creationId xmlns:a16="http://schemas.microsoft.com/office/drawing/2014/main" id="{C0AE6187-F2C6-1DE1-025F-A948A7E746F6}"/>
-              </a:ext>
-            </a:extLst>
-          </p:cNvPr>
-          <p:cNvSpPr>
-            <a:spLocks noGrp="1"/>
-          </p:cNvSpPr>
-          <p:nvPr>
-            <p:ph type="body" sz="quarter" idx="13"/>
-          </p:nvPr>
-        </p:nvSpPr>
-        <p:spPr/>
-        <p:txBody>
-          <a:bodyPr/>
-          <a:lstStyle/>
-          <a:p>
-            <a:pPr marL="0" indent="0">
-              <a:buNone/>
-            </a:pPr>
-            <a:endParaRPr lang="en-CH" dirty="0"/>
-          </a:p>
-        </p:txBody>
-      </p:sp>
-      <p:pic>
-        <p:nvPicPr>
-          <p:cNvPr id="9" name="Picture 8">
-            <a:extLst>
-              <a:ext uri="{FF2B5EF4-FFF2-40B4-BE49-F238E27FC236}">
-                <a16:creationId xmlns:a16="http://schemas.microsoft.com/office/drawing/2014/main" id="{48D31613-891E-B444-41DB-99A550AFCD21}"/>
-              </a:ext>
-            </a:extLst>
-          </p:cNvPr>
-          <p:cNvPicPr>
-            <a:picLocks noChangeAspect="1"/>
-          </p:cNvPicPr>
-          <p:nvPr/>
-        </p:nvPicPr>
-        <p:blipFill>
-          <a:blip r:embed="rId2"/>
-          <a:stretch>
-            <a:fillRect/>
-          </a:stretch>
-        </p:blipFill>
-        <p:spPr>
-          <a:xfrm>
-            <a:off x="6215948" y="1978913"/>
-            <a:ext cx="5351212" cy="4214944"/>
-          </a:xfrm>
-          <a:prstGeom prst="rect">
-            <a:avLst/>
-          </a:prstGeom>
-        </p:spPr>
-      </p:pic>
-      <p:sp>
-        <p:nvSpPr>
-          <p:cNvPr id="10" name="TextBox 9">
-            <a:extLst>
-              <a:ext uri="{FF2B5EF4-FFF2-40B4-BE49-F238E27FC236}">
-                <a16:creationId xmlns:a16="http://schemas.microsoft.com/office/drawing/2014/main" id="{5886748E-2E7F-DD4F-824A-BD1658CD26EF}"/>
-              </a:ext>
-            </a:extLst>
-          </p:cNvPr>
-          <p:cNvSpPr txBox="1"/>
-          <p:nvPr/>
-        </p:nvSpPr>
-        <p:spPr>
-          <a:xfrm>
-            <a:off x="529389" y="6458552"/>
-            <a:ext cx="6196151" cy="276999"/>
-          </a:xfrm>
-          <a:prstGeom prst="rect">
-            <a:avLst/>
-          </a:prstGeom>
-          <a:noFill/>
-        </p:spPr>
-        <p:txBody>
-          <a:bodyPr wrap="square" rtlCol="0">
-            <a:spAutoFit/>
-          </a:bodyPr>
-          <a:lstStyle/>
-          <a:p>
-            <a:r>
-              <a:rPr lang="en-CH" sz="1200" dirty="0"/>
-              <a:t>https://github.com/vjaeggi/MemoryOptimizedTables_SQL</a:t>
-            </a:r>
-          </a:p>
-        </p:txBody>
-      </p:sp>
-    </p:spTree>
-    <p:extLst>
-      <p:ext uri="{BB962C8B-B14F-4D97-AF65-F5344CB8AC3E}">
-        <p14:creationId xmlns:p14="http://schemas.microsoft.com/office/powerpoint/2010/main" val="999890976"/>
-      </p:ext>
-    </p:extLst>
-  </p:cSld>
-  <p:clrMapOvr>
-    <a:masterClrMapping/>
-  </p:clrMapOvr>
-</p:sld>
-</file>
-
-<file path=ppt/slides/slide7.xml><?xml version="1.0" encoding="utf-8"?>
-<p:sld xmlns:a="http://schemas.openxmlformats.org/drawingml/2006/main" xmlns:r="http://schemas.openxmlformats.org/officeDocument/2006/relationships" xmlns:p="http://schemas.openxmlformats.org/presentationml/2006/main">
-  <p:cSld>
-    <p:spTree>
-      <p:nvGrpSpPr>
-        <p:cNvPr id="1" name="">
-          <a:extLst>
-            <a:ext uri="{FF2B5EF4-FFF2-40B4-BE49-F238E27FC236}">
-              <a16:creationId xmlns:a16="http://schemas.microsoft.com/office/drawing/2014/main" id="{342C703F-356B-6790-BD49-86B5C9625829}"/>
-            </a:ext>
-          </a:extLst>
-        </p:cNvPr>
-        <p:cNvGrpSpPr/>
-        <p:nvPr/>
-      </p:nvGrpSpPr>
-      <p:grpSpPr>
-        <a:xfrm>
-          <a:off x="0" y="0"/>
-          <a:ext cx="0" cy="0"/>
-          <a:chOff x="0" y="0"/>
-          <a:chExt cx="0" cy="0"/>
-        </a:xfrm>
-      </p:grpSpPr>
-      <p:sp>
-        <p:nvSpPr>
-          <p:cNvPr id="4" name="Text Placeholder 3">
-            <a:extLst>
-              <a:ext uri="{FF2B5EF4-FFF2-40B4-BE49-F238E27FC236}">
-                <a16:creationId xmlns:a16="http://schemas.microsoft.com/office/drawing/2014/main" id="{813EDAB0-92BA-B0E8-8E92-256C22AAF7EE}"/>
-              </a:ext>
-            </a:extLst>
-          </p:cNvPr>
-          <p:cNvSpPr>
-            <a:spLocks noGrp="1"/>
-          </p:cNvSpPr>
-          <p:nvPr>
-            <p:ph type="body" sz="quarter" idx="13"/>
-          </p:nvPr>
-        </p:nvSpPr>
-        <p:spPr/>
-        <p:txBody>
-          <a:bodyPr>
-            <a:normAutofit fontScale="77500" lnSpcReduction="20000"/>
-          </a:bodyPr>
-          <a:lstStyle/>
-          <a:p>
-            <a:pPr marL="0" indent="0">
-              <a:buNone/>
-            </a:pPr>
-            <a:r>
-              <a:rPr lang="de-CH" dirty="0"/>
-              <a:t>Vorteile «in Memory» Table</a:t>
-            </a:r>
-          </a:p>
-          <a:p>
-            <a:pPr marL="0" indent="0">
-              <a:buNone/>
-            </a:pPr>
-            <a:r>
-              <a:rPr lang="de-CH" dirty="0" err="1"/>
-              <a:t>Optimization</a:t>
-            </a:r>
-            <a:r>
-              <a:rPr lang="de-CH" dirty="0"/>
-              <a:t> </a:t>
-            </a:r>
-            <a:r>
-              <a:rPr lang="de-CH" dirty="0" err="1"/>
-              <a:t>for</a:t>
-            </a:r>
-            <a:r>
-              <a:rPr lang="de-CH" dirty="0"/>
-              <a:t> CPU Cache Efficiency</a:t>
-            </a:r>
-          </a:p>
-          <a:p>
-            <a:pPr marL="0" indent="0">
-              <a:buNone/>
-            </a:pPr>
-            <a:r>
-              <a:rPr lang="de-CH" dirty="0"/>
-              <a:t>Lock Free </a:t>
-            </a:r>
-            <a:r>
-              <a:rPr lang="de-CH" dirty="0" err="1"/>
-              <a:t>Algorithms</a:t>
-            </a:r>
-            <a:r>
-              <a:rPr lang="de-CH" dirty="0"/>
-              <a:t> (possible </a:t>
-            </a:r>
-            <a:r>
-              <a:rPr lang="de-CH" dirty="0" err="1"/>
-              <a:t>true</a:t>
-            </a:r>
-            <a:r>
-              <a:rPr lang="de-CH" dirty="0"/>
-              <a:t> </a:t>
-            </a:r>
-            <a:r>
-              <a:rPr lang="de-CH" dirty="0" err="1"/>
-              <a:t>parallelism</a:t>
-            </a:r>
-            <a:r>
-              <a:rPr lang="de-CH" dirty="0"/>
-              <a:t>)</a:t>
-            </a:r>
-          </a:p>
-          <a:p>
-            <a:pPr marL="0" indent="0">
-              <a:buNone/>
-            </a:pPr>
-            <a:r>
-              <a:rPr lang="de-CH" dirty="0" err="1"/>
-              <a:t>Reduced</a:t>
-            </a:r>
-            <a:r>
-              <a:rPr lang="de-CH" dirty="0"/>
-              <a:t> </a:t>
-            </a:r>
-            <a:r>
-              <a:rPr lang="de-CH" dirty="0" err="1"/>
-              <a:t>serialization</a:t>
-            </a:r>
-            <a:r>
-              <a:rPr lang="de-CH" dirty="0"/>
-              <a:t> </a:t>
-            </a:r>
-            <a:r>
-              <a:rPr lang="de-CH" dirty="0" err="1"/>
-              <a:t>overhead</a:t>
-            </a:r>
-            <a:r>
-              <a:rPr lang="de-CH" dirty="0"/>
-              <a:t> (</a:t>
-            </a:r>
-            <a:r>
-              <a:rPr lang="de-CH" dirty="0" err="1"/>
-              <a:t>no</a:t>
-            </a:r>
-            <a:r>
-              <a:rPr lang="de-CH" dirty="0"/>
-              <a:t> </a:t>
-            </a:r>
-            <a:r>
-              <a:rPr lang="de-CH" dirty="0" err="1"/>
-              <a:t>need</a:t>
-            </a:r>
-            <a:r>
-              <a:rPr lang="de-CH" dirty="0"/>
-              <a:t> </a:t>
-            </a:r>
-            <a:r>
-              <a:rPr lang="de-CH" dirty="0" err="1"/>
-              <a:t>for</a:t>
-            </a:r>
-            <a:r>
-              <a:rPr lang="de-CH" dirty="0"/>
-              <a:t> </a:t>
-            </a:r>
-            <a:r>
-              <a:rPr lang="de-CH" dirty="0" err="1"/>
-              <a:t>serialize</a:t>
-            </a:r>
-            <a:r>
-              <a:rPr lang="de-CH" dirty="0"/>
-              <a:t> </a:t>
-            </a:r>
-            <a:r>
-              <a:rPr lang="de-CH" dirty="0" err="1"/>
-              <a:t>between</a:t>
-            </a:r>
-            <a:r>
-              <a:rPr lang="de-CH" dirty="0"/>
-              <a:t> </a:t>
-            </a:r>
-            <a:r>
-              <a:rPr lang="de-CH" dirty="0" err="1"/>
-              <a:t>disk</a:t>
-            </a:r>
-            <a:r>
-              <a:rPr lang="de-CH" dirty="0"/>
-              <a:t> and </a:t>
-            </a:r>
-            <a:r>
-              <a:rPr lang="de-CH" dirty="0" err="1"/>
-              <a:t>memory</a:t>
-            </a:r>
-            <a:r>
-              <a:rPr lang="de-CH" dirty="0"/>
-              <a:t> </a:t>
-            </a:r>
-            <a:r>
-              <a:rPr lang="de-CH" dirty="0" err="1"/>
-              <a:t>saving</a:t>
-            </a:r>
-            <a:r>
-              <a:rPr lang="de-CH" dirty="0"/>
-              <a:t> </a:t>
-            </a:r>
-            <a:r>
-              <a:rPr lang="de-CH" dirty="0" err="1"/>
-              <a:t>cpu</a:t>
-            </a:r>
-            <a:r>
-              <a:rPr lang="de-CH" dirty="0"/>
-              <a:t> </a:t>
-            </a:r>
-            <a:r>
-              <a:rPr lang="de-CH" dirty="0" err="1"/>
-              <a:t>cycles</a:t>
-            </a:r>
-            <a:r>
-              <a:rPr lang="de-CH" dirty="0"/>
-              <a:t>)</a:t>
-            </a:r>
-          </a:p>
-          <a:p>
-            <a:pPr marL="0" indent="0">
-              <a:buNone/>
-            </a:pPr>
-            <a:r>
-              <a:rPr lang="de-CH" dirty="0" err="1"/>
-              <a:t>Predicateble</a:t>
-            </a:r>
-            <a:r>
-              <a:rPr lang="de-CH" dirty="0"/>
-              <a:t> </a:t>
-            </a:r>
-            <a:r>
-              <a:rPr lang="de-CH" dirty="0" err="1"/>
-              <a:t>performance</a:t>
-            </a:r>
-            <a:r>
-              <a:rPr lang="de-CH" dirty="0"/>
-              <a:t> (</a:t>
-            </a:r>
-            <a:r>
-              <a:rPr lang="de-CH" dirty="0" err="1"/>
-              <a:t>No</a:t>
-            </a:r>
-            <a:r>
-              <a:rPr lang="de-CH" dirty="0"/>
-              <a:t> I/O </a:t>
-            </a:r>
-            <a:r>
-              <a:rPr lang="de-CH" dirty="0" err="1"/>
-              <a:t>variance</a:t>
-            </a:r>
-            <a:r>
-              <a:rPr lang="de-CH" dirty="0"/>
-              <a:t>) essential </a:t>
-            </a:r>
-            <a:r>
-              <a:rPr lang="de-CH" dirty="0" err="1"/>
-              <a:t>for</a:t>
-            </a:r>
-            <a:r>
-              <a:rPr lang="de-CH" dirty="0"/>
-              <a:t> </a:t>
-            </a:r>
-            <a:r>
-              <a:rPr lang="de-CH" dirty="0" err="1"/>
-              <a:t>systems</a:t>
-            </a:r>
-            <a:r>
-              <a:rPr lang="de-CH" dirty="0"/>
-              <a:t> </a:t>
-            </a:r>
-            <a:r>
-              <a:rPr lang="de-CH" dirty="0" err="1"/>
-              <a:t>with</a:t>
-            </a:r>
-            <a:r>
-              <a:rPr lang="de-CH" dirty="0"/>
-              <a:t> </a:t>
-            </a:r>
-            <a:r>
-              <a:rPr lang="de-CH" dirty="0" err="1"/>
-              <a:t>strict</a:t>
-            </a:r>
-            <a:r>
-              <a:rPr lang="de-CH" dirty="0"/>
-              <a:t> SLA (Service Level Agreements)</a:t>
-            </a:r>
-          </a:p>
-          <a:p>
-            <a:pPr marL="0" indent="0">
-              <a:buNone/>
-            </a:pPr>
-            <a:endParaRPr lang="de-CH" dirty="0"/>
-          </a:p>
-          <a:p>
-            <a:pPr>
-              <a:buFontTx/>
-              <a:buChar char="-"/>
-            </a:pPr>
-            <a:r>
-              <a:rPr lang="de-CH" dirty="0"/>
-              <a:t>Fast </a:t>
-            </a:r>
-            <a:r>
-              <a:rPr lang="de-CH" dirty="0" err="1"/>
-              <a:t>response</a:t>
-            </a:r>
-            <a:r>
-              <a:rPr lang="de-CH" dirty="0"/>
-              <a:t> (</a:t>
-            </a:r>
-            <a:r>
-              <a:rPr lang="de-CH" dirty="0" err="1"/>
-              <a:t>ms</a:t>
-            </a:r>
-            <a:r>
-              <a:rPr lang="de-CH" dirty="0"/>
-              <a:t>)</a:t>
-            </a:r>
-          </a:p>
-          <a:p>
-            <a:pPr lvl="1">
-              <a:buFontTx/>
-              <a:buChar char="-"/>
-            </a:pPr>
-            <a:r>
-              <a:rPr lang="de-CH" dirty="0"/>
-              <a:t>High </a:t>
-            </a:r>
-            <a:r>
-              <a:rPr lang="de-CH" dirty="0" err="1"/>
-              <a:t>frequency</a:t>
-            </a:r>
-            <a:r>
-              <a:rPr lang="de-CH" dirty="0"/>
-              <a:t> </a:t>
-            </a:r>
-            <a:r>
-              <a:rPr lang="de-CH" dirty="0" err="1"/>
-              <a:t>trading</a:t>
-            </a:r>
-            <a:endParaRPr lang="de-CH" dirty="0"/>
-          </a:p>
-          <a:p>
-            <a:pPr lvl="1">
-              <a:buFontTx/>
-              <a:buChar char="-"/>
-            </a:pPr>
-            <a:r>
-              <a:rPr lang="de-CH" dirty="0" err="1"/>
-              <a:t>Bidding</a:t>
-            </a:r>
-            <a:r>
-              <a:rPr lang="de-CH" dirty="0"/>
-              <a:t> </a:t>
-            </a:r>
-            <a:r>
-              <a:rPr lang="de-CH" dirty="0" err="1"/>
-              <a:t>platforms</a:t>
-            </a:r>
-            <a:endParaRPr lang="de-CH" dirty="0"/>
-          </a:p>
-          <a:p>
-            <a:pPr lvl="1">
-              <a:buFontTx/>
-              <a:buChar char="-"/>
-            </a:pPr>
-            <a:r>
-              <a:rPr lang="de-CH" dirty="0" err="1"/>
-              <a:t>Reduce</a:t>
-            </a:r>
-            <a:r>
-              <a:rPr lang="de-CH" dirty="0"/>
-              <a:t> </a:t>
-            </a:r>
-            <a:r>
-              <a:rPr lang="de-CH" dirty="0" err="1"/>
-              <a:t>payent</a:t>
-            </a:r>
-            <a:r>
-              <a:rPr lang="de-CH" dirty="0"/>
-              <a:t> </a:t>
-            </a:r>
-            <a:r>
-              <a:rPr lang="de-CH" dirty="0" err="1"/>
-              <a:t>processing</a:t>
-            </a:r>
-            <a:r>
-              <a:rPr lang="de-CH" dirty="0"/>
-              <a:t> </a:t>
-            </a:r>
-            <a:r>
-              <a:rPr lang="de-CH" dirty="0" err="1"/>
-              <a:t>latency</a:t>
-            </a:r>
-            <a:r>
-              <a:rPr lang="de-CH" dirty="0"/>
-              <a:t> </a:t>
-            </a:r>
-            <a:r>
-              <a:rPr lang="de-CH" dirty="0" err="1"/>
-              <a:t>by</a:t>
-            </a:r>
-            <a:r>
-              <a:rPr lang="de-CH" dirty="0"/>
-              <a:t> </a:t>
-            </a:r>
-            <a:r>
-              <a:rPr lang="de-CH" dirty="0" err="1"/>
-              <a:t>moving</a:t>
-            </a:r>
-            <a:r>
-              <a:rPr lang="de-CH" dirty="0"/>
-              <a:t> </a:t>
-            </a:r>
-            <a:r>
-              <a:rPr lang="de-CH" dirty="0" err="1"/>
-              <a:t>authentication</a:t>
-            </a:r>
-            <a:r>
-              <a:rPr lang="de-CH" dirty="0"/>
-              <a:t> </a:t>
-            </a:r>
-            <a:r>
-              <a:rPr lang="de-CH" dirty="0" err="1"/>
-              <a:t>tokens</a:t>
-            </a:r>
-            <a:endParaRPr lang="de-CH" dirty="0"/>
-          </a:p>
-          <a:p>
-            <a:pPr marL="228600" lvl="1" indent="0">
-              <a:buNone/>
-            </a:pPr>
-            <a:r>
-              <a:rPr lang="de-CH" dirty="0"/>
-              <a:t>Traffic </a:t>
-            </a:r>
-            <a:r>
-              <a:rPr lang="de-CH" dirty="0" err="1"/>
-              <a:t>spikes</a:t>
-            </a:r>
-            <a:r>
-              <a:rPr lang="de-CH" dirty="0"/>
-              <a:t> (Netflix (</a:t>
-            </a:r>
-            <a:r>
-              <a:rPr lang="de-CH" dirty="0" err="1"/>
-              <a:t>EvCache</a:t>
-            </a:r>
-            <a:r>
-              <a:rPr lang="de-CH" dirty="0"/>
-              <a:t>) </a:t>
-            </a:r>
-          </a:p>
-          <a:p>
-            <a:pPr marL="228600" lvl="1" indent="0">
-              <a:buNone/>
-            </a:pPr>
-            <a:r>
-              <a:rPr lang="de-CH" dirty="0" err="1"/>
-              <a:t>Complex</a:t>
-            </a:r>
-            <a:r>
-              <a:rPr lang="de-CH" dirty="0"/>
-              <a:t> </a:t>
-            </a:r>
-            <a:r>
-              <a:rPr lang="de-CH" dirty="0" err="1"/>
-              <a:t>data</a:t>
-            </a:r>
-            <a:r>
-              <a:rPr lang="de-CH" dirty="0"/>
-              <a:t> </a:t>
-            </a:r>
-            <a:r>
-              <a:rPr lang="de-CH" dirty="0" err="1"/>
-              <a:t>operations</a:t>
-            </a:r>
-            <a:endParaRPr lang="en-CH" dirty="0"/>
-          </a:p>
-        </p:txBody>
-      </p:sp>
-      <p:sp>
-        <p:nvSpPr>
-          <p:cNvPr id="10" name="TextBox 9">
-            <a:extLst>
-              <a:ext uri="{FF2B5EF4-FFF2-40B4-BE49-F238E27FC236}">
-                <a16:creationId xmlns:a16="http://schemas.microsoft.com/office/drawing/2014/main" id="{0EB7F73D-6562-3767-79B6-BB7AD2175159}"/>
-              </a:ext>
-            </a:extLst>
-          </p:cNvPr>
-          <p:cNvSpPr txBox="1"/>
-          <p:nvPr/>
-        </p:nvSpPr>
-        <p:spPr>
-          <a:xfrm>
-            <a:off x="529389" y="6458552"/>
-            <a:ext cx="6196151" cy="276999"/>
-          </a:xfrm>
-          <a:prstGeom prst="rect">
-            <a:avLst/>
-          </a:prstGeom>
-          <a:noFill/>
-        </p:spPr>
-        <p:txBody>
-          <a:bodyPr wrap="square" rtlCol="0">
-            <a:spAutoFit/>
-          </a:bodyPr>
-          <a:lstStyle/>
-          <a:p>
-            <a:r>
-              <a:rPr lang="en-CH" sz="1200" dirty="0"/>
-              <a:t>https://github.com/vjaeggi/MemoryOptimizedTables_SQL</a:t>
-            </a:r>
-          </a:p>
-        </p:txBody>
-      </p:sp>
-      <p:sp>
-        <p:nvSpPr>
-          <p:cNvPr id="5" name="Title 4">
-            <a:extLst>
-              <a:ext uri="{FF2B5EF4-FFF2-40B4-BE49-F238E27FC236}">
-                <a16:creationId xmlns:a16="http://schemas.microsoft.com/office/drawing/2014/main" id="{C9F9AE33-FF9F-F082-6024-01F13B77287E}"/>
-              </a:ext>
-            </a:extLst>
-          </p:cNvPr>
-          <p:cNvSpPr>
-            <a:spLocks noGrp="1"/>
-          </p:cNvSpPr>
-          <p:nvPr>
-            <p:ph type="title"/>
-          </p:nvPr>
-        </p:nvSpPr>
-        <p:spPr/>
-        <p:txBody>
-          <a:bodyPr/>
-          <a:lstStyle/>
-          <a:p>
-            <a:r>
-              <a:rPr lang="de-CH" dirty="0"/>
-              <a:t>Vor- und Nachteile  Memory </a:t>
-            </a:r>
-            <a:r>
-              <a:rPr lang="de-CH" dirty="0" err="1"/>
-              <a:t>Optimized</a:t>
-            </a:r>
-            <a:r>
-              <a:rPr lang="de-CH" dirty="0"/>
-              <a:t> Table</a:t>
-            </a:r>
-            <a:endParaRPr lang="en-CH" dirty="0"/>
-          </a:p>
-        </p:txBody>
-      </p:sp>
-      <p:sp>
-        <p:nvSpPr>
-          <p:cNvPr id="6" name="Text Placeholder 3">
-            <a:extLst>
-              <a:ext uri="{FF2B5EF4-FFF2-40B4-BE49-F238E27FC236}">
-                <a16:creationId xmlns:a16="http://schemas.microsoft.com/office/drawing/2014/main" id="{695D688A-C6E7-DE12-6A34-6AD9356B2CC8}"/>
-              </a:ext>
-            </a:extLst>
-          </p:cNvPr>
-          <p:cNvSpPr txBox="1">
-            <a:spLocks/>
-          </p:cNvSpPr>
-          <p:nvPr/>
-        </p:nvSpPr>
-        <p:spPr>
-          <a:xfrm>
-            <a:off x="6174536" y="2170176"/>
-            <a:ext cx="5166360" cy="4184904"/>
+            <a:off x="612648" y="1631650"/>
+            <a:ext cx="4060072" cy="1797350"/>
           </a:xfrm>
           <a:prstGeom prst="rect">
             <a:avLst/>
@@ -24581,9 +24396,341 @@
               <a:buFont typeface="Arial" panose="020B0604020202020204" pitchFamily="34" charset="0"/>
               <a:buNone/>
             </a:pPr>
+            <a:endParaRPr lang="en-CH" dirty="0"/>
+          </a:p>
+        </p:txBody>
+      </p:sp>
+    </p:spTree>
+    <p:extLst>
+      <p:ext uri="{BB962C8B-B14F-4D97-AF65-F5344CB8AC3E}">
+        <p14:creationId xmlns:p14="http://schemas.microsoft.com/office/powerpoint/2010/main" val="3158852068"/>
+      </p:ext>
+    </p:extLst>
+  </p:cSld>
+  <p:clrMapOvr>
+    <a:masterClrMapping/>
+  </p:clrMapOvr>
+</p:sld>
+</file>
+
+<file path=ppt/slides/slide5.xml><?xml version="1.0" encoding="utf-8"?>
+<p:sld xmlns:a="http://schemas.openxmlformats.org/drawingml/2006/main" xmlns:r="http://schemas.openxmlformats.org/officeDocument/2006/relationships" xmlns:p="http://schemas.openxmlformats.org/presentationml/2006/main">
+  <p:cSld>
+    <p:spTree>
+      <p:nvGrpSpPr>
+        <p:cNvPr id="1" name=""/>
+        <p:cNvGrpSpPr/>
+        <p:nvPr/>
+      </p:nvGrpSpPr>
+      <p:grpSpPr>
+        <a:xfrm>
+          <a:off x="0" y="0"/>
+          <a:ext cx="0" cy="0"/>
+          <a:chOff x="0" y="0"/>
+          <a:chExt cx="0" cy="0"/>
+        </a:xfrm>
+      </p:grpSpPr>
+      <p:sp>
+        <p:nvSpPr>
+          <p:cNvPr id="2" name="Title 1">
+            <a:extLst>
+              <a:ext uri="{FF2B5EF4-FFF2-40B4-BE49-F238E27FC236}">
+                <a16:creationId xmlns:a16="http://schemas.microsoft.com/office/drawing/2014/main" id="{56B45D51-721E-F586-DDFD-54F7CF1400C9}"/>
+              </a:ext>
+            </a:extLst>
+          </p:cNvPr>
+          <p:cNvSpPr>
+            <a:spLocks noGrp="1"/>
+          </p:cNvSpPr>
+          <p:nvPr>
+            <p:ph type="title"/>
+          </p:nvPr>
+        </p:nvSpPr>
+        <p:spPr/>
+        <p:txBody>
+          <a:bodyPr/>
+          <a:lstStyle/>
+          <a:p>
             <a:r>
               <a:rPr lang="de-CH" dirty="0"/>
-              <a:t>Nachteile «in Memory» Table</a:t>
+              <a:t>Erstellte Memory </a:t>
+            </a:r>
+            <a:r>
+              <a:rPr lang="de-CH" dirty="0" err="1"/>
+              <a:t>Optimized</a:t>
+            </a:r>
+            <a:r>
+              <a:rPr lang="de-CH" dirty="0"/>
+              <a:t> Table </a:t>
+            </a:r>
+            <a:endParaRPr lang="en-CH" dirty="0"/>
+          </a:p>
+        </p:txBody>
+      </p:sp>
+      <p:sp>
+        <p:nvSpPr>
+          <p:cNvPr id="3" name="Text Placeholder 2">
+            <a:extLst>
+              <a:ext uri="{FF2B5EF4-FFF2-40B4-BE49-F238E27FC236}">
+                <a16:creationId xmlns:a16="http://schemas.microsoft.com/office/drawing/2014/main" id="{98E728DD-E4C0-1593-B372-D1D68613DE94}"/>
+              </a:ext>
+            </a:extLst>
+          </p:cNvPr>
+          <p:cNvSpPr>
+            <a:spLocks noGrp="1"/>
+          </p:cNvSpPr>
+          <p:nvPr>
+            <p:ph type="body" sz="quarter" idx="13"/>
+          </p:nvPr>
+        </p:nvSpPr>
+        <p:spPr/>
+        <p:txBody>
+          <a:bodyPr/>
+          <a:lstStyle/>
+          <a:p>
+            <a:endParaRPr lang="en-CH" dirty="0"/>
+          </a:p>
+        </p:txBody>
+      </p:sp>
+      <p:sp>
+        <p:nvSpPr>
+          <p:cNvPr id="4" name="Text Placeholder 3">
+            <a:extLst>
+              <a:ext uri="{FF2B5EF4-FFF2-40B4-BE49-F238E27FC236}">
+                <a16:creationId xmlns:a16="http://schemas.microsoft.com/office/drawing/2014/main" id="{9FBF58D2-16E8-8744-4C6F-C9C36D8A5E8A}"/>
+              </a:ext>
+            </a:extLst>
+          </p:cNvPr>
+          <p:cNvSpPr>
+            <a:spLocks noGrp="1"/>
+          </p:cNvSpPr>
+          <p:nvPr>
+            <p:ph type="body" sz="quarter" idx="14"/>
+          </p:nvPr>
+        </p:nvSpPr>
+        <p:spPr/>
+        <p:txBody>
+          <a:bodyPr/>
+          <a:lstStyle/>
+          <a:p>
+            <a:endParaRPr lang="en-CH" dirty="0"/>
+          </a:p>
+        </p:txBody>
+      </p:sp>
+      <p:pic>
+        <p:nvPicPr>
+          <p:cNvPr id="6" name="Picture 5">
+            <a:extLst>
+              <a:ext uri="{FF2B5EF4-FFF2-40B4-BE49-F238E27FC236}">
+                <a16:creationId xmlns:a16="http://schemas.microsoft.com/office/drawing/2014/main" id="{FEDAF02F-6B9A-944C-FFE9-E6356854DBA6}"/>
+              </a:ext>
+            </a:extLst>
+          </p:cNvPr>
+          <p:cNvPicPr>
+            <a:picLocks noChangeAspect="1"/>
+          </p:cNvPicPr>
+          <p:nvPr/>
+        </p:nvPicPr>
+        <p:blipFill>
+          <a:blip r:embed="rId2"/>
+          <a:stretch>
+            <a:fillRect/>
+          </a:stretch>
+        </p:blipFill>
+        <p:spPr>
+          <a:xfrm>
+            <a:off x="262664" y="2289512"/>
+            <a:ext cx="6025605" cy="3572273"/>
+          </a:xfrm>
+          <a:prstGeom prst="rect">
+            <a:avLst/>
+          </a:prstGeom>
+        </p:spPr>
+      </p:pic>
+      <p:pic>
+        <p:nvPicPr>
+          <p:cNvPr id="8" name="Picture 7">
+            <a:extLst>
+              <a:ext uri="{FF2B5EF4-FFF2-40B4-BE49-F238E27FC236}">
+                <a16:creationId xmlns:a16="http://schemas.microsoft.com/office/drawing/2014/main" id="{D7579C38-5CF1-A103-F343-8F7F6B2A6D9B}"/>
+              </a:ext>
+            </a:extLst>
+          </p:cNvPr>
+          <p:cNvPicPr>
+            <a:picLocks noChangeAspect="1"/>
+          </p:cNvPicPr>
+          <p:nvPr/>
+        </p:nvPicPr>
+        <p:blipFill>
+          <a:blip r:embed="rId3"/>
+          <a:stretch>
+            <a:fillRect/>
+          </a:stretch>
+        </p:blipFill>
+        <p:spPr>
+          <a:xfrm>
+            <a:off x="5920374" y="2289512"/>
+            <a:ext cx="5658978" cy="3463319"/>
+          </a:xfrm>
+          <a:prstGeom prst="rect">
+            <a:avLst/>
+          </a:prstGeom>
+        </p:spPr>
+      </p:pic>
+      <p:sp>
+        <p:nvSpPr>
+          <p:cNvPr id="9" name="TextBox 8">
+            <a:extLst>
+              <a:ext uri="{FF2B5EF4-FFF2-40B4-BE49-F238E27FC236}">
+                <a16:creationId xmlns:a16="http://schemas.microsoft.com/office/drawing/2014/main" id="{F5F98E37-C8A3-D461-C76B-6F94DA9E18FB}"/>
+              </a:ext>
+            </a:extLst>
+          </p:cNvPr>
+          <p:cNvSpPr txBox="1"/>
+          <p:nvPr/>
+        </p:nvSpPr>
+        <p:spPr>
+          <a:xfrm>
+            <a:off x="529389" y="6458552"/>
+            <a:ext cx="6196151" cy="276999"/>
+          </a:xfrm>
+          <a:prstGeom prst="rect">
+            <a:avLst/>
+          </a:prstGeom>
+          <a:noFill/>
+        </p:spPr>
+        <p:txBody>
+          <a:bodyPr wrap="square" rtlCol="0">
+            <a:spAutoFit/>
+          </a:bodyPr>
+          <a:lstStyle/>
+          <a:p>
+            <a:r>
+              <a:rPr lang="en-CH" sz="1200" dirty="0"/>
+              <a:t>https://github.com/vjaeggi/MemoryOptimizedTables_SQL</a:t>
+            </a:r>
+          </a:p>
+        </p:txBody>
+      </p:sp>
+    </p:spTree>
+    <p:extLst>
+      <p:ext uri="{BB962C8B-B14F-4D97-AF65-F5344CB8AC3E}">
+        <p14:creationId xmlns:p14="http://schemas.microsoft.com/office/powerpoint/2010/main" val="1567427804"/>
+      </p:ext>
+    </p:extLst>
+  </p:cSld>
+  <p:clrMapOvr>
+    <a:masterClrMapping/>
+  </p:clrMapOvr>
+</p:sld>
+</file>
+
+<file path=ppt/slides/slide6.xml><?xml version="1.0" encoding="utf-8"?>
+<p:sld xmlns:a="http://schemas.openxmlformats.org/drawingml/2006/main" xmlns:r="http://schemas.openxmlformats.org/officeDocument/2006/relationships" xmlns:p="http://schemas.openxmlformats.org/presentationml/2006/main">
+  <p:cSld>
+    <p:spTree>
+      <p:nvGrpSpPr>
+        <p:cNvPr id="1" name="">
+          <a:extLst>
+            <a:ext uri="{FF2B5EF4-FFF2-40B4-BE49-F238E27FC236}">
+              <a16:creationId xmlns:a16="http://schemas.microsoft.com/office/drawing/2014/main" id="{E1C3E433-A8DF-825B-9DB9-C664B8AA6D67}"/>
+            </a:ext>
+          </a:extLst>
+        </p:cNvPr>
+        <p:cNvGrpSpPr/>
+        <p:nvPr/>
+      </p:nvGrpSpPr>
+      <p:grpSpPr>
+        <a:xfrm>
+          <a:off x="0" y="0"/>
+          <a:ext cx="0" cy="0"/>
+          <a:chOff x="0" y="0"/>
+          <a:chExt cx="0" cy="0"/>
+        </a:xfrm>
+      </p:grpSpPr>
+      <p:sp>
+        <p:nvSpPr>
+          <p:cNvPr id="2" name="Title 1">
+            <a:extLst>
+              <a:ext uri="{FF2B5EF4-FFF2-40B4-BE49-F238E27FC236}">
+                <a16:creationId xmlns:a16="http://schemas.microsoft.com/office/drawing/2014/main" id="{5E4BFFC2-A881-D7FD-A72F-A2BEFA44C006}"/>
+              </a:ext>
+            </a:extLst>
+          </p:cNvPr>
+          <p:cNvSpPr>
+            <a:spLocks noGrp="1"/>
+          </p:cNvSpPr>
+          <p:nvPr>
+            <p:ph type="title"/>
+          </p:nvPr>
+        </p:nvSpPr>
+        <p:spPr/>
+        <p:txBody>
+          <a:bodyPr/>
+          <a:lstStyle/>
+          <a:p>
+            <a:r>
+              <a:rPr lang="de-CH" dirty="0" err="1"/>
+              <a:t>Kurzdemo</a:t>
+            </a:r>
+            <a:r>
+              <a:rPr lang="de-CH" dirty="0"/>
+              <a:t> Performance Vergleich </a:t>
+            </a:r>
+            <a:r>
+              <a:rPr lang="de-CH" dirty="0" err="1"/>
+              <a:t>SSMS</a:t>
+            </a:r>
+            <a:r>
+              <a:rPr lang="de-CH" dirty="0"/>
+              <a:t> 2022 </a:t>
+            </a:r>
+            <a:br>
+              <a:rPr lang="en-US" dirty="0">
+                <a:solidFill>
+                  <a:schemeClr val="tx1"/>
+                </a:solidFill>
+              </a:rPr>
+            </a:br>
+            <a:endParaRPr lang="en-CH" dirty="0"/>
+          </a:p>
+        </p:txBody>
+      </p:sp>
+      <p:sp>
+        <p:nvSpPr>
+          <p:cNvPr id="4" name="Text Placeholder 3">
+            <a:extLst>
+              <a:ext uri="{FF2B5EF4-FFF2-40B4-BE49-F238E27FC236}">
+                <a16:creationId xmlns:a16="http://schemas.microsoft.com/office/drawing/2014/main" id="{DF2EE5AC-CE26-E9B8-3647-F8A110D8DFD2}"/>
+              </a:ext>
+            </a:extLst>
+          </p:cNvPr>
+          <p:cNvSpPr>
+            <a:spLocks noGrp="1"/>
+          </p:cNvSpPr>
+          <p:nvPr>
+            <p:ph type="body" sz="quarter" idx="13"/>
+          </p:nvPr>
+        </p:nvSpPr>
+        <p:spPr/>
+        <p:txBody>
+          <a:bodyPr/>
+          <a:lstStyle/>
+          <a:p>
+            <a:pPr marL="0" indent="0">
+              <a:buNone/>
+            </a:pPr>
+            <a:r>
+              <a:rPr lang="de-CH" dirty="0"/>
+              <a:t>Set </a:t>
+            </a:r>
+            <a:r>
+              <a:rPr lang="de-CH" dirty="0" err="1"/>
+              <a:t>up</a:t>
+            </a:r>
+            <a:r>
+              <a:rPr lang="de-CH" dirty="0"/>
+              <a:t>:</a:t>
             </a:r>
           </a:p>
           <a:p>
@@ -24593,91 +24740,13 @@
             </a:pPr>
             <a:r>
               <a:rPr lang="de-CH" dirty="0"/>
-              <a:t>Recovery </a:t>
-            </a:r>
-            <a:r>
-              <a:rPr lang="de-CH" dirty="0" err="1"/>
-              <a:t>planning</a:t>
-            </a:r>
-            <a:r>
-              <a:rPr lang="de-CH" dirty="0"/>
-              <a:t> </a:t>
-            </a:r>
-            <a:r>
-              <a:rPr lang="de-CH" dirty="0" err="1"/>
-              <a:t>becomes</a:t>
-            </a:r>
-            <a:r>
-              <a:rPr lang="de-CH" dirty="0"/>
-              <a:t> </a:t>
-            </a:r>
-            <a:r>
-              <a:rPr lang="de-CH" dirty="0" err="1"/>
-              <a:t>critical</a:t>
-            </a:r>
-            <a:r>
-              <a:rPr lang="de-CH" dirty="0"/>
-              <a:t> (</a:t>
-            </a:r>
-            <a:r>
-              <a:rPr lang="de-CH" dirty="0" err="1"/>
-              <a:t>cold</a:t>
-            </a:r>
-            <a:r>
-              <a:rPr lang="de-CH" dirty="0"/>
-              <a:t> </a:t>
-            </a:r>
-            <a:r>
-              <a:rPr lang="de-CH" dirty="0" err="1"/>
-              <a:t>starts</a:t>
-            </a:r>
-            <a:r>
-              <a:rPr lang="de-CH" dirty="0"/>
-              <a:t> </a:t>
-            </a:r>
-            <a:r>
-              <a:rPr lang="de-CH" dirty="0" err="1"/>
-              <a:t>with</a:t>
-            </a:r>
-            <a:r>
-              <a:rPr lang="de-CH" dirty="0"/>
-              <a:t> </a:t>
-            </a:r>
-            <a:r>
-              <a:rPr lang="de-CH" dirty="0" err="1"/>
-              <a:t>empty</a:t>
-            </a:r>
-            <a:r>
-              <a:rPr lang="de-CH" dirty="0"/>
-              <a:t> </a:t>
-            </a:r>
-            <a:r>
-              <a:rPr lang="de-CH" dirty="0" err="1"/>
-              <a:t>caches</a:t>
-            </a:r>
-            <a:r>
-              <a:rPr lang="de-CH" dirty="0"/>
-              <a:t>) </a:t>
-            </a:r>
-            <a:r>
-              <a:rPr lang="de-CH" dirty="0" err="1"/>
-              <a:t>load</a:t>
-            </a:r>
-            <a:r>
-              <a:rPr lang="de-CH" dirty="0"/>
-              <a:t> </a:t>
-            </a:r>
-            <a:r>
-              <a:rPr lang="de-CH" dirty="0" err="1"/>
-              <a:t>data</a:t>
-            </a:r>
-            <a:r>
-              <a:rPr lang="de-CH" dirty="0"/>
-              <a:t> in </a:t>
-            </a:r>
-            <a:r>
-              <a:rPr lang="de-CH" dirty="0" err="1"/>
-              <a:t>batches</a:t>
+              <a:t>Windows SQL Server 2025 </a:t>
+            </a:r>
+            <a:r>
+              <a:rPr lang="de-CH" dirty="0">
+                <a:hlinkClick r:id="rId2"/>
+              </a:rPr>
+              <a:t>Developer</a:t>
             </a:r>
             <a:endParaRPr lang="de-CH" dirty="0"/>
           </a:p>
@@ -24687,76 +24756,18 @@
               <a:buChar char="-"/>
             </a:pPr>
             <a:r>
+              <a:rPr lang="de-CH" dirty="0" err="1"/>
+              <a:t>SSMS</a:t>
+            </a:r>
+            <a:r>
               <a:rPr lang="de-CH" dirty="0"/>
-              <a:t>Memory </a:t>
-            </a:r>
-            <a:r>
-              <a:rPr lang="de-CH" dirty="0" err="1"/>
-              <a:t>fragmentation</a:t>
-            </a:r>
-            <a:r>
-              <a:rPr lang="de-CH" dirty="0"/>
-              <a:t> (</a:t>
-            </a:r>
-            <a:r>
-              <a:rPr lang="de-CH" dirty="0" err="1"/>
-              <a:t>memory</a:t>
-            </a:r>
-            <a:r>
-              <a:rPr lang="de-CH" dirty="0"/>
-              <a:t> </a:t>
-            </a:r>
-            <a:r>
-              <a:rPr lang="de-CH" dirty="0" err="1"/>
-              <a:t>fragmentation</a:t>
-            </a:r>
-            <a:r>
-              <a:rPr lang="de-CH" dirty="0"/>
-              <a:t> </a:t>
-            </a:r>
-            <a:r>
-              <a:rPr lang="de-CH" dirty="0" err="1"/>
-              <a:t>can</a:t>
-            </a:r>
-            <a:r>
-              <a:rPr lang="de-CH" dirty="0"/>
-              <a:t> </a:t>
-            </a:r>
-            <a:r>
-              <a:rPr lang="de-CH" dirty="0" err="1"/>
-              <a:t>degrade</a:t>
-            </a:r>
-            <a:r>
-              <a:rPr lang="de-CH" dirty="0"/>
-              <a:t> </a:t>
-            </a:r>
-            <a:r>
-              <a:rPr lang="de-CH" dirty="0" err="1"/>
-              <a:t>performance</a:t>
-            </a:r>
-            <a:r>
-              <a:rPr lang="de-CH" dirty="0"/>
-              <a:t> </a:t>
-            </a:r>
-            <a:r>
-              <a:rPr lang="de-CH" dirty="0" err="1"/>
-              <a:t>over</a:t>
-            </a:r>
-            <a:r>
-              <a:rPr lang="de-CH" dirty="0"/>
-              <a:t> time) -&gt; plan </a:t>
-            </a:r>
-            <a:r>
-              <a:rPr lang="de-CH" dirty="0" err="1"/>
-              <a:t>regular</a:t>
-            </a:r>
-            <a:r>
-              <a:rPr lang="de-CH" dirty="0"/>
-              <a:t> </a:t>
-            </a:r>
-            <a:r>
-              <a:rPr lang="de-CH" dirty="0" err="1"/>
-              <a:t>restarts</a:t>
+              <a:t> 2022: </a:t>
+            </a:r>
+            <a:r>
+              <a:rPr lang="de-CH" dirty="0">
+                <a:hlinkClick r:id="rId3"/>
+              </a:rPr>
+              <a:t>Download</a:t>
             </a:r>
             <a:endParaRPr lang="de-CH" dirty="0"/>
           </a:p>
@@ -24767,112 +24778,363 @@
             </a:pPr>
             <a:r>
               <a:rPr lang="de-CH" dirty="0"/>
-              <a:t>Data </a:t>
-            </a:r>
-            <a:r>
-              <a:rPr lang="de-CH" dirty="0" err="1"/>
-              <a:t>structure</a:t>
-            </a:r>
-            <a:r>
-              <a:rPr lang="de-CH" dirty="0"/>
-              <a:t> </a:t>
-            </a:r>
-            <a:r>
-              <a:rPr lang="de-CH" dirty="0" err="1"/>
-              <a:t>selection</a:t>
-            </a:r>
-            <a:r>
-              <a:rPr lang="de-CH" dirty="0"/>
-              <a:t> </a:t>
-            </a:r>
-            <a:r>
-              <a:rPr lang="de-CH" dirty="0" err="1"/>
-              <a:t>matters</a:t>
-            </a:r>
-            <a:r>
-              <a:rPr lang="de-CH" dirty="0"/>
-              <a:t> </a:t>
-            </a:r>
-            <a:r>
-              <a:rPr lang="de-CH" dirty="0" err="1"/>
-              <a:t>enormously</a:t>
-            </a:r>
-            <a:r>
-              <a:rPr lang="de-CH" dirty="0"/>
-              <a:t>. Switch </a:t>
-            </a:r>
-            <a:r>
-              <a:rPr lang="de-CH" dirty="0" err="1"/>
-              <a:t>from</a:t>
-            </a:r>
-            <a:r>
-              <a:rPr lang="de-CH" dirty="0"/>
-              <a:t> </a:t>
-            </a:r>
-            <a:r>
-              <a:rPr lang="de-CH" dirty="0" err="1"/>
-              <a:t>hash</a:t>
-            </a:r>
-            <a:r>
-              <a:rPr lang="de-CH" dirty="0"/>
-              <a:t> </a:t>
-            </a:r>
-            <a:r>
-              <a:rPr lang="de-CH" dirty="0" err="1"/>
-              <a:t>tables</a:t>
-            </a:r>
-            <a:r>
-              <a:rPr lang="de-CH" dirty="0"/>
-              <a:t> </a:t>
-            </a:r>
-            <a:r>
-              <a:rPr lang="de-CH" dirty="0" err="1"/>
-              <a:t>to</a:t>
-            </a:r>
-            <a:r>
-              <a:rPr lang="de-CH" dirty="0"/>
-              <a:t> </a:t>
-            </a:r>
-            <a:r>
-              <a:rPr lang="de-CH" dirty="0" err="1"/>
-              <a:t>specialized</a:t>
-            </a:r>
-            <a:r>
-              <a:rPr lang="de-CH" dirty="0"/>
-              <a:t> </a:t>
-            </a:r>
-            <a:r>
-              <a:rPr lang="de-CH" dirty="0" err="1"/>
-              <a:t>radic</a:t>
-            </a:r>
-            <a:r>
-              <a:rPr lang="de-CH" dirty="0"/>
-              <a:t> </a:t>
-            </a:r>
-            <a:r>
-              <a:rPr lang="de-CH" dirty="0" err="1"/>
-              <a:t>trees</a:t>
-            </a:r>
-            <a:r>
-              <a:rPr lang="de-CH" dirty="0"/>
-              <a:t> </a:t>
-            </a:r>
-            <a:r>
-              <a:rPr lang="de-CH" dirty="0" err="1"/>
-              <a:t>improvement</a:t>
-            </a:r>
-            <a:r>
-              <a:rPr lang="de-CH" dirty="0"/>
-              <a:t>? </a:t>
+              <a:t>Datenset: </a:t>
+            </a:r>
+            <a:r>
+              <a:rPr lang="de-CH" dirty="0">
+                <a:hlinkClick r:id="rId4"/>
+              </a:rPr>
+              <a:t>Wide World </a:t>
+            </a:r>
+            <a:r>
+              <a:rPr lang="de-CH" dirty="0" err="1">
+                <a:hlinkClick r:id="rId4"/>
+              </a:rPr>
+              <a:t>Importers</a:t>
             </a:r>
             <a:endParaRPr lang="en-CH" dirty="0"/>
+          </a:p>
+        </p:txBody>
+      </p:sp>
+      <p:pic>
+        <p:nvPicPr>
+          <p:cNvPr id="9" name="Picture 8">
+            <a:extLst>
+              <a:ext uri="{FF2B5EF4-FFF2-40B4-BE49-F238E27FC236}">
+                <a16:creationId xmlns:a16="http://schemas.microsoft.com/office/drawing/2014/main" id="{B78E56D0-45AD-947F-1350-177E4D9211D5}"/>
+              </a:ext>
+            </a:extLst>
+          </p:cNvPr>
+          <p:cNvPicPr>
+            <a:picLocks noChangeAspect="1"/>
+          </p:cNvPicPr>
+          <p:nvPr/>
+        </p:nvPicPr>
+        <p:blipFill>
+          <a:blip r:embed="rId5"/>
+          <a:stretch>
+            <a:fillRect/>
+          </a:stretch>
+        </p:blipFill>
+        <p:spPr>
+          <a:xfrm>
+            <a:off x="6215948" y="1978913"/>
+            <a:ext cx="5351212" cy="4214944"/>
+          </a:xfrm>
+          <a:prstGeom prst="rect">
+            <a:avLst/>
+          </a:prstGeom>
+        </p:spPr>
+      </p:pic>
+      <p:sp>
+        <p:nvSpPr>
+          <p:cNvPr id="10" name="TextBox 9">
+            <a:extLst>
+              <a:ext uri="{FF2B5EF4-FFF2-40B4-BE49-F238E27FC236}">
+                <a16:creationId xmlns:a16="http://schemas.microsoft.com/office/drawing/2014/main" id="{BE6AE895-3373-E405-3901-951DE9F3D2A3}"/>
+              </a:ext>
+            </a:extLst>
+          </p:cNvPr>
+          <p:cNvSpPr txBox="1"/>
+          <p:nvPr/>
+        </p:nvSpPr>
+        <p:spPr>
+          <a:xfrm>
+            <a:off x="529389" y="6458552"/>
+            <a:ext cx="6196151" cy="276999"/>
+          </a:xfrm>
+          <a:prstGeom prst="rect">
+            <a:avLst/>
+          </a:prstGeom>
+          <a:noFill/>
+        </p:spPr>
+        <p:txBody>
+          <a:bodyPr wrap="square" rtlCol="0">
+            <a:spAutoFit/>
+          </a:bodyPr>
+          <a:lstStyle/>
+          <a:p>
+            <a:r>
+              <a:rPr lang="en-CH" sz="1200" dirty="0"/>
+              <a:t>https://github.com/vjaeggi/MemoryOptimizedTables_SQL</a:t>
+            </a:r>
           </a:p>
         </p:txBody>
       </p:sp>
     </p:spTree>
     <p:extLst>
       <p:ext uri="{BB962C8B-B14F-4D97-AF65-F5344CB8AC3E}">
-        <p14:creationId xmlns:p14="http://schemas.microsoft.com/office/powerpoint/2010/main" val="3719485627"/>
+        <p14:creationId xmlns:p14="http://schemas.microsoft.com/office/powerpoint/2010/main" val="3981012660"/>
+      </p:ext>
+    </p:extLst>
+  </p:cSld>
+  <p:clrMapOvr>
+    <a:masterClrMapping/>
+  </p:clrMapOvr>
+</p:sld>
+</file>
+
+<file path=ppt/slides/slide7.xml><?xml version="1.0" encoding="utf-8"?>
+<p:sld xmlns:a="http://schemas.openxmlformats.org/drawingml/2006/main" xmlns:r="http://schemas.openxmlformats.org/officeDocument/2006/relationships" xmlns:p="http://schemas.openxmlformats.org/presentationml/2006/main">
+  <p:cSld>
+    <p:spTree>
+      <p:nvGrpSpPr>
+        <p:cNvPr id="1" name="">
+          <a:extLst>
+            <a:ext uri="{FF2B5EF4-FFF2-40B4-BE49-F238E27FC236}">
+              <a16:creationId xmlns:a16="http://schemas.microsoft.com/office/drawing/2014/main" id="{EDAAB87D-042C-9599-0E1E-901F1CB920CE}"/>
+            </a:ext>
+          </a:extLst>
+        </p:cNvPr>
+        <p:cNvGrpSpPr/>
+        <p:nvPr/>
+      </p:nvGrpSpPr>
+      <p:grpSpPr>
+        <a:xfrm>
+          <a:off x="0" y="0"/>
+          <a:ext cx="0" cy="0"/>
+          <a:chOff x="0" y="0"/>
+          <a:chExt cx="0" cy="0"/>
+        </a:xfrm>
+      </p:grpSpPr>
+      <p:sp>
+        <p:nvSpPr>
+          <p:cNvPr id="2" name="Title 1">
+            <a:extLst>
+              <a:ext uri="{FF2B5EF4-FFF2-40B4-BE49-F238E27FC236}">
+                <a16:creationId xmlns:a16="http://schemas.microsoft.com/office/drawing/2014/main" id="{968F3BE6-32B3-569B-9511-F95682EEE589}"/>
+              </a:ext>
+            </a:extLst>
+          </p:cNvPr>
+          <p:cNvSpPr>
+            <a:spLocks noGrp="1"/>
+          </p:cNvSpPr>
+          <p:nvPr>
+            <p:ph type="title"/>
+          </p:nvPr>
+        </p:nvSpPr>
+        <p:spPr/>
+        <p:txBody>
+          <a:bodyPr/>
+          <a:lstStyle/>
+          <a:p>
+            <a:r>
+              <a:rPr lang="de-CH" dirty="0"/>
+              <a:t>Fazit Performance Vergleich (Laufzeiten)</a:t>
+            </a:r>
+            <a:br>
+              <a:rPr lang="en-US" dirty="0">
+                <a:solidFill>
+                  <a:schemeClr val="tx1"/>
+                </a:solidFill>
+              </a:rPr>
+            </a:br>
+            <a:endParaRPr lang="en-CH" dirty="0"/>
+          </a:p>
+        </p:txBody>
+      </p:sp>
+      <p:sp>
+        <p:nvSpPr>
+          <p:cNvPr id="4" name="Text Placeholder 3">
+            <a:extLst>
+              <a:ext uri="{FF2B5EF4-FFF2-40B4-BE49-F238E27FC236}">
+                <a16:creationId xmlns:a16="http://schemas.microsoft.com/office/drawing/2014/main" id="{C0AE6187-F2C6-1DE1-025F-A948A7E746F6}"/>
+              </a:ext>
+            </a:extLst>
+          </p:cNvPr>
+          <p:cNvSpPr>
+            <a:spLocks noGrp="1"/>
+          </p:cNvSpPr>
+          <p:nvPr>
+            <p:ph type="body" sz="quarter" idx="13"/>
+          </p:nvPr>
+        </p:nvSpPr>
+        <p:spPr/>
+        <p:txBody>
+          <a:bodyPr/>
+          <a:lstStyle/>
+          <a:p>
+            <a:pPr marL="0" indent="0">
+              <a:buNone/>
+            </a:pPr>
+            <a:r>
+              <a:rPr lang="de-CH" dirty="0"/>
+              <a:t>Bei einem simplen </a:t>
+            </a:r>
+            <a:r>
+              <a:rPr lang="de-CH" dirty="0" err="1"/>
+              <a:t>scan</a:t>
+            </a:r>
+            <a:r>
+              <a:rPr lang="de-CH" dirty="0"/>
+              <a:t> + </a:t>
+            </a:r>
+            <a:r>
+              <a:rPr lang="de-CH" dirty="0" err="1"/>
+              <a:t>sort</a:t>
+            </a:r>
+            <a:r>
+              <a:rPr lang="de-CH" dirty="0"/>
+              <a:t> keinen grossen Vorteil von </a:t>
+            </a:r>
+            <a:r>
+              <a:rPr lang="de-CH" dirty="0" err="1"/>
+              <a:t>MOT</a:t>
+            </a:r>
+            <a:r>
+              <a:rPr lang="de-CH" dirty="0"/>
+              <a:t>. </a:t>
+            </a:r>
+          </a:p>
+          <a:p>
+            <a:pPr marL="0" indent="0">
+              <a:buNone/>
+            </a:pPr>
+            <a:endParaRPr lang="de-CH" dirty="0"/>
+          </a:p>
+          <a:p>
+            <a:pPr marL="0" indent="0">
+              <a:buNone/>
+            </a:pPr>
+            <a:r>
+              <a:rPr lang="de-CH" dirty="0"/>
+              <a:t>Grund: ist kein OLTP sondern eher </a:t>
+            </a:r>
+            <a:r>
+              <a:rPr lang="de-CH" dirty="0" err="1"/>
+              <a:t>scan</a:t>
+            </a:r>
+            <a:endParaRPr lang="de-CH" dirty="0"/>
+          </a:p>
+          <a:p>
+            <a:pPr marL="0" indent="0">
+              <a:buNone/>
+            </a:pPr>
+            <a:r>
+              <a:rPr lang="de-CH" dirty="0"/>
+              <a:t>Der Hash Index ist gut für </a:t>
+            </a:r>
+            <a:r>
+              <a:rPr lang="de-CH" dirty="0" err="1"/>
+              <a:t>point</a:t>
+            </a:r>
+            <a:r>
+              <a:rPr lang="de-CH" dirty="0"/>
+              <a:t> </a:t>
+            </a:r>
+            <a:r>
+              <a:rPr lang="de-CH" dirty="0" err="1"/>
+              <a:t>look</a:t>
+            </a:r>
+            <a:r>
+              <a:rPr lang="de-CH" dirty="0"/>
+              <a:t> </a:t>
+            </a:r>
+            <a:r>
+              <a:rPr lang="de-CH" dirty="0" err="1"/>
+              <a:t>up</a:t>
+            </a:r>
+            <a:r>
+              <a:rPr lang="de-CH" dirty="0"/>
+              <a:t> aber nicht für </a:t>
+            </a:r>
+            <a:r>
+              <a:rPr lang="de-CH" dirty="0" err="1"/>
+              <a:t>order</a:t>
+            </a:r>
+            <a:r>
+              <a:rPr lang="de-CH" dirty="0"/>
+              <a:t> </a:t>
+            </a:r>
+            <a:r>
+              <a:rPr lang="de-CH" dirty="0" err="1"/>
+              <a:t>by</a:t>
+            </a:r>
+            <a:r>
+              <a:rPr lang="de-CH" dirty="0"/>
+              <a:t> / </a:t>
+            </a:r>
+            <a:r>
+              <a:rPr lang="de-CH" dirty="0" err="1"/>
+              <a:t>range</a:t>
+            </a:r>
+            <a:r>
+              <a:rPr lang="de-CH" dirty="0"/>
+              <a:t> von grossen Tabellen</a:t>
+            </a:r>
+            <a:endParaRPr lang="en-CH" dirty="0"/>
+          </a:p>
+        </p:txBody>
+      </p:sp>
+      <p:sp>
+        <p:nvSpPr>
+          <p:cNvPr id="10" name="TextBox 9">
+            <a:extLst>
+              <a:ext uri="{FF2B5EF4-FFF2-40B4-BE49-F238E27FC236}">
+                <a16:creationId xmlns:a16="http://schemas.microsoft.com/office/drawing/2014/main" id="{5886748E-2E7F-DD4F-824A-BD1658CD26EF}"/>
+              </a:ext>
+            </a:extLst>
+          </p:cNvPr>
+          <p:cNvSpPr txBox="1"/>
+          <p:nvPr/>
+        </p:nvSpPr>
+        <p:spPr>
+          <a:xfrm>
+            <a:off x="529389" y="6458552"/>
+            <a:ext cx="6196151" cy="276999"/>
+          </a:xfrm>
+          <a:prstGeom prst="rect">
+            <a:avLst/>
+          </a:prstGeom>
+          <a:noFill/>
+        </p:spPr>
+        <p:txBody>
+          <a:bodyPr wrap="square" rtlCol="0">
+            <a:spAutoFit/>
+          </a:bodyPr>
+          <a:lstStyle/>
+          <a:p>
+            <a:r>
+              <a:rPr lang="en-CH" sz="1200" dirty="0"/>
+              <a:t>https://github.com/vjaeggi/MemoryOptimizedTables_SQL</a:t>
+            </a:r>
+          </a:p>
+        </p:txBody>
+      </p:sp>
+      <p:pic>
+        <p:nvPicPr>
+          <p:cNvPr id="7" name="Picture 6">
+            <a:extLst>
+              <a:ext uri="{FF2B5EF4-FFF2-40B4-BE49-F238E27FC236}">
+                <a16:creationId xmlns:a16="http://schemas.microsoft.com/office/drawing/2014/main" id="{33C1FD02-19F6-AC5A-ADBC-6272ED31F8CD}"/>
+              </a:ext>
+            </a:extLst>
+          </p:cNvPr>
+          <p:cNvPicPr>
+            <a:picLocks noChangeAspect="1"/>
+          </p:cNvPicPr>
+          <p:nvPr/>
+        </p:nvPicPr>
+        <p:blipFill>
+          <a:blip r:embed="rId2"/>
+          <a:stretch>
+            <a:fillRect/>
+          </a:stretch>
+        </p:blipFill>
+        <p:spPr>
+          <a:xfrm>
+            <a:off x="5900814" y="2030128"/>
+            <a:ext cx="6223809" cy="4324952"/>
+          </a:xfrm>
+          <a:prstGeom prst="rect">
+            <a:avLst/>
+          </a:prstGeom>
+        </p:spPr>
+      </p:pic>
+    </p:spTree>
+    <p:extLst>
+      <p:ext uri="{BB962C8B-B14F-4D97-AF65-F5344CB8AC3E}">
+        <p14:creationId xmlns:p14="http://schemas.microsoft.com/office/powerpoint/2010/main" val="999890976"/>
       </p:ext>
     </p:extLst>
   </p:cSld>
@@ -24890,7 +25152,7 @@
         <p:cNvPr id="1" name="">
           <a:extLst>
             <a:ext uri="{FF2B5EF4-FFF2-40B4-BE49-F238E27FC236}">
-              <a16:creationId xmlns:a16="http://schemas.microsoft.com/office/drawing/2014/main" id="{758697AA-130A-5063-F648-A78B3322D72B}"/>
+              <a16:creationId xmlns:a16="http://schemas.microsoft.com/office/drawing/2014/main" id="{342C703F-356B-6790-BD49-86B5C9625829}"/>
             </a:ext>
           </a:extLst>
         </p:cNvPr>
@@ -24910,7 +25172,7 @@
           <p:cNvPr id="4" name="Text Placeholder 3">
             <a:extLst>
               <a:ext uri="{FF2B5EF4-FFF2-40B4-BE49-F238E27FC236}">
-                <a16:creationId xmlns:a16="http://schemas.microsoft.com/office/drawing/2014/main" id="{B45C6B2A-59DB-929B-9ED2-498F1EF977FB}"/>
+                <a16:creationId xmlns:a16="http://schemas.microsoft.com/office/drawing/2014/main" id="{813EDAB0-92BA-B0E8-8E92-256C22AAF7EE}"/>
               </a:ext>
             </a:extLst>
           </p:cNvPr>
@@ -24923,15 +25185,136 @@
         </p:nvSpPr>
         <p:spPr/>
         <p:txBody>
-          <a:bodyPr/>
+          <a:bodyPr>
+            <a:normAutofit fontScale="92500" lnSpcReduction="20000"/>
+          </a:bodyPr>
           <a:lstStyle/>
           <a:p>
             <a:pPr marL="0" indent="0">
               <a:buNone/>
             </a:pPr>
             <a:r>
-              <a:rPr lang="de-CH" dirty="0"/>
+              <a:rPr lang="de-CH" b="1" dirty="0"/>
               <a:t>Vorteile «in Memory» Table</a:t>
+            </a:r>
+          </a:p>
+          <a:p>
+            <a:r>
+              <a:rPr lang="en-GB" dirty="0"/>
+              <a:t>Sehr schnell </a:t>
+            </a:r>
+            <a:r>
+              <a:rPr lang="en-GB" dirty="0" err="1"/>
+              <a:t>bei</a:t>
+            </a:r>
+            <a:r>
+              <a:rPr lang="en-GB" dirty="0"/>
+              <a:t> </a:t>
+            </a:r>
+            <a:r>
+              <a:rPr lang="en-GB" dirty="0" err="1"/>
+              <a:t>passenden</a:t>
+            </a:r>
+            <a:r>
+              <a:rPr lang="en-GB" dirty="0"/>
+              <a:t> </a:t>
+            </a:r>
+            <a:r>
+              <a:rPr lang="en-GB" dirty="0" err="1"/>
+              <a:t>OLTP</a:t>
+            </a:r>
+            <a:r>
+              <a:rPr lang="en-GB" dirty="0"/>
+              <a:t>-Workloads: </a:t>
+            </a:r>
+            <a:r>
+              <a:rPr lang="en-GB" dirty="0" err="1"/>
+              <a:t>viele</a:t>
+            </a:r>
+            <a:r>
+              <a:rPr lang="en-GB" dirty="0"/>
+              <a:t> </a:t>
+            </a:r>
+            <a:r>
+              <a:rPr lang="en-GB" dirty="0" err="1"/>
+              <a:t>kurze</a:t>
+            </a:r>
+            <a:r>
+              <a:rPr lang="en-GB" dirty="0"/>
+              <a:t> </a:t>
+            </a:r>
+            <a:r>
+              <a:rPr lang="en-GB" dirty="0" err="1"/>
+              <a:t>Transaktionen</a:t>
+            </a:r>
+            <a:r>
+              <a:rPr lang="en-GB" dirty="0"/>
+              <a:t>, „Hot Tables“, Session-/Queue-</a:t>
+            </a:r>
+            <a:r>
+              <a:rPr lang="en-GB" dirty="0" err="1"/>
+              <a:t>Tabellen</a:t>
+            </a:r>
+            <a:endParaRPr lang="en-GB" dirty="0"/>
+          </a:p>
+          <a:p>
+            <a:r>
+              <a:rPr lang="de-DE" dirty="0"/>
+              <a:t>Lock-/Latch-frei (</a:t>
+            </a:r>
+            <a:r>
+              <a:rPr lang="de-DE" dirty="0" err="1"/>
+              <a:t>MVCC</a:t>
+            </a:r>
+            <a:r>
+              <a:rPr lang="de-DE" dirty="0"/>
+              <a:t>) → weniger Blocking, echte Parallelität möglich</a:t>
+            </a:r>
+            <a:endParaRPr lang="de-CH" dirty="0"/>
+          </a:p>
+          <a:p>
+            <a:r>
+              <a:rPr lang="de-DE" dirty="0"/>
+              <a:t>CPU-/Cache-effiziente Datenstrukturen → weniger Engine-Overhead</a:t>
+            </a:r>
+          </a:p>
+          <a:p>
+            <a:r>
+              <a:rPr lang="de-DE" dirty="0"/>
+              <a:t>Vorhersagbare Latenz (kaum I/O-Varianz) → gut für strikte </a:t>
+            </a:r>
+            <a:r>
+              <a:rPr lang="de-DE" dirty="0" err="1"/>
+              <a:t>SLAs</a:t>
+            </a:r>
+            <a:endParaRPr lang="de-DE" dirty="0"/>
+          </a:p>
+          <a:p>
+            <a:r>
+              <a:rPr lang="de-DE" dirty="0"/>
+              <a:t>Low-</a:t>
+            </a:r>
+            <a:r>
+              <a:rPr lang="de-DE" dirty="0" err="1"/>
+              <a:t>Latency</a:t>
+            </a:r>
+            <a:r>
+              <a:rPr lang="de-DE" dirty="0"/>
+              <a:t> (</a:t>
+            </a:r>
+            <a:r>
+              <a:rPr lang="de-DE" dirty="0" err="1"/>
+              <a:t>ms</a:t>
+            </a:r>
+            <a:r>
+              <a:rPr lang="de-DE" dirty="0"/>
+              <a:t>) </a:t>
+            </a:r>
+          </a:p>
+          <a:p>
+            <a:r>
+              <a:rPr lang="de-DE" dirty="0"/>
+              <a:t>Hohe Schreib- / Leseraten</a:t>
             </a:r>
           </a:p>
           <a:p>
@@ -24944,27 +25327,7 @@
             <a:pPr marL="0" indent="0">
               <a:buNone/>
             </a:pPr>
-            <a:r>
-              <a:rPr lang="de-CH" dirty="0"/>
-              <a:t>Sehr gute </a:t>
-            </a:r>
-            <a:r>
-              <a:rPr lang="de-CH" dirty="0" err="1"/>
-              <a:t>performance</a:t>
-            </a:r>
-            <a:r>
-              <a:rPr lang="de-CH" dirty="0"/>
-              <a:t> bei passendem OLTP Workloads (z.B. vielen kurzen Transaktionen, Hot </a:t>
-            </a:r>
-            <a:r>
-              <a:rPr lang="de-CH" dirty="0" err="1"/>
-              <a:t>Tables</a:t>
-            </a:r>
-            <a:r>
-              <a:rPr lang="de-CH" dirty="0"/>
-              <a:t>, Sessions- oder Queue Tabellen)</a:t>
-            </a:r>
-            <a:endParaRPr lang="en-CH" dirty="0"/>
+            <a:endParaRPr lang="de-CH" dirty="0"/>
           </a:p>
         </p:txBody>
       </p:sp>
@@ -24973,7 +25336,7 @@
           <p:cNvPr id="10" name="TextBox 9">
             <a:extLst>
               <a:ext uri="{FF2B5EF4-FFF2-40B4-BE49-F238E27FC236}">
-                <a16:creationId xmlns:a16="http://schemas.microsoft.com/office/drawing/2014/main" id="{AB16D7DB-5E2A-6B86-41D0-E5CBC398E3E8}"/>
+                <a16:creationId xmlns:a16="http://schemas.microsoft.com/office/drawing/2014/main" id="{0EB7F73D-6562-3767-79B6-BB7AD2175159}"/>
               </a:ext>
             </a:extLst>
           </p:cNvPr>
@@ -25008,7 +25371,7 @@
           <p:cNvPr id="5" name="Title 4">
             <a:extLst>
               <a:ext uri="{FF2B5EF4-FFF2-40B4-BE49-F238E27FC236}">
-                <a16:creationId xmlns:a16="http://schemas.microsoft.com/office/drawing/2014/main" id="{C43DC06B-5030-4835-4B43-6F2243728419}"/>
+                <a16:creationId xmlns:a16="http://schemas.microsoft.com/office/drawing/2014/main" id="{C9F9AE33-FF9F-F082-6024-01F13B77287E}"/>
               </a:ext>
             </a:extLst>
           </p:cNvPr>
@@ -25026,7 +25389,7 @@
           <a:p>
             <a:r>
               <a:rPr lang="de-CH" dirty="0"/>
-              <a:t>Beispiel Nachteil Memory </a:t>
+              <a:t>Vor- und Nachteile  Memory </a:t>
             </a:r>
             <a:r>
               <a:rPr lang="de-CH" dirty="0" err="1"/>
@@ -25034,23 +25397,7 @@
             </a:r>
             <a:r>
               <a:rPr lang="de-CH" dirty="0"/>
-              <a:t> </a:t>
-            </a:r>
-            <a:r>
-              <a:rPr lang="de-CH" dirty="0" err="1"/>
-              <a:t>vs</a:t>
-            </a:r>
-            <a:r>
-              <a:rPr lang="de-CH" dirty="0"/>
-              <a:t>  «in </a:t>
-            </a:r>
-            <a:r>
-              <a:rPr lang="de-CH" dirty="0" err="1"/>
-              <a:t>disk</a:t>
-            </a:r>
-            <a:r>
-              <a:rPr lang="de-CH" dirty="0"/>
-              <a:t>» Table</a:t>
+              <a:t> Table</a:t>
             </a:r>
             <a:endParaRPr lang="en-CH" dirty="0"/>
           </a:p>
@@ -25061,7 +25408,7 @@
           <p:cNvPr id="6" name="Text Placeholder 3">
             <a:extLst>
               <a:ext uri="{FF2B5EF4-FFF2-40B4-BE49-F238E27FC236}">
-                <a16:creationId xmlns:a16="http://schemas.microsoft.com/office/drawing/2014/main" id="{960107AE-A633-3686-BA66-ABC783266DDF}"/>
+                <a16:creationId xmlns:a16="http://schemas.microsoft.com/office/drawing/2014/main" id="{695D688A-C6E7-DE12-6A34-6AD9356B2CC8}"/>
               </a:ext>
             </a:extLst>
           </p:cNvPr>
@@ -25074,6 +25421,462 @@
           <a:xfrm>
             <a:off x="6174536" y="2170176"/>
             <a:ext cx="5166360" cy="4184904"/>
+          </a:xfrm>
+          <a:prstGeom prst="rect">
+            <a:avLst/>
+          </a:prstGeom>
+        </p:spPr>
+        <p:txBody>
+          <a:bodyPr vert="horz" lIns="91440" tIns="45720" rIns="91440" bIns="45720" rtlCol="0">
+            <a:normAutofit fontScale="92500" lnSpcReduction="20000"/>
+          </a:bodyPr>
+          <a:lstStyle>
+            <a:lvl1pPr marL="228600" indent="-228600" algn="l" defTabSz="914400" rtl="0" eaLnBrk="1" latinLnBrk="0" hangingPunct="1">
+              <a:lnSpc>
+                <a:spcPct val="120000"/>
+              </a:lnSpc>
+              <a:spcBef>
+                <a:spcPts val="1000"/>
+              </a:spcBef>
+              <a:buFont typeface="Arial" panose="020B0604020202020204" pitchFamily="34" charset="0"/>
+              <a:buChar char="•"/>
+              <a:defRPr sz="1800" kern="1200">
+                <a:solidFill>
+                  <a:schemeClr val="tx1"/>
+                </a:solidFill>
+                <a:latin typeface="+mn-lt"/>
+                <a:ea typeface="+mn-ea"/>
+                <a:cs typeface="+mn-cs"/>
+              </a:defRPr>
+            </a:lvl1pPr>
+            <a:lvl2pPr marL="457200" indent="-228600" algn="l" defTabSz="914400" rtl="0" eaLnBrk="1" latinLnBrk="0" hangingPunct="1">
+              <a:lnSpc>
+                <a:spcPct val="120000"/>
+              </a:lnSpc>
+              <a:spcBef>
+                <a:spcPts val="500"/>
+              </a:spcBef>
+              <a:buFont typeface="Arial" panose="020B0604020202020204" pitchFamily="34" charset="0"/>
+              <a:buChar char="•"/>
+              <a:defRPr sz="1600" kern="1200">
+                <a:solidFill>
+                  <a:schemeClr val="tx1"/>
+                </a:solidFill>
+                <a:latin typeface="+mn-lt"/>
+                <a:ea typeface="+mn-ea"/>
+                <a:cs typeface="+mn-cs"/>
+              </a:defRPr>
+            </a:lvl2pPr>
+            <a:lvl3pPr marL="685800" indent="-228600" algn="l" defTabSz="914400" rtl="0" eaLnBrk="1" latinLnBrk="0" hangingPunct="1">
+              <a:lnSpc>
+                <a:spcPct val="120000"/>
+              </a:lnSpc>
+              <a:spcBef>
+                <a:spcPts val="500"/>
+              </a:spcBef>
+              <a:buFont typeface="Arial" panose="020B0604020202020204" pitchFamily="34" charset="0"/>
+              <a:buChar char="•"/>
+              <a:defRPr sz="1400" kern="1200">
+                <a:solidFill>
+                  <a:schemeClr val="tx1"/>
+                </a:solidFill>
+                <a:latin typeface="+mn-lt"/>
+                <a:ea typeface="+mn-ea"/>
+                <a:cs typeface="+mn-cs"/>
+              </a:defRPr>
+            </a:lvl3pPr>
+            <a:lvl4pPr marL="914400" indent="-228600" algn="l" defTabSz="914400" rtl="0" eaLnBrk="1" latinLnBrk="0" hangingPunct="1">
+              <a:lnSpc>
+                <a:spcPct val="120000"/>
+              </a:lnSpc>
+              <a:spcBef>
+                <a:spcPts val="500"/>
+              </a:spcBef>
+              <a:buFont typeface="Arial" panose="020B0604020202020204" pitchFamily="34" charset="0"/>
+              <a:buChar char="•"/>
+              <a:defRPr sz="1400" kern="1200">
+                <a:solidFill>
+                  <a:schemeClr val="tx1"/>
+                </a:solidFill>
+                <a:latin typeface="+mn-lt"/>
+                <a:ea typeface="+mn-ea"/>
+                <a:cs typeface="+mn-cs"/>
+              </a:defRPr>
+            </a:lvl4pPr>
+            <a:lvl5pPr marL="1143000" indent="-228600" algn="l" defTabSz="914400" rtl="0" eaLnBrk="1" latinLnBrk="0" hangingPunct="1">
+              <a:lnSpc>
+                <a:spcPct val="120000"/>
+              </a:lnSpc>
+              <a:spcBef>
+                <a:spcPts val="500"/>
+              </a:spcBef>
+              <a:buFont typeface="Arial" panose="020B0604020202020204" pitchFamily="34" charset="0"/>
+              <a:buChar char="•"/>
+              <a:defRPr sz="1400" kern="1200">
+                <a:solidFill>
+                  <a:schemeClr val="tx1"/>
+                </a:solidFill>
+                <a:latin typeface="+mn-lt"/>
+                <a:ea typeface="+mn-ea"/>
+                <a:cs typeface="+mn-cs"/>
+              </a:defRPr>
+            </a:lvl5pPr>
+            <a:lvl6pPr marL="2514600" indent="-228600" algn="l" defTabSz="914400" rtl="0" eaLnBrk="1" latinLnBrk="0" hangingPunct="1">
+              <a:lnSpc>
+                <a:spcPct val="90000"/>
+              </a:lnSpc>
+              <a:spcBef>
+                <a:spcPts val="500"/>
+              </a:spcBef>
+              <a:buFont typeface="Arial" panose="020B0604020202020204" pitchFamily="34" charset="0"/>
+              <a:buChar char="•"/>
+              <a:defRPr sz="1800" kern="1200">
+                <a:solidFill>
+                  <a:schemeClr val="tx1"/>
+                </a:solidFill>
+                <a:latin typeface="+mn-lt"/>
+                <a:ea typeface="+mn-ea"/>
+                <a:cs typeface="+mn-cs"/>
+              </a:defRPr>
+            </a:lvl6pPr>
+            <a:lvl7pPr marL="2971800" indent="-228600" algn="l" defTabSz="914400" rtl="0" eaLnBrk="1" latinLnBrk="0" hangingPunct="1">
+              <a:lnSpc>
+                <a:spcPct val="90000"/>
+              </a:lnSpc>
+              <a:spcBef>
+                <a:spcPts val="500"/>
+              </a:spcBef>
+              <a:buFont typeface="Arial" panose="020B0604020202020204" pitchFamily="34" charset="0"/>
+              <a:buChar char="•"/>
+              <a:defRPr sz="1800" kern="1200">
+                <a:solidFill>
+                  <a:schemeClr val="tx1"/>
+                </a:solidFill>
+                <a:latin typeface="+mn-lt"/>
+                <a:ea typeface="+mn-ea"/>
+                <a:cs typeface="+mn-cs"/>
+              </a:defRPr>
+            </a:lvl7pPr>
+            <a:lvl8pPr marL="3429000" indent="-228600" algn="l" defTabSz="914400" rtl="0" eaLnBrk="1" latinLnBrk="0" hangingPunct="1">
+              <a:lnSpc>
+                <a:spcPct val="90000"/>
+              </a:lnSpc>
+              <a:spcBef>
+                <a:spcPts val="500"/>
+              </a:spcBef>
+              <a:buFont typeface="Arial" panose="020B0604020202020204" pitchFamily="34" charset="0"/>
+              <a:buChar char="•"/>
+              <a:defRPr sz="1800" kern="1200">
+                <a:solidFill>
+                  <a:schemeClr val="tx1"/>
+                </a:solidFill>
+                <a:latin typeface="+mn-lt"/>
+                <a:ea typeface="+mn-ea"/>
+                <a:cs typeface="+mn-cs"/>
+              </a:defRPr>
+            </a:lvl8pPr>
+            <a:lvl9pPr marL="3886200" indent="-228600" algn="l" defTabSz="914400" rtl="0" eaLnBrk="1" latinLnBrk="0" hangingPunct="1">
+              <a:lnSpc>
+                <a:spcPct val="90000"/>
+              </a:lnSpc>
+              <a:spcBef>
+                <a:spcPts val="500"/>
+              </a:spcBef>
+              <a:buFont typeface="Arial" panose="020B0604020202020204" pitchFamily="34" charset="0"/>
+              <a:buChar char="•"/>
+              <a:defRPr sz="1800" kern="1200">
+                <a:solidFill>
+                  <a:schemeClr val="tx1"/>
+                </a:solidFill>
+                <a:latin typeface="+mn-lt"/>
+                <a:ea typeface="+mn-ea"/>
+                <a:cs typeface="+mn-cs"/>
+              </a:defRPr>
+            </a:lvl9pPr>
+          </a:lstStyle>
+          <a:p>
+            <a:pPr marL="0" indent="0">
+              <a:buFont typeface="Arial" panose="020B0604020202020204" pitchFamily="34" charset="0"/>
+              <a:buNone/>
+            </a:pPr>
+            <a:r>
+              <a:rPr lang="de-CH" b="1" dirty="0"/>
+              <a:t>Nachteile «in Memory» Table</a:t>
+            </a:r>
+          </a:p>
+          <a:p>
+            <a:r>
+              <a:rPr lang="de-DE" dirty="0"/>
+              <a:t>RAM ist der begrenzende Faktor (Daten + Indexe + Versionen)</a:t>
+            </a:r>
+          </a:p>
+          <a:p>
+            <a:r>
+              <a:rPr lang="en-GB" dirty="0"/>
+              <a:t>Design/Tuning </a:t>
+            </a:r>
+            <a:r>
+              <a:rPr lang="en-GB" dirty="0" err="1"/>
+              <a:t>wichtig</a:t>
+            </a:r>
+            <a:r>
+              <a:rPr lang="en-GB" dirty="0"/>
+              <a:t>: </a:t>
+            </a:r>
+            <a:r>
+              <a:rPr lang="en-GB" dirty="0" err="1"/>
+              <a:t>Indexwahl</a:t>
+            </a:r>
+            <a:r>
+              <a:rPr lang="en-GB" dirty="0"/>
+              <a:t> (Hash = = Lookups, Range = </a:t>
+            </a:r>
+            <a:r>
+              <a:rPr lang="en-GB" dirty="0" err="1"/>
+              <a:t>Bereiche</a:t>
+            </a:r>
+            <a:r>
+              <a:rPr lang="en-GB" dirty="0"/>
+              <a:t>/</a:t>
+            </a:r>
+            <a:r>
+              <a:rPr lang="en-GB" dirty="0" err="1"/>
+              <a:t>Sortierung</a:t>
+            </a:r>
+            <a:r>
+              <a:rPr lang="en-GB" dirty="0"/>
+              <a:t>), </a:t>
+            </a:r>
+            <a:r>
+              <a:rPr lang="en-GB" dirty="0" err="1"/>
+              <a:t>BUCKET_COUNT</a:t>
+            </a:r>
+            <a:endParaRPr lang="en-GB" dirty="0"/>
+          </a:p>
+          <a:p>
+            <a:r>
+              <a:rPr lang="de-DE" dirty="0"/>
+              <a:t>Einschränkungen bei Datentypen/Features (je nach SQL-Version/Objekt)</a:t>
+            </a:r>
+          </a:p>
+          <a:p>
+            <a:r>
+              <a:rPr lang="en-GB" dirty="0"/>
+              <a:t>Recovery/</a:t>
+            </a:r>
+            <a:r>
+              <a:rPr lang="en-GB" dirty="0" err="1"/>
+              <a:t>Startverhalten</a:t>
+            </a:r>
+            <a:r>
+              <a:rPr lang="en-GB" dirty="0"/>
+              <a:t> </a:t>
+            </a:r>
+            <a:r>
+              <a:rPr lang="en-GB" dirty="0" err="1"/>
+              <a:t>beachten</a:t>
+            </a:r>
+            <a:r>
+              <a:rPr lang="en-GB" dirty="0"/>
+              <a:t>: „Cold Start“ = </a:t>
+            </a:r>
+            <a:r>
+              <a:rPr lang="en-GB" dirty="0" err="1"/>
+              <a:t>leerer</a:t>
+            </a:r>
+            <a:r>
+              <a:rPr lang="en-GB" dirty="0"/>
+              <a:t> cache, </a:t>
+            </a:r>
+            <a:r>
+              <a:rPr lang="en-GB" dirty="0" err="1"/>
+              <a:t>Persistenz</a:t>
+            </a:r>
+            <a:r>
+              <a:rPr lang="en-GB" dirty="0"/>
+              <a:t> </a:t>
+            </a:r>
+            <a:r>
+              <a:rPr lang="en-GB" dirty="0" err="1"/>
+              <a:t>über</a:t>
+            </a:r>
+            <a:r>
+              <a:rPr lang="en-GB" dirty="0"/>
+              <a:t> Checkpoint-</a:t>
+            </a:r>
+            <a:r>
+              <a:rPr lang="en-GB" dirty="0" err="1"/>
+              <a:t>Dateien</a:t>
+            </a:r>
+            <a:r>
+              <a:rPr lang="en-GB" dirty="0"/>
+              <a:t> → Load/Recovery </a:t>
+            </a:r>
+            <a:r>
+              <a:rPr lang="en-GB" dirty="0" err="1"/>
+              <a:t>planen</a:t>
+            </a:r>
+            <a:endParaRPr lang="en-GB" dirty="0"/>
+          </a:p>
+          <a:p>
+            <a:r>
+              <a:rPr lang="de-DE" dirty="0"/>
+              <a:t>Memory </a:t>
+            </a:r>
+            <a:r>
+              <a:rPr lang="de-DE" dirty="0" err="1"/>
+              <a:t>Pressure</a:t>
+            </a:r>
+            <a:r>
+              <a:rPr lang="de-DE" dirty="0"/>
+              <a:t>/Fragmentierung möglich → Monitoring &amp; Wartung einplanen</a:t>
+            </a:r>
+            <a:endParaRPr lang="de-CH" dirty="0"/>
+          </a:p>
+        </p:txBody>
+      </p:sp>
+    </p:spTree>
+    <p:extLst>
+      <p:ext uri="{BB962C8B-B14F-4D97-AF65-F5344CB8AC3E}">
+        <p14:creationId xmlns:p14="http://schemas.microsoft.com/office/powerpoint/2010/main" val="3719485627"/>
+      </p:ext>
+    </p:extLst>
+  </p:cSld>
+  <p:clrMapOvr>
+    <a:masterClrMapping/>
+  </p:clrMapOvr>
+</p:sld>
+</file>
+
+<file path=ppt/slides/slide9.xml><?xml version="1.0" encoding="utf-8"?>
+<p:sld xmlns:a="http://schemas.openxmlformats.org/drawingml/2006/main" xmlns:r="http://schemas.openxmlformats.org/officeDocument/2006/relationships" xmlns:p="http://schemas.openxmlformats.org/presentationml/2006/main">
+  <p:cSld>
+    <p:spTree>
+      <p:nvGrpSpPr>
+        <p:cNvPr id="1" name="">
+          <a:extLst>
+            <a:ext uri="{FF2B5EF4-FFF2-40B4-BE49-F238E27FC236}">
+              <a16:creationId xmlns:a16="http://schemas.microsoft.com/office/drawing/2014/main" id="{7519E908-FF56-80A1-1DB0-92C58CC60B98}"/>
+            </a:ext>
+          </a:extLst>
+        </p:cNvPr>
+        <p:cNvGrpSpPr/>
+        <p:nvPr/>
+      </p:nvGrpSpPr>
+      <p:grpSpPr>
+        <a:xfrm>
+          <a:off x="0" y="0"/>
+          <a:ext cx="0" cy="0"/>
+          <a:chOff x="0" y="0"/>
+          <a:chExt cx="0" cy="0"/>
+        </a:xfrm>
+      </p:grpSpPr>
+      <p:sp>
+        <p:nvSpPr>
+          <p:cNvPr id="10" name="TextBox 9">
+            <a:extLst>
+              <a:ext uri="{FF2B5EF4-FFF2-40B4-BE49-F238E27FC236}">
+                <a16:creationId xmlns:a16="http://schemas.microsoft.com/office/drawing/2014/main" id="{2126D008-C956-735F-189B-6307C9852D66}"/>
+              </a:ext>
+            </a:extLst>
+          </p:cNvPr>
+          <p:cNvSpPr txBox="1"/>
+          <p:nvPr/>
+        </p:nvSpPr>
+        <p:spPr>
+          <a:xfrm>
+            <a:off x="529389" y="6458552"/>
+            <a:ext cx="6196151" cy="276999"/>
+          </a:xfrm>
+          <a:prstGeom prst="rect">
+            <a:avLst/>
+          </a:prstGeom>
+          <a:noFill/>
+        </p:spPr>
+        <p:txBody>
+          <a:bodyPr wrap="square" rtlCol="0">
+            <a:spAutoFit/>
+          </a:bodyPr>
+          <a:lstStyle/>
+          <a:p>
+            <a:r>
+              <a:rPr lang="en-CH" sz="1200" dirty="0"/>
+              <a:t>https://github.com/vjaeggi/MemoryOptimizedTables_SQL</a:t>
+            </a:r>
+          </a:p>
+        </p:txBody>
+      </p:sp>
+      <p:sp>
+        <p:nvSpPr>
+          <p:cNvPr id="5" name="Title 4">
+            <a:extLst>
+              <a:ext uri="{FF2B5EF4-FFF2-40B4-BE49-F238E27FC236}">
+                <a16:creationId xmlns:a16="http://schemas.microsoft.com/office/drawing/2014/main" id="{EE97757E-FA24-EF40-84A0-232207D10213}"/>
+              </a:ext>
+            </a:extLst>
+          </p:cNvPr>
+          <p:cNvSpPr>
+            <a:spLocks noGrp="1"/>
+          </p:cNvSpPr>
+          <p:nvPr>
+            <p:ph type="title"/>
+          </p:nvPr>
+        </p:nvSpPr>
+        <p:spPr/>
+        <p:txBody>
+          <a:bodyPr/>
+          <a:lstStyle/>
+          <a:p>
+            <a:r>
+              <a:rPr lang="de-CH" dirty="0"/>
+              <a:t>Beispiel Nachteil Memory </a:t>
+            </a:r>
+            <a:r>
+              <a:rPr lang="de-CH" dirty="0" err="1"/>
+              <a:t>Optimized</a:t>
+            </a:r>
+            <a:r>
+              <a:rPr lang="de-CH" dirty="0"/>
+              <a:t> </a:t>
+            </a:r>
+            <a:r>
+              <a:rPr lang="de-CH" dirty="0" err="1"/>
+              <a:t>vs</a:t>
+            </a:r>
+            <a:r>
+              <a:rPr lang="de-CH" dirty="0"/>
+              <a:t>  «in </a:t>
+            </a:r>
+            <a:r>
+              <a:rPr lang="de-CH" dirty="0" err="1"/>
+              <a:t>disk</a:t>
+            </a:r>
+            <a:r>
+              <a:rPr lang="de-CH" dirty="0"/>
+              <a:t>» Table</a:t>
+            </a:r>
+            <a:endParaRPr lang="en-CH" dirty="0"/>
+          </a:p>
+        </p:txBody>
+      </p:sp>
+      <p:sp>
+        <p:nvSpPr>
+          <p:cNvPr id="6" name="Text Placeholder 3">
+            <a:extLst>
+              <a:ext uri="{FF2B5EF4-FFF2-40B4-BE49-F238E27FC236}">
+                <a16:creationId xmlns:a16="http://schemas.microsoft.com/office/drawing/2014/main" id="{3F8B9DBB-D2C3-EDCD-B8FB-B9FEF895E9D9}"/>
+              </a:ext>
+            </a:extLst>
+          </p:cNvPr>
+          <p:cNvSpPr txBox="1">
+            <a:spLocks/>
+          </p:cNvSpPr>
+          <p:nvPr/>
+        </p:nvSpPr>
+        <p:spPr>
+          <a:xfrm>
+            <a:off x="8827805" y="2170176"/>
+            <a:ext cx="3147075" cy="4184904"/>
           </a:xfrm>
           <a:prstGeom prst="rect">
             <a:avLst/>
@@ -25254,8 +26057,63 @@
             </a:pPr>
             <a:r>
               <a:rPr lang="de-CH" dirty="0"/>
-              <a:t>Nachteile «in Memory» Table</a:t>
-            </a:r>
+              <a:t>Die in </a:t>
+            </a:r>
+            <a:r>
+              <a:rPr lang="de-CH" dirty="0" err="1"/>
+              <a:t>disk</a:t>
+            </a:r>
+            <a:r>
+              <a:rPr lang="de-CH" dirty="0"/>
+              <a:t> Table schneller als </a:t>
+            </a:r>
+            <a:r>
+              <a:rPr lang="de-CH" dirty="0" err="1"/>
+              <a:t>MOT</a:t>
+            </a:r>
+            <a:r>
+              <a:rPr lang="de-CH" dirty="0"/>
+              <a:t> bei leeren Daten da </a:t>
+            </a:r>
+            <a:r>
+              <a:rPr lang="de-CH" dirty="0" err="1"/>
+              <a:t>MOT</a:t>
+            </a:r>
+            <a:r>
+              <a:rPr lang="de-CH" dirty="0"/>
+              <a:t> die gesamte Hash-Tabelle durchgehen (</a:t>
+            </a:r>
+            <a:r>
+              <a:rPr lang="de-CH" dirty="0" err="1"/>
+              <a:t>lookup</a:t>
+            </a:r>
+            <a:r>
+              <a:rPr lang="de-CH" dirty="0"/>
+              <a:t>) muss. </a:t>
+            </a:r>
+          </a:p>
+          <a:p>
+            <a:pPr marL="0" indent="0">
+              <a:buFont typeface="Arial" panose="020B0604020202020204" pitchFamily="34" charset="0"/>
+              <a:buNone/>
+            </a:pPr>
+            <a:r>
+              <a:rPr lang="de-CH" dirty="0"/>
+              <a:t>= </a:t>
+            </a:r>
+            <a:r>
+              <a:rPr lang="de-CH" dirty="0" err="1"/>
+              <a:t>overhead</a:t>
+            </a:r>
+            <a:r>
+              <a:rPr lang="de-CH" dirty="0"/>
+              <a:t> </a:t>
+            </a:r>
+            <a:r>
+              <a:rPr lang="de-CH" dirty="0" err="1"/>
+              <a:t>MOT</a:t>
+            </a:r>
+            <a:endParaRPr lang="de-CH" dirty="0"/>
           </a:p>
           <a:p>
             <a:pPr marL="0" indent="0">
@@ -25264,1979 +26122,72 @@
             </a:pPr>
             <a:endParaRPr lang="de-CH" dirty="0"/>
           </a:p>
-          <a:p>
-            <a:pPr marL="0" indent="0">
-              <a:buFont typeface="Arial" panose="020B0604020202020204" pitchFamily="34" charset="0"/>
-              <a:buNone/>
-            </a:pPr>
-            <a:r>
-              <a:rPr lang="de-CH" dirty="0"/>
-              <a:t>Über RAM begrenzt</a:t>
-            </a:r>
-          </a:p>
-          <a:p>
-            <a:pPr marL="0" indent="0">
-              <a:buFont typeface="Arial" panose="020B0604020202020204" pitchFamily="34" charset="0"/>
-              <a:buNone/>
-            </a:pPr>
-            <a:r>
-              <a:rPr lang="de-CH" dirty="0"/>
-              <a:t>Datentypen Constraints</a:t>
-            </a:r>
-          </a:p>
-        </p:txBody>
-      </p:sp>
+        </p:txBody>
+      </p:sp>
+      <p:pic>
+        <p:nvPicPr>
+          <p:cNvPr id="3" name="Picture 2">
+            <a:extLst>
+              <a:ext uri="{FF2B5EF4-FFF2-40B4-BE49-F238E27FC236}">
+                <a16:creationId xmlns:a16="http://schemas.microsoft.com/office/drawing/2014/main" id="{5F7AF2A1-5D0A-133F-8176-A888800E25C8}"/>
+              </a:ext>
+            </a:extLst>
+          </p:cNvPr>
+          <p:cNvPicPr>
+            <a:picLocks noChangeAspect="1"/>
+          </p:cNvPicPr>
+          <p:nvPr/>
+        </p:nvPicPr>
+        <p:blipFill>
+          <a:blip r:embed="rId2"/>
+          <a:stretch>
+            <a:fillRect/>
+          </a:stretch>
+        </p:blipFill>
+        <p:spPr>
+          <a:xfrm>
+            <a:off x="217120" y="2028819"/>
+            <a:ext cx="4304660" cy="4394465"/>
+          </a:xfrm>
+          <a:prstGeom prst="rect">
+            <a:avLst/>
+          </a:prstGeom>
+        </p:spPr>
+      </p:pic>
+      <p:pic>
+        <p:nvPicPr>
+          <p:cNvPr id="11" name="Picture 10">
+            <a:extLst>
+              <a:ext uri="{FF2B5EF4-FFF2-40B4-BE49-F238E27FC236}">
+                <a16:creationId xmlns:a16="http://schemas.microsoft.com/office/drawing/2014/main" id="{1B069E2F-F4F2-5186-42A0-0575F01A8BE9}"/>
+              </a:ext>
+            </a:extLst>
+          </p:cNvPr>
+          <p:cNvPicPr>
+            <a:picLocks noChangeAspect="1"/>
+          </p:cNvPicPr>
+          <p:nvPr/>
+        </p:nvPicPr>
+        <p:blipFill>
+          <a:blip r:embed="rId3"/>
+          <a:stretch>
+            <a:fillRect/>
+          </a:stretch>
+        </p:blipFill>
+        <p:spPr>
+          <a:xfrm>
+            <a:off x="4730350" y="2767864"/>
+            <a:ext cx="4027366" cy="3280524"/>
+          </a:xfrm>
+          <a:prstGeom prst="rect">
+            <a:avLst/>
+          </a:prstGeom>
+        </p:spPr>
+      </p:pic>
     </p:spTree>
     <p:extLst>
       <p:ext uri="{BB962C8B-B14F-4D97-AF65-F5344CB8AC3E}">
-        <p14:creationId xmlns:p14="http://schemas.microsoft.com/office/powerpoint/2010/main" val="335068550"/>
-      </p:ext>
-    </p:extLst>
-  </p:cSld>
-  <p:clrMapOvr>
-    <a:masterClrMapping/>
-  </p:clrMapOvr>
-</p:sld>
-</file>
-
-<file path=ppt/slides/slide9.xml><?xml version="1.0" encoding="utf-8"?>
-<p:sld xmlns:a="http://schemas.openxmlformats.org/drawingml/2006/main" xmlns:r="http://schemas.openxmlformats.org/officeDocument/2006/relationships" xmlns:p="http://schemas.openxmlformats.org/presentationml/2006/main">
-  <p:cSld>
-    <p:spTree>
-      <p:nvGrpSpPr>
-        <p:cNvPr id="1" name=""/>
-        <p:cNvGrpSpPr/>
-        <p:nvPr/>
-      </p:nvGrpSpPr>
-      <p:grpSpPr>
-        <a:xfrm>
-          <a:off x="0" y="0"/>
-          <a:ext cx="0" cy="0"/>
-          <a:chOff x="0" y="0"/>
-          <a:chExt cx="0" cy="0"/>
-        </a:xfrm>
-      </p:grpSpPr>
-      <p:sp>
-        <p:nvSpPr>
-          <p:cNvPr id="2" name="Title 1">
-            <a:extLst>
-              <a:ext uri="{FF2B5EF4-FFF2-40B4-BE49-F238E27FC236}">
-                <a16:creationId xmlns:a16="http://schemas.microsoft.com/office/drawing/2014/main" id="{3E460989-2BA5-C934-C371-59ABD89AF6F2}"/>
-              </a:ext>
-            </a:extLst>
-          </p:cNvPr>
-          <p:cNvSpPr>
-            <a:spLocks noGrp="1"/>
-          </p:cNvSpPr>
-          <p:nvPr>
-            <p:ph type="title"/>
-          </p:nvPr>
-        </p:nvSpPr>
-        <p:spPr/>
-        <p:txBody>
-          <a:bodyPr/>
-          <a:lstStyle/>
-          <a:p>
-            <a:r>
-              <a:rPr lang="de-CH" dirty="0"/>
-              <a:t>Anhang</a:t>
-            </a:r>
-            <a:endParaRPr lang="en-CH" dirty="0"/>
-          </a:p>
-        </p:txBody>
-      </p:sp>
-      <p:sp>
-        <p:nvSpPr>
-          <p:cNvPr id="3" name="Content Placeholder 2">
-            <a:extLst>
-              <a:ext uri="{FF2B5EF4-FFF2-40B4-BE49-F238E27FC236}">
-                <a16:creationId xmlns:a16="http://schemas.microsoft.com/office/drawing/2014/main" id="{21373E59-A7C9-BFB4-08BB-DC39FC4EDCD5}"/>
-              </a:ext>
-            </a:extLst>
-          </p:cNvPr>
-          <p:cNvSpPr>
-            <a:spLocks noGrp="1"/>
-          </p:cNvSpPr>
-          <p:nvPr>
-            <p:ph sz="quarter" idx="13"/>
-          </p:nvPr>
-        </p:nvSpPr>
-        <p:spPr>
-          <a:xfrm>
-            <a:off x="7332292" y="1103861"/>
-            <a:ext cx="4060072" cy="1797350"/>
-          </a:xfrm>
-        </p:spPr>
-        <p:txBody>
-          <a:bodyPr/>
-          <a:lstStyle/>
-          <a:p>
-            <a:r>
-              <a:rPr lang="de-DE" dirty="0"/>
-              <a:t>In einer Transaktion können beide Typen kombiniert werden, meist mit READ </a:t>
-            </a:r>
-            <a:r>
-              <a:rPr lang="de-DE" dirty="0" err="1"/>
-              <a:t>COMMITTED</a:t>
-            </a:r>
-            <a:r>
-              <a:rPr lang="de-DE" dirty="0"/>
-              <a:t> für Disk‑Tabellen und </a:t>
-            </a:r>
-            <a:r>
-              <a:rPr lang="de-DE" dirty="0" err="1"/>
-              <a:t>SERIALIZABLE</a:t>
-            </a:r>
-            <a:r>
-              <a:rPr lang="de-DE" dirty="0"/>
-              <a:t>‑ähnlicher Isolation für in </a:t>
-            </a:r>
-            <a:r>
-              <a:rPr lang="de-DE" dirty="0" err="1"/>
-              <a:t>memory</a:t>
-            </a:r>
-            <a:r>
-              <a:rPr lang="de-DE" dirty="0"/>
-              <a:t> Tabellen</a:t>
-            </a:r>
-            <a:endParaRPr lang="en-CH" dirty="0"/>
-          </a:p>
-        </p:txBody>
-      </p:sp>
-      <p:graphicFrame>
-        <p:nvGraphicFramePr>
-          <p:cNvPr id="4" name="Table 3">
-            <a:extLst>
-              <a:ext uri="{FF2B5EF4-FFF2-40B4-BE49-F238E27FC236}">
-                <a16:creationId xmlns:a16="http://schemas.microsoft.com/office/drawing/2014/main" id="{E732A028-81D2-DDC3-10A8-350E9A730978}"/>
-              </a:ext>
-            </a:extLst>
-          </p:cNvPr>
-          <p:cNvGraphicFramePr>
-            <a:graphicFrameLocks noGrp="1"/>
-          </p:cNvGraphicFramePr>
-          <p:nvPr>
-            <p:extLst>
-              <p:ext uri="{D42A27DB-BD31-4B8C-83A1-F6EECF244321}">
-                <p14:modId xmlns:p14="http://schemas.microsoft.com/office/powerpoint/2010/main" val="4085196458"/>
-              </p:ext>
-            </p:extLst>
-          </p:nvPr>
-        </p:nvGraphicFramePr>
-        <p:xfrm>
-          <a:off x="612648" y="1554520"/>
-          <a:ext cx="5770512" cy="4581104"/>
-        </p:xfrm>
-        <a:graphic>
-          <a:graphicData uri="http://schemas.openxmlformats.org/drawingml/2006/table">
-            <a:tbl>
-              <a:tblPr/>
-              <a:tblGrid>
-                <a:gridCol w="1923504">
-                  <a:extLst>
-                    <a:ext uri="{9D8B030D-6E8A-4147-A177-3AD203B41FA5}">
-                      <a16:colId xmlns:a16="http://schemas.microsoft.com/office/drawing/2014/main" val="2619766692"/>
-                    </a:ext>
-                  </a:extLst>
-                </a:gridCol>
-                <a:gridCol w="1923504">
-                  <a:extLst>
-                    <a:ext uri="{9D8B030D-6E8A-4147-A177-3AD203B41FA5}">
-                      <a16:colId xmlns:a16="http://schemas.microsoft.com/office/drawing/2014/main" val="18921312"/>
-                    </a:ext>
-                  </a:extLst>
-                </a:gridCol>
-                <a:gridCol w="1923504">
-                  <a:extLst>
-                    <a:ext uri="{9D8B030D-6E8A-4147-A177-3AD203B41FA5}">
-                      <a16:colId xmlns:a16="http://schemas.microsoft.com/office/drawing/2014/main" val="1624438146"/>
-                    </a:ext>
-                  </a:extLst>
-                </a:gridCol>
-              </a:tblGrid>
-              <a:tr h="325981">
-                <a:tc>
-                  <a:txBody>
-                    <a:bodyPr/>
-                    <a:lstStyle/>
-                    <a:p>
-                      <a:pPr algn="l">
-                        <a:buNone/>
-                      </a:pPr>
-                      <a:endParaRPr lang="en-GB" sz="900" dirty="0">
-                        <a:effectLst/>
-                      </a:endParaRPr>
-                    </a:p>
-                  </a:txBody>
-                  <a:tcPr marL="40143" marR="40143" marT="40143" marB="40143" anchor="ctr">
-                    <a:lnL w="9525" cap="flat" cmpd="sng" algn="ctr">
-                      <a:solidFill>
-                        <a:srgbClr val="DDDDDD"/>
-                      </a:solidFill>
-                      <a:prstDash val="solid"/>
-                      <a:round/>
-                      <a:headEnd type="none" w="med" len="med"/>
-                      <a:tailEnd type="none" w="med" len="med"/>
-                    </a:lnL>
-                    <a:lnR w="9525" cap="flat" cmpd="sng" algn="ctr">
-                      <a:solidFill>
-                        <a:srgbClr val="DDDDDD"/>
-                      </a:solidFill>
-                      <a:prstDash val="solid"/>
-                      <a:round/>
-                      <a:headEnd type="none" w="med" len="med"/>
-                      <a:tailEnd type="none" w="med" len="med"/>
-                    </a:lnR>
-                    <a:lnT w="9525" cap="flat" cmpd="sng" algn="ctr">
-                      <a:solidFill>
-                        <a:srgbClr val="DDDDDD"/>
-                      </a:solidFill>
-                      <a:prstDash val="solid"/>
-                      <a:round/>
-                      <a:headEnd type="none" w="med" len="med"/>
-                      <a:tailEnd type="none" w="med" len="med"/>
-                    </a:lnT>
-                    <a:lnB w="9525" cap="flat" cmpd="sng" algn="ctr">
-                      <a:solidFill>
-                        <a:srgbClr val="DDDDDD"/>
-                      </a:solidFill>
-                      <a:prstDash val="solid"/>
-                      <a:round/>
-                      <a:headEnd type="none" w="med" len="med"/>
-                      <a:tailEnd type="none" w="med" len="med"/>
-                    </a:lnB>
-                    <a:solidFill>
-                      <a:srgbClr val="F2F2F2"/>
-                    </a:solidFill>
-                  </a:tcPr>
-                </a:tc>
-                <a:tc>
-                  <a:txBody>
-                    <a:bodyPr/>
-                    <a:lstStyle/>
-                    <a:p>
-                      <a:pPr algn="l">
-                        <a:buNone/>
-                      </a:pPr>
-                      <a:r>
-                        <a:rPr lang="en-GB" sz="900" dirty="0">
-                          <a:effectLst/>
-                        </a:rPr>
-                        <a:t>In Disk Table</a:t>
-                      </a:r>
-                    </a:p>
-                  </a:txBody>
-                  <a:tcPr marL="40143" marR="40143" marT="40143" marB="40143" anchor="ctr">
-                    <a:lnL w="9525" cap="flat" cmpd="sng" algn="ctr">
-                      <a:solidFill>
-                        <a:srgbClr val="DDDDDD"/>
-                      </a:solidFill>
-                      <a:prstDash val="solid"/>
-                      <a:round/>
-                      <a:headEnd type="none" w="med" len="med"/>
-                      <a:tailEnd type="none" w="med" len="med"/>
-                    </a:lnL>
-                    <a:lnR w="9525" cap="flat" cmpd="sng" algn="ctr">
-                      <a:solidFill>
-                        <a:srgbClr val="DDDDDD"/>
-                      </a:solidFill>
-                      <a:prstDash val="solid"/>
-                      <a:round/>
-                      <a:headEnd type="none" w="med" len="med"/>
-                      <a:tailEnd type="none" w="med" len="med"/>
-                    </a:lnR>
-                    <a:lnT w="9525" cap="flat" cmpd="sng" algn="ctr">
-                      <a:solidFill>
-                        <a:srgbClr val="DDDDDD"/>
-                      </a:solidFill>
-                      <a:prstDash val="solid"/>
-                      <a:round/>
-                      <a:headEnd type="none" w="med" len="med"/>
-                      <a:tailEnd type="none" w="med" len="med"/>
-                    </a:lnT>
-                    <a:lnB w="9525" cap="flat" cmpd="sng" algn="ctr">
-                      <a:solidFill>
-                        <a:srgbClr val="DDDDDD"/>
-                      </a:solidFill>
-                      <a:prstDash val="solid"/>
-                      <a:round/>
-                      <a:headEnd type="none" w="med" len="med"/>
-                      <a:tailEnd type="none" w="med" len="med"/>
-                    </a:lnB>
-                    <a:solidFill>
-                      <a:srgbClr val="F2F2F2"/>
-                    </a:solidFill>
-                  </a:tcPr>
-                </a:tc>
-                <a:tc>
-                  <a:txBody>
-                    <a:bodyPr/>
-                    <a:lstStyle/>
-                    <a:p>
-                      <a:pPr algn="l">
-                        <a:buNone/>
-                      </a:pPr>
-                      <a:r>
-                        <a:rPr lang="en-GB" sz="900" dirty="0">
-                          <a:effectLst/>
-                        </a:rPr>
-                        <a:t>In Memory Table</a:t>
-                      </a:r>
-                    </a:p>
-                  </a:txBody>
-                  <a:tcPr marL="40143" marR="40143" marT="40143" marB="40143" anchor="ctr">
-                    <a:lnL w="9525" cap="flat" cmpd="sng" algn="ctr">
-                      <a:solidFill>
-                        <a:srgbClr val="DDDDDD"/>
-                      </a:solidFill>
-                      <a:prstDash val="solid"/>
-                      <a:round/>
-                      <a:headEnd type="none" w="med" len="med"/>
-                      <a:tailEnd type="none" w="med" len="med"/>
-                    </a:lnL>
-                    <a:lnR w="9525" cap="flat" cmpd="sng" algn="ctr">
-                      <a:solidFill>
-                        <a:srgbClr val="DDDDDD"/>
-                      </a:solidFill>
-                      <a:prstDash val="solid"/>
-                      <a:round/>
-                      <a:headEnd type="none" w="med" len="med"/>
-                      <a:tailEnd type="none" w="med" len="med"/>
-                    </a:lnR>
-                    <a:lnT w="9525" cap="flat" cmpd="sng" algn="ctr">
-                      <a:solidFill>
-                        <a:srgbClr val="DDDDDD"/>
-                      </a:solidFill>
-                      <a:prstDash val="solid"/>
-                      <a:round/>
-                      <a:headEnd type="none" w="med" len="med"/>
-                      <a:tailEnd type="none" w="med" len="med"/>
-                    </a:lnT>
-                    <a:lnB w="9525" cap="flat" cmpd="sng" algn="ctr">
-                      <a:solidFill>
-                        <a:srgbClr val="DDDDDD"/>
-                      </a:solidFill>
-                      <a:prstDash val="solid"/>
-                      <a:round/>
-                      <a:headEnd type="none" w="med" len="med"/>
-                      <a:tailEnd type="none" w="med" len="med"/>
-                    </a:lnB>
-                    <a:solidFill>
-                      <a:srgbClr val="F2F2F2"/>
-                    </a:solidFill>
-                  </a:tcPr>
-                </a:tc>
-                <a:extLst>
-                  <a:ext uri="{0D108BD9-81ED-4DB2-BD59-A6C34878D82A}">
-                    <a16:rowId xmlns:a16="http://schemas.microsoft.com/office/drawing/2014/main" val="3852954944"/>
-                  </a:ext>
-                </a:extLst>
-              </a:tr>
-              <a:tr h="513826">
-                <a:tc>
-                  <a:txBody>
-                    <a:bodyPr/>
-                    <a:lstStyle/>
-                    <a:p>
-                      <a:pPr algn="l">
-                        <a:buNone/>
-                      </a:pPr>
-                      <a:r>
-                        <a:rPr lang="en-GB" sz="900">
-                          <a:effectLst/>
-                        </a:rPr>
-                        <a:t>Speicherort</a:t>
-                      </a:r>
-                    </a:p>
-                  </a:txBody>
-                  <a:tcPr marL="40143" marR="40143" marT="40143" marB="40143" anchor="ctr">
-                    <a:lnL w="9525" cap="flat" cmpd="sng" algn="ctr">
-                      <a:solidFill>
-                        <a:srgbClr val="DDDDDD"/>
-                      </a:solidFill>
-                      <a:prstDash val="solid"/>
-                      <a:round/>
-                      <a:headEnd type="none" w="med" len="med"/>
-                      <a:tailEnd type="none" w="med" len="med"/>
-                    </a:lnL>
-                    <a:lnR w="9525" cap="flat" cmpd="sng" algn="ctr">
-                      <a:solidFill>
-                        <a:srgbClr val="DDDDDD"/>
-                      </a:solidFill>
-                      <a:prstDash val="solid"/>
-                      <a:round/>
-                      <a:headEnd type="none" w="med" len="med"/>
-                      <a:tailEnd type="none" w="med" len="med"/>
-                    </a:lnR>
-                    <a:lnT w="9525" cap="flat" cmpd="sng" algn="ctr">
-                      <a:solidFill>
-                        <a:srgbClr val="DDDDDD"/>
-                      </a:solidFill>
-                      <a:prstDash val="solid"/>
-                      <a:round/>
-                      <a:headEnd type="none" w="med" len="med"/>
-                      <a:tailEnd type="none" w="med" len="med"/>
-                    </a:lnT>
-                    <a:lnB w="9525" cap="flat" cmpd="sng" algn="ctr">
-                      <a:solidFill>
-                        <a:srgbClr val="DDDDDD"/>
-                      </a:solidFill>
-                      <a:prstDash val="solid"/>
-                      <a:round/>
-                      <a:headEnd type="none" w="med" len="med"/>
-                      <a:tailEnd type="none" w="med" len="med"/>
-                    </a:lnB>
-                    <a:noFill/>
-                  </a:tcPr>
-                </a:tc>
-                <a:tc>
-                  <a:txBody>
-                    <a:bodyPr/>
-                    <a:lstStyle/>
-                    <a:p>
-                      <a:pPr algn="l">
-                        <a:buNone/>
-                      </a:pPr>
-                      <a:r>
-                        <a:rPr lang="de-DE" sz="900" dirty="0">
-                          <a:effectLst/>
-                        </a:rPr>
-                        <a:t>Seiten auf Datenträger, Buffer Cache im RAM</a:t>
-                      </a:r>
-                    </a:p>
-                  </a:txBody>
-                  <a:tcPr marL="40143" marR="40143" marT="40143" marB="40143" anchor="ctr">
-                    <a:lnL w="9525" cap="flat" cmpd="sng" algn="ctr">
-                      <a:solidFill>
-                        <a:srgbClr val="DDDDDD"/>
-                      </a:solidFill>
-                      <a:prstDash val="solid"/>
-                      <a:round/>
-                      <a:headEnd type="none" w="med" len="med"/>
-                      <a:tailEnd type="none" w="med" len="med"/>
-                    </a:lnL>
-                    <a:lnR w="9525" cap="flat" cmpd="sng" algn="ctr">
-                      <a:solidFill>
-                        <a:srgbClr val="DDDDDD"/>
-                      </a:solidFill>
-                      <a:prstDash val="solid"/>
-                      <a:round/>
-                      <a:headEnd type="none" w="med" len="med"/>
-                      <a:tailEnd type="none" w="med" len="med"/>
-                    </a:lnR>
-                    <a:lnT w="9525" cap="flat" cmpd="sng" algn="ctr">
-                      <a:solidFill>
-                        <a:srgbClr val="DDDDDD"/>
-                      </a:solidFill>
-                      <a:prstDash val="solid"/>
-                      <a:round/>
-                      <a:headEnd type="none" w="med" len="med"/>
-                      <a:tailEnd type="none" w="med" len="med"/>
-                    </a:lnT>
-                    <a:lnB w="9525" cap="flat" cmpd="sng" algn="ctr">
-                      <a:solidFill>
-                        <a:srgbClr val="DDDDDD"/>
-                      </a:solidFill>
-                      <a:prstDash val="solid"/>
-                      <a:round/>
-                      <a:headEnd type="none" w="med" len="med"/>
-                      <a:tailEnd type="none" w="med" len="med"/>
-                    </a:lnB>
-                    <a:noFill/>
-                  </a:tcPr>
-                </a:tc>
-                <a:tc>
-                  <a:txBody>
-                    <a:bodyPr/>
-                    <a:lstStyle/>
-                    <a:p>
-                      <a:pPr algn="l">
-                        <a:buNone/>
-                      </a:pPr>
-                      <a:r>
-                        <a:rPr lang="de-DE" sz="900" dirty="0">
-                          <a:effectLst/>
-                        </a:rPr>
-                        <a:t>Daten dauerhaft im RAM, Log/Daten/Delta auf Disk</a:t>
-                      </a:r>
-                    </a:p>
-                  </a:txBody>
-                  <a:tcPr marL="40143" marR="40143" marT="40143" marB="40143" anchor="ctr">
-                    <a:lnL w="9525" cap="flat" cmpd="sng" algn="ctr">
-                      <a:solidFill>
-                        <a:srgbClr val="DDDDDD"/>
-                      </a:solidFill>
-                      <a:prstDash val="solid"/>
-                      <a:round/>
-                      <a:headEnd type="none" w="med" len="med"/>
-                      <a:tailEnd type="none" w="med" len="med"/>
-                    </a:lnL>
-                    <a:lnR w="9525" cap="flat" cmpd="sng" algn="ctr">
-                      <a:solidFill>
-                        <a:srgbClr val="DDDDDD"/>
-                      </a:solidFill>
-                      <a:prstDash val="solid"/>
-                      <a:round/>
-                      <a:headEnd type="none" w="med" len="med"/>
-                      <a:tailEnd type="none" w="med" len="med"/>
-                    </a:lnR>
-                    <a:lnT w="9525" cap="flat" cmpd="sng" algn="ctr">
-                      <a:solidFill>
-                        <a:srgbClr val="DDDDDD"/>
-                      </a:solidFill>
-                      <a:prstDash val="solid"/>
-                      <a:round/>
-                      <a:headEnd type="none" w="med" len="med"/>
-                      <a:tailEnd type="none" w="med" len="med"/>
-                    </a:lnT>
-                    <a:lnB w="9525" cap="flat" cmpd="sng" algn="ctr">
-                      <a:solidFill>
-                        <a:srgbClr val="DDDDDD"/>
-                      </a:solidFill>
-                      <a:prstDash val="solid"/>
-                      <a:round/>
-                      <a:headEnd type="none" w="med" len="med"/>
-                      <a:tailEnd type="none" w="med" len="med"/>
-                    </a:lnB>
-                    <a:noFill/>
-                  </a:tcPr>
-                </a:tc>
-                <a:extLst>
-                  <a:ext uri="{0D108BD9-81ED-4DB2-BD59-A6C34878D82A}">
-                    <a16:rowId xmlns:a16="http://schemas.microsoft.com/office/drawing/2014/main" val="3048235710"/>
-                  </a:ext>
-                </a:extLst>
-              </a:tr>
-              <a:tr h="513826">
-                <a:tc>
-                  <a:txBody>
-                    <a:bodyPr/>
-                    <a:lstStyle/>
-                    <a:p>
-                      <a:pPr algn="l">
-                        <a:buNone/>
-                      </a:pPr>
-                      <a:r>
-                        <a:rPr lang="en-GB" sz="900">
-                          <a:effectLst/>
-                        </a:rPr>
-                        <a:t>Struktur</a:t>
-                      </a:r>
-                    </a:p>
-                  </a:txBody>
-                  <a:tcPr marL="40143" marR="40143" marT="40143" marB="40143" anchor="ctr">
-                    <a:lnL w="9525" cap="flat" cmpd="sng" algn="ctr">
-                      <a:solidFill>
-                        <a:srgbClr val="DDDDDD"/>
-                      </a:solidFill>
-                      <a:prstDash val="solid"/>
-                      <a:round/>
-                      <a:headEnd type="none" w="med" len="med"/>
-                      <a:tailEnd type="none" w="med" len="med"/>
-                    </a:lnL>
-                    <a:lnR w="9525" cap="flat" cmpd="sng" algn="ctr">
-                      <a:solidFill>
-                        <a:srgbClr val="DDDDDD"/>
-                      </a:solidFill>
-                      <a:prstDash val="solid"/>
-                      <a:round/>
-                      <a:headEnd type="none" w="med" len="med"/>
-                      <a:tailEnd type="none" w="med" len="med"/>
-                    </a:lnR>
-                    <a:lnT w="9525" cap="flat" cmpd="sng" algn="ctr">
-                      <a:solidFill>
-                        <a:srgbClr val="DDDDDD"/>
-                      </a:solidFill>
-                      <a:prstDash val="solid"/>
-                      <a:round/>
-                      <a:headEnd type="none" w="med" len="med"/>
-                      <a:tailEnd type="none" w="med" len="med"/>
-                    </a:lnT>
-                    <a:lnB w="9525" cap="flat" cmpd="sng" algn="ctr">
-                      <a:solidFill>
-                        <a:srgbClr val="DDDDDD"/>
-                      </a:solidFill>
-                      <a:prstDash val="solid"/>
-                      <a:round/>
-                      <a:headEnd type="none" w="med" len="med"/>
-                      <a:tailEnd type="none" w="med" len="med"/>
-                    </a:lnB>
-                    <a:noFill/>
-                  </a:tcPr>
-                </a:tc>
-                <a:tc>
-                  <a:txBody>
-                    <a:bodyPr/>
-                    <a:lstStyle/>
-                    <a:p>
-                      <a:pPr algn="l">
-                        <a:buNone/>
-                      </a:pPr>
-                      <a:r>
-                        <a:rPr lang="de-DE" sz="900" dirty="0">
-                          <a:effectLst/>
-                        </a:rPr>
-                        <a:t>8‑KB‑Seiten, eine Seite pro Tabelle</a:t>
-                      </a:r>
-                    </a:p>
-                  </a:txBody>
-                  <a:tcPr marL="40143" marR="40143" marT="40143" marB="40143" anchor="ctr">
-                    <a:lnL w="9525" cap="flat" cmpd="sng" algn="ctr">
-                      <a:solidFill>
-                        <a:srgbClr val="DDDDDD"/>
-                      </a:solidFill>
-                      <a:prstDash val="solid"/>
-                      <a:round/>
-                      <a:headEnd type="none" w="med" len="med"/>
-                      <a:tailEnd type="none" w="med" len="med"/>
-                    </a:lnL>
-                    <a:lnR w="9525" cap="flat" cmpd="sng" algn="ctr">
-                      <a:solidFill>
-                        <a:srgbClr val="DDDDDD"/>
-                      </a:solidFill>
-                      <a:prstDash val="solid"/>
-                      <a:round/>
-                      <a:headEnd type="none" w="med" len="med"/>
-                      <a:tailEnd type="none" w="med" len="med"/>
-                    </a:lnR>
-                    <a:lnT w="9525" cap="flat" cmpd="sng" algn="ctr">
-                      <a:solidFill>
-                        <a:srgbClr val="DDDDDD"/>
-                      </a:solidFill>
-                      <a:prstDash val="solid"/>
-                      <a:round/>
-                      <a:headEnd type="none" w="med" len="med"/>
-                      <a:tailEnd type="none" w="med" len="med"/>
-                    </a:lnT>
-                    <a:lnB w="9525" cap="flat" cmpd="sng" algn="ctr">
-                      <a:solidFill>
-                        <a:srgbClr val="DDDDDD"/>
-                      </a:solidFill>
-                      <a:prstDash val="solid"/>
-                      <a:round/>
-                      <a:headEnd type="none" w="med" len="med"/>
-                      <a:tailEnd type="none" w="med" len="med"/>
-                    </a:lnB>
-                    <a:noFill/>
-                  </a:tcPr>
-                </a:tc>
-                <a:tc>
-                  <a:txBody>
-                    <a:bodyPr/>
-                    <a:lstStyle/>
-                    <a:p>
-                      <a:pPr algn="l">
-                        <a:buNone/>
-                      </a:pPr>
-                      <a:r>
-                        <a:rPr lang="de-DE" sz="900" dirty="0">
-                          <a:effectLst/>
-                        </a:rPr>
-                        <a:t>Zeilenbasiert, keine Seiten, Files können Zeilen mehrerer Tabellen enthalten. </a:t>
-                      </a:r>
-                    </a:p>
-                  </a:txBody>
-                  <a:tcPr marL="40143" marR="40143" marT="40143" marB="40143" anchor="ctr">
-                    <a:lnL w="9525" cap="flat" cmpd="sng" algn="ctr">
-                      <a:solidFill>
-                        <a:srgbClr val="DDDDDD"/>
-                      </a:solidFill>
-                      <a:prstDash val="solid"/>
-                      <a:round/>
-                      <a:headEnd type="none" w="med" len="med"/>
-                      <a:tailEnd type="none" w="med" len="med"/>
-                    </a:lnL>
-                    <a:lnR w="9525" cap="flat" cmpd="sng" algn="ctr">
-                      <a:solidFill>
-                        <a:srgbClr val="DDDDDD"/>
-                      </a:solidFill>
-                      <a:prstDash val="solid"/>
-                      <a:round/>
-                      <a:headEnd type="none" w="med" len="med"/>
-                      <a:tailEnd type="none" w="med" len="med"/>
-                    </a:lnR>
-                    <a:lnT w="9525" cap="flat" cmpd="sng" algn="ctr">
-                      <a:solidFill>
-                        <a:srgbClr val="DDDDDD"/>
-                      </a:solidFill>
-                      <a:prstDash val="solid"/>
-                      <a:round/>
-                      <a:headEnd type="none" w="med" len="med"/>
-                      <a:tailEnd type="none" w="med" len="med"/>
-                    </a:lnT>
-                    <a:lnB w="9525" cap="flat" cmpd="sng" algn="ctr">
-                      <a:solidFill>
-                        <a:srgbClr val="DDDDDD"/>
-                      </a:solidFill>
-                      <a:prstDash val="solid"/>
-                      <a:round/>
-                      <a:headEnd type="none" w="med" len="med"/>
-                      <a:tailEnd type="none" w="med" len="med"/>
-                    </a:lnB>
-                    <a:noFill/>
-                  </a:tcPr>
-                </a:tc>
-                <a:extLst>
-                  <a:ext uri="{0D108BD9-81ED-4DB2-BD59-A6C34878D82A}">
-                    <a16:rowId xmlns:a16="http://schemas.microsoft.com/office/drawing/2014/main" val="4219890668"/>
-                  </a:ext>
-                </a:extLst>
-              </a:tr>
-              <a:tr h="658340">
-                <a:tc>
-                  <a:txBody>
-                    <a:bodyPr/>
-                    <a:lstStyle/>
-                    <a:p>
-                      <a:pPr algn="l">
-                        <a:buNone/>
-                      </a:pPr>
-                      <a:r>
-                        <a:rPr lang="en-GB" sz="900">
-                          <a:effectLst/>
-                        </a:rPr>
-                        <a:t>Indizes</a:t>
-                      </a:r>
-                    </a:p>
-                  </a:txBody>
-                  <a:tcPr marL="40143" marR="40143" marT="40143" marB="40143" anchor="ctr">
-                    <a:lnL w="9525" cap="flat" cmpd="sng" algn="ctr">
-                      <a:solidFill>
-                        <a:srgbClr val="DDDDDD"/>
-                      </a:solidFill>
-                      <a:prstDash val="solid"/>
-                      <a:round/>
-                      <a:headEnd type="none" w="med" len="med"/>
-                      <a:tailEnd type="none" w="med" len="med"/>
-                    </a:lnL>
-                    <a:lnR w="9525" cap="flat" cmpd="sng" algn="ctr">
-                      <a:solidFill>
-                        <a:srgbClr val="DDDDDD"/>
-                      </a:solidFill>
-                      <a:prstDash val="solid"/>
-                      <a:round/>
-                      <a:headEnd type="none" w="med" len="med"/>
-                      <a:tailEnd type="none" w="med" len="med"/>
-                    </a:lnR>
-                    <a:lnT w="9525" cap="flat" cmpd="sng" algn="ctr">
-                      <a:solidFill>
-                        <a:srgbClr val="DDDDDD"/>
-                      </a:solidFill>
-                      <a:prstDash val="solid"/>
-                      <a:round/>
-                      <a:headEnd type="none" w="med" len="med"/>
-                      <a:tailEnd type="none" w="med" len="med"/>
-                    </a:lnT>
-                    <a:lnB w="9525" cap="flat" cmpd="sng" algn="ctr">
-                      <a:solidFill>
-                        <a:srgbClr val="DDDDDD"/>
-                      </a:solidFill>
-                      <a:prstDash val="solid"/>
-                      <a:round/>
-                      <a:headEnd type="none" w="med" len="med"/>
-                      <a:tailEnd type="none" w="med" len="med"/>
-                    </a:lnB>
-                    <a:noFill/>
-                  </a:tcPr>
-                </a:tc>
-                <a:tc>
-                  <a:txBody>
-                    <a:bodyPr/>
-                    <a:lstStyle/>
-                    <a:p>
-                      <a:pPr algn="l">
-                        <a:buNone/>
-                      </a:pPr>
-                      <a:r>
-                        <a:rPr lang="en-GB" sz="900" dirty="0" err="1">
-                          <a:effectLst/>
-                        </a:rPr>
-                        <a:t>Persistierte</a:t>
-                      </a:r>
-                      <a:r>
-                        <a:rPr lang="en-GB" sz="900" dirty="0">
-                          <a:effectLst/>
-                        </a:rPr>
-                        <a:t> </a:t>
-                      </a:r>
-                      <a:r>
-                        <a:rPr lang="en-GB" sz="900" dirty="0" err="1">
-                          <a:effectLst/>
-                        </a:rPr>
-                        <a:t>Indexseiten</a:t>
-                      </a:r>
-                      <a:r>
-                        <a:rPr lang="en-GB" sz="900" dirty="0">
-                          <a:effectLst/>
-                        </a:rPr>
-                        <a:t>, </a:t>
-                      </a:r>
-                      <a:r>
-                        <a:rPr lang="en-GB" sz="900" dirty="0" err="1">
-                          <a:effectLst/>
-                        </a:rPr>
-                        <a:t>voll</a:t>
-                      </a:r>
-                      <a:r>
-                        <a:rPr lang="en-GB" sz="900" dirty="0">
-                          <a:effectLst/>
-                        </a:rPr>
-                        <a:t> </a:t>
-                      </a:r>
-                      <a:r>
-                        <a:rPr lang="en-GB" sz="900" dirty="0" err="1">
-                          <a:effectLst/>
-                        </a:rPr>
-                        <a:t>geloggt</a:t>
-                      </a:r>
-                      <a:r>
-                        <a:rPr lang="en-GB" sz="900" dirty="0">
-                          <a:effectLst/>
-                        </a:rPr>
-                        <a:t>.</a:t>
-                      </a:r>
-                    </a:p>
-                  </a:txBody>
-                  <a:tcPr marL="40143" marR="40143" marT="40143" marB="40143" anchor="ctr">
-                    <a:lnL w="9525" cap="flat" cmpd="sng" algn="ctr">
-                      <a:solidFill>
-                        <a:srgbClr val="DDDDDD"/>
-                      </a:solidFill>
-                      <a:prstDash val="solid"/>
-                      <a:round/>
-                      <a:headEnd type="none" w="med" len="med"/>
-                      <a:tailEnd type="none" w="med" len="med"/>
-                    </a:lnL>
-                    <a:lnR w="9525" cap="flat" cmpd="sng" algn="ctr">
-                      <a:solidFill>
-                        <a:srgbClr val="DDDDDD"/>
-                      </a:solidFill>
-                      <a:prstDash val="solid"/>
-                      <a:round/>
-                      <a:headEnd type="none" w="med" len="med"/>
-                      <a:tailEnd type="none" w="med" len="med"/>
-                    </a:lnR>
-                    <a:lnT w="9525" cap="flat" cmpd="sng" algn="ctr">
-                      <a:solidFill>
-                        <a:srgbClr val="DDDDDD"/>
-                      </a:solidFill>
-                      <a:prstDash val="solid"/>
-                      <a:round/>
-                      <a:headEnd type="none" w="med" len="med"/>
-                      <a:tailEnd type="none" w="med" len="med"/>
-                    </a:lnT>
-                    <a:lnB w="9525" cap="flat" cmpd="sng" algn="ctr">
-                      <a:solidFill>
-                        <a:srgbClr val="DDDDDD"/>
-                      </a:solidFill>
-                      <a:prstDash val="solid"/>
-                      <a:round/>
-                      <a:headEnd type="none" w="med" len="med"/>
-                      <a:tailEnd type="none" w="med" len="med"/>
-                    </a:lnB>
-                    <a:noFill/>
-                  </a:tcPr>
-                </a:tc>
-                <a:tc>
-                  <a:txBody>
-                    <a:bodyPr/>
-                    <a:lstStyle/>
-                    <a:p>
-                      <a:pPr algn="l">
-                        <a:buNone/>
-                      </a:pPr>
-                      <a:r>
-                        <a:rPr lang="en-GB" sz="900" dirty="0">
-                          <a:effectLst/>
-                        </a:rPr>
-                        <a:t>Nur Definition persistent, Index </a:t>
-                      </a:r>
-                      <a:r>
-                        <a:rPr lang="en-GB" sz="900" dirty="0" err="1">
-                          <a:effectLst/>
-                        </a:rPr>
-                        <a:t>im</a:t>
-                      </a:r>
-                      <a:r>
-                        <a:rPr lang="en-GB" sz="900" dirty="0">
-                          <a:effectLst/>
-                        </a:rPr>
-                        <a:t> RAM, </a:t>
-                      </a:r>
-                      <a:r>
-                        <a:rPr lang="en-GB" sz="900" dirty="0" err="1">
-                          <a:effectLst/>
-                        </a:rPr>
-                        <a:t>kein</a:t>
-                      </a:r>
-                      <a:r>
-                        <a:rPr lang="en-GB" sz="900" dirty="0">
-                          <a:effectLst/>
-                        </a:rPr>
-                        <a:t> Logging der Index‑</a:t>
-                      </a:r>
-                      <a:r>
-                        <a:rPr lang="en-GB" sz="900" dirty="0" err="1">
-                          <a:effectLst/>
-                        </a:rPr>
-                        <a:t>Zeilen</a:t>
-                      </a:r>
-                      <a:endParaRPr lang="en-GB" sz="900" dirty="0">
-                        <a:effectLst/>
-                      </a:endParaRPr>
-                    </a:p>
-                  </a:txBody>
-                  <a:tcPr marL="40143" marR="40143" marT="40143" marB="40143" anchor="ctr">
-                    <a:lnL w="9525" cap="flat" cmpd="sng" algn="ctr">
-                      <a:solidFill>
-                        <a:srgbClr val="DDDDDD"/>
-                      </a:solidFill>
-                      <a:prstDash val="solid"/>
-                      <a:round/>
-                      <a:headEnd type="none" w="med" len="med"/>
-                      <a:tailEnd type="none" w="med" len="med"/>
-                    </a:lnL>
-                    <a:lnR w="9525" cap="flat" cmpd="sng" algn="ctr">
-                      <a:solidFill>
-                        <a:srgbClr val="DDDDDD"/>
-                      </a:solidFill>
-                      <a:prstDash val="solid"/>
-                      <a:round/>
-                      <a:headEnd type="none" w="med" len="med"/>
-                      <a:tailEnd type="none" w="med" len="med"/>
-                    </a:lnR>
-                    <a:lnT w="9525" cap="flat" cmpd="sng" algn="ctr">
-                      <a:solidFill>
-                        <a:srgbClr val="DDDDDD"/>
-                      </a:solidFill>
-                      <a:prstDash val="solid"/>
-                      <a:round/>
-                      <a:headEnd type="none" w="med" len="med"/>
-                      <a:tailEnd type="none" w="med" len="med"/>
-                    </a:lnT>
-                    <a:lnB w="9525" cap="flat" cmpd="sng" algn="ctr">
-                      <a:solidFill>
-                        <a:srgbClr val="DDDDDD"/>
-                      </a:solidFill>
-                      <a:prstDash val="solid"/>
-                      <a:round/>
-                      <a:headEnd type="none" w="med" len="med"/>
-                      <a:tailEnd type="none" w="med" len="med"/>
-                    </a:lnB>
-                    <a:noFill/>
-                  </a:tcPr>
-                </a:tc>
-                <a:extLst>
-                  <a:ext uri="{0D108BD9-81ED-4DB2-BD59-A6C34878D82A}">
-                    <a16:rowId xmlns:a16="http://schemas.microsoft.com/office/drawing/2014/main" val="3453355456"/>
-                  </a:ext>
-                </a:extLst>
-              </a:tr>
-              <a:tr h="658340">
-                <a:tc>
-                  <a:txBody>
-                    <a:bodyPr/>
-                    <a:lstStyle/>
-                    <a:p>
-                      <a:pPr algn="l">
-                        <a:buNone/>
-                      </a:pPr>
-                      <a:r>
-                        <a:rPr lang="en-GB" sz="900" dirty="0" err="1">
-                          <a:effectLst/>
-                        </a:rPr>
-                        <a:t>DML</a:t>
-                      </a:r>
-                      <a:r>
-                        <a:rPr lang="en-GB" sz="900" dirty="0">
-                          <a:effectLst/>
-                        </a:rPr>
-                        <a:t> (Data Manipulation Language)</a:t>
-                      </a:r>
-                    </a:p>
-                  </a:txBody>
-                  <a:tcPr marL="40143" marR="40143" marT="40143" marB="40143" anchor="ctr">
-                    <a:lnL w="9525" cap="flat" cmpd="sng" algn="ctr">
-                      <a:solidFill>
-                        <a:srgbClr val="DDDDDD"/>
-                      </a:solidFill>
-                      <a:prstDash val="solid"/>
-                      <a:round/>
-                      <a:headEnd type="none" w="med" len="med"/>
-                      <a:tailEnd type="none" w="med" len="med"/>
-                    </a:lnL>
-                    <a:lnR w="9525" cap="flat" cmpd="sng" algn="ctr">
-                      <a:solidFill>
-                        <a:srgbClr val="DDDDDD"/>
-                      </a:solidFill>
-                      <a:prstDash val="solid"/>
-                      <a:round/>
-                      <a:headEnd type="none" w="med" len="med"/>
-                      <a:tailEnd type="none" w="med" len="med"/>
-                    </a:lnR>
-                    <a:lnT w="9525" cap="flat" cmpd="sng" algn="ctr">
-                      <a:solidFill>
-                        <a:srgbClr val="DDDDDD"/>
-                      </a:solidFill>
-                      <a:prstDash val="solid"/>
-                      <a:round/>
-                      <a:headEnd type="none" w="med" len="med"/>
-                      <a:tailEnd type="none" w="med" len="med"/>
-                    </a:lnT>
-                    <a:lnB w="9525" cap="flat" cmpd="sng" algn="ctr">
-                      <a:solidFill>
-                        <a:srgbClr val="DDDDDD"/>
-                      </a:solidFill>
-                      <a:prstDash val="solid"/>
-                      <a:round/>
-                      <a:headEnd type="none" w="med" len="med"/>
-                      <a:tailEnd type="none" w="med" len="med"/>
-                    </a:lnB>
-                    <a:noFill/>
-                  </a:tcPr>
-                </a:tc>
-                <a:tc>
-                  <a:txBody>
-                    <a:bodyPr/>
-                    <a:lstStyle/>
-                    <a:p>
-                      <a:pPr algn="l">
-                        <a:buNone/>
-                      </a:pPr>
-                      <a:r>
-                        <a:rPr lang="de-DE" sz="900" dirty="0">
-                          <a:effectLst/>
-                        </a:rPr>
-                        <a:t>Seiten laden, auf Seite ändern, Seiten zurückschreiben. </a:t>
-                      </a:r>
-                    </a:p>
-                  </a:txBody>
-                  <a:tcPr marL="40143" marR="40143" marT="40143" marB="40143" anchor="ctr">
-                    <a:lnL w="9525" cap="flat" cmpd="sng" algn="ctr">
-                      <a:solidFill>
-                        <a:srgbClr val="DDDDDD"/>
-                      </a:solidFill>
-                      <a:prstDash val="solid"/>
-                      <a:round/>
-                      <a:headEnd type="none" w="med" len="med"/>
-                      <a:tailEnd type="none" w="med" len="med"/>
-                    </a:lnL>
-                    <a:lnR w="9525" cap="flat" cmpd="sng" algn="ctr">
-                      <a:solidFill>
-                        <a:srgbClr val="DDDDDD"/>
-                      </a:solidFill>
-                      <a:prstDash val="solid"/>
-                      <a:round/>
-                      <a:headEnd type="none" w="med" len="med"/>
-                      <a:tailEnd type="none" w="med" len="med"/>
-                    </a:lnR>
-                    <a:lnT w="9525" cap="flat" cmpd="sng" algn="ctr">
-                      <a:solidFill>
-                        <a:srgbClr val="DDDDDD"/>
-                      </a:solidFill>
-                      <a:prstDash val="solid"/>
-                      <a:round/>
-                      <a:headEnd type="none" w="med" len="med"/>
-                      <a:tailEnd type="none" w="med" len="med"/>
-                    </a:lnT>
-                    <a:lnB w="9525" cap="flat" cmpd="sng" algn="ctr">
-                      <a:solidFill>
-                        <a:srgbClr val="DDDDDD"/>
-                      </a:solidFill>
-                      <a:prstDash val="solid"/>
-                      <a:round/>
-                      <a:headEnd type="none" w="med" len="med"/>
-                      <a:tailEnd type="none" w="med" len="med"/>
-                    </a:lnB>
-                    <a:noFill/>
-                  </a:tcPr>
-                </a:tc>
-                <a:tc>
-                  <a:txBody>
-                    <a:bodyPr/>
-                    <a:lstStyle/>
-                    <a:p>
-                      <a:pPr algn="l">
-                        <a:buNone/>
-                      </a:pPr>
-                      <a:r>
-                        <a:rPr lang="de-DE" sz="900" dirty="0">
-                          <a:effectLst/>
-                        </a:rPr>
-                        <a:t>Direkt im RAM, Log‑Thread schreibt Daten/Delta‑Dateien.</a:t>
-                      </a:r>
-                    </a:p>
-                  </a:txBody>
-                  <a:tcPr marL="40143" marR="40143" marT="40143" marB="40143" anchor="ctr">
-                    <a:lnL w="9525" cap="flat" cmpd="sng" algn="ctr">
-                      <a:solidFill>
-                        <a:srgbClr val="DDDDDD"/>
-                      </a:solidFill>
-                      <a:prstDash val="solid"/>
-                      <a:round/>
-                      <a:headEnd type="none" w="med" len="med"/>
-                      <a:tailEnd type="none" w="med" len="med"/>
-                    </a:lnL>
-                    <a:lnR w="9525" cap="flat" cmpd="sng" algn="ctr">
-                      <a:solidFill>
-                        <a:srgbClr val="DDDDDD"/>
-                      </a:solidFill>
-                      <a:prstDash val="solid"/>
-                      <a:round/>
-                      <a:headEnd type="none" w="med" len="med"/>
-                      <a:tailEnd type="none" w="med" len="med"/>
-                    </a:lnR>
-                    <a:lnT w="9525" cap="flat" cmpd="sng" algn="ctr">
-                      <a:solidFill>
-                        <a:srgbClr val="DDDDDD"/>
-                      </a:solidFill>
-                      <a:prstDash val="solid"/>
-                      <a:round/>
-                      <a:headEnd type="none" w="med" len="med"/>
-                      <a:tailEnd type="none" w="med" len="med"/>
-                    </a:lnT>
-                    <a:lnB w="9525" cap="flat" cmpd="sng" algn="ctr">
-                      <a:solidFill>
-                        <a:srgbClr val="DDDDDD"/>
-                      </a:solidFill>
-                      <a:prstDash val="solid"/>
-                      <a:round/>
-                      <a:headEnd type="none" w="med" len="med"/>
-                      <a:tailEnd type="none" w="med" len="med"/>
-                    </a:lnB>
-                    <a:noFill/>
-                  </a:tcPr>
-                </a:tc>
-                <a:extLst>
-                  <a:ext uri="{0D108BD9-81ED-4DB2-BD59-A6C34878D82A}">
-                    <a16:rowId xmlns:a16="http://schemas.microsoft.com/office/drawing/2014/main" val="1493453244"/>
-                  </a:ext>
-                </a:extLst>
-              </a:tr>
-              <a:tr h="369313">
-                <a:tc>
-                  <a:txBody>
-                    <a:bodyPr/>
-                    <a:lstStyle/>
-                    <a:p>
-                      <a:pPr algn="l">
-                        <a:buNone/>
-                      </a:pPr>
-                      <a:r>
-                        <a:rPr lang="en-GB" sz="900">
-                          <a:effectLst/>
-                        </a:rPr>
-                        <a:t>Concurrency</a:t>
-                      </a:r>
-                    </a:p>
-                  </a:txBody>
-                  <a:tcPr marL="40143" marR="40143" marT="40143" marB="40143" anchor="ctr">
-                    <a:lnL w="9525" cap="flat" cmpd="sng" algn="ctr">
-                      <a:solidFill>
-                        <a:srgbClr val="DDDDDD"/>
-                      </a:solidFill>
-                      <a:prstDash val="solid"/>
-                      <a:round/>
-                      <a:headEnd type="none" w="med" len="med"/>
-                      <a:tailEnd type="none" w="med" len="med"/>
-                    </a:lnL>
-                    <a:lnR w="9525" cap="flat" cmpd="sng" algn="ctr">
-                      <a:solidFill>
-                        <a:srgbClr val="DDDDDD"/>
-                      </a:solidFill>
-                      <a:prstDash val="solid"/>
-                      <a:round/>
-                      <a:headEnd type="none" w="med" len="med"/>
-                      <a:tailEnd type="none" w="med" len="med"/>
-                    </a:lnR>
-                    <a:lnT w="9525" cap="flat" cmpd="sng" algn="ctr">
-                      <a:solidFill>
-                        <a:srgbClr val="DDDDDD"/>
-                      </a:solidFill>
-                      <a:prstDash val="solid"/>
-                      <a:round/>
-                      <a:headEnd type="none" w="med" len="med"/>
-                      <a:tailEnd type="none" w="med" len="med"/>
-                    </a:lnT>
-                    <a:lnB w="9525" cap="flat" cmpd="sng" algn="ctr">
-                      <a:solidFill>
-                        <a:srgbClr val="DDDDDD"/>
-                      </a:solidFill>
-                      <a:prstDash val="solid"/>
-                      <a:round/>
-                      <a:headEnd type="none" w="med" len="med"/>
-                      <a:tailEnd type="none" w="med" len="med"/>
-                    </a:lnB>
-                    <a:noFill/>
-                  </a:tcPr>
-                </a:tc>
-                <a:tc>
-                  <a:txBody>
-                    <a:bodyPr/>
-                    <a:lstStyle/>
-                    <a:p>
-                      <a:pPr algn="l">
-                        <a:buNone/>
-                      </a:pPr>
-                      <a:r>
-                        <a:rPr lang="de-DE" sz="900" dirty="0">
-                          <a:effectLst/>
-                        </a:rPr>
-                        <a:t>Locks und Latches, potenziell Blockierungen.</a:t>
-                      </a:r>
-                    </a:p>
-                  </a:txBody>
-                  <a:tcPr marL="40143" marR="40143" marT="40143" marB="40143" anchor="ctr">
-                    <a:lnL w="9525" cap="flat" cmpd="sng" algn="ctr">
-                      <a:solidFill>
-                        <a:srgbClr val="DDDDDD"/>
-                      </a:solidFill>
-                      <a:prstDash val="solid"/>
-                      <a:round/>
-                      <a:headEnd type="none" w="med" len="med"/>
-                      <a:tailEnd type="none" w="med" len="med"/>
-                    </a:lnL>
-                    <a:lnR w="9525" cap="flat" cmpd="sng" algn="ctr">
-                      <a:solidFill>
-                        <a:srgbClr val="DDDDDD"/>
-                      </a:solidFill>
-                      <a:prstDash val="solid"/>
-                      <a:round/>
-                      <a:headEnd type="none" w="med" len="med"/>
-                      <a:tailEnd type="none" w="med" len="med"/>
-                    </a:lnR>
-                    <a:lnT w="9525" cap="flat" cmpd="sng" algn="ctr">
-                      <a:solidFill>
-                        <a:srgbClr val="DDDDDD"/>
-                      </a:solidFill>
-                      <a:prstDash val="solid"/>
-                      <a:round/>
-                      <a:headEnd type="none" w="med" len="med"/>
-                      <a:tailEnd type="none" w="med" len="med"/>
-                    </a:lnT>
-                    <a:lnB w="9525" cap="flat" cmpd="sng" algn="ctr">
-                      <a:solidFill>
-                        <a:srgbClr val="DDDDDD"/>
-                      </a:solidFill>
-                      <a:prstDash val="solid"/>
-                      <a:round/>
-                      <a:headEnd type="none" w="med" len="med"/>
-                      <a:tailEnd type="none" w="med" len="med"/>
-                    </a:lnB>
-                    <a:noFill/>
-                  </a:tcPr>
-                </a:tc>
-                <a:tc>
-                  <a:txBody>
-                    <a:bodyPr/>
-                    <a:lstStyle/>
-                    <a:p>
-                      <a:pPr algn="l">
-                        <a:buNone/>
-                      </a:pPr>
-                      <a:r>
-                        <a:rPr lang="de-DE" sz="900" dirty="0">
-                          <a:effectLst/>
-                        </a:rPr>
-                        <a:t>Lock‑freie Strukturen, optimistisches </a:t>
-                      </a:r>
-                      <a:r>
-                        <a:rPr lang="de-DE" sz="900" dirty="0" err="1">
-                          <a:effectLst/>
-                        </a:rPr>
-                        <a:t>MVCC</a:t>
-                      </a:r>
-                      <a:endParaRPr lang="de-DE" sz="900" dirty="0">
-                        <a:effectLst/>
-                      </a:endParaRPr>
-                    </a:p>
-                  </a:txBody>
-                  <a:tcPr marL="40143" marR="40143" marT="40143" marB="40143" anchor="ctr">
-                    <a:lnL w="9525" cap="flat" cmpd="sng" algn="ctr">
-                      <a:solidFill>
-                        <a:srgbClr val="DDDDDD"/>
-                      </a:solidFill>
-                      <a:prstDash val="solid"/>
-                      <a:round/>
-                      <a:headEnd type="none" w="med" len="med"/>
-                      <a:tailEnd type="none" w="med" len="med"/>
-                    </a:lnL>
-                    <a:lnR w="9525" cap="flat" cmpd="sng" algn="ctr">
-                      <a:solidFill>
-                        <a:srgbClr val="DDDDDD"/>
-                      </a:solidFill>
-                      <a:prstDash val="solid"/>
-                      <a:round/>
-                      <a:headEnd type="none" w="med" len="med"/>
-                      <a:tailEnd type="none" w="med" len="med"/>
-                    </a:lnR>
-                    <a:lnT w="9525" cap="flat" cmpd="sng" algn="ctr">
-                      <a:solidFill>
-                        <a:srgbClr val="DDDDDD"/>
-                      </a:solidFill>
-                      <a:prstDash val="solid"/>
-                      <a:round/>
-                      <a:headEnd type="none" w="med" len="med"/>
-                      <a:tailEnd type="none" w="med" len="med"/>
-                    </a:lnT>
-                    <a:lnB w="9525" cap="flat" cmpd="sng" algn="ctr">
-                      <a:solidFill>
-                        <a:srgbClr val="DDDDDD"/>
-                      </a:solidFill>
-                      <a:prstDash val="solid"/>
-                      <a:round/>
-                      <a:headEnd type="none" w="med" len="med"/>
-                      <a:tailEnd type="none" w="med" len="med"/>
-                    </a:lnB>
-                    <a:noFill/>
-                  </a:tcPr>
-                </a:tc>
-                <a:extLst>
-                  <a:ext uri="{0D108BD9-81ED-4DB2-BD59-A6C34878D82A}">
-                    <a16:rowId xmlns:a16="http://schemas.microsoft.com/office/drawing/2014/main" val="365479551"/>
-                  </a:ext>
-                </a:extLst>
-              </a:tr>
-              <a:tr h="513826">
-                <a:tc>
-                  <a:txBody>
-                    <a:bodyPr/>
-                    <a:lstStyle/>
-                    <a:p>
-                      <a:pPr algn="l">
-                        <a:buNone/>
-                      </a:pPr>
-                      <a:r>
-                        <a:rPr lang="en-GB" sz="900">
-                          <a:effectLst/>
-                        </a:rPr>
-                        <a:t>Fragmentierung</a:t>
-                      </a:r>
-                    </a:p>
-                  </a:txBody>
-                  <a:tcPr marL="40143" marR="40143" marT="40143" marB="40143" anchor="ctr">
-                    <a:lnL w="9525" cap="flat" cmpd="sng" algn="ctr">
-                      <a:solidFill>
-                        <a:srgbClr val="DDDDDD"/>
-                      </a:solidFill>
-                      <a:prstDash val="solid"/>
-                      <a:round/>
-                      <a:headEnd type="none" w="med" len="med"/>
-                      <a:tailEnd type="none" w="med" len="med"/>
-                    </a:lnL>
-                    <a:lnR w="9525" cap="flat" cmpd="sng" algn="ctr">
-                      <a:solidFill>
-                        <a:srgbClr val="DDDDDD"/>
-                      </a:solidFill>
-                      <a:prstDash val="solid"/>
-                      <a:round/>
-                      <a:headEnd type="none" w="med" len="med"/>
-                      <a:tailEnd type="none" w="med" len="med"/>
-                    </a:lnR>
-                    <a:lnT w="9525" cap="flat" cmpd="sng" algn="ctr">
-                      <a:solidFill>
-                        <a:srgbClr val="DDDDDD"/>
-                      </a:solidFill>
-                      <a:prstDash val="solid"/>
-                      <a:round/>
-                      <a:headEnd type="none" w="med" len="med"/>
-                      <a:tailEnd type="none" w="med" len="med"/>
-                    </a:lnT>
-                    <a:lnB w="9525" cap="flat" cmpd="sng" algn="ctr">
-                      <a:solidFill>
-                        <a:srgbClr val="DDDDDD"/>
-                      </a:solidFill>
-                      <a:prstDash val="solid"/>
-                      <a:round/>
-                      <a:headEnd type="none" w="med" len="med"/>
-                      <a:tailEnd type="none" w="med" len="med"/>
-                    </a:lnB>
-                    <a:noFill/>
-                  </a:tcPr>
-                </a:tc>
-                <a:tc>
-                  <a:txBody>
-                    <a:bodyPr/>
-                    <a:lstStyle/>
-                    <a:p>
-                      <a:pPr algn="l">
-                        <a:buNone/>
-                      </a:pPr>
-                      <a:r>
-                        <a:rPr lang="de-DE" sz="900" dirty="0">
-                          <a:effectLst/>
-                        </a:rPr>
-                        <a:t>Page‑Fragmentierung, Index‑Wartung nötig.</a:t>
-                      </a:r>
-                    </a:p>
-                    <a:p>
-                      <a:pPr algn="l">
-                        <a:buNone/>
-                      </a:pPr>
-                      <a:endParaRPr lang="de-DE" sz="900" dirty="0">
-                        <a:effectLst/>
-                      </a:endParaRPr>
-                    </a:p>
-                  </a:txBody>
-                  <a:tcPr marL="40143" marR="40143" marT="40143" marB="40143" anchor="ctr">
-                    <a:lnL w="9525" cap="flat" cmpd="sng" algn="ctr">
-                      <a:solidFill>
-                        <a:srgbClr val="DDDDDD"/>
-                      </a:solidFill>
-                      <a:prstDash val="solid"/>
-                      <a:round/>
-                      <a:headEnd type="none" w="med" len="med"/>
-                      <a:tailEnd type="none" w="med" len="med"/>
-                    </a:lnL>
-                    <a:lnR w="9525" cap="flat" cmpd="sng" algn="ctr">
-                      <a:solidFill>
-                        <a:srgbClr val="DDDDDD"/>
-                      </a:solidFill>
-                      <a:prstDash val="solid"/>
-                      <a:round/>
-                      <a:headEnd type="none" w="med" len="med"/>
-                      <a:tailEnd type="none" w="med" len="med"/>
-                    </a:lnR>
-                    <a:lnT w="9525" cap="flat" cmpd="sng" algn="ctr">
-                      <a:solidFill>
-                        <a:srgbClr val="DDDDDD"/>
-                      </a:solidFill>
-                      <a:prstDash val="solid"/>
-                      <a:round/>
-                      <a:headEnd type="none" w="med" len="med"/>
-                      <a:tailEnd type="none" w="med" len="med"/>
-                    </a:lnT>
-                    <a:lnB w="9525" cap="flat" cmpd="sng" algn="ctr">
-                      <a:solidFill>
-                        <a:srgbClr val="DDDDDD"/>
-                      </a:solidFill>
-                      <a:prstDash val="solid"/>
-                      <a:round/>
-                      <a:headEnd type="none" w="med" len="med"/>
-                      <a:tailEnd type="none" w="med" len="med"/>
-                    </a:lnB>
-                    <a:noFill/>
-                  </a:tcPr>
-                </a:tc>
-                <a:tc>
-                  <a:txBody>
-                    <a:bodyPr/>
-                    <a:lstStyle/>
-                    <a:p>
-                      <a:pPr algn="l">
-                        <a:buNone/>
-                      </a:pPr>
-                      <a:r>
-                        <a:rPr lang="de-DE" sz="900" dirty="0">
-                          <a:effectLst/>
-                        </a:rPr>
-                        <a:t>Keine Page‑Fragmentierung, Hintergrund‑</a:t>
-                      </a:r>
-                      <a:r>
-                        <a:rPr lang="de-DE" sz="900" dirty="0" err="1">
-                          <a:effectLst/>
-                        </a:rPr>
-                        <a:t>MERGE</a:t>
-                      </a:r>
-                      <a:r>
-                        <a:rPr lang="de-DE" sz="900" dirty="0">
-                          <a:effectLst/>
-                        </a:rPr>
-                        <a:t> kompaktiert Files.</a:t>
-                      </a:r>
-                    </a:p>
-                  </a:txBody>
-                  <a:tcPr marL="40143" marR="40143" marT="40143" marB="40143" anchor="ctr">
-                    <a:lnL w="9525" cap="flat" cmpd="sng" algn="ctr">
-                      <a:solidFill>
-                        <a:srgbClr val="DDDDDD"/>
-                      </a:solidFill>
-                      <a:prstDash val="solid"/>
-                      <a:round/>
-                      <a:headEnd type="none" w="med" len="med"/>
-                      <a:tailEnd type="none" w="med" len="med"/>
-                    </a:lnL>
-                    <a:lnR w="9525" cap="flat" cmpd="sng" algn="ctr">
-                      <a:solidFill>
-                        <a:srgbClr val="DDDDDD"/>
-                      </a:solidFill>
-                      <a:prstDash val="solid"/>
-                      <a:round/>
-                      <a:headEnd type="none" w="med" len="med"/>
-                      <a:tailEnd type="none" w="med" len="med"/>
-                    </a:lnR>
-                    <a:lnT w="9525" cap="flat" cmpd="sng" algn="ctr">
-                      <a:solidFill>
-                        <a:srgbClr val="DDDDDD"/>
-                      </a:solidFill>
-                      <a:prstDash val="solid"/>
-                      <a:round/>
-                      <a:headEnd type="none" w="med" len="med"/>
-                      <a:tailEnd type="none" w="med" len="med"/>
-                    </a:lnT>
-                    <a:lnB w="9525" cap="flat" cmpd="sng" algn="ctr">
-                      <a:solidFill>
-                        <a:srgbClr val="DDDDDD"/>
-                      </a:solidFill>
-                      <a:prstDash val="solid"/>
-                      <a:round/>
-                      <a:headEnd type="none" w="med" len="med"/>
-                      <a:tailEnd type="none" w="med" len="med"/>
-                    </a:lnB>
-                    <a:noFill/>
-                  </a:tcPr>
-                </a:tc>
-                <a:extLst>
-                  <a:ext uri="{0D108BD9-81ED-4DB2-BD59-A6C34878D82A}">
-                    <a16:rowId xmlns:a16="http://schemas.microsoft.com/office/drawing/2014/main" val="1841073391"/>
-                  </a:ext>
-                </a:extLst>
-              </a:tr>
-              <a:tr h="513826">
-                <a:tc>
-                  <a:txBody>
-                    <a:bodyPr/>
-                    <a:lstStyle/>
-                    <a:p>
-                      <a:pPr algn="l">
-                        <a:buNone/>
-                      </a:pPr>
-                      <a:r>
-                        <a:rPr lang="en-GB" sz="900" dirty="0" err="1">
-                          <a:effectLst/>
-                        </a:rPr>
-                        <a:t>DDL</a:t>
-                      </a:r>
-                      <a:r>
-                        <a:rPr lang="en-GB" sz="900" dirty="0">
-                          <a:effectLst/>
-                        </a:rPr>
-                        <a:t> (Data Definition Language)</a:t>
-                      </a:r>
-                    </a:p>
-                  </a:txBody>
-                  <a:tcPr marL="40143" marR="40143" marT="40143" marB="40143" anchor="ctr">
-                    <a:lnL w="9525" cap="flat" cmpd="sng" algn="ctr">
-                      <a:solidFill>
-                        <a:srgbClr val="DDDDDD"/>
-                      </a:solidFill>
-                      <a:prstDash val="solid"/>
-                      <a:round/>
-                      <a:headEnd type="none" w="med" len="med"/>
-                      <a:tailEnd type="none" w="med" len="med"/>
-                    </a:lnL>
-                    <a:lnR w="9525" cap="flat" cmpd="sng" algn="ctr">
-                      <a:solidFill>
-                        <a:srgbClr val="DDDDDD"/>
-                      </a:solidFill>
-                      <a:prstDash val="solid"/>
-                      <a:round/>
-                      <a:headEnd type="none" w="med" len="med"/>
-                      <a:tailEnd type="none" w="med" len="med"/>
-                    </a:lnR>
-                    <a:lnT w="9525" cap="flat" cmpd="sng" algn="ctr">
-                      <a:solidFill>
-                        <a:srgbClr val="DDDDDD"/>
-                      </a:solidFill>
-                      <a:prstDash val="solid"/>
-                      <a:round/>
-                      <a:headEnd type="none" w="med" len="med"/>
-                      <a:tailEnd type="none" w="med" len="med"/>
-                    </a:lnT>
-                    <a:lnB w="9525" cap="flat" cmpd="sng" algn="ctr">
-                      <a:solidFill>
-                        <a:srgbClr val="DDDDDD"/>
-                      </a:solidFill>
-                      <a:prstDash val="solid"/>
-                      <a:round/>
-                      <a:headEnd type="none" w="med" len="med"/>
-                      <a:tailEnd type="none" w="med" len="med"/>
-                    </a:lnB>
-                    <a:noFill/>
-                  </a:tcPr>
-                </a:tc>
-                <a:tc>
-                  <a:txBody>
-                    <a:bodyPr/>
-                    <a:lstStyle/>
-                    <a:p>
-                      <a:pPr algn="l">
-                        <a:buNone/>
-                      </a:pPr>
-                      <a:r>
-                        <a:rPr lang="en-US" sz="900" dirty="0">
-                          <a:effectLst/>
-                        </a:rPr>
-                        <a:t>Standard CREATE TABLE.</a:t>
-                      </a:r>
-                    </a:p>
-                  </a:txBody>
-                  <a:tcPr marL="40143" marR="40143" marT="40143" marB="40143" anchor="ctr">
-                    <a:lnL w="9525" cap="flat" cmpd="sng" algn="ctr">
-                      <a:solidFill>
-                        <a:srgbClr val="DDDDDD"/>
-                      </a:solidFill>
-                      <a:prstDash val="solid"/>
-                      <a:round/>
-                      <a:headEnd type="none" w="med" len="med"/>
-                      <a:tailEnd type="none" w="med" len="med"/>
-                    </a:lnL>
-                    <a:lnR w="9525" cap="flat" cmpd="sng" algn="ctr">
-                      <a:solidFill>
-                        <a:srgbClr val="DDDDDD"/>
-                      </a:solidFill>
-                      <a:prstDash val="solid"/>
-                      <a:round/>
-                      <a:headEnd type="none" w="med" len="med"/>
-                      <a:tailEnd type="none" w="med" len="med"/>
-                    </a:lnR>
-                    <a:lnT w="9525" cap="flat" cmpd="sng" algn="ctr">
-                      <a:solidFill>
-                        <a:srgbClr val="DDDDDD"/>
-                      </a:solidFill>
-                      <a:prstDash val="solid"/>
-                      <a:round/>
-                      <a:headEnd type="none" w="med" len="med"/>
-                      <a:tailEnd type="none" w="med" len="med"/>
-                    </a:lnT>
-                    <a:lnB w="9525" cap="flat" cmpd="sng" algn="ctr">
-                      <a:solidFill>
-                        <a:srgbClr val="DDDDDD"/>
-                      </a:solidFill>
-                      <a:prstDash val="solid"/>
-                      <a:round/>
-                      <a:headEnd type="none" w="med" len="med"/>
-                      <a:tailEnd type="none" w="med" len="med"/>
-                    </a:lnB>
-                    <a:noFill/>
-                  </a:tcPr>
-                </a:tc>
-                <a:tc>
-                  <a:txBody>
-                    <a:bodyPr/>
-                    <a:lstStyle/>
-                    <a:p>
-                      <a:pPr algn="l">
-                        <a:buNone/>
-                      </a:pPr>
-                      <a:r>
-                        <a:rPr lang="en-US" sz="900" dirty="0" err="1">
-                          <a:effectLst/>
-                        </a:rPr>
-                        <a:t>MEMORY_OPTIMIZED</a:t>
-                      </a:r>
-                      <a:r>
-                        <a:rPr lang="en-US" sz="900" dirty="0">
-                          <a:effectLst/>
-                        </a:rPr>
-                        <a:t> = ON, DURABILITY‑Option, </a:t>
-                      </a:r>
-                      <a:r>
-                        <a:rPr lang="en-US" sz="900" dirty="0" err="1">
-                          <a:effectLst/>
-                        </a:rPr>
-                        <a:t>spezielle</a:t>
-                      </a:r>
-                      <a:r>
-                        <a:rPr lang="en-US" sz="900" dirty="0">
-                          <a:effectLst/>
-                        </a:rPr>
-                        <a:t> Filegroup </a:t>
-                      </a:r>
-                      <a:r>
-                        <a:rPr lang="en-US" sz="900" dirty="0" err="1">
-                          <a:effectLst/>
-                        </a:rPr>
-                        <a:t>nötig</a:t>
-                      </a:r>
-                      <a:r>
-                        <a:rPr lang="en-US" sz="900" dirty="0">
-                          <a:effectLst/>
-                        </a:rPr>
-                        <a:t>.</a:t>
-                      </a:r>
-                    </a:p>
-                  </a:txBody>
-                  <a:tcPr marL="40143" marR="40143" marT="40143" marB="40143" anchor="ctr">
-                    <a:lnL w="9525" cap="flat" cmpd="sng" algn="ctr">
-                      <a:solidFill>
-                        <a:srgbClr val="DDDDDD"/>
-                      </a:solidFill>
-                      <a:prstDash val="solid"/>
-                      <a:round/>
-                      <a:headEnd type="none" w="med" len="med"/>
-                      <a:tailEnd type="none" w="med" len="med"/>
-                    </a:lnL>
-                    <a:lnR w="9525" cap="flat" cmpd="sng" algn="ctr">
-                      <a:solidFill>
-                        <a:srgbClr val="DDDDDD"/>
-                      </a:solidFill>
-                      <a:prstDash val="solid"/>
-                      <a:round/>
-                      <a:headEnd type="none" w="med" len="med"/>
-                      <a:tailEnd type="none" w="med" len="med"/>
-                    </a:lnR>
-                    <a:lnT w="9525" cap="flat" cmpd="sng" algn="ctr">
-                      <a:solidFill>
-                        <a:srgbClr val="DDDDDD"/>
-                      </a:solidFill>
-                      <a:prstDash val="solid"/>
-                      <a:round/>
-                      <a:headEnd type="none" w="med" len="med"/>
-                      <a:tailEnd type="none" w="med" len="med"/>
-                    </a:lnT>
-                    <a:lnB w="9525" cap="flat" cmpd="sng" algn="ctr">
-                      <a:solidFill>
-                        <a:srgbClr val="DDDDDD"/>
-                      </a:solidFill>
-                      <a:prstDash val="solid"/>
-                      <a:round/>
-                      <a:headEnd type="none" w="med" len="med"/>
-                      <a:tailEnd type="none" w="med" len="med"/>
-                    </a:lnB>
-                    <a:noFill/>
-                  </a:tcPr>
-                </a:tc>
-                <a:extLst>
-                  <a:ext uri="{0D108BD9-81ED-4DB2-BD59-A6C34878D82A}">
-                    <a16:rowId xmlns:a16="http://schemas.microsoft.com/office/drawing/2014/main" val="2178630465"/>
-                  </a:ext>
-                </a:extLst>
-              </a:tr>
-              <a:tr h="513826">
-                <a:tc>
-                  <a:txBody>
-                    <a:bodyPr/>
-                    <a:lstStyle/>
-                    <a:p>
-                      <a:pPr algn="l">
-                        <a:buNone/>
-                      </a:pPr>
-                      <a:r>
-                        <a:rPr lang="en-GB" sz="900" dirty="0" err="1">
-                          <a:effectLst/>
-                        </a:rPr>
-                        <a:t>Vorteil</a:t>
-                      </a:r>
-                      <a:r>
-                        <a:rPr lang="en-GB" sz="900" dirty="0">
-                          <a:effectLst/>
-                        </a:rPr>
-                        <a:t> </a:t>
-                      </a:r>
-                      <a:r>
-                        <a:rPr lang="en-GB" sz="900" dirty="0" err="1">
-                          <a:effectLst/>
-                        </a:rPr>
-                        <a:t>bei</a:t>
-                      </a:r>
-                      <a:endParaRPr lang="en-GB" sz="900" dirty="0">
-                        <a:effectLst/>
-                      </a:endParaRPr>
-                    </a:p>
-                  </a:txBody>
-                  <a:tcPr marL="40143" marR="40143" marT="40143" marB="40143" anchor="ctr">
-                    <a:lnL w="9525" cap="flat" cmpd="sng" algn="ctr">
-                      <a:solidFill>
-                        <a:srgbClr val="DDDDDD"/>
-                      </a:solidFill>
-                      <a:prstDash val="solid"/>
-                      <a:round/>
-                      <a:headEnd type="none" w="med" len="med"/>
-                      <a:tailEnd type="none" w="med" len="med"/>
-                    </a:lnL>
-                    <a:lnR w="9525" cap="flat" cmpd="sng" algn="ctr">
-                      <a:solidFill>
-                        <a:srgbClr val="DDDDDD"/>
-                      </a:solidFill>
-                      <a:prstDash val="solid"/>
-                      <a:round/>
-                      <a:headEnd type="none" w="med" len="med"/>
-                      <a:tailEnd type="none" w="med" len="med"/>
-                    </a:lnR>
-                    <a:lnT w="9525" cap="flat" cmpd="sng" algn="ctr">
-                      <a:solidFill>
-                        <a:srgbClr val="DDDDDD"/>
-                      </a:solidFill>
-                      <a:prstDash val="solid"/>
-                      <a:round/>
-                      <a:headEnd type="none" w="med" len="med"/>
-                      <a:tailEnd type="none" w="med" len="med"/>
-                    </a:lnT>
-                    <a:lnB w="9525" cap="flat" cmpd="sng" algn="ctr">
-                      <a:solidFill>
-                        <a:srgbClr val="DDDDDD"/>
-                      </a:solidFill>
-                      <a:prstDash val="solid"/>
-                      <a:round/>
-                      <a:headEnd type="none" w="med" len="med"/>
-                      <a:tailEnd type="none" w="med" len="med"/>
-                    </a:lnB>
-                    <a:noFill/>
-                  </a:tcPr>
-                </a:tc>
-                <a:tc>
-                  <a:txBody>
-                    <a:bodyPr/>
-                    <a:lstStyle/>
-                    <a:p>
-                      <a:pPr algn="l">
-                        <a:buNone/>
-                      </a:pPr>
-                      <a:r>
-                        <a:rPr lang="en-GB" sz="900" dirty="0">
-                          <a:effectLst/>
-                        </a:rPr>
-                        <a:t>Allgemeine </a:t>
-                      </a:r>
-                      <a:r>
-                        <a:rPr lang="en-GB" sz="900" dirty="0" err="1">
-                          <a:effectLst/>
-                        </a:rPr>
-                        <a:t>OLTP</a:t>
-                      </a:r>
-                      <a:r>
-                        <a:rPr lang="en-GB" sz="900" dirty="0">
-                          <a:effectLst/>
-                        </a:rPr>
-                        <a:t>/Reporting‑</a:t>
-                      </a:r>
-                      <a:r>
-                        <a:rPr lang="en-GB" sz="900" dirty="0" err="1">
-                          <a:effectLst/>
-                        </a:rPr>
-                        <a:t>Tabellen</a:t>
-                      </a:r>
-                      <a:r>
-                        <a:rPr lang="en-GB" sz="900" dirty="0">
-                          <a:effectLst/>
-                        </a:rPr>
-                        <a:t>.</a:t>
-                      </a:r>
-                    </a:p>
-                  </a:txBody>
-                  <a:tcPr marL="40143" marR="40143" marT="40143" marB="40143" anchor="ctr">
-                    <a:lnL w="9525" cap="flat" cmpd="sng" algn="ctr">
-                      <a:solidFill>
-                        <a:srgbClr val="DDDDDD"/>
-                      </a:solidFill>
-                      <a:prstDash val="solid"/>
-                      <a:round/>
-                      <a:headEnd type="none" w="med" len="med"/>
-                      <a:tailEnd type="none" w="med" len="med"/>
-                    </a:lnL>
-                    <a:lnR w="9525" cap="flat" cmpd="sng" algn="ctr">
-                      <a:solidFill>
-                        <a:srgbClr val="DDDDDD"/>
-                      </a:solidFill>
-                      <a:prstDash val="solid"/>
-                      <a:round/>
-                      <a:headEnd type="none" w="med" len="med"/>
-                      <a:tailEnd type="none" w="med" len="med"/>
-                    </a:lnR>
-                    <a:lnT w="9525" cap="flat" cmpd="sng" algn="ctr">
-                      <a:solidFill>
-                        <a:srgbClr val="DDDDDD"/>
-                      </a:solidFill>
-                      <a:prstDash val="solid"/>
-                      <a:round/>
-                      <a:headEnd type="none" w="med" len="med"/>
-                      <a:tailEnd type="none" w="med" len="med"/>
-                    </a:lnT>
-                    <a:lnB w="9525" cap="flat" cmpd="sng" algn="ctr">
-                      <a:solidFill>
-                        <a:srgbClr val="DDDDDD"/>
-                      </a:solidFill>
-                      <a:prstDash val="solid"/>
-                      <a:round/>
-                      <a:headEnd type="none" w="med" len="med"/>
-                      <a:tailEnd type="none" w="med" len="med"/>
-                    </a:lnB>
-                    <a:noFill/>
-                  </a:tcPr>
-                </a:tc>
-                <a:tc>
-                  <a:txBody>
-                    <a:bodyPr/>
-                    <a:lstStyle/>
-                    <a:p>
-                      <a:pPr algn="l">
-                        <a:buNone/>
-                      </a:pPr>
-                      <a:r>
-                        <a:rPr lang="en-US" sz="900" dirty="0">
-                          <a:effectLst/>
-                        </a:rPr>
-                        <a:t>High‑Throughput‑</a:t>
-                      </a:r>
-                      <a:r>
-                        <a:rPr lang="en-US" sz="900" dirty="0" err="1">
-                          <a:effectLst/>
-                        </a:rPr>
-                        <a:t>OLTP</a:t>
-                      </a:r>
-                      <a:r>
-                        <a:rPr lang="en-US" sz="900" dirty="0">
-                          <a:effectLst/>
-                        </a:rPr>
-                        <a:t>, Session‑State, Queues, Hot‑Lookups.</a:t>
-                      </a:r>
-                    </a:p>
-                  </a:txBody>
-                  <a:tcPr marL="40143" marR="40143" marT="40143" marB="40143" anchor="ctr">
-                    <a:lnL w="9525" cap="flat" cmpd="sng" algn="ctr">
-                      <a:solidFill>
-                        <a:srgbClr val="DDDDDD"/>
-                      </a:solidFill>
-                      <a:prstDash val="solid"/>
-                      <a:round/>
-                      <a:headEnd type="none" w="med" len="med"/>
-                      <a:tailEnd type="none" w="med" len="med"/>
-                    </a:lnL>
-                    <a:lnR w="9525" cap="flat" cmpd="sng" algn="ctr">
-                      <a:solidFill>
-                        <a:srgbClr val="DDDDDD"/>
-                      </a:solidFill>
-                      <a:prstDash val="solid"/>
-                      <a:round/>
-                      <a:headEnd type="none" w="med" len="med"/>
-                      <a:tailEnd type="none" w="med" len="med"/>
-                    </a:lnR>
-                    <a:lnT w="9525" cap="flat" cmpd="sng" algn="ctr">
-                      <a:solidFill>
-                        <a:srgbClr val="DDDDDD"/>
-                      </a:solidFill>
-                      <a:prstDash val="solid"/>
-                      <a:round/>
-                      <a:headEnd type="none" w="med" len="med"/>
-                      <a:tailEnd type="none" w="med" len="med"/>
-                    </a:lnT>
-                    <a:lnB w="9525" cap="flat" cmpd="sng" algn="ctr">
-                      <a:solidFill>
-                        <a:srgbClr val="DDDDDD"/>
-                      </a:solidFill>
-                      <a:prstDash val="solid"/>
-                      <a:round/>
-                      <a:headEnd type="none" w="med" len="med"/>
-                      <a:tailEnd type="none" w="med" len="med"/>
-                    </a:lnB>
-                    <a:noFill/>
-                  </a:tcPr>
-                </a:tc>
-                <a:extLst>
-                  <a:ext uri="{0D108BD9-81ED-4DB2-BD59-A6C34878D82A}">
-                    <a16:rowId xmlns:a16="http://schemas.microsoft.com/office/drawing/2014/main" val="4232391107"/>
-                  </a:ext>
-                </a:extLst>
-              </a:tr>
-            </a:tbl>
-          </a:graphicData>
-        </a:graphic>
-      </p:graphicFrame>
-    </p:spTree>
-    <p:extLst>
-      <p:ext uri="{BB962C8B-B14F-4D97-AF65-F5344CB8AC3E}">
-        <p14:creationId xmlns:p14="http://schemas.microsoft.com/office/powerpoint/2010/main" val="3884400882"/>
+        <p14:creationId xmlns:p14="http://schemas.microsoft.com/office/powerpoint/2010/main" val="3717939352"/>
       </p:ext>
     </p:extLst>
   </p:cSld>
@@ -27445,4 +26396,319 @@
     </a:ext>
   </a:extLst>
 </a:theme>
+</file>
+
+<file path=ppt/theme/theme2.xml><?xml version="1.0" encoding="utf-8"?>
+<a:theme xmlns:a="http://schemas.openxmlformats.org/drawingml/2006/main" name="Office Theme">
+  <a:themeElements>
+    <a:clrScheme name="Office">
+      <a:dk1>
+        <a:sysClr val="windowText" lastClr="000000"/>
+      </a:dk1>
+      <a:lt1>
+        <a:sysClr val="window" lastClr="FFFFFF"/>
+      </a:lt1>
+      <a:dk2>
+        <a:srgbClr val="0E2841"/>
+      </a:dk2>
+      <a:lt2>
+        <a:srgbClr val="E8E8E8"/>
+      </a:lt2>
+      <a:accent1>
+        <a:srgbClr val="156082"/>
+      </a:accent1>
+      <a:accent2>
+        <a:srgbClr val="E97132"/>
+      </a:accent2>
+      <a:accent3>
+        <a:srgbClr val="196B24"/>
+      </a:accent3>
+      <a:accent4>
+        <a:srgbClr val="0F9ED5"/>
+      </a:accent4>
+      <a:accent5>
+        <a:srgbClr val="A02B93"/>
+      </a:accent5>
+      <a:accent6>
+        <a:srgbClr val="4EA72E"/>
+      </a:accent6>
+      <a:hlink>
+        <a:srgbClr val="467886"/>
+      </a:hlink>
+      <a:folHlink>
+        <a:srgbClr val="96607D"/>
+      </a:folHlink>
+    </a:clrScheme>
+    <a:fontScheme name="Office">
+      <a:majorFont>
+        <a:latin typeface="Aptos Display" panose="02110004020202020204"/>
+        <a:ea typeface=""/>
+        <a:cs typeface=""/>
+        <a:font script="Jpan" typeface="游ゴシック Light"/>
+        <a:font script="Hang" typeface="맑은 고딕"/>
+        <a:font script="Hans" typeface="等线 Light"/>
+        <a:font script="Hant" typeface="新細明體"/>
+        <a:font script="Arab" typeface="Times New Roman"/>
+        <a:font script="Hebr" typeface="Times New Roman"/>
+        <a:font script="Thai" typeface="Angsana New"/>
+        <a:font script="Ethi" typeface="Nyala"/>
+        <a:font script="Beng" typeface="Vrinda"/>
+        <a:font script="Gujr" typeface="Shruti"/>
+        <a:font script="Khmr" typeface="MoolBoran"/>
+        <a:font script="Knda" typeface="Tunga"/>
+        <a:font script="Guru" typeface="Raavi"/>
+        <a:font script="Cans" typeface="Euphemia"/>
+        <a:font script="Cher" typeface="Plantagenet Cherokee"/>
+        <a:font script="Yiii" typeface="Microsoft Yi Baiti"/>
+        <a:font script="Tibt" typeface="Microsoft Himalaya"/>
+        <a:font script="Thaa" typeface="MV Boli"/>
+        <a:font script="Deva" typeface="Mangal"/>
+        <a:font script="Telu" typeface="Gautami"/>
+        <a:font script="Taml" typeface="Latha"/>
+        <a:font script="Syrc" typeface="Estrangelo Edessa"/>
+        <a:font script="Orya" typeface="Kalinga"/>
+        <a:font script="Mlym" typeface="Kartika"/>
+        <a:font script="Laoo" typeface="DokChampa"/>
+        <a:font script="Sinh" typeface="Iskoola Pota"/>
+        <a:font script="Mong" typeface="Mongolian Baiti"/>
+        <a:font script="Viet" typeface="Times New Roman"/>
+        <a:font script="Uigh" typeface="Microsoft Uighur"/>
+        <a:font script="Geor" typeface="Sylfaen"/>
+        <a:font script="Armn" typeface="Arial"/>
+        <a:font script="Bugi" typeface="Leelawadee UI"/>
+        <a:font script="Bopo" typeface="Microsoft JhengHei"/>
+        <a:font script="Java" typeface="Javanese Text"/>
+        <a:font script="Lisu" typeface="Segoe UI"/>
+        <a:font script="Mymr" typeface="Myanmar Text"/>
+        <a:font script="Nkoo" typeface="Ebrima"/>
+        <a:font script="Olck" typeface="Nirmala UI"/>
+        <a:font script="Osma" typeface="Ebrima"/>
+        <a:font script="Phag" typeface="Phagspa"/>
+        <a:font script="Syrn" typeface="Estrangelo Edessa"/>
+        <a:font script="Syrj" typeface="Estrangelo Edessa"/>
+        <a:font script="Syre" typeface="Estrangelo Edessa"/>
+        <a:font script="Sora" typeface="Nirmala UI"/>
+        <a:font script="Tale" typeface="Microsoft Tai Le"/>
+        <a:font script="Talu" typeface="Microsoft New Tai Lue"/>
+        <a:font script="Tfng" typeface="Ebrima"/>
+      </a:majorFont>
+      <a:minorFont>
+        <a:latin typeface="Aptos" panose="02110004020202020204"/>
+        <a:ea typeface=""/>
+        <a:cs typeface=""/>
+        <a:font script="Jpan" typeface="游ゴシック"/>
+        <a:font script="Hang" typeface="맑은 고딕"/>
+        <a:font script="Hans" typeface="等线"/>
+        <a:font script="Hant" typeface="新細明體"/>
+        <a:font script="Arab" typeface="Arial"/>
+        <a:font script="Hebr" typeface="Arial"/>
+        <a:font script="Thai" typeface="Cordia New"/>
+        <a:font script="Ethi" typeface="Nyala"/>
+        <a:font script="Beng" typeface="Vrinda"/>
+        <a:font script="Gujr" typeface="Shruti"/>
+        <a:font script="Khmr" typeface="DaunPenh"/>
+        <a:font script="Knda" typeface="Tunga"/>
+        <a:font script="Guru" typeface="Raavi"/>
+        <a:font script="Cans" typeface="Euphemia"/>
+        <a:font script="Cher" typeface="Plantagenet Cherokee"/>
+        <a:font script="Yiii" typeface="Microsoft Yi Baiti"/>
+        <a:font script="Tibt" typeface="Microsoft Himalaya"/>
+        <a:font script="Thaa" typeface="MV Boli"/>
+        <a:font script="Deva" typeface="Mangal"/>
+        <a:font script="Telu" typeface="Gautami"/>
+        <a:font script="Taml" typeface="Latha"/>
+        <a:font script="Syrc" typeface="Estrangelo Edessa"/>
+        <a:font script="Orya" typeface="Kalinga"/>
+        <a:font script="Mlym" typeface="Kartika"/>
+        <a:font script="Laoo" typeface="DokChampa"/>
+        <a:font script="Sinh" typeface="Iskoola Pota"/>
+        <a:font script="Mong" typeface="Mongolian Baiti"/>
+        <a:font script="Viet" typeface="Arial"/>
+        <a:font script="Uigh" typeface="Microsoft Uighur"/>
+        <a:font script="Geor" typeface="Sylfaen"/>
+        <a:font script="Armn" typeface="Arial"/>
+        <a:font script="Bugi" typeface="Leelawadee UI"/>
+        <a:font script="Bopo" typeface="Microsoft JhengHei"/>
+        <a:font script="Java" typeface="Javanese Text"/>
+        <a:font script="Lisu" typeface="Segoe UI"/>
+        <a:font script="Mymr" typeface="Myanmar Text"/>
+        <a:font script="Nkoo" typeface="Ebrima"/>
+        <a:font script="Olck" typeface="Nirmala UI"/>
+        <a:font script="Osma" typeface="Ebrima"/>
+        <a:font script="Phag" typeface="Phagspa"/>
+        <a:font script="Syrn" typeface="Estrangelo Edessa"/>
+        <a:font script="Syrj" typeface="Estrangelo Edessa"/>
+        <a:font script="Syre" typeface="Estrangelo Edessa"/>
+        <a:font script="Sora" typeface="Nirmala UI"/>
+        <a:font script="Tale" typeface="Microsoft Tai Le"/>
+        <a:font script="Talu" typeface="Microsoft New Tai Lue"/>
+        <a:font script="Tfng" typeface="Ebrima"/>
+      </a:minorFont>
+    </a:fontScheme>
+    <a:fmtScheme name="Office">
+      <a:fillStyleLst>
+        <a:solidFill>
+          <a:schemeClr val="phClr"/>
+        </a:solidFill>
+        <a:gradFill rotWithShape="1">
+          <a:gsLst>
+            <a:gs pos="0">
+              <a:schemeClr val="phClr">
+                <a:lumMod val="110000"/>
+                <a:satMod val="105000"/>
+                <a:tint val="67000"/>
+              </a:schemeClr>
+            </a:gs>
+            <a:gs pos="50000">
+              <a:schemeClr val="phClr">
+                <a:lumMod val="105000"/>
+                <a:satMod val="103000"/>
+                <a:tint val="73000"/>
+              </a:schemeClr>
+            </a:gs>
+            <a:gs pos="100000">
+              <a:schemeClr val="phClr">
+                <a:lumMod val="105000"/>
+                <a:satMod val="109000"/>
+                <a:tint val="81000"/>
+              </a:schemeClr>
+            </a:gs>
+          </a:gsLst>
+          <a:lin ang="5400000" scaled="0"/>
+        </a:gradFill>
+        <a:gradFill rotWithShape="1">
+          <a:gsLst>
+            <a:gs pos="0">
+              <a:schemeClr val="phClr">
+                <a:satMod val="103000"/>
+                <a:lumMod val="102000"/>
+                <a:tint val="94000"/>
+              </a:schemeClr>
+            </a:gs>
+            <a:gs pos="50000">
+              <a:schemeClr val="phClr">
+                <a:satMod val="110000"/>
+                <a:lumMod val="100000"/>
+                <a:shade val="100000"/>
+              </a:schemeClr>
+            </a:gs>
+            <a:gs pos="100000">
+              <a:schemeClr val="phClr">
+                <a:lumMod val="99000"/>
+                <a:satMod val="120000"/>
+                <a:shade val="78000"/>
+              </a:schemeClr>
+            </a:gs>
+          </a:gsLst>
+          <a:lin ang="5400000" scaled="0"/>
+        </a:gradFill>
+      </a:fillStyleLst>
+      <a:lnStyleLst>
+        <a:ln w="12700" cap="flat" cmpd="sng" algn="ctr">
+          <a:solidFill>
+            <a:schemeClr val="phClr"/>
+          </a:solidFill>
+          <a:prstDash val="solid"/>
+          <a:miter lim="800000"/>
+        </a:ln>
+        <a:ln w="19050" cap="flat" cmpd="sng" algn="ctr">
+          <a:solidFill>
+            <a:schemeClr val="phClr"/>
+          </a:solidFill>
+          <a:prstDash val="solid"/>
+          <a:miter lim="800000"/>
+        </a:ln>
+        <a:ln w="25400" cap="flat" cmpd="sng" algn="ctr">
+          <a:solidFill>
+            <a:schemeClr val="phClr"/>
+          </a:solidFill>
+          <a:prstDash val="solid"/>
+          <a:miter lim="800000"/>
+        </a:ln>
+      </a:lnStyleLst>
+      <a:effectStyleLst>
+        <a:effectStyle>
+          <a:effectLst/>
+        </a:effectStyle>
+        <a:effectStyle>
+          <a:effectLst/>
+        </a:effectStyle>
+        <a:effectStyle>
+          <a:effectLst>
+            <a:outerShdw blurRad="57150" dist="19050" dir="5400000" algn="ctr" rotWithShape="0">
+              <a:srgbClr val="000000">
+                <a:alpha val="63000"/>
+              </a:srgbClr>
+            </a:outerShdw>
+          </a:effectLst>
+        </a:effectStyle>
+      </a:effectStyleLst>
+      <a:bgFillStyleLst>
+        <a:solidFill>
+          <a:schemeClr val="phClr"/>
+        </a:solidFill>
+        <a:solidFill>
+          <a:schemeClr val="phClr">
+            <a:tint val="95000"/>
+            <a:satMod val="170000"/>
+          </a:schemeClr>
+        </a:solidFill>
+        <a:gradFill rotWithShape="1">
+          <a:gsLst>
+            <a:gs pos="0">
+              <a:schemeClr val="phClr">
+                <a:tint val="93000"/>
+                <a:satMod val="150000"/>
+                <a:shade val="98000"/>
+                <a:lumMod val="102000"/>
+              </a:schemeClr>
+            </a:gs>
+            <a:gs pos="50000">
+              <a:schemeClr val="phClr">
+                <a:tint val="98000"/>
+                <a:satMod val="130000"/>
+                <a:shade val="90000"/>
+                <a:lumMod val="103000"/>
+              </a:schemeClr>
+            </a:gs>
+            <a:gs pos="100000">
+              <a:schemeClr val="phClr">
+                <a:shade val="63000"/>
+                <a:satMod val="120000"/>
+              </a:schemeClr>
+            </a:gs>
+          </a:gsLst>
+          <a:lin ang="5400000" scaled="0"/>
+        </a:gradFill>
+      </a:bgFillStyleLst>
+    </a:fmtScheme>
+  </a:themeElements>
+  <a:objectDefaults>
+    <a:lnDef>
+      <a:spPr/>
+      <a:bodyPr/>
+      <a:lstStyle/>
+      <a:style>
+        <a:lnRef idx="2">
+          <a:schemeClr val="accent1"/>
+        </a:lnRef>
+        <a:fillRef idx="0">
+          <a:schemeClr val="accent1"/>
+        </a:fillRef>
+        <a:effectRef idx="1">
+          <a:schemeClr val="accent1"/>
+        </a:effectRef>
+        <a:fontRef idx="minor">
+          <a:schemeClr val="tx1"/>
+        </a:fontRef>
+      </a:style>
+    </a:lnDef>
+  </a:objectDefaults>
+  <a:extraClrSchemeLst/>
+  <a:extLst>
+    <a:ext uri="{05A4C25C-085E-4340-85A3-A5531E510DB2}">
+      <thm15:themeFamily xmlns:thm15="http://schemas.microsoft.com/office/thememl/2012/main" name="Office Theme" id="{2E142A2C-CD16-42D6-873A-C26D2A0506FA}" vid="{1BDDFF52-6CD6-40A5-AB3C-68EB2F1E4D0A}"/>
+    </a:ext>
+  </a:extLst>
+</a:theme>
 </file>
--- a/presentation/MemoryOptimizedTables_SQLDatenbanken.pptx
+++ b/presentation/MemoryOptimizedTables_SQLDatenbanken.pptx
@@ -217,7 +217,7 @@
           <a:p>
             <a:fld id="{F0B750DF-DCB7-4C86-AE8F-4F3AE2390C9E}" type="datetimeFigureOut">
               <a:rPr lang="en-CH" smtClean="0"/>
-              <a:t>24.02.2026</a:t>
+              <a:t>25.02.2026</a:t>
             </a:fld>
             <a:endParaRPr lang="en-CH"/>
           </a:p>
@@ -1223,7 +1223,7 @@
           <a:p>
             <a:fld id="{D29CF56E-D922-4450-9794-8B0E1451F6EB}" type="datetime1">
               <a:rPr lang="en-US" smtClean="0"/>
-              <a:t>2/24/2026</a:t>
+              <a:t>2/25/2026</a:t>
             </a:fld>
             <a:endParaRPr lang="en-US" dirty="0"/>
           </a:p>
@@ -1800,7 +1800,7 @@
           <a:p>
             <a:fld id="{9C5C1F80-0989-4135-BEC0-53996BCA1D73}" type="datetime1">
               <a:rPr lang="en-US" smtClean="0"/>
-              <a:t>2/24/2026</a:t>
+              <a:t>2/25/2026</a:t>
             </a:fld>
             <a:endParaRPr lang="en-US" dirty="0"/>
           </a:p>
@@ -2358,7 +2358,7 @@
           <a:p>
             <a:fld id="{2B346B3B-D23C-46FC-82B4-EC936862EBB6}" type="datetime1">
               <a:rPr lang="en-US" smtClean="0"/>
-              <a:t>2/24/2026</a:t>
+              <a:t>2/25/2026</a:t>
             </a:fld>
             <a:endParaRPr lang="en-US" dirty="0"/>
           </a:p>
@@ -2888,7 +2888,7 @@
           <a:p>
             <a:fld id="{11039C6F-01AE-405F-93D2-431591D79461}" type="datetime1">
               <a:rPr lang="en-US" smtClean="0"/>
-              <a:t>2/24/2026</a:t>
+              <a:t>2/25/2026</a:t>
             </a:fld>
             <a:endParaRPr lang="en-US" dirty="0"/>
           </a:p>
@@ -3291,7 +3291,7 @@
           <a:p>
             <a:fld id="{6AE82713-2685-4CB9-BD26-DD329F3C67A6}" type="datetime1">
               <a:rPr lang="en-US" smtClean="0"/>
-              <a:t>2/24/2026</a:t>
+              <a:t>2/25/2026</a:t>
             </a:fld>
             <a:endParaRPr lang="en-US" dirty="0"/>
           </a:p>
@@ -3690,7 +3690,7 @@
           <a:p>
             <a:fld id="{957926B3-CA5D-44FB-BC2D-6B05FBB97B04}" type="datetime1">
               <a:rPr lang="en-US" smtClean="0"/>
-              <a:t>2/24/2026</a:t>
+              <a:t>2/25/2026</a:t>
             </a:fld>
             <a:endParaRPr lang="en-US" dirty="0"/>
           </a:p>
@@ -4088,7 +4088,7 @@
           <a:p>
             <a:fld id="{7E009212-C305-41EC-8687-C39B36C09AF0}" type="datetime1">
               <a:rPr lang="en-US" smtClean="0"/>
-              <a:t>2/24/2026</a:t>
+              <a:t>2/25/2026</a:t>
             </a:fld>
             <a:endParaRPr lang="en-US" dirty="0"/>
           </a:p>
@@ -4487,7 +4487,7 @@
           <a:p>
             <a:fld id="{7CD886C8-FB0E-44DB-9413-26C9933623BA}" type="datetime1">
               <a:rPr lang="en-US" smtClean="0"/>
-              <a:t>2/24/2026</a:t>
+              <a:t>2/25/2026</a:t>
             </a:fld>
             <a:endParaRPr lang="en-US" dirty="0"/>
           </a:p>
@@ -4887,7 +4887,7 @@
           <a:p>
             <a:fld id="{278A6864-E7E2-494F-A90A-ECC53613C6EC}" type="datetime1">
               <a:rPr lang="en-US" smtClean="0"/>
-              <a:t>2/24/2026</a:t>
+              <a:t>2/25/2026</a:t>
             </a:fld>
             <a:endParaRPr lang="en-US" dirty="0"/>
           </a:p>
@@ -5254,7 +5254,7 @@
           <a:p>
             <a:fld id="{2F4ED686-7864-484B-8047-F06E855FD995}" type="datetime1">
               <a:rPr lang="en-US" smtClean="0"/>
-              <a:t>2/24/2026</a:t>
+              <a:t>2/25/2026</a:t>
             </a:fld>
             <a:endParaRPr lang="en-US" dirty="0"/>
           </a:p>
@@ -5635,7 +5635,7 @@
           <a:p>
             <a:fld id="{CB8F8C76-8E31-4D47-BC79-85F35E81929B}" type="datetime1">
               <a:rPr lang="en-US" smtClean="0"/>
-              <a:t>2/24/2026</a:t>
+              <a:t>2/25/2026</a:t>
             </a:fld>
             <a:endParaRPr lang="en-US" dirty="0"/>
           </a:p>
@@ -6014,7 +6014,7 @@
           <a:p>
             <a:fld id="{CBE1C96F-46D7-47BB-8945-9667BCB4F5BB}" type="datetime1">
               <a:rPr lang="en-US" smtClean="0"/>
-              <a:t>2/24/2026</a:t>
+              <a:t>2/25/2026</a:t>
             </a:fld>
             <a:endParaRPr lang="en-US" dirty="0"/>
           </a:p>
@@ -6447,7 +6447,7 @@
           <a:p>
             <a:fld id="{85640267-1344-46BE-B105-162E68855468}" type="datetime1">
               <a:rPr lang="en-US" smtClean="0"/>
-              <a:t>2/24/2026</a:t>
+              <a:t>2/25/2026</a:t>
             </a:fld>
             <a:endParaRPr lang="en-US" dirty="0"/>
           </a:p>
@@ -6864,7 +6864,7 @@
           <a:p>
             <a:fld id="{1C45E567-307A-4358-87B7-AFD16C4C07D5}" type="datetime1">
               <a:rPr lang="en-US" smtClean="0"/>
-              <a:t>2/24/2026</a:t>
+              <a:t>2/25/2026</a:t>
             </a:fld>
             <a:endParaRPr lang="en-US" dirty="0"/>
           </a:p>
@@ -7082,7 +7082,7 @@
           <a:p>
             <a:fld id="{E016730A-3443-4D7F-BC47-3A3CDB3837FC}" type="datetime1">
               <a:rPr lang="en-US" smtClean="0"/>
-              <a:t>2/24/2026</a:t>
+              <a:t>2/25/2026</a:t>
             </a:fld>
             <a:endParaRPr lang="en-US" dirty="0"/>
           </a:p>
@@ -7699,7 +7699,7 @@
           <a:p>
             <a:fld id="{D9193AC5-F257-4C01-8A7B-A4CD87F22F04}" type="datetime1">
               <a:rPr lang="en-US" smtClean="0"/>
-              <a:t>2/24/2026</a:t>
+              <a:t>2/25/2026</a:t>
             </a:fld>
             <a:endParaRPr lang="en-US" dirty="0"/>
           </a:p>
@@ -8070,7 +8070,7 @@
           <a:p>
             <a:fld id="{A64EBB10-E93E-4729-97C4-FAB8DF4548E2}" type="datetime1">
               <a:rPr lang="en-US" smtClean="0"/>
-              <a:t>2/24/2026</a:t>
+              <a:t>2/25/2026</a:t>
             </a:fld>
             <a:endParaRPr lang="en-US" dirty="0"/>
           </a:p>
@@ -8343,7 +8343,7 @@
           <a:p>
             <a:fld id="{7040DD2C-7FC6-41A9-87A2-29E4EDD4A815}" type="datetime1">
               <a:rPr lang="en-US" smtClean="0"/>
-              <a:t>2/24/2026</a:t>
+              <a:t>2/25/2026</a:t>
             </a:fld>
             <a:endParaRPr lang="en-US" dirty="0"/>
           </a:p>
@@ -8968,7 +8968,7 @@
           <a:p>
             <a:fld id="{C8E3A8ED-7C53-48B7-8E07-F767A8357B67}" type="datetime1">
               <a:rPr lang="en-US" smtClean="0"/>
-              <a:t>2/24/2026</a:t>
+              <a:t>2/25/2026</a:t>
             </a:fld>
             <a:endParaRPr lang="en-US" dirty="0"/>
           </a:p>
@@ -9403,7 +9403,7 @@
           <a:p>
             <a:fld id="{81AC3B39-0D1D-4C0E-BE8E-C570B18D6B3B}" type="datetime1">
               <a:rPr lang="en-US" smtClean="0"/>
-              <a:t>2/24/2026</a:t>
+              <a:t>2/25/2026</a:t>
             </a:fld>
             <a:endParaRPr lang="en-US" dirty="0"/>
           </a:p>
@@ -9652,7 +9652,7 @@
           <a:p>
             <a:fld id="{0780F3AB-C899-4854-A4A4-B2E20F203358}" type="datetime1">
               <a:rPr lang="en-US" smtClean="0"/>
-              <a:t>2/24/2026</a:t>
+              <a:t>2/25/2026</a:t>
             </a:fld>
             <a:endParaRPr lang="en-US" dirty="0"/>
           </a:p>
@@ -10292,7 +10292,7 @@
           <a:p>
             <a:fld id="{1095A040-388D-41D5-A09F-3EC1A1D097A8}" type="datetime1">
               <a:rPr lang="en-US" smtClean="0"/>
-              <a:t>2/24/2026</a:t>
+              <a:t>2/25/2026</a:t>
             </a:fld>
             <a:endParaRPr lang="en-US" dirty="0"/>
           </a:p>
@@ -10712,7 +10712,7 @@
           <a:p>
             <a:fld id="{A6379DD5-AE65-4D02-9BCE-257CC17A63B7}" type="datetime1">
               <a:rPr lang="en-US" smtClean="0"/>
-              <a:t>2/24/2026</a:t>
+              <a:t>2/25/2026</a:t>
             </a:fld>
             <a:endParaRPr lang="en-US" dirty="0"/>
           </a:p>
@@ -11154,7 +11154,7 @@
           <a:p>
             <a:fld id="{5ECB542C-378A-4AAF-83EE-A3767FF83605}" type="datetime1">
               <a:rPr lang="en-US" smtClean="0"/>
-              <a:t>2/24/2026</a:t>
+              <a:t>2/25/2026</a:t>
             </a:fld>
             <a:endParaRPr lang="en-US"/>
           </a:p>
@@ -11446,7 +11446,7 @@
           <a:p>
             <a:fld id="{16C6F251-EB74-4ADA-AD63-D85EC3A9D616}" type="datetime1">
               <a:rPr lang="en-US" smtClean="0"/>
-              <a:t>2/24/2026</a:t>
+              <a:t>2/25/2026</a:t>
             </a:fld>
             <a:endParaRPr lang="en-US" dirty="0"/>
           </a:p>
@@ -11854,7 +11854,7 @@
           <a:p>
             <a:fld id="{7305F46D-792E-48B7-9047-8A1672515077}" type="datetime1">
               <a:rPr lang="en-US" smtClean="0"/>
-              <a:t>2/24/2026</a:t>
+              <a:t>2/25/2026</a:t>
             </a:fld>
             <a:endParaRPr lang="en-US" dirty="0"/>
           </a:p>
@@ -12262,7 +12262,7 @@
           <a:p>
             <a:fld id="{8B53D3FE-D727-4B50-874D-41D5E635B20A}" type="datetime1">
               <a:rPr lang="en-US" smtClean="0"/>
-              <a:t>2/24/2026</a:t>
+              <a:t>2/25/2026</a:t>
             </a:fld>
             <a:endParaRPr lang="en-US" dirty="0"/>
           </a:p>
@@ -12670,7 +12670,7 @@
           <a:p>
             <a:fld id="{FE942071-3A2D-4B86-82F9-428DB212BAF8}" type="datetime1">
               <a:rPr lang="en-US" smtClean="0"/>
-              <a:t>2/24/2026</a:t>
+              <a:t>2/25/2026</a:t>
             </a:fld>
             <a:endParaRPr lang="en-US" dirty="0"/>
           </a:p>
@@ -13351,7 +13351,7 @@
           <a:p>
             <a:fld id="{040D1012-6B36-4753-8153-E5F982239567}" type="datetime1">
               <a:rPr lang="en-US" smtClean="0"/>
-              <a:t>2/24/2026</a:t>
+              <a:t>2/25/2026</a:t>
             </a:fld>
             <a:endParaRPr lang="en-US" dirty="0"/>
           </a:p>
@@ -13544,7 +13544,7 @@
           <a:p>
             <a:fld id="{02E2BBBB-FE25-456C-89E4-A0303F0273E5}" type="datetime1">
               <a:rPr lang="en-US" smtClean="0"/>
-              <a:t>2/24/2026</a:t>
+              <a:t>2/25/2026</a:t>
             </a:fld>
             <a:endParaRPr lang="en-US" dirty="0"/>
           </a:p>
@@ -13761,7 +13761,7 @@
           <a:p>
             <a:fld id="{1315EE4B-219D-4799-AB8D-57B100451C5D}" type="datetime1">
               <a:rPr lang="en-US" smtClean="0"/>
-              <a:t>2/24/2026</a:t>
+              <a:t>2/25/2026</a:t>
             </a:fld>
             <a:endParaRPr lang="en-US" dirty="0"/>
           </a:p>
@@ -14101,7 +14101,7 @@
           <a:p>
             <a:fld id="{6499AFF4-C109-45E7-87CB-3A41EC6C3342}" type="datetime1">
               <a:rPr lang="en-US" smtClean="0"/>
-              <a:t>2/24/2026</a:t>
+              <a:t>2/25/2026</a:t>
             </a:fld>
             <a:endParaRPr lang="en-US" dirty="0"/>
           </a:p>
@@ -15116,7 +15116,7 @@
           <a:p>
             <a:fld id="{50AFEFF9-BDF1-4CFA-B535-0413D62BE29A}" type="datetime1">
               <a:rPr lang="en-US" smtClean="0"/>
-              <a:t>2/24/2026</a:t>
+              <a:t>2/25/2026</a:t>
             </a:fld>
             <a:endParaRPr lang="en-US" dirty="0"/>
           </a:p>
@@ -15345,7 +15345,7 @@
           <a:p>
             <a:fld id="{9DFFF819-4E26-4576-8A6D-DA055CFF682A}" type="datetime1">
               <a:rPr lang="en-US" smtClean="0"/>
-              <a:t>2/24/2026</a:t>
+              <a:t>2/25/2026</a:t>
             </a:fld>
             <a:endParaRPr lang="en-US" dirty="0"/>
           </a:p>
@@ -16009,7 +16009,7 @@
           <a:p>
             <a:fld id="{6E761A50-B070-4EAD-9EB9-92E4929324E7}" type="datetime1">
               <a:rPr lang="en-US" smtClean="0"/>
-              <a:t>2/24/2026</a:t>
+              <a:t>2/25/2026</a:t>
             </a:fld>
             <a:endParaRPr lang="en-US" dirty="0"/>
           </a:p>
@@ -16225,7 +16225,7 @@
           <a:p>
             <a:fld id="{9A1CBA35-F376-4C5F-B8C5-4C103617FD91}" type="datetime1">
               <a:rPr lang="en-US" smtClean="0"/>
-              <a:t>2/24/2026</a:t>
+              <a:t>2/25/2026</a:t>
             </a:fld>
             <a:endParaRPr lang="en-US" dirty="0"/>
           </a:p>
@@ -16895,7 +16895,7 @@
           <a:p>
             <a:fld id="{BA89D600-DCDC-4EC3-BDD3-052C2836DAF2}" type="datetime1">
               <a:rPr lang="en-US" smtClean="0"/>
-              <a:t>2/24/2026</a:t>
+              <a:t>2/25/2026</a:t>
             </a:fld>
             <a:endParaRPr lang="en-US" dirty="0"/>
           </a:p>
@@ -17421,7 +17421,7 @@
           <a:p>
             <a:fld id="{3ADB2DB3-0A08-4E5B-8BB6-A488CF1C042F}" type="datetime1">
               <a:rPr lang="en-US" smtClean="0"/>
-              <a:t>2/24/2026</a:t>
+              <a:t>2/25/2026</a:t>
             </a:fld>
             <a:endParaRPr lang="en-US" dirty="0"/>
           </a:p>
@@ -17765,7 +17765,7 @@
           <a:p>
             <a:fld id="{7A329DD1-6F17-4170-B2B1-1A76C32D62A1}" type="datetime1">
               <a:rPr lang="en-US" smtClean="0"/>
-              <a:t>2/24/2026</a:t>
+              <a:t>2/25/2026</a:t>
             </a:fld>
             <a:endParaRPr lang="en-US" dirty="0"/>
           </a:p>
@@ -18261,7 +18261,7 @@
           <a:p>
             <a:fld id="{BA7E6053-DA33-4DC9-86BB-0E52E5EB5B56}" type="datetime1">
               <a:rPr lang="en-US" smtClean="0"/>
-              <a:t>2/24/2026</a:t>
+              <a:t>2/25/2026</a:t>
             </a:fld>
             <a:endParaRPr lang="en-US" dirty="0"/>
           </a:p>
@@ -18406,7 +18406,7 @@
           <a:p>
             <a:fld id="{7C72CE4D-D83F-44D4-ACB0-A88A6B9DB4F7}" type="datetime1">
               <a:rPr lang="en-US" smtClean="0"/>
-              <a:t>2/24/2026</a:t>
+              <a:t>2/25/2026</a:t>
             </a:fld>
             <a:endParaRPr lang="en-US"/>
           </a:p>
@@ -18522,7 +18522,7 @@
           <a:p>
             <a:fld id="{9A62F981-1EE1-49F5-B605-4EA23F0307AC}" type="datetime1">
               <a:rPr lang="en-US" smtClean="0"/>
-              <a:t>2/24/2026</a:t>
+              <a:t>2/25/2026</a:t>
             </a:fld>
             <a:endParaRPr lang="en-US"/>
           </a:p>
@@ -18979,7 +18979,7 @@
           <a:p>
             <a:fld id="{B0B6493B-A447-4205-AC2D-AE2DEDAE4E3B}" type="datetime1">
               <a:rPr lang="en-US" smtClean="0"/>
-              <a:t>2/24/2026</a:t>
+              <a:t>2/25/2026</a:t>
             </a:fld>
             <a:endParaRPr lang="en-US"/>
           </a:p>
@@ -19401,7 +19401,7 @@
           <a:p>
             <a:fld id="{1F9A354F-9C13-4261-9BA4-DD76051C2429}" type="datetime1">
               <a:rPr lang="en-US" smtClean="0"/>
-              <a:t>2/24/2026</a:t>
+              <a:t>2/25/2026</a:t>
             </a:fld>
             <a:endParaRPr lang="en-US" dirty="0"/>
           </a:p>
@@ -19838,7 +19838,7 @@
           <a:p>
             <a:fld id="{2602ACF4-9E47-4D03-8EA6-1CE7E20F9165}" type="datetime1">
               <a:rPr lang="en-US" smtClean="0"/>
-              <a:t>2/24/2026</a:t>
+              <a:t>2/25/2026</a:t>
             </a:fld>
             <a:endParaRPr lang="en-US" dirty="0"/>
           </a:p>
@@ -20241,7 +20241,7 @@
           <a:p>
             <a:fld id="{D3A9CD26-23FE-488A-AF3B-5DDE99301C10}" type="datetime1">
               <a:rPr lang="en-US" smtClean="0"/>
-              <a:t>2/24/2026</a:t>
+              <a:t>2/25/2026</a:t>
             </a:fld>
             <a:endParaRPr lang="en-US" dirty="0"/>
           </a:p>
@@ -20500,7 +20500,7 @@
           <a:p>
             <a:fld id="{CC67263D-2536-4E2E-A4D6-BA89E45F00B0}" type="datetime1">
               <a:rPr lang="en-US" smtClean="0"/>
-              <a:t>2/24/2026</a:t>
+              <a:t>2/25/2026</a:t>
             </a:fld>
             <a:endParaRPr lang="en-US" dirty="0"/>
           </a:p>
@@ -21123,7 +21123,7 @@
           <a:p>
             <a:fld id="{3A82B809-8BB3-463C-8B5E-28962B4654D8}" type="datetime1">
               <a:rPr lang="en-US" smtClean="0"/>
-              <a:t>2/24/2026</a:t>
+              <a:t>2/25/2026</a:t>
             </a:fld>
             <a:endParaRPr lang="en-US" dirty="0"/>
           </a:p>
@@ -21346,7 +21346,7 @@
           <a:p>
             <a:fld id="{2DB8F537-5E0E-4697-8198-FDF0E53F372F}" type="datetime1">
               <a:rPr lang="en-US" smtClean="0"/>
-              <a:t>2/24/2026</a:t>
+              <a:t>2/25/2026</a:t>
             </a:fld>
             <a:endParaRPr lang="en-US" dirty="0"/>
           </a:p>
@@ -21840,7 +21840,7 @@
           <a:p>
             <a:fld id="{1D4E7D34-A495-4E23-B1D1-F5D651D22AFE}" type="datetime1">
               <a:rPr lang="en-US" smtClean="0"/>
-              <a:t>2/24/2026</a:t>
+              <a:t>2/25/2026</a:t>
             </a:fld>
             <a:endParaRPr lang="en-US" dirty="0"/>
           </a:p>
@@ -22023,7 +22023,7 @@
           <a:p>
             <a:fld id="{85976A96-D1F6-4A74-B023-FDE16753EDD7}" type="datetime1">
               <a:rPr lang="en-US" smtClean="0"/>
-              <a:t>2/24/2026</a:t>
+              <a:t>2/25/2026</a:t>
             </a:fld>
             <a:endParaRPr lang="en-US" dirty="0"/>
           </a:p>
@@ -22282,7 +22282,7 @@
           <a:p>
             <a:fld id="{FD1C4689-B28D-4D3C-8B05-9ABB967E2A3E}" type="datetime1">
               <a:rPr lang="en-US" smtClean="0"/>
-              <a:t>2/24/2026</a:t>
+              <a:t>2/25/2026</a:t>
             </a:fld>
             <a:endParaRPr lang="en-US" dirty="0"/>
           </a:p>
@@ -23819,7 +23819,7 @@
         <p:spPr/>
         <p:txBody>
           <a:bodyPr>
-            <a:normAutofit fontScale="85000" lnSpcReduction="20000"/>
+            <a:normAutofit/>
           </a:bodyPr>
           <a:lstStyle/>
           <a:p>
@@ -23827,169 +23827,149 @@
               <a:buNone/>
             </a:pPr>
             <a:r>
-              <a:rPr lang="de-DE" b="1" dirty="0"/>
+              <a:rPr lang="de-DE" sz="1500" b="1" dirty="0"/>
               <a:t>Disk-basierte </a:t>
             </a:r>
             <a:r>
-              <a:rPr lang="de-DE" b="1" dirty="0" err="1"/>
+              <a:rPr lang="de-DE" sz="1500" b="1" dirty="0" err="1"/>
               <a:t>Tables</a:t>
             </a:r>
-            <a:endParaRPr lang="de-DE" b="1" dirty="0"/>
-          </a:p>
-          <a:p>
-            <a:r>
-              <a:rPr lang="en-GB" sz="1600" dirty="0"/>
+            <a:endParaRPr lang="de-DE" sz="1500" b="1" dirty="0"/>
+          </a:p>
+          <a:p>
+            <a:r>
+              <a:rPr lang="en-GB" sz="1500" dirty="0"/>
               <a:t>Page-/</a:t>
             </a:r>
             <a:r>
-              <a:rPr lang="en-GB" sz="1600" dirty="0" err="1"/>
+              <a:rPr lang="en-GB" sz="1500" dirty="0" err="1"/>
               <a:t>Bufferpool-basiert</a:t>
             </a:r>
             <a:r>
-              <a:rPr lang="en-GB" sz="1600" dirty="0"/>
+              <a:rPr lang="en-GB" sz="1500" dirty="0"/>
               <a:t> (8-KB Pages auf Disk, Caching </a:t>
             </a:r>
             <a:r>
-              <a:rPr lang="en-GB" sz="1600" dirty="0" err="1"/>
+              <a:rPr lang="en-GB" sz="1500" dirty="0" err="1"/>
               <a:t>im</a:t>
             </a:r>
             <a:r>
-              <a:rPr lang="en-GB" sz="1600" dirty="0"/>
+              <a:rPr lang="en-GB" sz="1500" dirty="0"/>
               <a:t> Buffer Pool) </a:t>
             </a:r>
           </a:p>
           <a:p>
             <a:r>
-              <a:rPr lang="en-US" dirty="0"/>
+              <a:rPr lang="en-US" sz="1500" dirty="0"/>
               <a:t>B-Tree </a:t>
             </a:r>
             <a:r>
-              <a:rPr lang="en-US" dirty="0" err="1"/>
+              <a:rPr lang="en-US" sz="1500" dirty="0" err="1"/>
               <a:t>Rowstore</a:t>
             </a:r>
             <a:r>
-              <a:rPr lang="en-US" dirty="0"/>
+              <a:rPr lang="en-US" sz="1500" dirty="0"/>
               <a:t> (Clustered/</a:t>
             </a:r>
             <a:r>
-              <a:rPr lang="en-US" dirty="0" err="1"/>
+              <a:rPr lang="en-US" sz="1500" dirty="0" err="1"/>
               <a:t>Nonclustered</a:t>
             </a:r>
             <a:r>
-              <a:rPr lang="en-US" dirty="0"/>
+              <a:rPr lang="en-US" sz="1500" dirty="0"/>
               <a:t>), optional </a:t>
             </a:r>
             <a:r>
-              <a:rPr lang="en-US" dirty="0" err="1"/>
+              <a:rPr lang="en-US" sz="1500" dirty="0" err="1"/>
               <a:t>Columnstore</a:t>
             </a:r>
             <a:r>
-              <a:rPr lang="en-US" dirty="0"/>
-              <a:t> für Analytics</a:t>
-            </a:r>
-          </a:p>
-          <a:p>
-            <a:r>
-              <a:rPr lang="en-GB" dirty="0"/>
+              <a:rPr lang="en-US" sz="1500" dirty="0"/>
+              <a:t> für Analytics </a:t>
+            </a:r>
+            <a:r>
+              <a:rPr lang="de-DE" sz="1500" dirty="0"/>
+              <a:t> (</a:t>
+            </a:r>
+            <a:r>
+              <a:rPr lang="en-GB" sz="1500" dirty="0"/>
+              <a:t>Batch Mode, </a:t>
+            </a:r>
+            <a:r>
+              <a:rPr lang="en-GB" sz="1500" dirty="0" err="1"/>
+              <a:t>Kompression</a:t>
+            </a:r>
+            <a:r>
+              <a:rPr lang="en-GB" sz="1500" dirty="0"/>
+              <a:t>)</a:t>
+            </a:r>
+            <a:endParaRPr lang="de-DE" sz="1500" dirty="0"/>
+          </a:p>
+          <a:p>
+            <a:r>
+              <a:rPr lang="en-GB" sz="1500" dirty="0"/>
               <a:t>Locking + Latching (Pessimistic Concurrency)</a:t>
             </a:r>
           </a:p>
           <a:p>
             <a:r>
-              <a:rPr lang="en-GB" dirty="0"/>
+              <a:rPr lang="en-GB" sz="1500" dirty="0"/>
               <a:t>Write-Ahead Logging: Pages/</a:t>
             </a:r>
             <a:r>
-              <a:rPr lang="en-GB" dirty="0" err="1"/>
+              <a:rPr lang="en-GB" sz="1500" dirty="0" err="1"/>
               <a:t>Änderungen</a:t>
             </a:r>
             <a:r>
-              <a:rPr lang="en-GB" dirty="0"/>
+              <a:rPr lang="en-GB" sz="1500" dirty="0"/>
               <a:t> </a:t>
             </a:r>
             <a:r>
-              <a:rPr lang="en-GB" dirty="0" err="1"/>
+              <a:rPr lang="en-GB" sz="1500" dirty="0" err="1"/>
               <a:t>werden</a:t>
             </a:r>
             <a:r>
-              <a:rPr lang="en-GB" dirty="0"/>
+              <a:rPr lang="en-GB" sz="1500" dirty="0"/>
               <a:t> </a:t>
             </a:r>
             <a:r>
-              <a:rPr lang="en-GB" dirty="0" err="1"/>
+              <a:rPr lang="en-GB" sz="1500" dirty="0" err="1"/>
               <a:t>geloggt</a:t>
             </a:r>
             <a:r>
-              <a:rPr lang="en-GB" dirty="0"/>
+              <a:rPr lang="en-GB" sz="1500" dirty="0"/>
               <a:t> → stabile Recovery</a:t>
             </a:r>
           </a:p>
           <a:p>
-            <a:r>
-              <a:rPr lang="en-GB" dirty="0"/>
+            <a:pPr lvl="1"/>
+            <a:r>
+              <a:rPr lang="en-GB" sz="1300" dirty="0"/>
               <a:t>Page </a:t>
             </a:r>
             <a:r>
-              <a:rPr lang="en-GB" dirty="0" err="1"/>
+              <a:rPr lang="en-GB" sz="1300" dirty="0" err="1"/>
               <a:t>Fragmentierung</a:t>
             </a:r>
             <a:r>
-              <a:rPr lang="en-GB" dirty="0"/>
+              <a:rPr lang="en-GB" sz="1300" dirty="0"/>
               <a:t> (Rebuild/Reorg von </a:t>
             </a:r>
             <a:r>
-              <a:rPr lang="en-GB" dirty="0" err="1"/>
+              <a:rPr lang="en-GB" sz="1300" dirty="0" err="1"/>
               <a:t>Indexen</a:t>
             </a:r>
             <a:r>
-              <a:rPr lang="en-GB" dirty="0"/>
+              <a:rPr lang="en-GB" sz="1300" dirty="0"/>
               <a:t>)</a:t>
             </a:r>
           </a:p>
           <a:p>
             <a:r>
-              <a:rPr lang="de-DE" dirty="0"/>
+              <a:rPr lang="de-DE" sz="1500" dirty="0"/>
               <a:t>Bevorzugt bei großen Scans/Aggregationen/Reporting &amp; sehr großen Datenmengen</a:t>
             </a:r>
           </a:p>
-          <a:p>
-            <a:r>
-              <a:rPr lang="de-DE" dirty="0"/>
-              <a:t>Vorteil für </a:t>
-            </a:r>
-            <a:r>
-              <a:rPr lang="de-DE" dirty="0" err="1"/>
-              <a:t>DWH</a:t>
-            </a:r>
-            <a:r>
-              <a:rPr lang="de-DE" dirty="0"/>
-              <a:t>/Reporting ist „Disk + </a:t>
-            </a:r>
-            <a:r>
-              <a:rPr lang="de-DE" dirty="0" err="1"/>
-              <a:t>Columnstore</a:t>
-            </a:r>
-            <a:r>
-              <a:rPr lang="de-DE" dirty="0"/>
-              <a:t>“  (</a:t>
-            </a:r>
-            <a:r>
-              <a:rPr lang="en-GB" dirty="0"/>
-              <a:t>Batch Mode, </a:t>
-            </a:r>
-            <a:r>
-              <a:rPr lang="en-GB" dirty="0" err="1"/>
-              <a:t>Kompression</a:t>
-            </a:r>
-            <a:r>
-              <a:rPr lang="en-GB" dirty="0"/>
-              <a:t>)</a:t>
-            </a:r>
-            <a:endParaRPr lang="de-DE" dirty="0"/>
-          </a:p>
-          <a:p>
-            <a:endParaRPr lang="en-CH" dirty="0"/>
-          </a:p>
         </p:txBody>
       </p:sp>
       <p:sp>
@@ -24011,7 +23991,7 @@
         <p:spPr/>
         <p:txBody>
           <a:bodyPr>
-            <a:normAutofit fontScale="85000" lnSpcReduction="10000"/>
+            <a:normAutofit fontScale="92500" lnSpcReduction="20000"/>
           </a:bodyPr>
           <a:lstStyle/>
           <a:p>
@@ -24027,11 +24007,7 @@
           <a:p>
             <a:r>
               <a:rPr lang="de-DE" dirty="0"/>
-              <a:t>Daten </a:t>
-            </a:r>
-            <a:r>
-              <a:rPr lang="de-DE" b="1" dirty="0"/>
-              <a:t>liegen im RAM</a:t>
+              <a:t>Daten liegen im RAM</a:t>
             </a:r>
           </a:p>
           <a:p>
@@ -24130,6 +24106,7 @@
             </a:r>
           </a:p>
           <a:p>
+            <a:pPr lvl="1"/>
             <a:r>
               <a:rPr lang="en-GB" dirty="0"/>
               <a:t>Alte </a:t>
@@ -25428,7 +25405,7 @@
         </p:spPr>
         <p:txBody>
           <a:bodyPr vert="horz" lIns="91440" tIns="45720" rIns="91440" bIns="45720" rtlCol="0">
-            <a:normAutofit fontScale="92500" lnSpcReduction="20000"/>
+            <a:normAutofit fontScale="92500" lnSpcReduction="10000"/>
           </a:bodyPr>
           <a:lstStyle>
             <a:lvl1pPr marL="228600" indent="-228600" algn="l" defTabSz="914400" rtl="0" eaLnBrk="1" latinLnBrk="0" hangingPunct="1">
@@ -25629,7 +25606,7 @@
             </a:r>
             <a:r>
               <a:rPr lang="en-GB" dirty="0"/>
-              <a:t> (Hash = = Lookups, Range = </a:t>
+              <a:t> (Hash =  Lookups, Range = </a:t>
             </a:r>
             <a:r>
               <a:rPr lang="en-GB" dirty="0" err="1"/>
@@ -25645,13 +25622,8 @@
             </a:r>
             <a:r>
               <a:rPr lang="en-GB" dirty="0"/>
-              <a:t>), </a:t>
-            </a:r>
-            <a:r>
-              <a:rPr lang="en-GB" dirty="0" err="1"/>
-              <a:t>BUCKET_COUNT</a:t>
-            </a:r>
-            <a:endParaRPr lang="en-GB" dirty="0"/>
+              <a:t>), Bucket count</a:t>
+            </a:r>
           </a:p>
           <a:p>
             <a:r>
@@ -26091,29 +26063,6 @@
               <a:rPr lang="de-CH" dirty="0"/>
               <a:t>) muss. </a:t>
             </a:r>
-          </a:p>
-          <a:p>
-            <a:pPr marL="0" indent="0">
-              <a:buFont typeface="Arial" panose="020B0604020202020204" pitchFamily="34" charset="0"/>
-              <a:buNone/>
-            </a:pPr>
-            <a:r>
-              <a:rPr lang="de-CH" dirty="0"/>
-              <a:t>= </a:t>
-            </a:r>
-            <a:r>
-              <a:rPr lang="de-CH" dirty="0" err="1"/>
-              <a:t>overhead</a:t>
-            </a:r>
-            <a:r>
-              <a:rPr lang="de-CH" dirty="0"/>
-              <a:t> </a:t>
-            </a:r>
-            <a:r>
-              <a:rPr lang="de-CH" dirty="0" err="1"/>
-              <a:t>MOT</a:t>
-            </a:r>
-            <a:endParaRPr lang="de-CH" dirty="0"/>
           </a:p>
           <a:p>
             <a:pPr marL="0" indent="0">
